--- a/output/Target_Financial_Analysis.pptx
+++ b/output/Target_Financial_Analysis.pptx
@@ -21,6 +21,22 @@
     <p:sldId id="269" r:id="rId20"/>
     <p:sldId id="270" r:id="rId21"/>
     <p:sldId id="271" r:id="rId22"/>
+    <p:sldId id="272" r:id="rId23"/>
+    <p:sldId id="273" r:id="rId24"/>
+    <p:sldId id="274" r:id="rId25"/>
+    <p:sldId id="275" r:id="rId26"/>
+    <p:sldId id="276" r:id="rId27"/>
+    <p:sldId id="277" r:id="rId28"/>
+    <p:sldId id="278" r:id="rId29"/>
+    <p:sldId id="279" r:id="rId30"/>
+    <p:sldId id="280" r:id="rId31"/>
+    <p:sldId id="281" r:id="rId32"/>
+    <p:sldId id="282" r:id="rId33"/>
+    <p:sldId id="283" r:id="rId34"/>
+    <p:sldId id="284" r:id="rId35"/>
+    <p:sldId id="285" r:id="rId36"/>
+    <p:sldId id="286" r:id="rId37"/>
+    <p:sldId id="287" r:id="rId38"/>
   </p:sldIdLst>
   <p:sldSz cx="9144000" cy="6858000" type="screen4x3"/>
   <p:notesSz cx="6858000" cy="9144000"/>
@@ -3192,14 +3208,49 @@
           <a:lstStyle/>
           <a:p>
             <a:pPr algn="ctr">
-              <a:defRPr sz="2400">
+              <a:defRPr sz="2000">
                 <a:solidFill>
                   <a:srgbClr val="808080"/>
                 </a:solidFill>
               </a:defRPr>
             </a:pPr>
             <a:r>
-              <a:t>FY2024 - Q3 2025</a:t>
+              <a:t>5 Pillars of Financial Analysis | 24 Interactive Charts</a:t>
+            </a:r>
+          </a:p>
+        </p:txBody>
+      </p:sp>
+      <p:sp>
+        <p:nvSpPr>
+          <p:cNvPr id="5" name="TextBox 4"/>
+          <p:cNvSpPr txBox="1"/>
+          <p:nvPr/>
+        </p:nvSpPr>
+        <p:spPr>
+          <a:xfrm>
+            <a:off x="914400" y="4389120"/>
+            <a:ext cx="7315200" cy="365760"/>
+          </a:xfrm>
+          <a:prstGeom prst="rect">
+            <a:avLst/>
+          </a:prstGeom>
+          <a:noFill/>
+        </p:spPr>
+        <p:txBody>
+          <a:bodyPr wrap="none">
+            <a:spAutoFit/>
+          </a:bodyPr>
+          <a:lstStyle/>
+          <a:p>
+            <a:pPr algn="ctr">
+              <a:defRPr sz="1600">
+                <a:solidFill>
+                  <a:srgbClr val="969696"/>
+                </a:solidFill>
+              </a:defRPr>
+            </a:pPr>
+            <a:r>
+              <a:t>Data: FY2015 - Q3 2025</a:t>
             </a:r>
           </a:p>
         </p:txBody>
@@ -3224,338 +3275,63 @@
       <p:grpSpPr/>
       <p:sp>
         <p:nvSpPr>
-          <p:cNvPr id="2" name="Title 1"/>
-          <p:cNvSpPr>
-            <a:spLocks noGrp="1"/>
-          </p:cNvSpPr>
-          <p:nvPr>
-            <p:ph type="title"/>
-          </p:nvPr>
-        </p:nvSpPr>
-        <p:spPr/>
-        <p:txBody>
-          <a:bodyPr/>
-          <a:lstStyle/>
-          <a:p>
-            <a:r>
-              <a:t>Q1 2025 Performance</a:t>
-            </a:r>
-          </a:p>
-        </p:txBody>
-      </p:sp>
-      <p:graphicFrame>
-        <p:nvGraphicFramePr>
-          <p:cNvPr id="3" name="Table 2"/>
-          <p:cNvGraphicFramePr>
-            <a:graphicFrameLocks noGrp="1"/>
-          </p:cNvGraphicFramePr>
-          <p:nvPr/>
-        </p:nvGraphicFramePr>
-        <p:xfrm>
-          <a:off x="457200" y="1645920"/>
-          <a:ext cx="4114800" cy="2743200"/>
-        </p:xfrm>
-        <a:graphic>
-          <a:graphicData uri="http://schemas.openxmlformats.org/drawingml/2006/table">
-            <a:tbl>
-              <a:tblPr firstRow="1" bandRow="1">
-                <a:tableStyleId>{5C22544A-7EE6-4342-B048-85BDC9FD1C3A}</a:tableStyleId>
-              </a:tblPr>
-              <a:tblGrid>
-                <a:gridCol w="1371600"/>
-                <a:gridCol w="1371600"/>
-                <a:gridCol w="1371600"/>
-              </a:tblGrid>
-              <a:tr h="457200">
-                <a:tc>
-                  <a:txBody>
-                    <a:bodyPr/>
-                    <a:lstStyle/>
-                    <a:p>
-                      <a:pPr>
-                        <a:defRPr sz="1200"/>
-                      </a:pPr>
-                      <a:r>
-                        <a:t>Metric</a:t>
-                      </a:r>
-                    </a:p>
-                  </a:txBody>
-                  <a:tcPr/>
-                </a:tc>
-                <a:tc>
-                  <a:txBody>
-                    <a:bodyPr/>
-                    <a:lstStyle/>
-                    <a:p>
-                      <a:pPr>
-                        <a:defRPr sz="1200"/>
-                      </a:pPr>
-                      <a:r>
-                        <a:t>Q1 2025</a:t>
-                      </a:r>
-                    </a:p>
-                  </a:txBody>
-                  <a:tcPr/>
-                </a:tc>
-                <a:tc>
-                  <a:txBody>
-                    <a:bodyPr/>
-                    <a:lstStyle/>
-                    <a:p>
-                      <a:pPr>
-                        <a:defRPr sz="1200"/>
-                      </a:pPr>
-                      <a:r>
-                        <a:t>vs Baseline</a:t>
-                      </a:r>
-                    </a:p>
-                  </a:txBody>
-                  <a:tcPr/>
-                </a:tc>
-              </a:tr>
-              <a:tr h="457200">
-                <a:tc>
-                  <a:txBody>
-                    <a:bodyPr/>
-                    <a:lstStyle/>
-                    <a:p>
-                      <a:pPr>
-                        <a:defRPr sz="1200"/>
-                      </a:pPr>
-                      <a:r>
-                        <a:t>Net Sales</a:t>
-                      </a:r>
-                    </a:p>
-                  </a:txBody>
-                  <a:tcPr/>
-                </a:tc>
-                <a:tc>
-                  <a:txBody>
-                    <a:bodyPr/>
-                    <a:lstStyle/>
-                    <a:p>
-                      <a:pPr>
-                        <a:defRPr sz="1200"/>
-                      </a:pPr>
-                      <a:r>
-                        <a:t>$23.85B</a:t>
-                      </a:r>
-                    </a:p>
-                  </a:txBody>
-                  <a:tcPr/>
-                </a:tc>
-                <a:tc>
-                  <a:txBody>
-                    <a:bodyPr/>
-                    <a:lstStyle/>
-                    <a:p>
-                      <a:pPr>
-                        <a:defRPr sz="1200"/>
-                      </a:pPr>
-                      <a:r>
-                        <a:t>-82.72B</a:t>
-                      </a:r>
-                    </a:p>
-                  </a:txBody>
-                  <a:tcPr/>
-                </a:tc>
-              </a:tr>
-              <a:tr h="457200">
-                <a:tc>
-                  <a:txBody>
-                    <a:bodyPr/>
-                    <a:lstStyle/>
-                    <a:p>
-                      <a:pPr>
-                        <a:defRPr sz="1200"/>
-                      </a:pPr>
-                      <a:r>
-                        <a:t>Operating Margin</a:t>
-                      </a:r>
-                    </a:p>
-                  </a:txBody>
-                  <a:tcPr/>
-                </a:tc>
-                <a:tc>
-                  <a:txBody>
-                    <a:bodyPr/>
-                    <a:lstStyle/>
-                    <a:p>
-                      <a:pPr>
-                        <a:defRPr sz="1200"/>
-                      </a:pPr>
-                      <a:r>
-                        <a:t>6.17%</a:t>
-                      </a:r>
-                    </a:p>
-                  </a:txBody>
-                  <a:tcPr/>
-                </a:tc>
-                <a:tc>
-                  <a:txBody>
-                    <a:bodyPr/>
-                    <a:lstStyle/>
-                    <a:p>
-                      <a:pPr>
-                        <a:defRPr sz="1200">
-                          <a:solidFill>
-                            <a:srgbClr val="008000"/>
-                          </a:solidFill>
-                        </a:defRPr>
-                      </a:pPr>
-                      <a:r>
-                        <a:t>+0.95%</a:t>
-                      </a:r>
-                    </a:p>
-                  </a:txBody>
-                  <a:tcPr/>
-                </a:tc>
-              </a:tr>
-              <a:tr h="457200">
-                <a:tc>
-                  <a:txBody>
-                    <a:bodyPr/>
-                    <a:lstStyle/>
-                    <a:p>
-                      <a:pPr>
-                        <a:defRPr sz="1200"/>
-                      </a:pPr>
-                      <a:r>
-                        <a:t>Gross Margin</a:t>
-                      </a:r>
-                    </a:p>
-                  </a:txBody>
-                  <a:tcPr/>
-                </a:tc>
-                <a:tc>
-                  <a:txBody>
-                    <a:bodyPr/>
-                    <a:lstStyle/>
-                    <a:p>
-                      <a:pPr>
-                        <a:defRPr sz="1200"/>
-                      </a:pPr>
-                      <a:r>
-                        <a:t>28.17%</a:t>
-                      </a:r>
-                    </a:p>
-                  </a:txBody>
-                  <a:tcPr/>
-                </a:tc>
-                <a:tc>
-                  <a:txBody>
-                    <a:bodyPr/>
-                    <a:lstStyle/>
-                    <a:p>
-                      <a:pPr>
-                        <a:defRPr sz="1200"/>
-                      </a:pPr>
-                      <a:r>
-                        <a:t>-0.04%</a:t>
-                      </a:r>
-                    </a:p>
-                  </a:txBody>
-                  <a:tcPr/>
-                </a:tc>
-              </a:tr>
-              <a:tr h="457200">
-                <a:tc>
-                  <a:txBody>
-                    <a:bodyPr/>
-                    <a:lstStyle/>
-                    <a:p>
-                      <a:pPr>
-                        <a:defRPr sz="1200"/>
-                      </a:pPr>
-                      <a:r>
-                        <a:t>Operating Income</a:t>
-                      </a:r>
-                    </a:p>
-                  </a:txBody>
-                  <a:tcPr/>
-                </a:tc>
-                <a:tc>
-                  <a:txBody>
-                    <a:bodyPr/>
-                    <a:lstStyle/>
-                    <a:p>
-                      <a:pPr>
-                        <a:defRPr sz="1200"/>
-                      </a:pPr>
-                      <a:r>
-                        <a:t>$1.47B</a:t>
-                      </a:r>
-                    </a:p>
-                  </a:txBody>
-                  <a:tcPr/>
-                </a:tc>
-                <a:tc>
-                  <a:txBody>
-                    <a:bodyPr/>
-                    <a:lstStyle/>
-                    <a:p>
-                      <a:pPr>
-                        <a:defRPr sz="1200"/>
-                      </a:pPr>
-                      <a:r>
-                        <a:t>-4.09B</a:t>
-                      </a:r>
-                    </a:p>
-                  </a:txBody>
-                  <a:tcPr/>
-                </a:tc>
-              </a:tr>
-              <a:tr h="457200">
-                <a:tc>
-                  <a:txBody>
-                    <a:bodyPr/>
-                    <a:lstStyle/>
-                    <a:p>
-                      <a:pPr>
-                        <a:defRPr sz="1200"/>
-                      </a:pPr>
-                      <a:r>
-                        <a:t>Inventory</a:t>
-                      </a:r>
-                    </a:p>
-                  </a:txBody>
-                  <a:tcPr/>
-                </a:tc>
-                <a:tc>
-                  <a:txBody>
-                    <a:bodyPr/>
-                    <a:lstStyle/>
-                    <a:p>
-                      <a:pPr>
-                        <a:defRPr sz="1200"/>
-                      </a:pPr>
-                      <a:r>
-                        <a:t>$13.05B</a:t>
-                      </a:r>
-                    </a:p>
-                  </a:txBody>
-                  <a:tcPr/>
-                </a:tc>
-                <a:tc>
-                  <a:txBody>
-                    <a:bodyPr/>
-                    <a:lstStyle/>
-                    <a:p>
-                      <a:pPr>
-                        <a:defRPr sz="1200"/>
-                      </a:pPr>
-                      <a:r>
-                        <a:t>+0.31B</a:t>
-                      </a:r>
-                    </a:p>
-                  </a:txBody>
-                  <a:tcPr/>
-                </a:tc>
-              </a:tr>
-            </a:tbl>
-          </a:graphicData>
-        </a:graphic>
-      </p:graphicFrame>
+          <p:cNvPr id="2" name="TextBox 1"/>
+          <p:cNvSpPr txBox="1"/>
+          <p:nvPr/>
+        </p:nvSpPr>
+        <p:spPr>
+          <a:xfrm>
+            <a:off x="457200" y="182880"/>
+            <a:ext cx="8229600" cy="457200"/>
+          </a:xfrm>
+          <a:prstGeom prst="rect">
+            <a:avLst/>
+          </a:prstGeom>
+          <a:noFill/>
+        </p:spPr>
+        <p:txBody>
+          <a:bodyPr wrap="none">
+            <a:spAutoFit/>
+          </a:bodyPr>
+          <a:lstStyle/>
+          <a:p>
+            <a:pPr>
+              <a:defRPr sz="2400" b="1">
+                <a:solidFill>
+                  <a:srgbClr val="CC0000"/>
+                </a:solidFill>
+              </a:defRPr>
+            </a:pPr>
+            <a:r>
+              <a:t>Margin Analysis (Gross/Operating/Net)</a:t>
+            </a:r>
+          </a:p>
+        </p:txBody>
+      </p:sp>
+      <p:pic>
+        <p:nvPicPr>
+          <p:cNvPr id="3" name="Picture 2" descr="chart_margin_analysis.png"/>
+          <p:cNvPicPr>
+            <a:picLocks noChangeAspect="1"/>
+          </p:cNvPicPr>
+          <p:nvPr/>
+        </p:nvPicPr>
+        <p:blipFill>
+          <a:blip r:embed="rId2"/>
+          <a:stretch>
+            <a:fillRect/>
+          </a:stretch>
+        </p:blipFill>
+        <p:spPr>
+          <a:xfrm>
+            <a:off x="457200" y="731520"/>
+            <a:ext cx="8229600" cy="4114800"/>
+          </a:xfrm>
+          <a:prstGeom prst="rect">
+            <a:avLst/>
+          </a:prstGeom>
+        </p:spPr>
+      </p:pic>
       <p:sp>
         <p:nvSpPr>
           <p:cNvPr id="4" name="TextBox 3"/>
@@ -3564,8 +3340,8 @@
         </p:nvSpPr>
         <p:spPr>
           <a:xfrm>
-            <a:off x="5029200" y="1645920"/>
-            <a:ext cx="3657600" cy="3657600"/>
+            <a:off x="457200" y="5029200"/>
+            <a:ext cx="8229600" cy="1371600"/>
           </a:xfrm>
           <a:prstGeom prst="rect">
             <a:avLst/>
@@ -3577,80 +3353,16 @@
             <a:spAutoFit/>
           </a:bodyPr>
           <a:lstStyle/>
-          <a:p/>
-          <a:p>
-            <a:pPr>
-              <a:spcAft>
-                <a:spcPts val="800"/>
-              </a:spcAft>
-              <a:defRPr sz="1400" b="1"/>
-            </a:pPr>
-            <a:r>
-              <a:t>Key Observations:</a:t>
-            </a:r>
-          </a:p>
-          <a:p>
-            <a:pPr>
-              <a:defRPr sz="1200"/>
-            </a:pPr>
-            <a:r>
-              <a:t>✅ Operating margin improving (+0.95% vs baseline)</a:t>
-            </a:r>
-          </a:p>
-          <a:p>
-            <a:pPr>
-              <a:defRPr sz="1200"/>
-            </a:pPr>
-            <a:r>
-              <a:t>✅ Operating margin +0.80% vs Q1 2024</a:t>
-            </a:r>
-          </a:p>
-          <a:p>
-            <a:pPr>
-              <a:defRPr sz="1200"/>
-            </a:pPr>
-            <a:r>
-              <a:t>⚠️ Sales -1.2% YoY</a:t>
-            </a:r>
-          </a:p>
           <a:p>
             <a:pPr>
               <a:defRPr sz="1200">
                 <a:solidFill>
-                  <a:srgbClr val="FF0000"/>
-                </a:solidFill>
-              </a:defRPr>
-            </a:pPr>
-            <a:r>
-              <a:t>🚨 Inventory growing 11.2% vs sales -1.2%</a:t>
-            </a:r>
-          </a:p>
-          <a:p>
-            <a:br/>
-            <a:pPr>
-              <a:spcBef>
-                <a:spcPts val="800"/>
-              </a:spcBef>
-              <a:defRPr sz="1200" b="1"/>
-            </a:pPr>
-            <a:r>
-              <a:t>Risk Flags:</a:t>
-            </a:r>
-          </a:p>
-          <a:p>
-            <a:pPr lvl="1">
-              <a:defRPr sz="1100"/>
-            </a:pPr>
-            <a:r>
-              <a:t>• Shrink/theft mentioned in MD&amp;A</a:t>
-            </a:r>
-          </a:p>
-          <a:p>
-            <a:pPr lvl="1">
-              <a:defRPr sz="1100"/>
-            </a:pPr>
-            <a:r>
-              <a:t>• Increased markdown/promotional activity noted</a:t>
+                  <a:srgbClr val="646464"/>
+                </a:solidFill>
+              </a:defRPr>
+            </a:pPr>
+            <a:r>
+              <a:t>Three margin lines tracking profitability over time. Compression between lines reveals where profits leak.</a:t>
             </a:r>
           </a:p>
         </p:txBody>
@@ -3675,338 +3387,63 @@
       <p:grpSpPr/>
       <p:sp>
         <p:nvSpPr>
-          <p:cNvPr id="2" name="Title 1"/>
-          <p:cNvSpPr>
-            <a:spLocks noGrp="1"/>
-          </p:cNvSpPr>
-          <p:nvPr>
-            <p:ph type="title"/>
-          </p:nvPr>
-        </p:nvSpPr>
-        <p:spPr/>
-        <p:txBody>
-          <a:bodyPr/>
-          <a:lstStyle/>
-          <a:p>
-            <a:r>
-              <a:t>Q2 2025 Performance</a:t>
-            </a:r>
-          </a:p>
-        </p:txBody>
-      </p:sp>
-      <p:graphicFrame>
-        <p:nvGraphicFramePr>
-          <p:cNvPr id="3" name="Table 2"/>
-          <p:cNvGraphicFramePr>
-            <a:graphicFrameLocks noGrp="1"/>
-          </p:cNvGraphicFramePr>
-          <p:nvPr/>
-        </p:nvGraphicFramePr>
-        <p:xfrm>
-          <a:off x="457200" y="1645920"/>
-          <a:ext cx="4114800" cy="2743200"/>
-        </p:xfrm>
-        <a:graphic>
-          <a:graphicData uri="http://schemas.openxmlformats.org/drawingml/2006/table">
-            <a:tbl>
-              <a:tblPr firstRow="1" bandRow="1">
-                <a:tableStyleId>{5C22544A-7EE6-4342-B048-85BDC9FD1C3A}</a:tableStyleId>
-              </a:tblPr>
-              <a:tblGrid>
-                <a:gridCol w="1371600"/>
-                <a:gridCol w="1371600"/>
-                <a:gridCol w="1371600"/>
-              </a:tblGrid>
-              <a:tr h="457200">
-                <a:tc>
-                  <a:txBody>
-                    <a:bodyPr/>
-                    <a:lstStyle/>
-                    <a:p>
-                      <a:pPr>
-                        <a:defRPr sz="1200"/>
-                      </a:pPr>
-                      <a:r>
-                        <a:t>Metric</a:t>
-                      </a:r>
-                    </a:p>
-                  </a:txBody>
-                  <a:tcPr/>
-                </a:tc>
-                <a:tc>
-                  <a:txBody>
-                    <a:bodyPr/>
-                    <a:lstStyle/>
-                    <a:p>
-                      <a:pPr>
-                        <a:defRPr sz="1200"/>
-                      </a:pPr>
-                      <a:r>
-                        <a:t>Q2 2025</a:t>
-                      </a:r>
-                    </a:p>
-                  </a:txBody>
-                  <a:tcPr/>
-                </a:tc>
-                <a:tc>
-                  <a:txBody>
-                    <a:bodyPr/>
-                    <a:lstStyle/>
-                    <a:p>
-                      <a:pPr>
-                        <a:defRPr sz="1200"/>
-                      </a:pPr>
-                      <a:r>
-                        <a:t>vs Baseline</a:t>
-                      </a:r>
-                    </a:p>
-                  </a:txBody>
-                  <a:tcPr/>
-                </a:tc>
-              </a:tr>
-              <a:tr h="457200">
-                <a:tc>
-                  <a:txBody>
-                    <a:bodyPr/>
-                    <a:lstStyle/>
-                    <a:p>
-                      <a:pPr>
-                        <a:defRPr sz="1200"/>
-                      </a:pPr>
-                      <a:r>
-                        <a:t>Net Sales</a:t>
-                      </a:r>
-                    </a:p>
-                  </a:txBody>
-                  <a:tcPr/>
-                </a:tc>
-                <a:tc>
-                  <a:txBody>
-                    <a:bodyPr/>
-                    <a:lstStyle/>
-                    <a:p>
-                      <a:pPr>
-                        <a:defRPr sz="1200"/>
-                      </a:pPr>
-                      <a:r>
-                        <a:t>$25.21B</a:t>
-                      </a:r>
-                    </a:p>
-                  </a:txBody>
-                  <a:tcPr/>
-                </a:tc>
-                <a:tc>
-                  <a:txBody>
-                    <a:bodyPr/>
-                    <a:lstStyle/>
-                    <a:p>
-                      <a:pPr>
-                        <a:defRPr sz="1200"/>
-                      </a:pPr>
-                      <a:r>
-                        <a:t>-81.36B</a:t>
-                      </a:r>
-                    </a:p>
-                  </a:txBody>
-                  <a:tcPr/>
-                </a:tc>
-              </a:tr>
-              <a:tr h="457200">
-                <a:tc>
-                  <a:txBody>
-                    <a:bodyPr/>
-                    <a:lstStyle/>
-                    <a:p>
-                      <a:pPr>
-                        <a:defRPr sz="1200"/>
-                      </a:pPr>
-                      <a:r>
-                        <a:t>Operating Margin</a:t>
-                      </a:r>
-                    </a:p>
-                  </a:txBody>
-                  <a:tcPr/>
-                </a:tc>
-                <a:tc>
-                  <a:txBody>
-                    <a:bodyPr/>
-                    <a:lstStyle/>
-                    <a:p>
-                      <a:pPr>
-                        <a:defRPr sz="1200"/>
-                      </a:pPr>
-                      <a:r>
-                        <a:t>5.22%</a:t>
-                      </a:r>
-                    </a:p>
-                  </a:txBody>
-                  <a:tcPr/>
-                </a:tc>
-                <a:tc>
-                  <a:txBody>
-                    <a:bodyPr/>
-                    <a:lstStyle/>
-                    <a:p>
-                      <a:pPr>
-                        <a:defRPr sz="1200"/>
-                      </a:pPr>
-                      <a:r>
-                        <a:t>+0.00%</a:t>
-                      </a:r>
-                    </a:p>
-                  </a:txBody>
-                  <a:tcPr/>
-                </a:tc>
-              </a:tr>
-              <a:tr h="457200">
-                <a:tc>
-                  <a:txBody>
-                    <a:bodyPr/>
-                    <a:lstStyle/>
-                    <a:p>
-                      <a:pPr>
-                        <a:defRPr sz="1200"/>
-                      </a:pPr>
-                      <a:r>
-                        <a:t>Gross Margin</a:t>
-                      </a:r>
-                    </a:p>
-                  </a:txBody>
-                  <a:tcPr/>
-                </a:tc>
-                <a:tc>
-                  <a:txBody>
-                    <a:bodyPr/>
-                    <a:lstStyle/>
-                    <a:p>
-                      <a:pPr>
-                        <a:defRPr sz="1200"/>
-                      </a:pPr>
-                      <a:r>
-                        <a:t>28.99%</a:t>
-                      </a:r>
-                    </a:p>
-                  </a:txBody>
-                  <a:tcPr/>
-                </a:tc>
-                <a:tc>
-                  <a:txBody>
-                    <a:bodyPr/>
-                    <a:lstStyle/>
-                    <a:p>
-                      <a:pPr>
-                        <a:defRPr sz="1200">
-                          <a:solidFill>
-                            <a:srgbClr val="008000"/>
-                          </a:solidFill>
-                        </a:defRPr>
-                      </a:pPr>
-                      <a:r>
-                        <a:t>+0.78%</a:t>
-                      </a:r>
-                    </a:p>
-                  </a:txBody>
-                  <a:tcPr/>
-                </a:tc>
-              </a:tr>
-              <a:tr h="457200">
-                <a:tc>
-                  <a:txBody>
-                    <a:bodyPr/>
-                    <a:lstStyle/>
-                    <a:p>
-                      <a:pPr>
-                        <a:defRPr sz="1200"/>
-                      </a:pPr>
-                      <a:r>
-                        <a:t>Operating Income</a:t>
-                      </a:r>
-                    </a:p>
-                  </a:txBody>
-                  <a:tcPr/>
-                </a:tc>
-                <a:tc>
-                  <a:txBody>
-                    <a:bodyPr/>
-                    <a:lstStyle/>
-                    <a:p>
-                      <a:pPr>
-                        <a:defRPr sz="1200"/>
-                      </a:pPr>
-                      <a:r>
-                        <a:t>$1.32B</a:t>
-                      </a:r>
-                    </a:p>
-                  </a:txBody>
-                  <a:tcPr/>
-                </a:tc>
-                <a:tc>
-                  <a:txBody>
-                    <a:bodyPr/>
-                    <a:lstStyle/>
-                    <a:p>
-                      <a:pPr>
-                        <a:defRPr sz="1200"/>
-                      </a:pPr>
-                      <a:r>
-                        <a:t>-4.25B</a:t>
-                      </a:r>
-                    </a:p>
-                  </a:txBody>
-                  <a:tcPr/>
-                </a:tc>
-              </a:tr>
-              <a:tr h="457200">
-                <a:tc>
-                  <a:txBody>
-                    <a:bodyPr/>
-                    <a:lstStyle/>
-                    <a:p>
-                      <a:pPr>
-                        <a:defRPr sz="1200"/>
-                      </a:pPr>
-                      <a:r>
-                        <a:t>Inventory</a:t>
-                      </a:r>
-                    </a:p>
-                  </a:txBody>
-                  <a:tcPr/>
-                </a:tc>
-                <a:tc>
-                  <a:txBody>
-                    <a:bodyPr/>
-                    <a:lstStyle/>
-                    <a:p>
-                      <a:pPr>
-                        <a:defRPr sz="1200"/>
-                      </a:pPr>
-                      <a:r>
-                        <a:t>$12.88B</a:t>
-                      </a:r>
-                    </a:p>
-                  </a:txBody>
-                  <a:tcPr/>
-                </a:tc>
-                <a:tc>
-                  <a:txBody>
-                    <a:bodyPr/>
-                    <a:lstStyle/>
-                    <a:p>
-                      <a:pPr>
-                        <a:defRPr sz="1200"/>
-                      </a:pPr>
-                      <a:r>
-                        <a:t>+0.14B</a:t>
-                      </a:r>
-                    </a:p>
-                  </a:txBody>
-                  <a:tcPr/>
-                </a:tc>
-              </a:tr>
-            </a:tbl>
-          </a:graphicData>
-        </a:graphic>
-      </p:graphicFrame>
+          <p:cNvPr id="2" name="TextBox 1"/>
+          <p:cNvSpPr txBox="1"/>
+          <p:nvPr/>
+        </p:nvSpPr>
+        <p:spPr>
+          <a:xfrm>
+            <a:off x="457200" y="182880"/>
+            <a:ext cx="8229600" cy="457200"/>
+          </a:xfrm>
+          <a:prstGeom prst="rect">
+            <a:avLst/>
+          </a:prstGeom>
+          <a:noFill/>
+        </p:spPr>
+        <p:txBody>
+          <a:bodyPr wrap="none">
+            <a:spAutoFit/>
+          </a:bodyPr>
+          <a:lstStyle/>
+          <a:p>
+            <a:pPr>
+              <a:defRPr sz="2400" b="1">
+                <a:solidFill>
+                  <a:srgbClr val="CC0000"/>
+                </a:solidFill>
+              </a:defRPr>
+            </a:pPr>
+            <a:r>
+              <a:t>Margin Bridge Waterfall</a:t>
+            </a:r>
+          </a:p>
+        </p:txBody>
+      </p:sp>
+      <p:pic>
+        <p:nvPicPr>
+          <p:cNvPr id="3" name="Picture 2" descr="chart_margin_bridge.png"/>
+          <p:cNvPicPr>
+            <a:picLocks noChangeAspect="1"/>
+          </p:cNvPicPr>
+          <p:nvPr/>
+        </p:nvPicPr>
+        <p:blipFill>
+          <a:blip r:embed="rId2"/>
+          <a:stretch>
+            <a:fillRect/>
+          </a:stretch>
+        </p:blipFill>
+        <p:spPr>
+          <a:xfrm>
+            <a:off x="457200" y="731520"/>
+            <a:ext cx="8229600" cy="4114800"/>
+          </a:xfrm>
+          <a:prstGeom prst="rect">
+            <a:avLst/>
+          </a:prstGeom>
+        </p:spPr>
+      </p:pic>
       <p:sp>
         <p:nvSpPr>
           <p:cNvPr id="4" name="TextBox 3"/>
@@ -4015,8 +3452,8 @@
         </p:nvSpPr>
         <p:spPr>
           <a:xfrm>
-            <a:off x="5029200" y="1645920"/>
-            <a:ext cx="3657600" cy="3657600"/>
+            <a:off x="457200" y="5029200"/>
+            <a:ext cx="8229600" cy="1371600"/>
           </a:xfrm>
           <a:prstGeom prst="rect">
             <a:avLst/>
@@ -4028,76 +3465,16 @@
             <a:spAutoFit/>
           </a:bodyPr>
           <a:lstStyle/>
-          <a:p/>
           <a:p>
             <a:pPr>
-              <a:spcAft>
-                <a:spcPts val="800"/>
-              </a:spcAft>
-              <a:defRPr sz="1400" b="1"/>
-            </a:pPr>
-            <a:r>
-              <a:t>Key Observations:</a:t>
-            </a:r>
-          </a:p>
-          <a:p>
-            <a:pPr>
-              <a:defRPr sz="1200"/>
-            </a:pPr>
-            <a:r>
-              <a:t>⚠️ Operating margin declining (+0.00% vs baseline)</a:t>
-            </a:r>
-          </a:p>
-          <a:p>
-            <a:pPr>
-              <a:defRPr sz="1200"/>
-            </a:pPr>
-            <a:r>
-              <a:t>✅ Gross margin +0.78% vs baseline</a:t>
-            </a:r>
-          </a:p>
-          <a:p>
-            <a:pPr>
-              <a:defRPr sz="1200"/>
-            </a:pPr>
-            <a:r>
-              <a:t>⚠️ Operating margin -1.31% vs Q2 2024</a:t>
-            </a:r>
-          </a:p>
-          <a:p>
-            <a:pPr>
-              <a:defRPr sz="1200"/>
-            </a:pPr>
-            <a:r>
-              <a:t>✅ Sales +0.8% YoY</a:t>
-            </a:r>
-          </a:p>
-          <a:p>
-            <a:br/>
-            <a:pPr>
-              <a:spcBef>
-                <a:spcPts val="800"/>
-              </a:spcBef>
-              <a:defRPr sz="1200" b="1"/>
-            </a:pPr>
-            <a:r>
-              <a:t>Risk Flags:</a:t>
-            </a:r>
-          </a:p>
-          <a:p>
-            <a:pPr lvl="1">
-              <a:defRPr sz="1100"/>
-            </a:pPr>
-            <a:r>
-              <a:t>• Shrink/theft mentioned in MD&amp;A</a:t>
-            </a:r>
-          </a:p>
-          <a:p>
-            <a:pPr lvl="1">
-              <a:defRPr sz="1100"/>
-            </a:pPr>
-            <a:r>
-              <a:t>• Increased markdown/promotional activity noted</a:t>
+              <a:defRPr sz="1200">
+                <a:solidFill>
+                  <a:srgbClr val="646464"/>
+                </a:solidFill>
+              </a:defRPr>
+            </a:pPr>
+            <a:r>
+              <a:t>Waterfall showing margin evolution from FY2022 baseline. Green bars = improvement, red bars = deterioration.</a:t>
             </a:r>
           </a:p>
         </p:txBody>
@@ -4122,68 +3499,73 @@
       <p:grpSpPr/>
       <p:sp>
         <p:nvSpPr>
-          <p:cNvPr id="2" name="Rectangle 1"/>
-          <p:cNvSpPr/>
-          <p:nvPr/>
-        </p:nvSpPr>
-        <p:spPr>
-          <a:xfrm>
-            <a:off x="0" y="457200"/>
-            <a:ext cx="9144000" cy="914400"/>
-          </a:xfrm>
-          <a:prstGeom prst="rect">
-            <a:avLst/>
-          </a:prstGeom>
-          <a:solidFill>
-            <a:srgbClr val="FF0000"/>
-          </a:solidFill>
-          <a:ln>
-            <a:solidFill>
-              <a:srgbClr val="FF0000"/>
-            </a:solidFill>
-          </a:ln>
-        </p:spPr>
-        <p:style>
-          <a:lnRef idx="1">
-            <a:schemeClr val="accent1"/>
-          </a:lnRef>
-          <a:fillRef idx="3">
-            <a:schemeClr val="accent1"/>
-          </a:fillRef>
-          <a:effectRef idx="2">
-            <a:schemeClr val="accent1"/>
-          </a:effectRef>
-          <a:fontRef idx="minor">
-            <a:schemeClr val="lt1"/>
-          </a:fontRef>
-        </p:style>
-        <p:txBody>
-          <a:bodyPr rtlCol="0" anchor="ctr"/>
-          <a:lstStyle/>
-          <a:p>
-            <a:pPr algn="ctr">
-              <a:defRPr sz="2800" b="1">
-                <a:solidFill>
-                  <a:srgbClr val="FFFFFF"/>
-                </a:solidFill>
-              </a:defRPr>
-            </a:pPr>
-            <a:r>
-              <a:t>⚠️ Q3 2025: CRITICAL WEAKNESS DETECTED</a:t>
-            </a:r>
-          </a:p>
-        </p:txBody>
-      </p:sp>
-      <p:sp>
-        <p:nvSpPr>
-          <p:cNvPr id="3" name="TextBox 2"/>
+          <p:cNvPr id="2" name="TextBox 1"/>
           <p:cNvSpPr txBox="1"/>
           <p:nvPr/>
         </p:nvSpPr>
         <p:spPr>
           <a:xfrm>
-            <a:off x="914400" y="1828800"/>
-            <a:ext cx="7315200" cy="4114800"/>
+            <a:off x="457200" y="182880"/>
+            <a:ext cx="8229600" cy="457200"/>
+          </a:xfrm>
+          <a:prstGeom prst="rect">
+            <a:avLst/>
+          </a:prstGeom>
+          <a:noFill/>
+        </p:spPr>
+        <p:txBody>
+          <a:bodyPr wrap="none">
+            <a:spAutoFit/>
+          </a:bodyPr>
+          <a:lstStyle/>
+          <a:p>
+            <a:pPr>
+              <a:defRPr sz="2400" b="1">
+                <a:solidFill>
+                  <a:srgbClr val="CC0000"/>
+                </a:solidFill>
+              </a:defRPr>
+            </a:pPr>
+            <a:r>
+              <a:t>Operating Expense Breakdown</a:t>
+            </a:r>
+          </a:p>
+        </p:txBody>
+      </p:sp>
+      <p:pic>
+        <p:nvPicPr>
+          <p:cNvPr id="3" name="Picture 2" descr="chart_expense_breakdown.png"/>
+          <p:cNvPicPr>
+            <a:picLocks noChangeAspect="1"/>
+          </p:cNvPicPr>
+          <p:nvPr/>
+        </p:nvPicPr>
+        <p:blipFill>
+          <a:blip r:embed="rId2"/>
+          <a:stretch>
+            <a:fillRect/>
+          </a:stretch>
+        </p:blipFill>
+        <p:spPr>
+          <a:xfrm>
+            <a:off x="457200" y="731520"/>
+            <a:ext cx="8229600" cy="4114800"/>
+          </a:xfrm>
+          <a:prstGeom prst="rect">
+            <a:avLst/>
+          </a:prstGeom>
+        </p:spPr>
+      </p:pic>
+      <p:sp>
+        <p:nvSpPr>
+          <p:cNvPr id="4" name="TextBox 3"/>
+          <p:cNvSpPr txBox="1"/>
+          <p:nvPr/>
+        </p:nvSpPr>
+        <p:spPr>
+          <a:xfrm>
+            <a:off x="457200" y="5029200"/>
+            <a:ext cx="8229600" cy="1371600"/>
           </a:xfrm>
           <a:prstGeom prst="rect">
             <a:avLst/>
@@ -4195,148 +3577,16 @@
             <a:spAutoFit/>
           </a:bodyPr>
           <a:lstStyle/>
-          <a:p/>
           <a:p>
             <a:pPr>
-              <a:spcAft>
-                <a:spcPts val="400"/>
-              </a:spcAft>
-              <a:defRPr sz="1600" b="1"/>
-            </a:pPr>
-            <a:r>
-              <a:t>Operating Margin: 3.75% (-1.47% vs baseline)</a:t>
-            </a:r>
-          </a:p>
-          <a:p>
-            <a:pPr lvl="1">
-              <a:defRPr sz="1300">
-                <a:solidFill>
-                  <a:srgbClr val="FF0000"/>
-                </a:solidFill>
-              </a:defRPr>
-            </a:pPr>
-            <a:r>
-              <a:t>  → Declined 147 basis points - worst quarter of the year</a:t>
-            </a:r>
-          </a:p>
-          <a:p>
-            <a:pPr>
-              <a:defRPr sz="1400"/>
-            </a:pPr>
-          </a:p>
-          <a:p>
-            <a:pPr>
-              <a:spcAft>
-                <a:spcPts val="400"/>
-              </a:spcAft>
-              <a:defRPr sz="1600" b="1"/>
-            </a:pPr>
-            <a:r>
-              <a:t>Inventory: $14.90B</a:t>
-            </a:r>
-          </a:p>
-          <a:p>
-            <a:pPr lvl="1">
-              <a:defRPr sz="1300">
-                <a:solidFill>
-                  <a:srgbClr val="800000"/>
-                </a:solidFill>
-              </a:defRPr>
-            </a:pPr>
-            <a:r>
-              <a:t>  → Up 16.9% from baseline</a:t>
-            </a:r>
-          </a:p>
-          <a:p>
-            <a:pPr lvl="1">
-              <a:defRPr sz="1300">
-                <a:solidFill>
-                  <a:srgbClr val="800000"/>
-                </a:solidFill>
-              </a:defRPr>
-            </a:pPr>
-            <a:r>
-              <a:t>  → Excess inventory building = potential clearance sales ahead</a:t>
-            </a:r>
-          </a:p>
-          <a:p>
-            <a:pPr>
-              <a:defRPr sz="1400"/>
-            </a:pPr>
-          </a:p>
-          <a:p>
-            <a:pPr>
-              <a:spcAft>
-                <a:spcPts val="400"/>
-              </a:spcAft>
-              <a:defRPr sz="1600" b="1"/>
-            </a:pPr>
-            <a:r>
-              <a:t>Operating Income: $0.95B</a:t>
-            </a:r>
-          </a:p>
-          <a:p>
-            <a:pPr lvl="1">
-              <a:defRPr sz="1300">
-                <a:solidFill>
-                  <a:srgbClr val="800000"/>
-                </a:solidFill>
-              </a:defRPr>
-            </a:pPr>
-            <a:r>
-              <a:t>  → Lowest quarterly operating income despite similar sales</a:t>
-            </a:r>
-          </a:p>
-          <a:p>
-            <a:pPr>
-              <a:defRPr sz="1400"/>
-            </a:pPr>
-          </a:p>
-          <a:p>
-            <a:pPr>
-              <a:spcAft>
-                <a:spcPts val="400"/>
-              </a:spcAft>
-              <a:defRPr sz="1600" b="1"/>
-            </a:pPr>
-            <a:r>
-              <a:t>Combined Effect:</a:t>
-            </a:r>
-          </a:p>
-          <a:p>
-            <a:pPr lvl="1">
-              <a:defRPr sz="1300">
-                <a:solidFill>
-                  <a:srgbClr val="800000"/>
-                </a:solidFill>
-              </a:defRPr>
-            </a:pPr>
-            <a:r>
-              <a:t>  → Interest coverage dropped to 1.5x (from 9.7x at baseline)</a:t>
-            </a:r>
-          </a:p>
-          <a:p>
-            <a:pPr lvl="1">
-              <a:defRPr sz="1300">
-                <a:solidFill>
-                  <a:srgbClr val="FF0000"/>
-                </a:solidFill>
-              </a:defRPr>
-            </a:pPr>
-            <a:r>
-              <a:t>  → Approaching distressed territory (&lt;1.5x is red flag)</a:t>
-            </a:r>
-          </a:p>
-          <a:p>
-            <a:pPr lvl="1">
-              <a:defRPr sz="1300">
-                <a:solidFill>
-                  <a:srgbClr val="FF0000"/>
-                </a:solidFill>
-              </a:defRPr>
-            </a:pPr>
-            <a:r>
-              <a:t>  → Rising debt + falling profitability = liquidity risk</a:t>
+              <a:defRPr sz="1200">
+                <a:solidFill>
+                  <a:srgbClr val="646464"/>
+                </a:solidFill>
+              </a:defRPr>
+            </a:pPr>
+            <a:r>
+              <a:t>100% stacked bars showing cost structure. Watch for SG&amp;A creep eating into margins.</a:t>
             </a:r>
           </a:p>
         </p:txBody>
@@ -4367,7 +3617,7 @@
         </p:nvSpPr>
         <p:spPr>
           <a:xfrm>
-            <a:off x="457200" y="274320"/>
+            <a:off x="457200" y="182880"/>
             <a:ext cx="8229600" cy="457200"/>
           </a:xfrm>
           <a:prstGeom prst="rect">
@@ -4382,24 +3632,52 @@
           <a:lstStyle/>
           <a:p>
             <a:pPr>
-              <a:defRPr sz="2800" b="1"/>
-            </a:pPr>
-            <a:r>
-              <a:t>Operating Margin Bridge (FY2022 → Q3 2025)</a:t>
-            </a:r>
-          </a:p>
-        </p:txBody>
-      </p:sp>
-      <p:sp>
-        <p:nvSpPr>
-          <p:cNvPr id="3" name="TextBox 2"/>
+              <a:defRPr sz="2400" b="1">
+                <a:solidFill>
+                  <a:srgbClr val="CC0000"/>
+                </a:solidFill>
+              </a:defRPr>
+            </a:pPr>
+            <a:r>
+              <a:t>EBITDA Bridge</a:t>
+            </a:r>
+          </a:p>
+        </p:txBody>
+      </p:sp>
+      <p:pic>
+        <p:nvPicPr>
+          <p:cNvPr id="3" name="Picture 2" descr="chart_ebitda_bridge.png"/>
+          <p:cNvPicPr>
+            <a:picLocks noChangeAspect="1"/>
+          </p:cNvPicPr>
+          <p:nvPr/>
+        </p:nvPicPr>
+        <p:blipFill>
+          <a:blip r:embed="rId2"/>
+          <a:stretch>
+            <a:fillRect/>
+          </a:stretch>
+        </p:blipFill>
+        <p:spPr>
+          <a:xfrm>
+            <a:off x="457200" y="731520"/>
+            <a:ext cx="8229600" cy="4114800"/>
+          </a:xfrm>
+          <a:prstGeom prst="rect">
+            <a:avLst/>
+          </a:prstGeom>
+        </p:spPr>
+      </p:pic>
+      <p:sp>
+        <p:nvSpPr>
+          <p:cNvPr id="4" name="TextBox 3"/>
           <p:cNvSpPr txBox="1"/>
           <p:nvPr/>
         </p:nvSpPr>
         <p:spPr>
           <a:xfrm>
-            <a:off x="457200" y="914400"/>
-            <a:ext cx="8229600" cy="914400"/>
+            <a:off x="457200" y="5029200"/>
+            <a:ext cx="8229600" cy="1371600"/>
           </a:xfrm>
           <a:prstGeom prst="rect">
             <a:avLst/>
@@ -4407,126 +3685,20 @@
           <a:noFill/>
         </p:spPr>
         <p:txBody>
-          <a:bodyPr wrap="none">
+          <a:bodyPr wrap="square">
             <a:spAutoFit/>
           </a:bodyPr>
           <a:lstStyle/>
           <a:p>
             <a:pPr>
-              <a:spcAft>
-                <a:spcPts val="600"/>
-              </a:spcAft>
-              <a:defRPr sz="1400"/>
-            </a:pPr>
-            <a:r>
-              <a:t>Interactive waterfall chart showing operating margin evolution:</a:t>
-            </a:r>
-          </a:p>
-          <a:p>
-            <a:pPr>
-              <a:spcAft>
-                <a:spcPts val="1200"/>
-              </a:spcAft>
-              <a:defRPr sz="1400"/>
-            </a:pPr>
-            <a:r>
-              <a:t>📂 Click to view: </a:t>
-            </a:r>
-            <a:r>
-              <a:rPr sz="1400" u="sng">
-                <a:solidFill>
-                  <a:srgbClr val="0000FF"/>
-                </a:solidFill>
-                <a:hlinkClick r:id="rId2"/>
-              </a:rPr>
-              <a:t>Margin Bridge Waterfall Chart</a:t>
-            </a:r>
-          </a:p>
-        </p:txBody>
-      </p:sp>
-      <p:sp>
-        <p:nvSpPr>
-          <p:cNvPr id="4" name="TextBox 3"/>
-          <p:cNvSpPr txBox="1"/>
-          <p:nvPr/>
-        </p:nvSpPr>
-        <p:spPr>
-          <a:xfrm>
-            <a:off x="457200" y="2286000"/>
-            <a:ext cx="8229600" cy="3657600"/>
-          </a:xfrm>
-          <a:prstGeom prst="rect">
-            <a:avLst/>
-          </a:prstGeom>
-          <a:noFill/>
-        </p:spPr>
-        <p:txBody>
-          <a:bodyPr wrap="none">
-            <a:spAutoFit/>
-          </a:bodyPr>
-          <a:lstStyle/>
-          <a:p>
-            <a:pPr>
-              <a:spcAft>
-                <a:spcPts val="600"/>
-              </a:spcAft>
-              <a:defRPr sz="1600"/>
-            </a:pPr>
-            <a:r>
-              <a:t>• FY2022 Baseline: 3.58%</a:t>
-            </a:r>
-          </a:p>
-          <a:p>
-            <a:pPr>
-              <a:spcAft>
-                <a:spcPts val="600"/>
-              </a:spcAft>
-              <a:defRPr sz="1600"/>
-            </a:pPr>
-            <a:r>
-              <a:t>• Q3 2025 Current: 3.75%</a:t>
-            </a:r>
-          </a:p>
-          <a:p>
-            <a:pPr>
-              <a:spcAft>
-                <a:spcPts val="1200"/>
-              </a:spcAft>
-              <a:defRPr sz="1600">
-                <a:solidFill>
-                  <a:srgbClr val="008000"/>
-                </a:solidFill>
-              </a:defRPr>
-            </a:pPr>
-            <a:r>
-              <a:t>• Net Change: +0.17 percentage points</a:t>
-            </a:r>
-          </a:p>
-          <a:p>
-            <a:pPr>
-              <a:spcAft>
-                <a:spcPts val="600"/>
-              </a:spcAft>
-              <a:defRPr sz="1400" b="1"/>
-            </a:pPr>
-            <a:r>
-              <a:t>Key Drivers:</a:t>
-            </a:r>
-          </a:p>
-          <a:p>
-            <a:pPr lvl="1">
-              <a:defRPr sz="1400"/>
-            </a:pPr>
-            <a:r>
-              <a:t>• Shrink impact: increasing trend</a:t>
-            </a:r>
-          </a:p>
-          <a:p>
-            <a:pPr lvl="1">
-              <a:defRPr sz="1400"/>
-            </a:pPr>
-            <a:r>
-              <a:t>• Markdown activity: stable/decreasing trend</a:t>
+              <a:defRPr sz="1200">
+                <a:solidFill>
+                  <a:srgbClr val="646464"/>
+                </a:solidFill>
+              </a:defRPr>
+            </a:pPr>
+            <a:r>
+              <a:t>Shows how revenue flows to EBITDA through operating expenses. The D&amp;A add-back reveals capital intensity.</a:t>
             </a:r>
           </a:p>
         </p:txBody>
@@ -4557,7 +3729,7 @@
         </p:nvSpPr>
         <p:spPr>
           <a:xfrm>
-            <a:off x="457200" y="274320"/>
+            <a:off x="457200" y="182880"/>
             <a:ext cx="8229600" cy="457200"/>
           </a:xfrm>
           <a:prstGeom prst="rect">
@@ -4572,24 +3744,52 @@
           <a:lstStyle/>
           <a:p>
             <a:pPr>
-              <a:defRPr sz="2800" b="1"/>
-            </a:pPr>
-            <a:r>
-              <a:t>Risk Heatmap: Shrink &amp; Markdown Trends</a:t>
-            </a:r>
-          </a:p>
-        </p:txBody>
-      </p:sp>
-      <p:sp>
-        <p:nvSpPr>
-          <p:cNvPr id="3" name="TextBox 2"/>
+              <a:defRPr sz="2400" b="1">
+                <a:solidFill>
+                  <a:srgbClr val="CC0000"/>
+                </a:solidFill>
+              </a:defRPr>
+            </a:pPr>
+            <a:r>
+              <a:t>Operating Margin Waterfall</a:t>
+            </a:r>
+          </a:p>
+        </p:txBody>
+      </p:sp>
+      <p:pic>
+        <p:nvPicPr>
+          <p:cNvPr id="3" name="Picture 2" descr="chart_operating_margin_waterfall.png"/>
+          <p:cNvPicPr>
+            <a:picLocks noChangeAspect="1"/>
+          </p:cNvPicPr>
+          <p:nvPr/>
+        </p:nvPicPr>
+        <p:blipFill>
+          <a:blip r:embed="rId2"/>
+          <a:stretch>
+            <a:fillRect/>
+          </a:stretch>
+        </p:blipFill>
+        <p:spPr>
+          <a:xfrm>
+            <a:off x="457200" y="731520"/>
+            <a:ext cx="8229600" cy="4114800"/>
+          </a:xfrm>
+          <a:prstGeom prst="rect">
+            <a:avLst/>
+          </a:prstGeom>
+        </p:spPr>
+      </p:pic>
+      <p:sp>
+        <p:nvSpPr>
+          <p:cNvPr id="4" name="TextBox 3"/>
           <p:cNvSpPr txBox="1"/>
           <p:nvPr/>
         </p:nvSpPr>
         <p:spPr>
           <a:xfrm>
-            <a:off x="457200" y="914400"/>
-            <a:ext cx="8229600" cy="1828800"/>
+            <a:off x="457200" y="5029200"/>
+            <a:ext cx="8229600" cy="1371600"/>
           </a:xfrm>
           <a:prstGeom prst="rect">
             <a:avLst/>
@@ -4597,287 +3797,24 @@
           <a:noFill/>
         </p:spPr>
         <p:txBody>
-          <a:bodyPr wrap="none">
+          <a:bodyPr wrap="square">
             <a:spAutoFit/>
           </a:bodyPr>
           <a:lstStyle/>
           <a:p>
             <a:pPr>
-              <a:spcAft>
-                <a:spcPts val="600"/>
-              </a:spcAft>
-              <a:defRPr sz="1400"/>
-            </a:pPr>
-            <a:r>
-              <a:t>Interactive visualizations showing risk mention trends:</a:t>
-            </a:r>
-          </a:p>
-          <a:p>
-            <a:pPr>
-              <a:spcAft>
-                <a:spcPts val="600"/>
-              </a:spcAft>
-              <a:defRPr sz="1400" b="1"/>
-            </a:pPr>
-            <a:r>
-              <a:t>📂 Click to view charts:</a:t>
-            </a:r>
-          </a:p>
-          <a:p>
-            <a:pPr lvl="1"/>
-            <a:r>
-              <a:t>   • </a:t>
-            </a:r>
-            <a:r>
-              <a:rPr sz="1400" u="sng">
-                <a:solidFill>
-                  <a:srgbClr val="0000FF"/>
-                </a:solidFill>
-                <a:hlinkClick r:id="rId2"/>
-              </a:rPr>
-              <a:t>Risk Mention Trends (stacked area chart)</a:t>
-            </a:r>
-          </a:p>
-          <a:p>
-            <a:pPr lvl="1">
-              <a:spcAft>
-                <a:spcPts val="1200"/>
-              </a:spcAft>
-            </a:pPr>
-            <a:r>
-              <a:t>   • </a:t>
-            </a:r>
-            <a:r>
-              <a:rPr sz="1400" u="sng">
-                <a:solidFill>
-                  <a:srgbClr val="0000FF"/>
-                </a:solidFill>
-                <a:hlinkClick r:id="rId3"/>
-              </a:rPr>
-              <a:t>Risk Heatmap Grid (intensity matrix)</a:t>
-            </a:r>
-          </a:p>
-        </p:txBody>
-      </p:sp>
-      <p:graphicFrame>
-        <p:nvGraphicFramePr>
-          <p:cNvPr id="4" name="Table 3"/>
-          <p:cNvGraphicFramePr>
-            <a:graphicFrameLocks noGrp="1"/>
-          </p:cNvGraphicFramePr>
-          <p:nvPr/>
-        </p:nvGraphicFramePr>
-        <p:xfrm>
-          <a:off x="1371600" y="2743200"/>
-          <a:ext cx="6400800" cy="2286000"/>
-        </p:xfrm>
-        <a:graphic>
-          <a:graphicData uri="http://schemas.openxmlformats.org/drawingml/2006/table">
-            <a:tbl>
-              <a:tblPr firstRow="1" bandRow="1">
-                <a:tableStyleId>{5C22544A-7EE6-4342-B048-85BDC9FD1C3A}</a:tableStyleId>
-              </a:tblPr>
-              <a:tblGrid>
-                <a:gridCol w="1600200"/>
-                <a:gridCol w="1600200"/>
-                <a:gridCol w="1600200"/>
-                <a:gridCol w="1600200"/>
-              </a:tblGrid>
-              <a:tr h="762000">
-                <a:tc>
-                  <a:txBody>
-                    <a:bodyPr/>
-                    <a:lstStyle/>
-                    <a:p>
-                      <a:pPr algn="ctr">
-                        <a:defRPr sz="1400" b="1"/>
-                      </a:pPr>
-                      <a:r>
-                        <a:t>Risk Type</a:t>
-                      </a:r>
-                    </a:p>
-                  </a:txBody>
-                  <a:tcPr/>
-                </a:tc>
-                <a:tc>
-                  <a:txBody>
-                    <a:bodyPr/>
-                    <a:lstStyle/>
-                    <a:p>
-                      <a:pPr algn="ctr">
-                        <a:defRPr sz="1400" b="1"/>
-                      </a:pPr>
-                      <a:r>
-                        <a:t>Total Mentions</a:t>
-                      </a:r>
-                    </a:p>
-                  </a:txBody>
-                  <a:tcPr/>
-                </a:tc>
-                <a:tc>
-                  <a:txBody>
-                    <a:bodyPr/>
-                    <a:lstStyle/>
-                    <a:p>
-                      <a:pPr algn="ctr">
-                        <a:defRPr sz="1400" b="1"/>
-                      </a:pPr>
-                      <a:r>
-                        <a:t>Avg per Period</a:t>
-                      </a:r>
-                    </a:p>
-                  </a:txBody>
-                  <a:tcPr/>
-                </a:tc>
-                <a:tc>
-                  <a:txBody>
-                    <a:bodyPr/>
-                    <a:lstStyle/>
-                    <a:p>
-                      <a:pPr algn="ctr">
-                        <a:defRPr sz="1400" b="1"/>
-                      </a:pPr>
-                      <a:r>
-                        <a:t>Trend</a:t>
-                      </a:r>
-                    </a:p>
-                  </a:txBody>
-                  <a:tcPr/>
-                </a:tc>
-              </a:tr>
-              <a:tr h="762000">
-                <a:tc>
-                  <a:txBody>
-                    <a:bodyPr/>
-                    <a:lstStyle/>
-                    <a:p>
-                      <a:pPr algn="ctr">
-                        <a:defRPr sz="1400"/>
-                      </a:pPr>
-                      <a:r>
-                        <a:t>Shrink/Theft</a:t>
-                      </a:r>
-                    </a:p>
-                  </a:txBody>
-                  <a:tcPr/>
-                </a:tc>
-                <a:tc>
-                  <a:txBody>
-                    <a:bodyPr/>
-                    <a:lstStyle/>
-                    <a:p>
-                      <a:pPr algn="ctr">
-                        <a:defRPr sz="1400"/>
-                      </a:pPr>
-                      <a:r>
-                        <a:t>22</a:t>
-                      </a:r>
-                    </a:p>
-                  </a:txBody>
-                  <a:tcPr/>
-                </a:tc>
-                <a:tc>
-                  <a:txBody>
-                    <a:bodyPr/>
-                    <a:lstStyle/>
-                    <a:p>
-                      <a:pPr algn="ctr">
-                        <a:defRPr sz="1400"/>
-                      </a:pPr>
-                      <a:r>
-                        <a:t>2.8</a:t>
-                      </a:r>
-                    </a:p>
-                  </a:txBody>
-                  <a:tcPr/>
-                </a:tc>
-                <a:tc>
-                  <a:txBody>
-                    <a:bodyPr/>
-                    <a:lstStyle/>
-                    <a:p>
-                      <a:pPr algn="ctr">
-                        <a:defRPr sz="1400"/>
-                      </a:pPr>
-                      <a:r>
-                        <a:rPr b="1">
-                          <a:solidFill>
-                            <a:srgbClr val="FF0000"/>
-                          </a:solidFill>
-                        </a:rPr>
-                        <a:t>increasing</a:t>
-                      </a:r>
-                    </a:p>
-                  </a:txBody>
-                  <a:tcPr/>
-                </a:tc>
-              </a:tr>
-              <a:tr h="762000">
-                <a:tc>
-                  <a:txBody>
-                    <a:bodyPr/>
-                    <a:lstStyle/>
-                    <a:p>
-                      <a:pPr algn="ctr">
-                        <a:defRPr sz="1400"/>
-                      </a:pPr>
-                      <a:r>
-                        <a:t>Markdown/Promo</a:t>
-                      </a:r>
-                    </a:p>
-                  </a:txBody>
-                  <a:tcPr/>
-                </a:tc>
-                <a:tc>
-                  <a:txBody>
-                    <a:bodyPr/>
-                    <a:lstStyle/>
-                    <a:p>
-                      <a:pPr algn="ctr">
-                        <a:defRPr sz="1400"/>
-                      </a:pPr>
-                      <a:r>
-                        <a:t>89</a:t>
-                      </a:r>
-                    </a:p>
-                  </a:txBody>
-                  <a:tcPr/>
-                </a:tc>
-                <a:tc>
-                  <a:txBody>
-                    <a:bodyPr/>
-                    <a:lstStyle/>
-                    <a:p>
-                      <a:pPr algn="ctr">
-                        <a:defRPr sz="1400"/>
-                      </a:pPr>
-                      <a:r>
-                        <a:t>7.4</a:t>
-                      </a:r>
-                    </a:p>
-                  </a:txBody>
-                  <a:tcPr/>
-                </a:tc>
-                <a:tc>
-                  <a:txBody>
-                    <a:bodyPr/>
-                    <a:lstStyle/>
-                    <a:p>
-                      <a:pPr algn="ctr">
-                        <a:defRPr sz="1400"/>
-                      </a:pPr>
-                      <a:r>
-                        <a:t>stable/decreasing</a:t>
-                      </a:r>
-                    </a:p>
-                  </a:txBody>
-                  <a:tcPr/>
-                </a:tc>
-              </a:tr>
-            </a:tbl>
-          </a:graphicData>
-        </a:graphic>
-      </p:graphicFrame>
+              <a:defRPr sz="1200">
+                <a:solidFill>
+                  <a:srgbClr val="646464"/>
+                </a:solidFill>
+              </a:defRPr>
+            </a:pPr>
+            <a:r>
+              <a:t>Quarterly margin changes as waterfall. Identifies seasonal patterns and pressure points.</a:t>
+            </a:r>
+          </a:p>
+        </p:txBody>
+      </p:sp>
     </p:spTree>
   </p:cSld>
   <p:clrMapOvr>
@@ -4898,461 +3835,14 @@
       <p:grpSpPr/>
       <p:sp>
         <p:nvSpPr>
-          <p:cNvPr id="2" name="Title 1"/>
-          <p:cNvSpPr>
-            <a:spLocks noGrp="1"/>
-          </p:cNvSpPr>
-          <p:nvPr>
-            <p:ph type="title"/>
-          </p:nvPr>
-        </p:nvSpPr>
-        <p:spPr/>
-        <p:txBody>
-          <a:bodyPr/>
-          <a:lstStyle/>
-          <a:p>
-            <a:r>
-              <a:t>Debt &amp; Leverage Analysis</a:t>
-            </a:r>
-          </a:p>
-        </p:txBody>
-      </p:sp>
-      <p:graphicFrame>
-        <p:nvGraphicFramePr>
-          <p:cNvPr id="3" name="Table 2"/>
-          <p:cNvGraphicFramePr>
-            <a:graphicFrameLocks noGrp="1"/>
-          </p:cNvGraphicFramePr>
-          <p:nvPr/>
-        </p:nvGraphicFramePr>
-        <p:xfrm>
-          <a:off x="457200" y="1645920"/>
-          <a:ext cx="8229600" cy="1828800"/>
-        </p:xfrm>
-        <a:graphic>
-          <a:graphicData uri="http://schemas.openxmlformats.org/drawingml/2006/table">
-            <a:tbl>
-              <a:tblPr firstRow="1" bandRow="1">
-                <a:tableStyleId>{5C22544A-7EE6-4342-B048-85BDC9FD1C3A}</a:tableStyleId>
-              </a:tblPr>
-              <a:tblGrid>
-                <a:gridCol w="1645920"/>
-                <a:gridCol w="1645920"/>
-                <a:gridCol w="1645920"/>
-                <a:gridCol w="1645920"/>
-                <a:gridCol w="1645920"/>
-              </a:tblGrid>
-              <a:tr h="365760">
-                <a:tc>
-                  <a:txBody>
-                    <a:bodyPr/>
-                    <a:lstStyle/>
-                    <a:p>
-                      <a:pPr>
-                        <a:defRPr sz="1200"/>
-                      </a:pPr>
-                      <a:r>
-                        <a:t>Metric</a:t>
-                      </a:r>
-                    </a:p>
-                  </a:txBody>
-                  <a:tcPr/>
-                </a:tc>
-                <a:tc>
-                  <a:txBody>
-                    <a:bodyPr/>
-                    <a:lstStyle/>
-                    <a:p>
-                      <a:pPr>
-                        <a:defRPr sz="1200"/>
-                      </a:pPr>
-                      <a:r>
-                        <a:t>FY2024</a:t>
-                      </a:r>
-                    </a:p>
-                  </a:txBody>
-                  <a:tcPr/>
-                </a:tc>
-                <a:tc>
-                  <a:txBody>
-                    <a:bodyPr/>
-                    <a:lstStyle/>
-                    <a:p>
-                      <a:pPr>
-                        <a:defRPr sz="1200"/>
-                      </a:pPr>
-                      <a:r>
-                        <a:t>Q1 2025</a:t>
-                      </a:r>
-                    </a:p>
-                  </a:txBody>
-                  <a:tcPr/>
-                </a:tc>
-                <a:tc>
-                  <a:txBody>
-                    <a:bodyPr/>
-                    <a:lstStyle/>
-                    <a:p>
-                      <a:pPr>
-                        <a:defRPr sz="1200"/>
-                      </a:pPr>
-                      <a:r>
-                        <a:t>Q2 2025</a:t>
-                      </a:r>
-                    </a:p>
-                  </a:txBody>
-                  <a:tcPr/>
-                </a:tc>
-                <a:tc>
-                  <a:txBody>
-                    <a:bodyPr/>
-                    <a:lstStyle/>
-                    <a:p>
-                      <a:pPr>
-                        <a:defRPr sz="1200"/>
-                      </a:pPr>
-                      <a:r>
-                        <a:t>Q3 2025</a:t>
-                      </a:r>
-                    </a:p>
-                  </a:txBody>
-                  <a:tcPr/>
-                </a:tc>
-              </a:tr>
-              <a:tr h="365760">
-                <a:tc>
-                  <a:txBody>
-                    <a:bodyPr/>
-                    <a:lstStyle/>
-                    <a:p>
-                      <a:pPr>
-                        <a:defRPr sz="1200"/>
-                      </a:pPr>
-                      <a:r>
-                        <a:t>Total Debt</a:t>
-                      </a:r>
-                    </a:p>
-                  </a:txBody>
-                  <a:tcPr/>
-                </a:tc>
-                <a:tc>
-                  <a:txBody>
-                    <a:bodyPr/>
-                    <a:lstStyle/>
-                    <a:p>
-                      <a:pPr>
-                        <a:defRPr sz="1200"/>
-                      </a:pPr>
-                      <a:r>
-                        <a:t>$14.30B</a:t>
-                      </a:r>
-                    </a:p>
-                  </a:txBody>
-                  <a:tcPr/>
-                </a:tc>
-                <a:tc>
-                  <a:txBody>
-                    <a:bodyPr/>
-                    <a:lstStyle/>
-                    <a:p>
-                      <a:pPr>
-                        <a:defRPr sz="1200"/>
-                      </a:pPr>
-                      <a:r>
-                        <a:t>$14.33B</a:t>
-                      </a:r>
-                    </a:p>
-                  </a:txBody>
-                  <a:tcPr/>
-                </a:tc>
-                <a:tc>
-                  <a:txBody>
-                    <a:bodyPr/>
-                    <a:lstStyle/>
-                    <a:p>
-                      <a:pPr>
-                        <a:defRPr sz="1200"/>
-                      </a:pPr>
-                      <a:r>
-                        <a:t>$15.32B</a:t>
-                      </a:r>
-                    </a:p>
-                  </a:txBody>
-                  <a:tcPr/>
-                </a:tc>
-                <a:tc>
-                  <a:txBody>
-                    <a:bodyPr/>
-                    <a:lstStyle/>
-                    <a:p>
-                      <a:pPr>
-                        <a:defRPr sz="1200"/>
-                      </a:pPr>
-                      <a:r>
-                        <a:t>$15.37B</a:t>
-                      </a:r>
-                    </a:p>
-                  </a:txBody>
-                  <a:tcPr/>
-                </a:tc>
-              </a:tr>
-              <a:tr h="365760">
-                <a:tc>
-                  <a:txBody>
-                    <a:bodyPr/>
-                    <a:lstStyle/>
-                    <a:p>
-                      <a:pPr>
-                        <a:defRPr sz="1200"/>
-                      </a:pPr>
-                      <a:r>
-                        <a:t>Debt-to-Equity</a:t>
-                      </a:r>
-                    </a:p>
-                  </a:txBody>
-                  <a:tcPr/>
-                </a:tc>
-                <a:tc>
-                  <a:txBody>
-                    <a:bodyPr/>
-                    <a:lstStyle/>
-                    <a:p>
-                      <a:pPr>
-                        <a:defRPr sz="1200"/>
-                      </a:pPr>
-                      <a:r>
-                        <a:t>0.97x</a:t>
-                      </a:r>
-                    </a:p>
-                  </a:txBody>
-                  <a:tcPr/>
-                </a:tc>
-                <a:tc>
-                  <a:txBody>
-                    <a:bodyPr/>
-                    <a:lstStyle/>
-                    <a:p>
-                      <a:pPr>
-                        <a:defRPr sz="1200">
-                          <a:solidFill>
-                            <a:srgbClr val="FF0000"/>
-                          </a:solidFill>
-                        </a:defRPr>
-                      </a:pPr>
-                      <a:r>
-                        <a:t>0.96x</a:t>
-                      </a:r>
-                    </a:p>
-                  </a:txBody>
-                  <a:tcPr/>
-                </a:tc>
-                <a:tc>
-                  <a:txBody>
-                    <a:bodyPr/>
-                    <a:lstStyle/>
-                    <a:p>
-                      <a:pPr>
-                        <a:defRPr sz="1200">
-                          <a:solidFill>
-                            <a:srgbClr val="FF0000"/>
-                          </a:solidFill>
-                        </a:defRPr>
-                      </a:pPr>
-                      <a:r>
-                        <a:t>0.99x</a:t>
-                      </a:r>
-                    </a:p>
-                  </a:txBody>
-                  <a:tcPr/>
-                </a:tc>
-                <a:tc>
-                  <a:txBody>
-                    <a:bodyPr/>
-                    <a:lstStyle/>
-                    <a:p>
-                      <a:pPr>
-                        <a:defRPr sz="1200">
-                          <a:solidFill>
-                            <a:srgbClr val="FF0000"/>
-                          </a:solidFill>
-                        </a:defRPr>
-                      </a:pPr>
-                      <a:r>
-                        <a:t>0.99x</a:t>
-                      </a:r>
-                    </a:p>
-                  </a:txBody>
-                  <a:tcPr/>
-                </a:tc>
-              </a:tr>
-              <a:tr h="365760">
-                <a:tc>
-                  <a:txBody>
-                    <a:bodyPr/>
-                    <a:lstStyle/>
-                    <a:p>
-                      <a:pPr>
-                        <a:defRPr sz="1200"/>
-                      </a:pPr>
-                      <a:r>
-                        <a:t>Interest Coverage</a:t>
-                      </a:r>
-                    </a:p>
-                  </a:txBody>
-                  <a:tcPr/>
-                </a:tc>
-                <a:tc>
-                  <a:txBody>
-                    <a:bodyPr/>
-                    <a:lstStyle/>
-                    <a:p>
-                      <a:pPr>
-                        <a:defRPr sz="1200"/>
-                      </a:pPr>
-                      <a:r>
-                        <a:t>9.7x</a:t>
-                      </a:r>
-                    </a:p>
-                  </a:txBody>
-                  <a:tcPr/>
-                </a:tc>
-                <a:tc>
-                  <a:txBody>
-                    <a:bodyPr/>
-                    <a:lstStyle/>
-                    <a:p>
-                      <a:pPr>
-                        <a:defRPr sz="1200"/>
-                      </a:pPr>
-                      <a:r>
-                        <a:t>2.6x</a:t>
-                      </a:r>
-                    </a:p>
-                  </a:txBody>
-                  <a:tcPr/>
-                </a:tc>
-                <a:tc>
-                  <a:txBody>
-                    <a:bodyPr/>
-                    <a:lstStyle/>
-                    <a:p>
-                      <a:pPr>
-                        <a:defRPr sz="1200"/>
-                      </a:pPr>
-                      <a:r>
-                        <a:t>2.2x</a:t>
-                      </a:r>
-                    </a:p>
-                  </a:txBody>
-                  <a:tcPr/>
-                </a:tc>
-                <a:tc>
-                  <a:txBody>
-                    <a:bodyPr/>
-                    <a:lstStyle/>
-                    <a:p>
-                      <a:pPr>
-                        <a:defRPr sz="1200"/>
-                      </a:pPr>
-                      <a:r>
-                        <a:t>1.5x</a:t>
-                      </a:r>
-                    </a:p>
-                  </a:txBody>
-                  <a:tcPr/>
-                </a:tc>
-              </a:tr>
-              <a:tr h="365760">
-                <a:tc>
-                  <a:txBody>
-                    <a:bodyPr/>
-                    <a:lstStyle/>
-                    <a:p>
-                      <a:pPr>
-                        <a:defRPr sz="1200"/>
-                      </a:pPr>
-                      <a:r>
-                        <a:t>Change from Baseline</a:t>
-                      </a:r>
-                    </a:p>
-                  </a:txBody>
-                  <a:tcPr/>
-                </a:tc>
-                <a:tc>
-                  <a:txBody>
-                    <a:bodyPr/>
-                    <a:lstStyle/>
-                    <a:p>
-                      <a:pPr>
-                        <a:defRPr sz="1200"/>
-                      </a:pPr>
-                      <a:r>
-                        <a:t>—</a:t>
-                      </a:r>
-                    </a:p>
-                  </a:txBody>
-                  <a:tcPr/>
-                </a:tc>
-                <a:tc>
-                  <a:txBody>
-                    <a:bodyPr/>
-                    <a:lstStyle/>
-                    <a:p>
-                      <a:pPr>
-                        <a:defRPr sz="1200"/>
-                      </a:pPr>
-                      <a:r>
-                        <a:t>+0.2%</a:t>
-                      </a:r>
-                    </a:p>
-                  </a:txBody>
-                  <a:tcPr/>
-                </a:tc>
-                <a:tc>
-                  <a:txBody>
-                    <a:bodyPr/>
-                    <a:lstStyle/>
-                    <a:p>
-                      <a:pPr>
-                        <a:defRPr sz="1200"/>
-                      </a:pPr>
-                      <a:r>
-                        <a:t>+7.1%</a:t>
-                      </a:r>
-                    </a:p>
-                  </a:txBody>
-                  <a:tcPr/>
-                </a:tc>
-                <a:tc>
-                  <a:txBody>
-                    <a:bodyPr/>
-                    <a:lstStyle/>
-                    <a:p>
-                      <a:pPr>
-                        <a:defRPr sz="1200"/>
-                      </a:pPr>
-                      <a:r>
-                        <a:t>+7.5%</a:t>
-                      </a:r>
-                    </a:p>
-                  </a:txBody>
-                  <a:tcPr/>
-                </a:tc>
-              </a:tr>
-            </a:tbl>
-          </a:graphicData>
-        </a:graphic>
-      </p:graphicFrame>
-      <p:sp>
-        <p:nvSpPr>
-          <p:cNvPr id="4" name="TextBox 3"/>
+          <p:cNvPr id="2" name="TextBox 1"/>
           <p:cNvSpPr txBox="1"/>
           <p:nvPr/>
         </p:nvSpPr>
         <p:spPr>
           <a:xfrm>
-            <a:off x="457200" y="4114800"/>
-            <a:ext cx="8229600" cy="2286000"/>
+            <a:off x="457200" y="182880"/>
+            <a:ext cx="8229600" cy="457200"/>
           </a:xfrm>
           <a:prstGeom prst="rect">
             <a:avLst/>
@@ -5364,49 +3854,75 @@
             <a:spAutoFit/>
           </a:bodyPr>
           <a:lstStyle/>
-          <a:p/>
           <a:p>
             <a:pPr>
-              <a:defRPr sz="1600" b="1">
+              <a:defRPr sz="2400" b="1">
                 <a:solidFill>
                   <a:srgbClr val="CC0000"/>
                 </a:solidFill>
               </a:defRPr>
             </a:pPr>
             <a:r>
-              <a:t>Critical Findings:</a:t>
-            </a:r>
-          </a:p>
+              <a:t>Earnings Quality</a:t>
+            </a:r>
+          </a:p>
+        </p:txBody>
+      </p:sp>
+      <p:pic>
+        <p:nvPicPr>
+          <p:cNvPr id="3" name="Picture 2" descr="chart_earnings_quality.png"/>
+          <p:cNvPicPr>
+            <a:picLocks noChangeAspect="1"/>
+          </p:cNvPicPr>
+          <p:nvPr/>
+        </p:nvPicPr>
+        <p:blipFill>
+          <a:blip r:embed="rId2"/>
+          <a:stretch>
+            <a:fillRect/>
+          </a:stretch>
+        </p:blipFill>
+        <p:spPr>
+          <a:xfrm>
+            <a:off x="457200" y="731520"/>
+            <a:ext cx="8229600" cy="4114800"/>
+          </a:xfrm>
+          <a:prstGeom prst="rect">
+            <a:avLst/>
+          </a:prstGeom>
+        </p:spPr>
+      </p:pic>
+      <p:sp>
+        <p:nvSpPr>
+          <p:cNvPr id="4" name="TextBox 3"/>
+          <p:cNvSpPr txBox="1"/>
+          <p:nvPr/>
+        </p:nvSpPr>
+        <p:spPr>
+          <a:xfrm>
+            <a:off x="457200" y="5029200"/>
+            <a:ext cx="8229600" cy="1371600"/>
+          </a:xfrm>
+          <a:prstGeom prst="rect">
+            <a:avLst/>
+          </a:prstGeom>
+          <a:noFill/>
+        </p:spPr>
+        <p:txBody>
+          <a:bodyPr wrap="square">
+            <a:spAutoFit/>
+          </a:bodyPr>
+          <a:lstStyle/>
           <a:p>
             <a:pPr>
-              <a:defRPr sz="1300"/>
-            </a:pPr>
-            <a:r>
-              <a:t>• Debt increased 7.5% while operating income declined significantly</a:t>
-            </a:r>
-          </a:p>
-          <a:p>
-            <a:pPr>
-              <a:defRPr sz="1300"/>
-            </a:pPr>
-            <a:r>
-              <a:t>• Interest coverage compressed from 9.7x to 1.5x in one year (approaching distressed level)</a:t>
-            </a:r>
-          </a:p>
-          <a:p>
-            <a:pPr>
-              <a:defRPr sz="1300"/>
-            </a:pPr>
-            <a:r>
-              <a:t>• Debt likely used to fund inventory buildup and cover working capital shortfalls</a:t>
-            </a:r>
-          </a:p>
-          <a:p>
-            <a:pPr>
-              <a:defRPr sz="1300"/>
-            </a:pPr>
-            <a:r>
-              <a:t>• $2.00B debt matures in FY2026 - needs refinancing or paydown with limited cash flow</a:t>
+              <a:defRPr sz="1200">
+                <a:solidFill>
+                  <a:srgbClr val="646464"/>
+                </a:solidFill>
+              </a:defRPr>
+            </a:pPr>
+            <a:r>
+              <a:t>Compares Net Income to Operating Cash Flow. High-quality earnings convert to cash consistently.</a:t>
             </a:r>
           </a:p>
         </p:txBody>
@@ -5431,22 +3947,46 @@
       <p:grpSpPr/>
       <p:sp>
         <p:nvSpPr>
-          <p:cNvPr id="2" name="Title 1"/>
-          <p:cNvSpPr>
-            <a:spLocks noGrp="1"/>
-          </p:cNvSpPr>
-          <p:nvPr>
-            <p:ph type="title"/>
-          </p:nvPr>
-        </p:nvSpPr>
-        <p:spPr/>
-        <p:txBody>
-          <a:bodyPr/>
-          <a:lstStyle/>
-          <a:p>
-            <a:r>
-              <a:t>Key Risks &amp; Monitoring Points</a:t>
-            </a:r>
+          <p:cNvPr id="2" name="Rectangle 1"/>
+          <p:cNvSpPr/>
+          <p:nvPr/>
+        </p:nvSpPr>
+        <p:spPr>
+          <a:xfrm>
+            <a:off x="0" y="2286000"/>
+            <a:ext cx="9144000" cy="1828800"/>
+          </a:xfrm>
+          <a:prstGeom prst="rect">
+            <a:avLst/>
+          </a:prstGeom>
+          <a:solidFill>
+            <a:srgbClr val="CC0000"/>
+          </a:solidFill>
+          <a:ln>
+            <a:solidFill>
+              <a:srgbClr val="CC0000"/>
+            </a:solidFill>
+          </a:ln>
+        </p:spPr>
+        <p:style>
+          <a:lnRef idx="1">
+            <a:schemeClr val="accent1"/>
+          </a:lnRef>
+          <a:fillRef idx="3">
+            <a:schemeClr val="accent1"/>
+          </a:fillRef>
+          <a:effectRef idx="2">
+            <a:schemeClr val="accent1"/>
+          </a:effectRef>
+          <a:fontRef idx="minor">
+            <a:schemeClr val="lt1"/>
+          </a:fontRef>
+        </p:style>
+        <p:txBody>
+          <a:bodyPr rtlCol="0" anchor="ctr"/>
+          <a:lstStyle/>
+          <a:p>
+            <a:pPr algn="ctr"/>
           </a:p>
         </p:txBody>
       </p:sp>
@@ -5458,8 +3998,190 @@
         </p:nvSpPr>
         <p:spPr>
           <a:xfrm>
-            <a:off x="457200" y="1371600"/>
-            <a:ext cx="8229600" cy="5029200"/>
+            <a:off x="457200" y="2468880"/>
+            <a:ext cx="8229600" cy="548640"/>
+          </a:xfrm>
+          <a:prstGeom prst="rect">
+            <a:avLst/>
+          </a:prstGeom>
+          <a:noFill/>
+        </p:spPr>
+        <p:txBody>
+          <a:bodyPr wrap="none">
+            <a:spAutoFit/>
+          </a:bodyPr>
+          <a:lstStyle/>
+          <a:p>
+            <a:pPr algn="ctr">
+              <a:defRPr sz="2400" b="1">
+                <a:solidFill>
+                  <a:srgbClr val="FFFFFF"/>
+                </a:solidFill>
+              </a:defRPr>
+            </a:pPr>
+            <a:r>
+              <a:t>PILLAR 3</a:t>
+            </a:r>
+          </a:p>
+        </p:txBody>
+      </p:sp>
+      <p:sp>
+        <p:nvSpPr>
+          <p:cNvPr id="4" name="TextBox 3"/>
+          <p:cNvSpPr txBox="1"/>
+          <p:nvPr/>
+        </p:nvSpPr>
+        <p:spPr>
+          <a:xfrm>
+            <a:off x="457200" y="3017520"/>
+            <a:ext cx="8229600" cy="731520"/>
+          </a:xfrm>
+          <a:prstGeom prst="rect">
+            <a:avLst/>
+          </a:prstGeom>
+          <a:noFill/>
+        </p:spPr>
+        <p:txBody>
+          <a:bodyPr wrap="none">
+            <a:spAutoFit/>
+          </a:bodyPr>
+          <a:lstStyle/>
+          <a:p>
+            <a:pPr algn="ctr">
+              <a:defRPr sz="4400" b="1">
+                <a:solidFill>
+                  <a:srgbClr val="FFFFFF"/>
+                </a:solidFill>
+              </a:defRPr>
+            </a:pPr>
+            <a:r>
+              <a:t>Liquidity &amp; Solvency</a:t>
+            </a:r>
+          </a:p>
+        </p:txBody>
+      </p:sp>
+      <p:sp>
+        <p:nvSpPr>
+          <p:cNvPr id="5" name="TextBox 4"/>
+          <p:cNvSpPr txBox="1"/>
+          <p:nvPr/>
+        </p:nvSpPr>
+        <p:spPr>
+          <a:xfrm>
+            <a:off x="457200" y="4572000"/>
+            <a:ext cx="8229600" cy="457200"/>
+          </a:xfrm>
+          <a:prstGeom prst="rect">
+            <a:avLst/>
+          </a:prstGeom>
+          <a:noFill/>
+        </p:spPr>
+        <p:txBody>
+          <a:bodyPr wrap="none">
+            <a:spAutoFit/>
+          </a:bodyPr>
+          <a:lstStyle/>
+          <a:p>
+            <a:pPr algn="ctr">
+              <a:defRPr sz="2400" i="1">
+                <a:solidFill>
+                  <a:srgbClr val="646464"/>
+                </a:solidFill>
+              </a:defRPr>
+            </a:pPr>
+            <a:r>
+              <a:t>"Can the company pay its bills today and debts in the future?"</a:t>
+            </a:r>
+          </a:p>
+        </p:txBody>
+      </p:sp>
+    </p:spTree>
+  </p:cSld>
+  <p:clrMapOvr>
+    <a:masterClrMapping/>
+  </p:clrMapOvr>
+</p:sld>
+</file>
+
+<file path=ppt/slides/slide17.xml><?xml version="1.0" encoding="utf-8"?>
+<p:sld xmlns:a="http://schemas.openxmlformats.org/drawingml/2006/main" xmlns:p="http://schemas.openxmlformats.org/presentationml/2006/main" xmlns:r="http://schemas.openxmlformats.org/officeDocument/2006/relationships">
+  <p:cSld>
+    <p:spTree>
+      <p:nvGrpSpPr>
+        <p:cNvPr id="1" name=""/>
+        <p:cNvGrpSpPr/>
+        <p:nvPr/>
+      </p:nvGrpSpPr>
+      <p:grpSpPr/>
+      <p:sp>
+        <p:nvSpPr>
+          <p:cNvPr id="2" name="TextBox 1"/>
+          <p:cNvSpPr txBox="1"/>
+          <p:nvPr/>
+        </p:nvSpPr>
+        <p:spPr>
+          <a:xfrm>
+            <a:off x="457200" y="182880"/>
+            <a:ext cx="8229600" cy="457200"/>
+          </a:xfrm>
+          <a:prstGeom prst="rect">
+            <a:avLst/>
+          </a:prstGeom>
+          <a:noFill/>
+        </p:spPr>
+        <p:txBody>
+          <a:bodyPr wrap="none">
+            <a:spAutoFit/>
+          </a:bodyPr>
+          <a:lstStyle/>
+          <a:p>
+            <a:pPr>
+              <a:defRPr sz="2400" b="1">
+                <a:solidFill>
+                  <a:srgbClr val="CC0000"/>
+                </a:solidFill>
+              </a:defRPr>
+            </a:pPr>
+            <a:r>
+              <a:t>Current Ratio Gauge</a:t>
+            </a:r>
+          </a:p>
+        </p:txBody>
+      </p:sp>
+      <p:pic>
+        <p:nvPicPr>
+          <p:cNvPr id="3" name="Picture 2" descr="chart_current_ratio_gauge.png"/>
+          <p:cNvPicPr>
+            <a:picLocks noChangeAspect="1"/>
+          </p:cNvPicPr>
+          <p:nvPr/>
+        </p:nvPicPr>
+        <p:blipFill>
+          <a:blip r:embed="rId2"/>
+          <a:stretch>
+            <a:fillRect/>
+          </a:stretch>
+        </p:blipFill>
+        <p:spPr>
+          <a:xfrm>
+            <a:off x="457200" y="731520"/>
+            <a:ext cx="8229600" cy="4114800"/>
+          </a:xfrm>
+          <a:prstGeom prst="rect">
+            <a:avLst/>
+          </a:prstGeom>
+        </p:spPr>
+      </p:pic>
+      <p:sp>
+        <p:nvSpPr>
+          <p:cNvPr id="4" name="TextBox 3"/>
+          <p:cNvSpPr txBox="1"/>
+          <p:nvPr/>
+        </p:nvSpPr>
+        <p:spPr>
+          <a:xfrm>
+            <a:off x="457200" y="5029200"/>
+            <a:ext cx="8229600" cy="1371600"/>
           </a:xfrm>
           <a:prstGeom prst="rect">
             <a:avLst/>
@@ -5471,193 +4193,241 @@
             <a:spAutoFit/>
           </a:bodyPr>
           <a:lstStyle/>
-          <a:p/>
           <a:p>
             <a:pPr>
-              <a:spcAft>
-                <a:spcPts val="600"/>
-              </a:spcAft>
-              <a:defRPr sz="1600" b="1">
+              <a:defRPr sz="1200">
+                <a:solidFill>
+                  <a:srgbClr val="646464"/>
+                </a:solidFill>
+              </a:defRPr>
+            </a:pPr>
+            <a:r>
+              <a:t>Measures short-term liquidity. Below 1.0 is warning (liabilities exceed assets); above 1.5 is healthy for retail.</a:t>
+            </a:r>
+          </a:p>
+        </p:txBody>
+      </p:sp>
+    </p:spTree>
+  </p:cSld>
+  <p:clrMapOvr>
+    <a:masterClrMapping/>
+  </p:clrMapOvr>
+</p:sld>
+</file>
+
+<file path=ppt/slides/slide18.xml><?xml version="1.0" encoding="utf-8"?>
+<p:sld xmlns:a="http://schemas.openxmlformats.org/drawingml/2006/main" xmlns:p="http://schemas.openxmlformats.org/presentationml/2006/main" xmlns:r="http://schemas.openxmlformats.org/officeDocument/2006/relationships">
+  <p:cSld>
+    <p:spTree>
+      <p:nvGrpSpPr>
+        <p:cNvPr id="1" name=""/>
+        <p:cNvGrpSpPr/>
+        <p:nvPr/>
+      </p:nvGrpSpPr>
+      <p:grpSpPr/>
+      <p:sp>
+        <p:nvSpPr>
+          <p:cNvPr id="2" name="TextBox 1"/>
+          <p:cNvSpPr txBox="1"/>
+          <p:nvPr/>
+        </p:nvSpPr>
+        <p:spPr>
+          <a:xfrm>
+            <a:off x="457200" y="182880"/>
+            <a:ext cx="8229600" cy="457200"/>
+          </a:xfrm>
+          <a:prstGeom prst="rect">
+            <a:avLst/>
+          </a:prstGeom>
+          <a:noFill/>
+        </p:spPr>
+        <p:txBody>
+          <a:bodyPr wrap="none">
+            <a:spAutoFit/>
+          </a:bodyPr>
+          <a:lstStyle/>
+          <a:p>
+            <a:pPr>
+              <a:defRPr sz="2400" b="1">
                 <a:solidFill>
                   <a:srgbClr val="CC0000"/>
                 </a:solidFill>
               </a:defRPr>
             </a:pPr>
             <a:r>
-              <a:t>Immediate Risks (Q4 2025)</a:t>
-            </a:r>
-          </a:p>
+              <a:t>Capital Structure</a:t>
+            </a:r>
+          </a:p>
+        </p:txBody>
+      </p:sp>
+      <p:pic>
+        <p:nvPicPr>
+          <p:cNvPr id="3" name="Picture 2" descr="chart_capital_structure_donut.png"/>
+          <p:cNvPicPr>
+            <a:picLocks noChangeAspect="1"/>
+          </p:cNvPicPr>
+          <p:nvPr/>
+        </p:nvPicPr>
+        <p:blipFill>
+          <a:blip r:embed="rId2"/>
+          <a:stretch>
+            <a:fillRect/>
+          </a:stretch>
+        </p:blipFill>
+        <p:spPr>
+          <a:xfrm>
+            <a:off x="457200" y="731520"/>
+            <a:ext cx="8229600" cy="4114800"/>
+          </a:xfrm>
+          <a:prstGeom prst="rect">
+            <a:avLst/>
+          </a:prstGeom>
+        </p:spPr>
+      </p:pic>
+      <p:sp>
+        <p:nvSpPr>
+          <p:cNvPr id="4" name="TextBox 3"/>
+          <p:cNvSpPr txBox="1"/>
+          <p:nvPr/>
+        </p:nvSpPr>
+        <p:spPr>
+          <a:xfrm>
+            <a:off x="457200" y="5029200"/>
+            <a:ext cx="8229600" cy="1371600"/>
+          </a:xfrm>
+          <a:prstGeom prst="rect">
+            <a:avLst/>
+          </a:prstGeom>
+          <a:noFill/>
+        </p:spPr>
+        <p:txBody>
+          <a:bodyPr wrap="square">
+            <a:spAutoFit/>
+          </a:bodyPr>
+          <a:lstStyle/>
           <a:p>
             <a:pPr>
-              <a:spcAft>
-                <a:spcPts val="300"/>
-              </a:spcAft>
-              <a:defRPr sz="1300"/>
-            </a:pPr>
-            <a:r>
-              <a:t>• Q4 operating margin recovery critical to avoid further deterioration</a:t>
-            </a:r>
-          </a:p>
+              <a:defRPr sz="1200">
+                <a:solidFill>
+                  <a:srgbClr val="646464"/>
+                </a:solidFill>
+              </a:defRPr>
+            </a:pPr>
+            <a:r>
+              <a:t>Shows debt vs equity mix. Higher debt = higher risk but potentially higher returns on equity.</a:t>
+            </a:r>
+          </a:p>
+        </p:txBody>
+      </p:sp>
+    </p:spTree>
+  </p:cSld>
+  <p:clrMapOvr>
+    <a:masterClrMapping/>
+  </p:clrMapOvr>
+</p:sld>
+</file>
+
+<file path=ppt/slides/slide19.xml><?xml version="1.0" encoding="utf-8"?>
+<p:sld xmlns:a="http://schemas.openxmlformats.org/drawingml/2006/main" xmlns:p="http://schemas.openxmlformats.org/presentationml/2006/main" xmlns:r="http://schemas.openxmlformats.org/officeDocument/2006/relationships">
+  <p:cSld>
+    <p:spTree>
+      <p:nvGrpSpPr>
+        <p:cNvPr id="1" name=""/>
+        <p:cNvGrpSpPr/>
+        <p:nvPr/>
+      </p:nvGrpSpPr>
+      <p:grpSpPr/>
+      <p:sp>
+        <p:nvSpPr>
+          <p:cNvPr id="2" name="TextBox 1"/>
+          <p:cNvSpPr txBox="1"/>
+          <p:nvPr/>
+        </p:nvSpPr>
+        <p:spPr>
+          <a:xfrm>
+            <a:off x="457200" y="182880"/>
+            <a:ext cx="8229600" cy="457200"/>
+          </a:xfrm>
+          <a:prstGeom prst="rect">
+            <a:avLst/>
+          </a:prstGeom>
+          <a:noFill/>
+        </p:spPr>
+        <p:txBody>
+          <a:bodyPr wrap="none">
+            <a:spAutoFit/>
+          </a:bodyPr>
+          <a:lstStyle/>
           <a:p>
             <a:pPr>
-              <a:spcAft>
-                <a:spcPts val="300"/>
-              </a:spcAft>
-              <a:defRPr sz="1300"/>
-            </a:pPr>
-            <a:r>
-              <a:t>• High inventory + weak margins → Expected Q4 clearance sales</a:t>
-            </a:r>
-          </a:p>
+              <a:defRPr sz="2400" b="1">
+                <a:solidFill>
+                  <a:srgbClr val="CC0000"/>
+                </a:solidFill>
+              </a:defRPr>
+            </a:pPr>
+            <a:r>
+              <a:t>Debt-to-EBITDA Trend</a:t>
+            </a:r>
+          </a:p>
+        </p:txBody>
+      </p:sp>
+      <p:pic>
+        <p:nvPicPr>
+          <p:cNvPr id="3" name="Picture 2" descr="chart_debt_to_ebitda_trend.png"/>
+          <p:cNvPicPr>
+            <a:picLocks noChangeAspect="1"/>
+          </p:cNvPicPr>
+          <p:nvPr/>
+        </p:nvPicPr>
+        <p:blipFill>
+          <a:blip r:embed="rId2"/>
+          <a:stretch>
+            <a:fillRect/>
+          </a:stretch>
+        </p:blipFill>
+        <p:spPr>
+          <a:xfrm>
+            <a:off x="457200" y="731520"/>
+            <a:ext cx="8229600" cy="4114800"/>
+          </a:xfrm>
+          <a:prstGeom prst="rect">
+            <a:avLst/>
+          </a:prstGeom>
+        </p:spPr>
+      </p:pic>
+      <p:sp>
+        <p:nvSpPr>
+          <p:cNvPr id="4" name="TextBox 3"/>
+          <p:cNvSpPr txBox="1"/>
+          <p:nvPr/>
+        </p:nvSpPr>
+        <p:spPr>
+          <a:xfrm>
+            <a:off x="457200" y="5029200"/>
+            <a:ext cx="8229600" cy="1371600"/>
+          </a:xfrm>
+          <a:prstGeom prst="rect">
+            <a:avLst/>
+          </a:prstGeom>
+          <a:noFill/>
+        </p:spPr>
+        <p:txBody>
+          <a:bodyPr wrap="square">
+            <a:spAutoFit/>
+          </a:bodyPr>
+          <a:lstStyle/>
           <a:p>
             <a:pPr>
-              <a:spcAft>
-                <a:spcPts val="300"/>
-              </a:spcAft>
-              <a:defRPr sz="1300"/>
-            </a:pPr>
-            <a:r>
-              <a:t>• If interest coverage falls below 1.5x, triggers debt covenant concerns</a:t>
-            </a:r>
-          </a:p>
-          <a:p>
-            <a:pPr>
-              <a:spcAft>
-                <a:spcPts val="1000"/>
-              </a:spcAft>
-            </a:pPr>
-          </a:p>
-          <a:p>
-            <a:pPr>
-              <a:spcAft>
-                <a:spcPts val="600"/>
-              </a:spcAft>
-              <a:defRPr sz="1600" b="1">
-                <a:solidFill>
-                  <a:srgbClr val="CC0000"/>
-                </a:solidFill>
-              </a:defRPr>
-            </a:pPr>
-            <a:r>
-              <a:t>Watch Points for Next Quarter</a:t>
-            </a:r>
-          </a:p>
-          <a:p>
-            <a:pPr>
-              <a:spcAft>
-                <a:spcPts val="300"/>
-              </a:spcAft>
-              <a:defRPr sz="1300"/>
-            </a:pPr>
-            <a:r>
-              <a:t>• Operating margin trend (needs to recover to 5%+ range)</a:t>
-            </a:r>
-          </a:p>
-          <a:p>
-            <a:pPr>
-              <a:spcAft>
-                <a:spcPts val="300"/>
-              </a:spcAft>
-              <a:defRPr sz="1300"/>
-            </a:pPr>
-            <a:r>
-              <a:t>• Inventory levels (should decline post-holiday)</a:t>
-            </a:r>
-          </a:p>
-          <a:p>
-            <a:pPr>
-              <a:spcAft>
-                <a:spcPts val="300"/>
-              </a:spcAft>
-              <a:defRPr sz="1300"/>
-            </a:pPr>
-            <a:r>
-              <a:t>• Comparable sales breakdown (store vs. digital performance)</a:t>
-            </a:r>
-          </a:p>
-          <a:p>
-            <a:pPr>
-              <a:spcAft>
-                <a:spcPts val="300"/>
-              </a:spcAft>
-              <a:defRPr sz="1300"/>
-            </a:pPr>
-            <a:r>
-              <a:t>• Cash flow from operations (ability to service $2B FY2026 debt maturity)</a:t>
-            </a:r>
-          </a:p>
-          <a:p>
-            <a:pPr>
-              <a:spcAft>
-                <a:spcPts val="1000"/>
-              </a:spcAft>
-            </a:pPr>
-          </a:p>
-          <a:p>
-            <a:pPr>
-              <a:spcAft>
-                <a:spcPts val="600"/>
-              </a:spcAft>
-              <a:defRPr sz="1600" b="1">
-                <a:solidFill>
-                  <a:srgbClr val="CC0000"/>
-                </a:solidFill>
-              </a:defRPr>
-            </a:pPr>
-            <a:r>
-              <a:t>Strategic Questions</a:t>
-            </a:r>
-          </a:p>
-          <a:p>
-            <a:pPr>
-              <a:spcAft>
-                <a:spcPts val="300"/>
-              </a:spcAft>
-              <a:defRPr sz="1300"/>
-            </a:pPr>
-            <a:r>
-              <a:t>• Can Target reduce inventory without severe margin impact?</a:t>
-            </a:r>
-          </a:p>
-          <a:p>
-            <a:pPr>
-              <a:spcAft>
-                <a:spcPts val="300"/>
-              </a:spcAft>
-              <a:defRPr sz="1300"/>
-            </a:pPr>
-            <a:r>
-              <a:t>• Is the operating margin decline temporary or structural?</a:t>
-            </a:r>
-          </a:p>
-          <a:p>
-            <a:pPr>
-              <a:spcAft>
-                <a:spcPts val="300"/>
-              </a:spcAft>
-              <a:defRPr sz="1300"/>
-            </a:pPr>
-            <a:r>
-              <a:t>• Will shrink/theft issues persist into FY2026?</a:t>
-            </a:r>
-          </a:p>
-          <a:p>
-            <a:pPr>
-              <a:spcAft>
-                <a:spcPts val="300"/>
-              </a:spcAft>
-              <a:defRPr sz="1300"/>
-            </a:pPr>
-            <a:r>
-              <a:t>• Is current debt level sustainable with lower profitability?</a:t>
-            </a:r>
-          </a:p>
-          <a:p>
-            <a:pPr>
-              <a:spcAft>
-                <a:spcPts val="1000"/>
-              </a:spcAft>
-            </a:pPr>
+              <a:defRPr sz="1200">
+                <a:solidFill>
+                  <a:srgbClr val="646464"/>
+                </a:solidFill>
+              </a:defRPr>
+            </a:pPr>
+            <a:r>
+              <a:t>Key leverage metric showing how many years of earnings to repay debt. Below 3x is healthy; above 5x is risky.</a:t>
+            </a:r>
           </a:p>
         </p:txBody>
       </p:sp>
@@ -5681,19 +4451,33 @@
       <p:grpSpPr/>
       <p:sp>
         <p:nvSpPr>
-          <p:cNvPr id="2" name="Title 1"/>
-          <p:cNvSpPr>
-            <a:spLocks noGrp="1"/>
-          </p:cNvSpPr>
-          <p:nvPr>
-            <p:ph type="title"/>
-          </p:nvPr>
-        </p:nvSpPr>
-        <p:spPr/>
-        <p:txBody>
-          <a:bodyPr/>
-          <a:lstStyle/>
-          <a:p>
+          <p:cNvPr id="2" name="TextBox 1"/>
+          <p:cNvSpPr txBox="1"/>
+          <p:nvPr/>
+        </p:nvSpPr>
+        <p:spPr>
+          <a:xfrm>
+            <a:off x="457200" y="274320"/>
+            <a:ext cx="8229600" cy="548640"/>
+          </a:xfrm>
+          <a:prstGeom prst="rect">
+            <a:avLst/>
+          </a:prstGeom>
+          <a:noFill/>
+        </p:spPr>
+        <p:txBody>
+          <a:bodyPr wrap="none">
+            <a:spAutoFit/>
+          </a:bodyPr>
+          <a:lstStyle/>
+          <a:p>
+            <a:pPr>
+              <a:defRPr sz="3200" b="1">
+                <a:solidFill>
+                  <a:srgbClr val="CC0000"/>
+                </a:solidFill>
+              </a:defRPr>
+            </a:pPr>
             <a:r>
               <a:t>Executive Summary</a:t>
             </a:r>
@@ -5708,8 +4492,8 @@
         </p:nvSpPr>
         <p:spPr>
           <a:xfrm>
-            <a:off x="457200" y="1371600"/>
-            <a:ext cx="8229600" cy="5029200"/>
+            <a:off x="457200" y="1097280"/>
+            <a:ext cx="8229600" cy="5486400"/>
           </a:xfrm>
           <a:prstGeom prst="rect">
             <a:avLst/>
@@ -5745,7 +4529,7 @@
               <a:defRPr sz="1400"/>
             </a:pPr>
             <a:r>
-              <a:t>• Net Sales: $92.40B</a:t>
+              <a:t>   Net Sales: $26.12B</a:t>
             </a:r>
           </a:p>
           <a:p>
@@ -5756,7 +4540,7 @@
               <a:defRPr sz="1400"/>
             </a:pPr>
             <a:r>
-              <a:t>• Operating Margin: 7.08%</a:t>
+              <a:t>   Operating Margin: 3.91%</a:t>
             </a:r>
           </a:p>
           <a:p>
@@ -5767,7 +4551,7 @@
               <a:defRPr sz="1400"/>
             </a:pPr>
             <a:r>
-              <a:t>• Gross Margin: 28.38%</a:t>
+              <a:t>   Gross Margin: 24.66%</a:t>
             </a:r>
           </a:p>
           <a:p>
@@ -5789,7 +4573,7 @@
               </a:defRPr>
             </a:pPr>
             <a:r>
-              <a:t>Q3 2025 - Critical Weakness Detected</a:t>
+              <a:t>Latest Quarter Highlights</a:t>
             </a:r>
           </a:p>
           <a:p>
@@ -5800,7 +4584,7 @@
               <a:defRPr sz="1400"/>
             </a:pPr>
             <a:r>
-              <a:t>• Operating Margin: 5.42% (+1.84% vs baseline) ⚠️</a:t>
+              <a:t>   Operating Margin: 3.75%</a:t>
             </a:r>
           </a:p>
           <a:p>
@@ -5811,7 +4595,7 @@
               <a:defRPr sz="1400"/>
             </a:pPr>
             <a:r>
-              <a:t>• Inventory: $15.08B (+41.6%) 🚨</a:t>
+              <a:t>   Inventory: $14.90B</a:t>
             </a:r>
           </a:p>
           <a:p>
@@ -5822,7 +4606,7 @@
               <a:defRPr sz="1400"/>
             </a:pPr>
             <a:r>
-              <a:t>• Debt increased 7.5% while operating income declined</a:t>
+              <a:t>   See pillar charts for detailed trends</a:t>
             </a:r>
           </a:p>
           <a:p>
@@ -5844,7 +4628,7 @@
               </a:defRPr>
             </a:pPr>
             <a:r>
-              <a:t>Key Risk Flags</a:t>
+              <a:t>5 Pillars Covered</a:t>
             </a:r>
           </a:p>
           <a:p>
@@ -5855,7 +4639,7 @@
               <a:defRPr sz="1400"/>
             </a:pPr>
             <a:r>
-              <a:t>• Interest coverage deteriorated from 9.7x to 1.5x</a:t>
+              <a:t>   1. Growth &amp; Revenue - 4 charts</a:t>
             </a:r>
           </a:p>
           <a:p>
@@ -5866,7 +4650,7 @@
               <a:defRPr sz="1400"/>
             </a:pPr>
             <a:r>
-              <a:t>• Shrink/theft mentioned in all quarters</a:t>
+              <a:t>   2. Profitability &amp; Margins - 6 charts</a:t>
             </a:r>
           </a:p>
           <a:p>
@@ -5877,7 +4661,29 @@
               <a:defRPr sz="1400"/>
             </a:pPr>
             <a:r>
-              <a:t>• Inventory buildup suggests potential clearance ahead</a:t>
+              <a:t>   3. Liquidity &amp; Solvency - 5 charts</a:t>
+            </a:r>
+          </a:p>
+          <a:p>
+            <a:pPr>
+              <a:spcAft>
+                <a:spcPts val="300"/>
+              </a:spcAft>
+              <a:defRPr sz="1400"/>
+            </a:pPr>
+            <a:r>
+              <a:t>   4. Operational Efficiency - 4 charts</a:t>
+            </a:r>
+          </a:p>
+          <a:p>
+            <a:pPr>
+              <a:spcAft>
+                <a:spcPts val="300"/>
+              </a:spcAft>
+              <a:defRPr sz="1400"/>
+            </a:pPr>
+            <a:r>
+              <a:t>   5. Valuation &amp; Risk - 5 charts</a:t>
             </a:r>
           </a:p>
           <a:p>
@@ -5886,6 +4692,1238 @@
                 <a:spcPts val="1200"/>
               </a:spcAft>
             </a:pPr>
+          </a:p>
+        </p:txBody>
+      </p:sp>
+    </p:spTree>
+  </p:cSld>
+  <p:clrMapOvr>
+    <a:masterClrMapping/>
+  </p:clrMapOvr>
+</p:sld>
+</file>
+
+<file path=ppt/slides/slide20.xml><?xml version="1.0" encoding="utf-8"?>
+<p:sld xmlns:a="http://schemas.openxmlformats.org/drawingml/2006/main" xmlns:p="http://schemas.openxmlformats.org/presentationml/2006/main" xmlns:r="http://schemas.openxmlformats.org/officeDocument/2006/relationships">
+  <p:cSld>
+    <p:spTree>
+      <p:nvGrpSpPr>
+        <p:cNvPr id="1" name=""/>
+        <p:cNvGrpSpPr/>
+        <p:nvPr/>
+      </p:nvGrpSpPr>
+      <p:grpSpPr/>
+      <p:sp>
+        <p:nvSpPr>
+          <p:cNvPr id="2" name="TextBox 1"/>
+          <p:cNvSpPr txBox="1"/>
+          <p:nvPr/>
+        </p:nvSpPr>
+        <p:spPr>
+          <a:xfrm>
+            <a:off x="457200" y="182880"/>
+            <a:ext cx="8229600" cy="457200"/>
+          </a:xfrm>
+          <a:prstGeom prst="rect">
+            <a:avLst/>
+          </a:prstGeom>
+          <a:noFill/>
+        </p:spPr>
+        <p:txBody>
+          <a:bodyPr wrap="none">
+            <a:spAutoFit/>
+          </a:bodyPr>
+          <a:lstStyle/>
+          <a:p>
+            <a:pPr>
+              <a:defRPr sz="2400" b="1">
+                <a:solidFill>
+                  <a:srgbClr val="CC0000"/>
+                </a:solidFill>
+              </a:defRPr>
+            </a:pPr>
+            <a:r>
+              <a:t>Debt Health (Interest Coverage)</a:t>
+            </a:r>
+          </a:p>
+        </p:txBody>
+      </p:sp>
+      <p:pic>
+        <p:nvPicPr>
+          <p:cNvPr id="3" name="Picture 2" descr="chart_debt_health.png"/>
+          <p:cNvPicPr>
+            <a:picLocks noChangeAspect="1"/>
+          </p:cNvPicPr>
+          <p:nvPr/>
+        </p:nvPicPr>
+        <p:blipFill>
+          <a:blip r:embed="rId2"/>
+          <a:stretch>
+            <a:fillRect/>
+          </a:stretch>
+        </p:blipFill>
+        <p:spPr>
+          <a:xfrm>
+            <a:off x="457200" y="731520"/>
+            <a:ext cx="8229600" cy="4114800"/>
+          </a:xfrm>
+          <a:prstGeom prst="rect">
+            <a:avLst/>
+          </a:prstGeom>
+        </p:spPr>
+      </p:pic>
+      <p:sp>
+        <p:nvSpPr>
+          <p:cNvPr id="4" name="TextBox 3"/>
+          <p:cNvSpPr txBox="1"/>
+          <p:nvPr/>
+        </p:nvSpPr>
+        <p:spPr>
+          <a:xfrm>
+            <a:off x="457200" y="5029200"/>
+            <a:ext cx="8229600" cy="1371600"/>
+          </a:xfrm>
+          <a:prstGeom prst="rect">
+            <a:avLst/>
+          </a:prstGeom>
+          <a:noFill/>
+        </p:spPr>
+        <p:txBody>
+          <a:bodyPr wrap="square">
+            <a:spAutoFit/>
+          </a:bodyPr>
+          <a:lstStyle/>
+          <a:p>
+            <a:pPr>
+              <a:defRPr sz="1200">
+                <a:solidFill>
+                  <a:srgbClr val="646464"/>
+                </a:solidFill>
+              </a:defRPr>
+            </a:pPr>
+            <a:r>
+              <a:t>Interest coverage ratio tracking. Above 3x is comfortable; below 2x requires monitoring.</a:t>
+            </a:r>
+          </a:p>
+        </p:txBody>
+      </p:sp>
+    </p:spTree>
+  </p:cSld>
+  <p:clrMapOvr>
+    <a:masterClrMapping/>
+  </p:clrMapOvr>
+</p:sld>
+</file>
+
+<file path=ppt/slides/slide21.xml><?xml version="1.0" encoding="utf-8"?>
+<p:sld xmlns:a="http://schemas.openxmlformats.org/drawingml/2006/main" xmlns:p="http://schemas.openxmlformats.org/presentationml/2006/main" xmlns:r="http://schemas.openxmlformats.org/officeDocument/2006/relationships">
+  <p:cSld>
+    <p:spTree>
+      <p:nvGrpSpPr>
+        <p:cNvPr id="1" name=""/>
+        <p:cNvGrpSpPr/>
+        <p:nvPr/>
+      </p:nvGrpSpPr>
+      <p:grpSpPr/>
+      <p:sp>
+        <p:nvSpPr>
+          <p:cNvPr id="2" name="TextBox 1"/>
+          <p:cNvSpPr txBox="1"/>
+          <p:nvPr/>
+        </p:nvSpPr>
+        <p:spPr>
+          <a:xfrm>
+            <a:off x="457200" y="182880"/>
+            <a:ext cx="8229600" cy="457200"/>
+          </a:xfrm>
+          <a:prstGeom prst="rect">
+            <a:avLst/>
+          </a:prstGeom>
+          <a:noFill/>
+        </p:spPr>
+        <p:txBody>
+          <a:bodyPr wrap="none">
+            <a:spAutoFit/>
+          </a:bodyPr>
+          <a:lstStyle/>
+          <a:p>
+            <a:pPr>
+              <a:defRPr sz="2400" b="1">
+                <a:solidFill>
+                  <a:srgbClr val="CC0000"/>
+                </a:solidFill>
+              </a:defRPr>
+            </a:pPr>
+            <a:r>
+              <a:t>Statement of Cash Flows</a:t>
+            </a:r>
+          </a:p>
+        </p:txBody>
+      </p:sp>
+      <p:pic>
+        <p:nvPicPr>
+          <p:cNvPr id="3" name="Picture 2" descr="chart_cash_flows.png"/>
+          <p:cNvPicPr>
+            <a:picLocks noChangeAspect="1"/>
+          </p:cNvPicPr>
+          <p:nvPr/>
+        </p:nvPicPr>
+        <p:blipFill>
+          <a:blip r:embed="rId2"/>
+          <a:stretch>
+            <a:fillRect/>
+          </a:stretch>
+        </p:blipFill>
+        <p:spPr>
+          <a:xfrm>
+            <a:off x="457200" y="731520"/>
+            <a:ext cx="8229600" cy="4114800"/>
+          </a:xfrm>
+          <a:prstGeom prst="rect">
+            <a:avLst/>
+          </a:prstGeom>
+        </p:spPr>
+      </p:pic>
+      <p:sp>
+        <p:nvSpPr>
+          <p:cNvPr id="4" name="TextBox 3"/>
+          <p:cNvSpPr txBox="1"/>
+          <p:nvPr/>
+        </p:nvSpPr>
+        <p:spPr>
+          <a:xfrm>
+            <a:off x="457200" y="5029200"/>
+            <a:ext cx="8229600" cy="1371600"/>
+          </a:xfrm>
+          <a:prstGeom prst="rect">
+            <a:avLst/>
+          </a:prstGeom>
+          <a:noFill/>
+        </p:spPr>
+        <p:txBody>
+          <a:bodyPr wrap="square">
+            <a:spAutoFit/>
+          </a:bodyPr>
+          <a:lstStyle/>
+          <a:p>
+            <a:pPr>
+              <a:defRPr sz="1200">
+                <a:solidFill>
+                  <a:srgbClr val="646464"/>
+                </a:solidFill>
+              </a:defRPr>
+            </a:pPr>
+            <a:r>
+              <a:t>Three cash flow lines: Operating, Investing, Financing. Operating should be consistently positive.</a:t>
+            </a:r>
+          </a:p>
+        </p:txBody>
+      </p:sp>
+    </p:spTree>
+  </p:cSld>
+  <p:clrMapOvr>
+    <a:masterClrMapping/>
+  </p:clrMapOvr>
+</p:sld>
+</file>
+
+<file path=ppt/slides/slide22.xml><?xml version="1.0" encoding="utf-8"?>
+<p:sld xmlns:a="http://schemas.openxmlformats.org/drawingml/2006/main" xmlns:p="http://schemas.openxmlformats.org/presentationml/2006/main" xmlns:r="http://schemas.openxmlformats.org/officeDocument/2006/relationships">
+  <p:cSld>
+    <p:spTree>
+      <p:nvGrpSpPr>
+        <p:cNvPr id="1" name=""/>
+        <p:cNvGrpSpPr/>
+        <p:nvPr/>
+      </p:nvGrpSpPr>
+      <p:grpSpPr/>
+      <p:sp>
+        <p:nvSpPr>
+          <p:cNvPr id="2" name="Rectangle 1"/>
+          <p:cNvSpPr/>
+          <p:nvPr/>
+        </p:nvSpPr>
+        <p:spPr>
+          <a:xfrm>
+            <a:off x="0" y="2286000"/>
+            <a:ext cx="9144000" cy="1828800"/>
+          </a:xfrm>
+          <a:prstGeom prst="rect">
+            <a:avLst/>
+          </a:prstGeom>
+          <a:solidFill>
+            <a:srgbClr val="CC0000"/>
+          </a:solidFill>
+          <a:ln>
+            <a:solidFill>
+              <a:srgbClr val="CC0000"/>
+            </a:solidFill>
+          </a:ln>
+        </p:spPr>
+        <p:style>
+          <a:lnRef idx="1">
+            <a:schemeClr val="accent1"/>
+          </a:lnRef>
+          <a:fillRef idx="3">
+            <a:schemeClr val="accent1"/>
+          </a:fillRef>
+          <a:effectRef idx="2">
+            <a:schemeClr val="accent1"/>
+          </a:effectRef>
+          <a:fontRef idx="minor">
+            <a:schemeClr val="lt1"/>
+          </a:fontRef>
+        </p:style>
+        <p:txBody>
+          <a:bodyPr rtlCol="0" anchor="ctr"/>
+          <a:lstStyle/>
+          <a:p>
+            <a:pPr algn="ctr"/>
+          </a:p>
+        </p:txBody>
+      </p:sp>
+      <p:sp>
+        <p:nvSpPr>
+          <p:cNvPr id="3" name="TextBox 2"/>
+          <p:cNvSpPr txBox="1"/>
+          <p:nvPr/>
+        </p:nvSpPr>
+        <p:spPr>
+          <a:xfrm>
+            <a:off x="457200" y="2468880"/>
+            <a:ext cx="8229600" cy="548640"/>
+          </a:xfrm>
+          <a:prstGeom prst="rect">
+            <a:avLst/>
+          </a:prstGeom>
+          <a:noFill/>
+        </p:spPr>
+        <p:txBody>
+          <a:bodyPr wrap="none">
+            <a:spAutoFit/>
+          </a:bodyPr>
+          <a:lstStyle/>
+          <a:p>
+            <a:pPr algn="ctr">
+              <a:defRPr sz="2400" b="1">
+                <a:solidFill>
+                  <a:srgbClr val="FFFFFF"/>
+                </a:solidFill>
+              </a:defRPr>
+            </a:pPr>
+            <a:r>
+              <a:t>PILLAR 4</a:t>
+            </a:r>
+          </a:p>
+        </p:txBody>
+      </p:sp>
+      <p:sp>
+        <p:nvSpPr>
+          <p:cNvPr id="4" name="TextBox 3"/>
+          <p:cNvSpPr txBox="1"/>
+          <p:nvPr/>
+        </p:nvSpPr>
+        <p:spPr>
+          <a:xfrm>
+            <a:off x="457200" y="3017520"/>
+            <a:ext cx="8229600" cy="731520"/>
+          </a:xfrm>
+          <a:prstGeom prst="rect">
+            <a:avLst/>
+          </a:prstGeom>
+          <a:noFill/>
+        </p:spPr>
+        <p:txBody>
+          <a:bodyPr wrap="none">
+            <a:spAutoFit/>
+          </a:bodyPr>
+          <a:lstStyle/>
+          <a:p>
+            <a:pPr algn="ctr">
+              <a:defRPr sz="4400" b="1">
+                <a:solidFill>
+                  <a:srgbClr val="FFFFFF"/>
+                </a:solidFill>
+              </a:defRPr>
+            </a:pPr>
+            <a:r>
+              <a:t>Operational Efficiency</a:t>
+            </a:r>
+          </a:p>
+        </p:txBody>
+      </p:sp>
+      <p:sp>
+        <p:nvSpPr>
+          <p:cNvPr id="5" name="TextBox 4"/>
+          <p:cNvSpPr txBox="1"/>
+          <p:nvPr/>
+        </p:nvSpPr>
+        <p:spPr>
+          <a:xfrm>
+            <a:off x="457200" y="4572000"/>
+            <a:ext cx="8229600" cy="457200"/>
+          </a:xfrm>
+          <a:prstGeom prst="rect">
+            <a:avLst/>
+          </a:prstGeom>
+          <a:noFill/>
+        </p:spPr>
+        <p:txBody>
+          <a:bodyPr wrap="none">
+            <a:spAutoFit/>
+          </a:bodyPr>
+          <a:lstStyle/>
+          <a:p>
+            <a:pPr algn="ctr">
+              <a:defRPr sz="2400" i="1">
+                <a:solidFill>
+                  <a:srgbClr val="646464"/>
+                </a:solidFill>
+              </a:defRPr>
+            </a:pPr>
+            <a:r>
+              <a:t>"How well is the company using its assets?"</a:t>
+            </a:r>
+          </a:p>
+        </p:txBody>
+      </p:sp>
+    </p:spTree>
+  </p:cSld>
+  <p:clrMapOvr>
+    <a:masterClrMapping/>
+  </p:clrMapOvr>
+</p:sld>
+</file>
+
+<file path=ppt/slides/slide23.xml><?xml version="1.0" encoding="utf-8"?>
+<p:sld xmlns:a="http://schemas.openxmlformats.org/drawingml/2006/main" xmlns:p="http://schemas.openxmlformats.org/presentationml/2006/main" xmlns:r="http://schemas.openxmlformats.org/officeDocument/2006/relationships">
+  <p:cSld>
+    <p:spTree>
+      <p:nvGrpSpPr>
+        <p:cNvPr id="1" name=""/>
+        <p:cNvGrpSpPr/>
+        <p:nvPr/>
+      </p:nvGrpSpPr>
+      <p:grpSpPr/>
+      <p:sp>
+        <p:nvSpPr>
+          <p:cNvPr id="2" name="TextBox 1"/>
+          <p:cNvSpPr txBox="1"/>
+          <p:nvPr/>
+        </p:nvSpPr>
+        <p:spPr>
+          <a:xfrm>
+            <a:off x="457200" y="182880"/>
+            <a:ext cx="8229600" cy="457200"/>
+          </a:xfrm>
+          <a:prstGeom prst="rect">
+            <a:avLst/>
+          </a:prstGeom>
+          <a:noFill/>
+        </p:spPr>
+        <p:txBody>
+          <a:bodyPr wrap="none">
+            <a:spAutoFit/>
+          </a:bodyPr>
+          <a:lstStyle/>
+          <a:p>
+            <a:pPr>
+              <a:defRPr sz="2400" b="1">
+                <a:solidFill>
+                  <a:srgbClr val="CC0000"/>
+                </a:solidFill>
+              </a:defRPr>
+            </a:pPr>
+            <a:r>
+              <a:t>DuPont Analysis</a:t>
+            </a:r>
+          </a:p>
+        </p:txBody>
+      </p:sp>
+      <p:pic>
+        <p:nvPicPr>
+          <p:cNvPr id="3" name="Picture 2" descr="chart_dupont_analysis.png"/>
+          <p:cNvPicPr>
+            <a:picLocks noChangeAspect="1"/>
+          </p:cNvPicPr>
+          <p:nvPr/>
+        </p:nvPicPr>
+        <p:blipFill>
+          <a:blip r:embed="rId2"/>
+          <a:stretch>
+            <a:fillRect/>
+          </a:stretch>
+        </p:blipFill>
+        <p:spPr>
+          <a:xfrm>
+            <a:off x="457200" y="731520"/>
+            <a:ext cx="8229600" cy="4114800"/>
+          </a:xfrm>
+          <a:prstGeom prst="rect">
+            <a:avLst/>
+          </a:prstGeom>
+        </p:spPr>
+      </p:pic>
+      <p:sp>
+        <p:nvSpPr>
+          <p:cNvPr id="4" name="TextBox 3"/>
+          <p:cNvSpPr txBox="1"/>
+          <p:nvPr/>
+        </p:nvSpPr>
+        <p:spPr>
+          <a:xfrm>
+            <a:off x="457200" y="5029200"/>
+            <a:ext cx="8229600" cy="1371600"/>
+          </a:xfrm>
+          <a:prstGeom prst="rect">
+            <a:avLst/>
+          </a:prstGeom>
+          <a:noFill/>
+        </p:spPr>
+        <p:txBody>
+          <a:bodyPr wrap="square">
+            <a:spAutoFit/>
+          </a:bodyPr>
+          <a:lstStyle/>
+          <a:p>
+            <a:pPr>
+              <a:defRPr sz="1200">
+                <a:solidFill>
+                  <a:srgbClr val="646464"/>
+                </a:solidFill>
+              </a:defRPr>
+            </a:pPr>
+            <a:r>
+              <a:t>Decomposes ROE into Profit Margin x Asset Turnover x Financial Leverage. Shows what drives returns.</a:t>
+            </a:r>
+          </a:p>
+        </p:txBody>
+      </p:sp>
+    </p:spTree>
+  </p:cSld>
+  <p:clrMapOvr>
+    <a:masterClrMapping/>
+  </p:clrMapOvr>
+</p:sld>
+</file>
+
+<file path=ppt/slides/slide24.xml><?xml version="1.0" encoding="utf-8"?>
+<p:sld xmlns:a="http://schemas.openxmlformats.org/drawingml/2006/main" xmlns:p="http://schemas.openxmlformats.org/presentationml/2006/main" xmlns:r="http://schemas.openxmlformats.org/officeDocument/2006/relationships">
+  <p:cSld>
+    <p:spTree>
+      <p:nvGrpSpPr>
+        <p:cNvPr id="1" name=""/>
+        <p:cNvGrpSpPr/>
+        <p:nvPr/>
+      </p:nvGrpSpPr>
+      <p:grpSpPr/>
+      <p:sp>
+        <p:nvSpPr>
+          <p:cNvPr id="2" name="TextBox 1"/>
+          <p:cNvSpPr txBox="1"/>
+          <p:nvPr/>
+        </p:nvSpPr>
+        <p:spPr>
+          <a:xfrm>
+            <a:off x="457200" y="182880"/>
+            <a:ext cx="8229600" cy="457200"/>
+          </a:xfrm>
+          <a:prstGeom prst="rect">
+            <a:avLst/>
+          </a:prstGeom>
+          <a:noFill/>
+        </p:spPr>
+        <p:txBody>
+          <a:bodyPr wrap="none">
+            <a:spAutoFit/>
+          </a:bodyPr>
+          <a:lstStyle/>
+          <a:p>
+            <a:pPr>
+              <a:defRPr sz="2400" b="1">
+                <a:solidFill>
+                  <a:srgbClr val="CC0000"/>
+                </a:solidFill>
+              </a:defRPr>
+            </a:pPr>
+            <a:r>
+              <a:t>Inventory Efficiency</a:t>
+            </a:r>
+          </a:p>
+        </p:txBody>
+      </p:sp>
+      <p:pic>
+        <p:nvPicPr>
+          <p:cNvPr id="3" name="Picture 2" descr="chart_inventory_efficiency.png"/>
+          <p:cNvPicPr>
+            <a:picLocks noChangeAspect="1"/>
+          </p:cNvPicPr>
+          <p:nvPr/>
+        </p:nvPicPr>
+        <p:blipFill>
+          <a:blip r:embed="rId2"/>
+          <a:stretch>
+            <a:fillRect/>
+          </a:stretch>
+        </p:blipFill>
+        <p:spPr>
+          <a:xfrm>
+            <a:off x="457200" y="731520"/>
+            <a:ext cx="8229600" cy="4114800"/>
+          </a:xfrm>
+          <a:prstGeom prst="rect">
+            <a:avLst/>
+          </a:prstGeom>
+        </p:spPr>
+      </p:pic>
+      <p:sp>
+        <p:nvSpPr>
+          <p:cNvPr id="4" name="TextBox 3"/>
+          <p:cNvSpPr txBox="1"/>
+          <p:nvPr/>
+        </p:nvSpPr>
+        <p:spPr>
+          <a:xfrm>
+            <a:off x="457200" y="5029200"/>
+            <a:ext cx="8229600" cy="1371600"/>
+          </a:xfrm>
+          <a:prstGeom prst="rect">
+            <a:avLst/>
+          </a:prstGeom>
+          <a:noFill/>
+        </p:spPr>
+        <p:txBody>
+          <a:bodyPr wrap="square">
+            <a:spAutoFit/>
+          </a:bodyPr>
+          <a:lstStyle/>
+          <a:p>
+            <a:pPr>
+              <a:defRPr sz="1200">
+                <a:solidFill>
+                  <a:srgbClr val="646464"/>
+                </a:solidFill>
+              </a:defRPr>
+            </a:pPr>
+            <a:r>
+              <a:t>Tracks turnover ratio and days on hand. Faster turns = less capital tied up in inventory.</a:t>
+            </a:r>
+          </a:p>
+        </p:txBody>
+      </p:sp>
+    </p:spTree>
+  </p:cSld>
+  <p:clrMapOvr>
+    <a:masterClrMapping/>
+  </p:clrMapOvr>
+</p:sld>
+</file>
+
+<file path=ppt/slides/slide25.xml><?xml version="1.0" encoding="utf-8"?>
+<p:sld xmlns:a="http://schemas.openxmlformats.org/drawingml/2006/main" xmlns:p="http://schemas.openxmlformats.org/presentationml/2006/main" xmlns:r="http://schemas.openxmlformats.org/officeDocument/2006/relationships">
+  <p:cSld>
+    <p:spTree>
+      <p:nvGrpSpPr>
+        <p:cNvPr id="1" name=""/>
+        <p:cNvGrpSpPr/>
+        <p:nvPr/>
+      </p:nvGrpSpPr>
+      <p:grpSpPr/>
+      <p:sp>
+        <p:nvSpPr>
+          <p:cNvPr id="2" name="TextBox 1"/>
+          <p:cNvSpPr txBox="1"/>
+          <p:nvPr/>
+        </p:nvSpPr>
+        <p:spPr>
+          <a:xfrm>
+            <a:off x="457200" y="182880"/>
+            <a:ext cx="8229600" cy="457200"/>
+          </a:xfrm>
+          <a:prstGeom prst="rect">
+            <a:avLst/>
+          </a:prstGeom>
+          <a:noFill/>
+        </p:spPr>
+        <p:txBody>
+          <a:bodyPr wrap="none">
+            <a:spAutoFit/>
+          </a:bodyPr>
+          <a:lstStyle/>
+          <a:p>
+            <a:pPr>
+              <a:defRPr sz="2400" b="1">
+                <a:solidFill>
+                  <a:srgbClr val="CC0000"/>
+                </a:solidFill>
+              </a:defRPr>
+            </a:pPr>
+            <a:r>
+              <a:t>Cash Conversion Cycle</a:t>
+            </a:r>
+          </a:p>
+        </p:txBody>
+      </p:sp>
+      <p:pic>
+        <p:nvPicPr>
+          <p:cNvPr id="3" name="Picture 2" descr="chart_cash_conversion_cycle.png"/>
+          <p:cNvPicPr>
+            <a:picLocks noChangeAspect="1"/>
+          </p:cNvPicPr>
+          <p:nvPr/>
+        </p:nvPicPr>
+        <p:blipFill>
+          <a:blip r:embed="rId2"/>
+          <a:stretch>
+            <a:fillRect/>
+          </a:stretch>
+        </p:blipFill>
+        <p:spPr>
+          <a:xfrm>
+            <a:off x="457200" y="731520"/>
+            <a:ext cx="8229600" cy="4114800"/>
+          </a:xfrm>
+          <a:prstGeom prst="rect">
+            <a:avLst/>
+          </a:prstGeom>
+        </p:spPr>
+      </p:pic>
+      <p:sp>
+        <p:nvSpPr>
+          <p:cNvPr id="4" name="TextBox 3"/>
+          <p:cNvSpPr txBox="1"/>
+          <p:nvPr/>
+        </p:nvSpPr>
+        <p:spPr>
+          <a:xfrm>
+            <a:off x="457200" y="5029200"/>
+            <a:ext cx="8229600" cy="1371600"/>
+          </a:xfrm>
+          <a:prstGeom prst="rect">
+            <a:avLst/>
+          </a:prstGeom>
+          <a:noFill/>
+        </p:spPr>
+        <p:txBody>
+          <a:bodyPr wrap="square">
+            <a:spAutoFit/>
+          </a:bodyPr>
+          <a:lstStyle/>
+          <a:p>
+            <a:pPr>
+              <a:defRPr sz="1200">
+                <a:solidFill>
+                  <a:srgbClr val="646464"/>
+                </a:solidFill>
+              </a:defRPr>
+            </a:pPr>
+            <a:r>
+              <a:t>Days to convert inventory to cash vs retail peers. Lower is better; negative means suppliers finance operations.</a:t>
+            </a:r>
+          </a:p>
+        </p:txBody>
+      </p:sp>
+    </p:spTree>
+  </p:cSld>
+  <p:clrMapOvr>
+    <a:masterClrMapping/>
+  </p:clrMapOvr>
+</p:sld>
+</file>
+
+<file path=ppt/slides/slide26.xml><?xml version="1.0" encoding="utf-8"?>
+<p:sld xmlns:a="http://schemas.openxmlformats.org/drawingml/2006/main" xmlns:p="http://schemas.openxmlformats.org/presentationml/2006/main" xmlns:r="http://schemas.openxmlformats.org/officeDocument/2006/relationships">
+  <p:cSld>
+    <p:spTree>
+      <p:nvGrpSpPr>
+        <p:cNvPr id="1" name=""/>
+        <p:cNvGrpSpPr/>
+        <p:nvPr/>
+      </p:nvGrpSpPr>
+      <p:grpSpPr/>
+      <p:sp>
+        <p:nvSpPr>
+          <p:cNvPr id="2" name="TextBox 1"/>
+          <p:cNvSpPr txBox="1"/>
+          <p:nvPr/>
+        </p:nvSpPr>
+        <p:spPr>
+          <a:xfrm>
+            <a:off x="457200" y="182880"/>
+            <a:ext cx="8229600" cy="457200"/>
+          </a:xfrm>
+          <a:prstGeom prst="rect">
+            <a:avLst/>
+          </a:prstGeom>
+          <a:noFill/>
+        </p:spPr>
+        <p:txBody>
+          <a:bodyPr wrap="none">
+            <a:spAutoFit/>
+          </a:bodyPr>
+          <a:lstStyle/>
+          <a:p>
+            <a:pPr>
+              <a:defRPr sz="2400" b="1">
+                <a:solidFill>
+                  <a:srgbClr val="CC0000"/>
+                </a:solidFill>
+              </a:defRPr>
+            </a:pPr>
+            <a:r>
+              <a:t>OCF vs CapEx</a:t>
+            </a:r>
+          </a:p>
+        </p:txBody>
+      </p:sp>
+      <p:pic>
+        <p:nvPicPr>
+          <p:cNvPr id="3" name="Picture 2" descr="chart_ocf_vs_capex.png"/>
+          <p:cNvPicPr>
+            <a:picLocks noChangeAspect="1"/>
+          </p:cNvPicPr>
+          <p:nvPr/>
+        </p:nvPicPr>
+        <p:blipFill>
+          <a:blip r:embed="rId2"/>
+          <a:stretch>
+            <a:fillRect/>
+          </a:stretch>
+        </p:blipFill>
+        <p:spPr>
+          <a:xfrm>
+            <a:off x="457200" y="731520"/>
+            <a:ext cx="8229600" cy="4114800"/>
+          </a:xfrm>
+          <a:prstGeom prst="rect">
+            <a:avLst/>
+          </a:prstGeom>
+        </p:spPr>
+      </p:pic>
+      <p:sp>
+        <p:nvSpPr>
+          <p:cNvPr id="4" name="TextBox 3"/>
+          <p:cNvSpPr txBox="1"/>
+          <p:nvPr/>
+        </p:nvSpPr>
+        <p:spPr>
+          <a:xfrm>
+            <a:off x="457200" y="5029200"/>
+            <a:ext cx="8229600" cy="1371600"/>
+          </a:xfrm>
+          <a:prstGeom prst="rect">
+            <a:avLst/>
+          </a:prstGeom>
+          <a:noFill/>
+        </p:spPr>
+        <p:txBody>
+          <a:bodyPr wrap="square">
+            <a:spAutoFit/>
+          </a:bodyPr>
+          <a:lstStyle/>
+          <a:p>
+            <a:pPr>
+              <a:defRPr sz="1200">
+                <a:solidFill>
+                  <a:srgbClr val="646464"/>
+                </a:solidFill>
+              </a:defRPr>
+            </a:pPr>
+            <a:r>
+              <a:t>Operating cash vs capital spending. The gap between them is Free Cash Flow available for shareholders.</a:t>
+            </a:r>
+          </a:p>
+        </p:txBody>
+      </p:sp>
+    </p:spTree>
+  </p:cSld>
+  <p:clrMapOvr>
+    <a:masterClrMapping/>
+  </p:clrMapOvr>
+</p:sld>
+</file>
+
+<file path=ppt/slides/slide27.xml><?xml version="1.0" encoding="utf-8"?>
+<p:sld xmlns:a="http://schemas.openxmlformats.org/drawingml/2006/main" xmlns:p="http://schemas.openxmlformats.org/presentationml/2006/main" xmlns:r="http://schemas.openxmlformats.org/officeDocument/2006/relationships">
+  <p:cSld>
+    <p:spTree>
+      <p:nvGrpSpPr>
+        <p:cNvPr id="1" name=""/>
+        <p:cNvGrpSpPr/>
+        <p:nvPr/>
+      </p:nvGrpSpPr>
+      <p:grpSpPr/>
+      <p:sp>
+        <p:nvSpPr>
+          <p:cNvPr id="2" name="Rectangle 1"/>
+          <p:cNvSpPr/>
+          <p:nvPr/>
+        </p:nvSpPr>
+        <p:spPr>
+          <a:xfrm>
+            <a:off x="0" y="2286000"/>
+            <a:ext cx="9144000" cy="1828800"/>
+          </a:xfrm>
+          <a:prstGeom prst="rect">
+            <a:avLst/>
+          </a:prstGeom>
+          <a:solidFill>
+            <a:srgbClr val="CC0000"/>
+          </a:solidFill>
+          <a:ln>
+            <a:solidFill>
+              <a:srgbClr val="CC0000"/>
+            </a:solidFill>
+          </a:ln>
+        </p:spPr>
+        <p:style>
+          <a:lnRef idx="1">
+            <a:schemeClr val="accent1"/>
+          </a:lnRef>
+          <a:fillRef idx="3">
+            <a:schemeClr val="accent1"/>
+          </a:fillRef>
+          <a:effectRef idx="2">
+            <a:schemeClr val="accent1"/>
+          </a:effectRef>
+          <a:fontRef idx="minor">
+            <a:schemeClr val="lt1"/>
+          </a:fontRef>
+        </p:style>
+        <p:txBody>
+          <a:bodyPr rtlCol="0" anchor="ctr"/>
+          <a:lstStyle/>
+          <a:p>
+            <a:pPr algn="ctr"/>
+          </a:p>
+        </p:txBody>
+      </p:sp>
+      <p:sp>
+        <p:nvSpPr>
+          <p:cNvPr id="3" name="TextBox 2"/>
+          <p:cNvSpPr txBox="1"/>
+          <p:nvPr/>
+        </p:nvSpPr>
+        <p:spPr>
+          <a:xfrm>
+            <a:off x="457200" y="2468880"/>
+            <a:ext cx="8229600" cy="548640"/>
+          </a:xfrm>
+          <a:prstGeom prst="rect">
+            <a:avLst/>
+          </a:prstGeom>
+          <a:noFill/>
+        </p:spPr>
+        <p:txBody>
+          <a:bodyPr wrap="none">
+            <a:spAutoFit/>
+          </a:bodyPr>
+          <a:lstStyle/>
+          <a:p>
+            <a:pPr algn="ctr">
+              <a:defRPr sz="2400" b="1">
+                <a:solidFill>
+                  <a:srgbClr val="FFFFFF"/>
+                </a:solidFill>
+              </a:defRPr>
+            </a:pPr>
+            <a:r>
+              <a:t>PILLAR 5</a:t>
+            </a:r>
+          </a:p>
+        </p:txBody>
+      </p:sp>
+      <p:sp>
+        <p:nvSpPr>
+          <p:cNvPr id="4" name="TextBox 3"/>
+          <p:cNvSpPr txBox="1"/>
+          <p:nvPr/>
+        </p:nvSpPr>
+        <p:spPr>
+          <a:xfrm>
+            <a:off x="457200" y="3017520"/>
+            <a:ext cx="8229600" cy="731520"/>
+          </a:xfrm>
+          <a:prstGeom prst="rect">
+            <a:avLst/>
+          </a:prstGeom>
+          <a:noFill/>
+        </p:spPr>
+        <p:txBody>
+          <a:bodyPr wrap="none">
+            <a:spAutoFit/>
+          </a:bodyPr>
+          <a:lstStyle/>
+          <a:p>
+            <a:pPr algn="ctr">
+              <a:defRPr sz="4400" b="1">
+                <a:solidFill>
+                  <a:srgbClr val="FFFFFF"/>
+                </a:solidFill>
+              </a:defRPr>
+            </a:pPr>
+            <a:r>
+              <a:t>Valuation &amp; Risk</a:t>
+            </a:r>
+          </a:p>
+        </p:txBody>
+      </p:sp>
+      <p:sp>
+        <p:nvSpPr>
+          <p:cNvPr id="5" name="TextBox 4"/>
+          <p:cNvSpPr txBox="1"/>
+          <p:nvPr/>
+        </p:nvSpPr>
+        <p:spPr>
+          <a:xfrm>
+            <a:off x="457200" y="4572000"/>
+            <a:ext cx="8229600" cy="457200"/>
+          </a:xfrm>
+          <a:prstGeom prst="rect">
+            <a:avLst/>
+          </a:prstGeom>
+          <a:noFill/>
+        </p:spPr>
+        <p:txBody>
+          <a:bodyPr wrap="none">
+            <a:spAutoFit/>
+          </a:bodyPr>
+          <a:lstStyle/>
+          <a:p>
+            <a:pPr algn="ctr">
+              <a:defRPr sz="2400" i="1">
+                <a:solidFill>
+                  <a:srgbClr val="646464"/>
+                </a:solidFill>
+              </a:defRPr>
+            </a:pPr>
+            <a:r>
+              <a:t>"Is the stock fairly priced, and what are the risks?"</a:t>
+            </a:r>
+          </a:p>
+        </p:txBody>
+      </p:sp>
+    </p:spTree>
+  </p:cSld>
+  <p:clrMapOvr>
+    <a:masterClrMapping/>
+  </p:clrMapOvr>
+</p:sld>
+</file>
+
+<file path=ppt/slides/slide28.xml><?xml version="1.0" encoding="utf-8"?>
+<p:sld xmlns:a="http://schemas.openxmlformats.org/drawingml/2006/main" xmlns:p="http://schemas.openxmlformats.org/presentationml/2006/main" xmlns:r="http://schemas.openxmlformats.org/officeDocument/2006/relationships">
+  <p:cSld>
+    <p:spTree>
+      <p:nvGrpSpPr>
+        <p:cNvPr id="1" name=""/>
+        <p:cNvGrpSpPr/>
+        <p:nvPr/>
+      </p:nvGrpSpPr>
+      <p:grpSpPr/>
+      <p:sp>
+        <p:nvSpPr>
+          <p:cNvPr id="2" name="TextBox 1"/>
+          <p:cNvSpPr txBox="1"/>
+          <p:nvPr/>
+        </p:nvSpPr>
+        <p:spPr>
+          <a:xfrm>
+            <a:off x="457200" y="182880"/>
+            <a:ext cx="8229600" cy="457200"/>
+          </a:xfrm>
+          <a:prstGeom prst="rect">
+            <a:avLst/>
+          </a:prstGeom>
+          <a:noFill/>
+        </p:spPr>
+        <p:txBody>
+          <a:bodyPr wrap="none">
+            <a:spAutoFit/>
+          </a:bodyPr>
+          <a:lstStyle/>
+          <a:p>
+            <a:pPr>
+              <a:defRPr sz="2400" b="1">
+                <a:solidFill>
+                  <a:srgbClr val="CC0000"/>
+                </a:solidFill>
+              </a:defRPr>
+            </a:pPr>
+            <a:r>
+              <a:t>Valuation vs Growth</a:t>
+            </a:r>
+          </a:p>
+        </p:txBody>
+      </p:sp>
+      <p:pic>
+        <p:nvPicPr>
+          <p:cNvPr id="3" name="Picture 2" descr="chart_valuation_scatter.png"/>
+          <p:cNvPicPr>
+            <a:picLocks noChangeAspect="1"/>
+          </p:cNvPicPr>
+          <p:nvPr/>
+        </p:nvPicPr>
+        <p:blipFill>
+          <a:blip r:embed="rId2"/>
+          <a:stretch>
+            <a:fillRect/>
+          </a:stretch>
+        </p:blipFill>
+        <p:spPr>
+          <a:xfrm>
+            <a:off x="457200" y="731520"/>
+            <a:ext cx="8229600" cy="4114800"/>
+          </a:xfrm>
+          <a:prstGeom prst="rect">
+            <a:avLst/>
+          </a:prstGeom>
+        </p:spPr>
+      </p:pic>
+      <p:sp>
+        <p:nvSpPr>
+          <p:cNvPr id="4" name="TextBox 3"/>
+          <p:cNvSpPr txBox="1"/>
+          <p:nvPr/>
+        </p:nvSpPr>
+        <p:spPr>
+          <a:xfrm>
+            <a:off x="457200" y="5029200"/>
+            <a:ext cx="8229600" cy="1371600"/>
+          </a:xfrm>
+          <a:prstGeom prst="rect">
+            <a:avLst/>
+          </a:prstGeom>
+          <a:noFill/>
+        </p:spPr>
+        <p:txBody>
+          <a:bodyPr wrap="square">
+            <a:spAutoFit/>
+          </a:bodyPr>
+          <a:lstStyle/>
+          <a:p>
+            <a:pPr>
+              <a:defRPr sz="1200">
+                <a:solidFill>
+                  <a:srgbClr val="646464"/>
+                </a:solidFill>
+              </a:defRPr>
+            </a:pPr>
+            <a:r>
+              <a:t>P/E ratio vs revenue growth for Target and peers. Lower-right quadrant = undervalued opportunities.</a:t>
+            </a:r>
+          </a:p>
+        </p:txBody>
+      </p:sp>
+    </p:spTree>
+  </p:cSld>
+  <p:clrMapOvr>
+    <a:masterClrMapping/>
+  </p:clrMapOvr>
+</p:sld>
+</file>
+
+<file path=ppt/slides/slide29.xml><?xml version="1.0" encoding="utf-8"?>
+<p:sld xmlns:a="http://schemas.openxmlformats.org/drawingml/2006/main" xmlns:p="http://schemas.openxmlformats.org/presentationml/2006/main" xmlns:r="http://schemas.openxmlformats.org/officeDocument/2006/relationships">
+  <p:cSld>
+    <p:spTree>
+      <p:nvGrpSpPr>
+        <p:cNvPr id="1" name=""/>
+        <p:cNvGrpSpPr/>
+        <p:nvPr/>
+      </p:nvGrpSpPr>
+      <p:grpSpPr/>
+      <p:sp>
+        <p:nvSpPr>
+          <p:cNvPr id="2" name="TextBox 1"/>
+          <p:cNvSpPr txBox="1"/>
+          <p:nvPr/>
+        </p:nvSpPr>
+        <p:spPr>
+          <a:xfrm>
+            <a:off x="457200" y="182880"/>
+            <a:ext cx="8229600" cy="457200"/>
+          </a:xfrm>
+          <a:prstGeom prst="rect">
+            <a:avLst/>
+          </a:prstGeom>
+          <a:noFill/>
+        </p:spPr>
+        <p:txBody>
+          <a:bodyPr wrap="none">
+            <a:spAutoFit/>
+          </a:bodyPr>
+          <a:lstStyle/>
+          <a:p>
+            <a:pPr>
+              <a:defRPr sz="2400" b="1">
+                <a:solidFill>
+                  <a:srgbClr val="CC0000"/>
+                </a:solidFill>
+              </a:defRPr>
+            </a:pPr>
+            <a:r>
+              <a:t>Historical P/E Band</a:t>
+            </a:r>
+          </a:p>
+        </p:txBody>
+      </p:sp>
+      <p:pic>
+        <p:nvPicPr>
+          <p:cNvPr id="3" name="Picture 2" descr="chart_pe_band.png"/>
+          <p:cNvPicPr>
+            <a:picLocks noChangeAspect="1"/>
+          </p:cNvPicPr>
+          <p:nvPr/>
+        </p:nvPicPr>
+        <p:blipFill>
+          <a:blip r:embed="rId2"/>
+          <a:stretch>
+            <a:fillRect/>
+          </a:stretch>
+        </p:blipFill>
+        <p:spPr>
+          <a:xfrm>
+            <a:off x="457200" y="731520"/>
+            <a:ext cx="8229600" cy="4114800"/>
+          </a:xfrm>
+          <a:prstGeom prst="rect">
+            <a:avLst/>
+          </a:prstGeom>
+        </p:spPr>
+      </p:pic>
+      <p:sp>
+        <p:nvSpPr>
+          <p:cNvPr id="4" name="TextBox 3"/>
+          <p:cNvSpPr txBox="1"/>
+          <p:nvPr/>
+        </p:nvSpPr>
+        <p:spPr>
+          <a:xfrm>
+            <a:off x="457200" y="5029200"/>
+            <a:ext cx="8229600" cy="1371600"/>
+          </a:xfrm>
+          <a:prstGeom prst="rect">
+            <a:avLst/>
+          </a:prstGeom>
+          <a:noFill/>
+        </p:spPr>
+        <p:txBody>
+          <a:bodyPr wrap="square">
+            <a:spAutoFit/>
+          </a:bodyPr>
+          <a:lstStyle/>
+          <a:p>
+            <a:pPr>
+              <a:defRPr sz="1200">
+                <a:solidFill>
+                  <a:srgbClr val="646464"/>
+                </a:solidFill>
+              </a:defRPr>
+            </a:pPr>
+            <a:r>
+              <a:t>Current price vs historical valuation range. Below 25th percentile = historically undervalued.</a:t>
+            </a:r>
           </a:p>
         </p:txBody>
       </p:sp>
@@ -6017,15 +6055,15 @@
               <a:defRPr sz="2000" b="1"/>
             </a:pPr>
             <a:r>
-              <a:t>⚠️  Risk Factors</a:t>
+              <a:t>Risk Factors</a:t>
             </a:r>
           </a:p>
           <a:p>
             <a:pPr>
-              <a:defRPr sz="1400"/>
-            </a:pPr>
-            <a:r>
-              <a:t>• Shrink/Theft (High)</a:t>
+              <a:defRPr sz="1400" b="1"/>
+            </a:pPr>
+            <a:r>
+              <a:t>Shrink/Theft (High)</a:t>
             </a:r>
           </a:p>
           <a:p>
@@ -6070,15 +6108,15 @@
               <a:defRPr sz="2000" b="1"/>
             </a:pPr>
             <a:r>
-              <a:t>✨ Opportunities</a:t>
+              <a:t>Opportunities</a:t>
             </a:r>
           </a:p>
           <a:p>
             <a:pPr>
-              <a:defRPr sz="1400"/>
-            </a:pPr>
-            <a:r>
-              <a:t>• Digital Sales Growth (High potential)</a:t>
+              <a:defRPr sz="1400" b="1"/>
+            </a:pPr>
+            <a:r>
+              <a:t>Digital Sales Growth (High potential)</a:t>
             </a:r>
           </a:p>
           <a:p>
@@ -6090,6 +6128,342 @@
             </a:pPr>
             <a:r>
               <a:t>Digital comp sales up 2.4% in latest quarter</a:t>
+            </a:r>
+          </a:p>
+        </p:txBody>
+      </p:sp>
+    </p:spTree>
+  </p:cSld>
+  <p:clrMapOvr>
+    <a:masterClrMapping/>
+  </p:clrMapOvr>
+</p:sld>
+</file>
+
+<file path=ppt/slides/slide30.xml><?xml version="1.0" encoding="utf-8"?>
+<p:sld xmlns:a="http://schemas.openxmlformats.org/drawingml/2006/main" xmlns:p="http://schemas.openxmlformats.org/presentationml/2006/main" xmlns:r="http://schemas.openxmlformats.org/officeDocument/2006/relationships">
+  <p:cSld>
+    <p:spTree>
+      <p:nvGrpSpPr>
+        <p:cNvPr id="1" name=""/>
+        <p:cNvGrpSpPr/>
+        <p:nvPr/>
+      </p:nvGrpSpPr>
+      <p:grpSpPr/>
+      <p:sp>
+        <p:nvSpPr>
+          <p:cNvPr id="2" name="TextBox 1"/>
+          <p:cNvSpPr txBox="1"/>
+          <p:nvPr/>
+        </p:nvSpPr>
+        <p:spPr>
+          <a:xfrm>
+            <a:off x="457200" y="182880"/>
+            <a:ext cx="8229600" cy="457200"/>
+          </a:xfrm>
+          <a:prstGeom prst="rect">
+            <a:avLst/>
+          </a:prstGeom>
+          <a:noFill/>
+        </p:spPr>
+        <p:txBody>
+          <a:bodyPr wrap="none">
+            <a:spAutoFit/>
+          </a:bodyPr>
+          <a:lstStyle/>
+          <a:p>
+            <a:pPr>
+              <a:defRPr sz="2400" b="1">
+                <a:solidFill>
+                  <a:srgbClr val="CC0000"/>
+                </a:solidFill>
+              </a:defRPr>
+            </a:pPr>
+            <a:r>
+              <a:t>Cash Flow Sankey</a:t>
+            </a:r>
+          </a:p>
+        </p:txBody>
+      </p:sp>
+      <p:pic>
+        <p:nvPicPr>
+          <p:cNvPr id="3" name="Picture 2" descr="chart_cash_flow_sankey.png"/>
+          <p:cNvPicPr>
+            <a:picLocks noChangeAspect="1"/>
+          </p:cNvPicPr>
+          <p:nvPr/>
+        </p:nvPicPr>
+        <p:blipFill>
+          <a:blip r:embed="rId2"/>
+          <a:stretch>
+            <a:fillRect/>
+          </a:stretch>
+        </p:blipFill>
+        <p:spPr>
+          <a:xfrm>
+            <a:off x="457200" y="731520"/>
+            <a:ext cx="8229600" cy="4114800"/>
+          </a:xfrm>
+          <a:prstGeom prst="rect">
+            <a:avLst/>
+          </a:prstGeom>
+        </p:spPr>
+      </p:pic>
+      <p:sp>
+        <p:nvSpPr>
+          <p:cNvPr id="4" name="TextBox 3"/>
+          <p:cNvSpPr txBox="1"/>
+          <p:nvPr/>
+        </p:nvSpPr>
+        <p:spPr>
+          <a:xfrm>
+            <a:off x="457200" y="5029200"/>
+            <a:ext cx="8229600" cy="1371600"/>
+          </a:xfrm>
+          <a:prstGeom prst="rect">
+            <a:avLst/>
+          </a:prstGeom>
+          <a:noFill/>
+        </p:spPr>
+        <p:txBody>
+          <a:bodyPr wrap="square">
+            <a:spAutoFit/>
+          </a:bodyPr>
+          <a:lstStyle/>
+          <a:p>
+            <a:pPr>
+              <a:defRPr sz="1200">
+                <a:solidFill>
+                  <a:srgbClr val="646464"/>
+                </a:solidFill>
+              </a:defRPr>
+            </a:pPr>
+            <a:r>
+              <a:t>Visualizes cash allocation: CapEx, dividends, buybacks, debt repayment. Shows management priorities.</a:t>
+            </a:r>
+          </a:p>
+        </p:txBody>
+      </p:sp>
+    </p:spTree>
+  </p:cSld>
+  <p:clrMapOvr>
+    <a:masterClrMapping/>
+  </p:clrMapOvr>
+</p:sld>
+</file>
+
+<file path=ppt/slides/slide31.xml><?xml version="1.0" encoding="utf-8"?>
+<p:sld xmlns:a="http://schemas.openxmlformats.org/drawingml/2006/main" xmlns:p="http://schemas.openxmlformats.org/presentationml/2006/main" xmlns:r="http://schemas.openxmlformats.org/officeDocument/2006/relationships">
+  <p:cSld>
+    <p:spTree>
+      <p:nvGrpSpPr>
+        <p:cNvPr id="1" name=""/>
+        <p:cNvGrpSpPr/>
+        <p:nvPr/>
+      </p:nvGrpSpPr>
+      <p:grpSpPr/>
+      <p:sp>
+        <p:nvSpPr>
+          <p:cNvPr id="2" name="TextBox 1"/>
+          <p:cNvSpPr txBox="1"/>
+          <p:nvPr/>
+        </p:nvSpPr>
+        <p:spPr>
+          <a:xfrm>
+            <a:off x="457200" y="182880"/>
+            <a:ext cx="8229600" cy="457200"/>
+          </a:xfrm>
+          <a:prstGeom prst="rect">
+            <a:avLst/>
+          </a:prstGeom>
+          <a:noFill/>
+        </p:spPr>
+        <p:txBody>
+          <a:bodyPr wrap="none">
+            <a:spAutoFit/>
+          </a:bodyPr>
+          <a:lstStyle/>
+          <a:p>
+            <a:pPr>
+              <a:defRPr sz="2400" b="1">
+                <a:solidFill>
+                  <a:srgbClr val="CC0000"/>
+                </a:solidFill>
+              </a:defRPr>
+            </a:pPr>
+            <a:r>
+              <a:t>Risk Trends</a:t>
+            </a:r>
+          </a:p>
+        </p:txBody>
+      </p:sp>
+      <p:pic>
+        <p:nvPicPr>
+          <p:cNvPr id="3" name="Picture 2" descr="chart_risk_trends.png"/>
+          <p:cNvPicPr>
+            <a:picLocks noChangeAspect="1"/>
+          </p:cNvPicPr>
+          <p:nvPr/>
+        </p:nvPicPr>
+        <p:blipFill>
+          <a:blip r:embed="rId2"/>
+          <a:stretch>
+            <a:fillRect/>
+          </a:stretch>
+        </p:blipFill>
+        <p:spPr>
+          <a:xfrm>
+            <a:off x="457200" y="731520"/>
+            <a:ext cx="8229600" cy="4114800"/>
+          </a:xfrm>
+          <a:prstGeom prst="rect">
+            <a:avLst/>
+          </a:prstGeom>
+        </p:spPr>
+      </p:pic>
+      <p:sp>
+        <p:nvSpPr>
+          <p:cNvPr id="4" name="TextBox 3"/>
+          <p:cNvSpPr txBox="1"/>
+          <p:nvPr/>
+        </p:nvSpPr>
+        <p:spPr>
+          <a:xfrm>
+            <a:off x="457200" y="5029200"/>
+            <a:ext cx="8229600" cy="1371600"/>
+          </a:xfrm>
+          <a:prstGeom prst="rect">
+            <a:avLst/>
+          </a:prstGeom>
+          <a:noFill/>
+        </p:spPr>
+        <p:txBody>
+          <a:bodyPr wrap="square">
+            <a:spAutoFit/>
+          </a:bodyPr>
+          <a:lstStyle/>
+          <a:p>
+            <a:pPr>
+              <a:defRPr sz="1200">
+                <a:solidFill>
+                  <a:srgbClr val="646464"/>
+                </a:solidFill>
+              </a:defRPr>
+            </a:pPr>
+            <a:r>
+              <a:t>Stacked area of risk mentions (shrink, theft, markdown) over time. Rising trends signal increasing concerns.</a:t>
+            </a:r>
+          </a:p>
+        </p:txBody>
+      </p:sp>
+    </p:spTree>
+  </p:cSld>
+  <p:clrMapOvr>
+    <a:masterClrMapping/>
+  </p:clrMapOvr>
+</p:sld>
+</file>
+
+<file path=ppt/slides/slide32.xml><?xml version="1.0" encoding="utf-8"?>
+<p:sld xmlns:a="http://schemas.openxmlformats.org/drawingml/2006/main" xmlns:p="http://schemas.openxmlformats.org/presentationml/2006/main" xmlns:r="http://schemas.openxmlformats.org/officeDocument/2006/relationships">
+  <p:cSld>
+    <p:spTree>
+      <p:nvGrpSpPr>
+        <p:cNvPr id="1" name=""/>
+        <p:cNvGrpSpPr/>
+        <p:nvPr/>
+      </p:nvGrpSpPr>
+      <p:grpSpPr/>
+      <p:sp>
+        <p:nvSpPr>
+          <p:cNvPr id="2" name="TextBox 1"/>
+          <p:cNvSpPr txBox="1"/>
+          <p:nvPr/>
+        </p:nvSpPr>
+        <p:spPr>
+          <a:xfrm>
+            <a:off x="457200" y="182880"/>
+            <a:ext cx="8229600" cy="457200"/>
+          </a:xfrm>
+          <a:prstGeom prst="rect">
+            <a:avLst/>
+          </a:prstGeom>
+          <a:noFill/>
+        </p:spPr>
+        <p:txBody>
+          <a:bodyPr wrap="none">
+            <a:spAutoFit/>
+          </a:bodyPr>
+          <a:lstStyle/>
+          <a:p>
+            <a:pPr>
+              <a:defRPr sz="2400" b="1">
+                <a:solidFill>
+                  <a:srgbClr val="CC0000"/>
+                </a:solidFill>
+              </a:defRPr>
+            </a:pPr>
+            <a:r>
+              <a:t>Risk Heatmap</a:t>
+            </a:r>
+          </a:p>
+        </p:txBody>
+      </p:sp>
+      <p:pic>
+        <p:nvPicPr>
+          <p:cNvPr id="3" name="Picture 2" descr="chart_risk_heatmap_grid.png"/>
+          <p:cNvPicPr>
+            <a:picLocks noChangeAspect="1"/>
+          </p:cNvPicPr>
+          <p:nvPr/>
+        </p:nvPicPr>
+        <p:blipFill>
+          <a:blip r:embed="rId2"/>
+          <a:stretch>
+            <a:fillRect/>
+          </a:stretch>
+        </p:blipFill>
+        <p:spPr>
+          <a:xfrm>
+            <a:off x="457200" y="731520"/>
+            <a:ext cx="8229600" cy="4114800"/>
+          </a:xfrm>
+          <a:prstGeom prst="rect">
+            <a:avLst/>
+          </a:prstGeom>
+        </p:spPr>
+      </p:pic>
+      <p:sp>
+        <p:nvSpPr>
+          <p:cNvPr id="4" name="TextBox 3"/>
+          <p:cNvSpPr txBox="1"/>
+          <p:nvPr/>
+        </p:nvSpPr>
+        <p:spPr>
+          <a:xfrm>
+            <a:off x="457200" y="5029200"/>
+            <a:ext cx="8229600" cy="1371600"/>
+          </a:xfrm>
+          <a:prstGeom prst="rect">
+            <a:avLst/>
+          </a:prstGeom>
+          <a:noFill/>
+        </p:spPr>
+        <p:txBody>
+          <a:bodyPr wrap="square">
+            <a:spAutoFit/>
+          </a:bodyPr>
+          <a:lstStyle/>
+          <a:p>
+            <a:pPr>
+              <a:defRPr sz="1200">
+                <a:solidFill>
+                  <a:srgbClr val="646464"/>
+                </a:solidFill>
+              </a:defRPr>
+            </a:pPr>
+            <a:r>
+              <a:t>Intensity grid showing risk types by period. Dark cells = high concern in that area.</a:t>
             </a:r>
           </a:p>
         </p:txBody>
@@ -6114,243 +6488,154 @@
       <p:grpSpPr/>
       <p:sp>
         <p:nvSpPr>
-          <p:cNvPr id="2" name="Title 1"/>
-          <p:cNvSpPr>
-            <a:spLocks noGrp="1"/>
-          </p:cNvSpPr>
-          <p:nvPr>
-            <p:ph type="title"/>
-          </p:nvPr>
-        </p:nvSpPr>
-        <p:spPr/>
-        <p:txBody>
-          <a:bodyPr/>
-          <a:lstStyle/>
-          <a:p>
-            <a:r>
-              <a:t>Baseline: FY2024 Annual Performance</a:t>
-            </a:r>
-          </a:p>
-        </p:txBody>
-      </p:sp>
-      <p:graphicFrame>
-        <p:nvGraphicFramePr>
-          <p:cNvPr id="3" name="Table 2"/>
-          <p:cNvGraphicFramePr>
-            <a:graphicFrameLocks noGrp="1"/>
-          </p:cNvGraphicFramePr>
-          <p:nvPr/>
-        </p:nvGraphicFramePr>
-        <p:xfrm>
-          <a:off x="1828800" y="1828800"/>
-          <a:ext cx="5486400" cy="2743200"/>
-        </p:xfrm>
-        <a:graphic>
-          <a:graphicData uri="http://schemas.openxmlformats.org/drawingml/2006/table">
-            <a:tbl>
-              <a:tblPr firstRow="1" bandRow="1">
-                <a:tableStyleId>{5C22544A-7EE6-4342-B048-85BDC9FD1C3A}</a:tableStyleId>
-              </a:tblPr>
-              <a:tblGrid>
-                <a:gridCol w="2743200"/>
-                <a:gridCol w="2743200"/>
-              </a:tblGrid>
-              <a:tr h="457200">
-                <a:tc>
-                  <a:txBody>
-                    <a:bodyPr/>
-                    <a:lstStyle/>
-                    <a:p>
-                      <a:pPr>
-                        <a:defRPr sz="1400"/>
-                      </a:pPr>
-                      <a:r>
-                        <a:t>Metric</a:t>
-                      </a:r>
-                    </a:p>
-                  </a:txBody>
-                  <a:tcPr/>
-                </a:tc>
-                <a:tc>
-                  <a:txBody>
-                    <a:bodyPr/>
-                    <a:lstStyle/>
-                    <a:p>
-                      <a:pPr>
-                        <a:defRPr sz="1400"/>
-                      </a:pPr>
-                      <a:r>
-                        <a:t>Value</a:t>
-                      </a:r>
-                    </a:p>
-                  </a:txBody>
-                  <a:tcPr/>
-                </a:tc>
-              </a:tr>
-              <a:tr h="457200">
-                <a:tc>
-                  <a:txBody>
-                    <a:bodyPr/>
-                    <a:lstStyle/>
-                    <a:p>
-                      <a:pPr>
-                        <a:defRPr sz="1400"/>
-                      </a:pPr>
-                      <a:r>
-                        <a:t>Net Sales</a:t>
-                      </a:r>
-                    </a:p>
-                  </a:txBody>
-                  <a:tcPr/>
-                </a:tc>
-                <a:tc>
-                  <a:txBody>
-                    <a:bodyPr/>
-                    <a:lstStyle/>
-                    <a:p>
-                      <a:pPr>
-                        <a:defRPr sz="1400"/>
-                      </a:pPr>
-                      <a:r>
-                        <a:t>$106.57B</a:t>
-                      </a:r>
-                    </a:p>
-                  </a:txBody>
-                  <a:tcPr/>
-                </a:tc>
-              </a:tr>
-              <a:tr h="457200">
-                <a:tc>
-                  <a:txBody>
-                    <a:bodyPr/>
-                    <a:lstStyle/>
-                    <a:p>
-                      <a:pPr>
-                        <a:defRPr sz="1400"/>
-                      </a:pPr>
-                      <a:r>
-                        <a:t>Operating Income</a:t>
-                      </a:r>
-                    </a:p>
-                  </a:txBody>
-                  <a:tcPr/>
-                </a:tc>
-                <a:tc>
-                  <a:txBody>
-                    <a:bodyPr/>
-                    <a:lstStyle/>
-                    <a:p>
-                      <a:pPr>
-                        <a:defRPr sz="1400"/>
-                      </a:pPr>
-                      <a:r>
-                        <a:t>$5.57B</a:t>
-                      </a:r>
-                    </a:p>
-                  </a:txBody>
-                  <a:tcPr/>
-                </a:tc>
-              </a:tr>
-              <a:tr h="457200">
-                <a:tc>
-                  <a:txBody>
-                    <a:bodyPr/>
-                    <a:lstStyle/>
-                    <a:p>
-                      <a:pPr>
-                        <a:defRPr sz="1400"/>
-                      </a:pPr>
-                      <a:r>
-                        <a:t>Operating Margin</a:t>
-                      </a:r>
-                    </a:p>
-                  </a:txBody>
-                  <a:tcPr/>
-                </a:tc>
-                <a:tc>
-                  <a:txBody>
-                    <a:bodyPr/>
-                    <a:lstStyle/>
-                    <a:p>
-                      <a:pPr>
-                        <a:defRPr sz="1400"/>
-                      </a:pPr>
-                      <a:r>
-                        <a:t>5.22%</a:t>
-                      </a:r>
-                    </a:p>
-                  </a:txBody>
-                  <a:tcPr/>
-                </a:tc>
-              </a:tr>
-              <a:tr h="457200">
-                <a:tc>
-                  <a:txBody>
-                    <a:bodyPr/>
-                    <a:lstStyle/>
-                    <a:p>
-                      <a:pPr>
-                        <a:defRPr sz="1400"/>
-                      </a:pPr>
-                      <a:r>
-                        <a:t>Gross Margin</a:t>
-                      </a:r>
-                    </a:p>
-                  </a:txBody>
-                  <a:tcPr/>
-                </a:tc>
-                <a:tc>
-                  <a:txBody>
-                    <a:bodyPr/>
-                    <a:lstStyle/>
-                    <a:p>
-                      <a:pPr>
-                        <a:defRPr sz="1400"/>
-                      </a:pPr>
-                      <a:r>
-                        <a:t>28.21%</a:t>
-                      </a:r>
-                    </a:p>
-                  </a:txBody>
-                  <a:tcPr/>
-                </a:tc>
-              </a:tr>
-              <a:tr h="457200">
-                <a:tc>
-                  <a:txBody>
-                    <a:bodyPr/>
-                    <a:lstStyle/>
-                    <a:p>
-                      <a:pPr>
-                        <a:defRPr sz="1400"/>
-                      </a:pPr>
-                      <a:r>
-                        <a:t>Inventory</a:t>
-                      </a:r>
-                    </a:p>
-                  </a:txBody>
-                  <a:tcPr/>
-                </a:tc>
-                <a:tc>
-                  <a:txBody>
-                    <a:bodyPr/>
-                    <a:lstStyle/>
-                    <a:p>
-                      <a:pPr>
-                        <a:defRPr sz="1400"/>
-                      </a:pPr>
-                      <a:r>
-                        <a:t>$12.74B</a:t>
-                      </a:r>
-                    </a:p>
-                  </a:txBody>
-                  <a:tcPr/>
-                </a:tc>
-              </a:tr>
-            </a:tbl>
-          </a:graphicData>
-        </a:graphic>
-      </p:graphicFrame>
+          <p:cNvPr id="2" name="Rectangle 1"/>
+          <p:cNvSpPr/>
+          <p:nvPr/>
+        </p:nvSpPr>
+        <p:spPr>
+          <a:xfrm>
+            <a:off x="0" y="2286000"/>
+            <a:ext cx="9144000" cy="1828800"/>
+          </a:xfrm>
+          <a:prstGeom prst="rect">
+            <a:avLst/>
+          </a:prstGeom>
+          <a:solidFill>
+            <a:srgbClr val="CC0000"/>
+          </a:solidFill>
+          <a:ln>
+            <a:solidFill>
+              <a:srgbClr val="CC0000"/>
+            </a:solidFill>
+          </a:ln>
+        </p:spPr>
+        <p:style>
+          <a:lnRef idx="1">
+            <a:schemeClr val="accent1"/>
+          </a:lnRef>
+          <a:fillRef idx="3">
+            <a:schemeClr val="accent1"/>
+          </a:fillRef>
+          <a:effectRef idx="2">
+            <a:schemeClr val="accent1"/>
+          </a:effectRef>
+          <a:fontRef idx="minor">
+            <a:schemeClr val="lt1"/>
+          </a:fontRef>
+        </p:style>
+        <p:txBody>
+          <a:bodyPr rtlCol="0" anchor="ctr"/>
+          <a:lstStyle/>
+          <a:p>
+            <a:pPr algn="ctr"/>
+          </a:p>
+        </p:txBody>
+      </p:sp>
+      <p:sp>
+        <p:nvSpPr>
+          <p:cNvPr id="3" name="TextBox 2"/>
+          <p:cNvSpPr txBox="1"/>
+          <p:nvPr/>
+        </p:nvSpPr>
+        <p:spPr>
+          <a:xfrm>
+            <a:off x="457200" y="2468880"/>
+            <a:ext cx="8229600" cy="548640"/>
+          </a:xfrm>
+          <a:prstGeom prst="rect">
+            <a:avLst/>
+          </a:prstGeom>
+          <a:noFill/>
+        </p:spPr>
+        <p:txBody>
+          <a:bodyPr wrap="none">
+            <a:spAutoFit/>
+          </a:bodyPr>
+          <a:lstStyle/>
+          <a:p>
+            <a:pPr algn="ctr">
+              <a:defRPr sz="2400" b="1">
+                <a:solidFill>
+                  <a:srgbClr val="FFFFFF"/>
+                </a:solidFill>
+              </a:defRPr>
+            </a:pPr>
+            <a:r>
+              <a:t>PILLAR 1</a:t>
+            </a:r>
+          </a:p>
+        </p:txBody>
+      </p:sp>
+      <p:sp>
+        <p:nvSpPr>
+          <p:cNvPr id="4" name="TextBox 3"/>
+          <p:cNvSpPr txBox="1"/>
+          <p:nvPr/>
+        </p:nvSpPr>
+        <p:spPr>
+          <a:xfrm>
+            <a:off x="457200" y="3017520"/>
+            <a:ext cx="8229600" cy="731520"/>
+          </a:xfrm>
+          <a:prstGeom prst="rect">
+            <a:avLst/>
+          </a:prstGeom>
+          <a:noFill/>
+        </p:spPr>
+        <p:txBody>
+          <a:bodyPr wrap="none">
+            <a:spAutoFit/>
+          </a:bodyPr>
+          <a:lstStyle/>
+          <a:p>
+            <a:pPr algn="ctr">
+              <a:defRPr sz="4400" b="1">
+                <a:solidFill>
+                  <a:srgbClr val="FFFFFF"/>
+                </a:solidFill>
+              </a:defRPr>
+            </a:pPr>
+            <a:r>
+              <a:t>Growth &amp; Revenue</a:t>
+            </a:r>
+          </a:p>
+        </p:txBody>
+      </p:sp>
+      <p:sp>
+        <p:nvSpPr>
+          <p:cNvPr id="5" name="TextBox 4"/>
+          <p:cNvSpPr txBox="1"/>
+          <p:nvPr/>
+        </p:nvSpPr>
+        <p:spPr>
+          <a:xfrm>
+            <a:off x="457200" y="4572000"/>
+            <a:ext cx="8229600" cy="457200"/>
+          </a:xfrm>
+          <a:prstGeom prst="rect">
+            <a:avLst/>
+          </a:prstGeom>
+          <a:noFill/>
+        </p:spPr>
+        <p:txBody>
+          <a:bodyPr wrap="none">
+            <a:spAutoFit/>
+          </a:bodyPr>
+          <a:lstStyle/>
+          <a:p>
+            <a:pPr algn="ctr">
+              <a:defRPr sz="2400" i="1">
+                <a:solidFill>
+                  <a:srgbClr val="646464"/>
+                </a:solidFill>
+              </a:defRPr>
+            </a:pPr>
+            <a:r>
+              <a:t>"How is the business growing?"</a:t>
+            </a:r>
+          </a:p>
+        </p:txBody>
+      </p:sp>
     </p:spTree>
   </p:cSld>
   <p:clrMapOvr>
@@ -6377,7 +6662,7 @@
         </p:nvSpPr>
         <p:spPr>
           <a:xfrm>
-            <a:off x="457200" y="274320"/>
+            <a:off x="457200" y="182880"/>
             <a:ext cx="8229600" cy="457200"/>
           </a:xfrm>
           <a:prstGeom prst="rect">
@@ -6392,24 +6677,52 @@
           <a:lstStyle/>
           <a:p>
             <a:pPr>
-              <a:defRPr sz="2800" b="1"/>
-            </a:pPr>
-            <a:r>
-              <a:t>Revenue vs Inventory Growth Trend</a:t>
-            </a:r>
-          </a:p>
-        </p:txBody>
-      </p:sp>
-      <p:sp>
-        <p:nvSpPr>
-          <p:cNvPr id="3" name="TextBox 2"/>
+              <a:defRPr sz="2400" b="1">
+                <a:solidFill>
+                  <a:srgbClr val="CC0000"/>
+                </a:solidFill>
+              </a:defRPr>
+            </a:pPr>
+            <a:r>
+              <a:t>Revenue &amp; Net Income (10-Year)</a:t>
+            </a:r>
+          </a:p>
+        </p:txBody>
+      </p:sp>
+      <p:pic>
+        <p:nvPicPr>
+          <p:cNvPr id="3" name="Picture 2" descr="chart_revenue_netincome_annual.png"/>
+          <p:cNvPicPr>
+            <a:picLocks noChangeAspect="1"/>
+          </p:cNvPicPr>
+          <p:nvPr/>
+        </p:nvPicPr>
+        <p:blipFill>
+          <a:blip r:embed="rId2"/>
+          <a:stretch>
+            <a:fillRect/>
+          </a:stretch>
+        </p:blipFill>
+        <p:spPr>
+          <a:xfrm>
+            <a:off x="457200" y="731520"/>
+            <a:ext cx="8229600" cy="4114800"/>
+          </a:xfrm>
+          <a:prstGeom prst="rect">
+            <a:avLst/>
+          </a:prstGeom>
+        </p:spPr>
+      </p:pic>
+      <p:sp>
+        <p:nvSpPr>
+          <p:cNvPr id="4" name="TextBox 3"/>
           <p:cNvSpPr txBox="1"/>
           <p:nvPr/>
         </p:nvSpPr>
         <p:spPr>
           <a:xfrm>
-            <a:off x="457200" y="914400"/>
-            <a:ext cx="8229600" cy="914400"/>
+            <a:off x="457200" y="5029200"/>
+            <a:ext cx="8229600" cy="1371600"/>
           </a:xfrm>
           <a:prstGeom prst="rect">
             <a:avLst/>
@@ -6417,160 +6730,20 @@
           <a:noFill/>
         </p:spPr>
         <p:txBody>
-          <a:bodyPr wrap="none">
+          <a:bodyPr wrap="square">
             <a:spAutoFit/>
           </a:bodyPr>
           <a:lstStyle/>
           <a:p>
             <a:pPr>
-              <a:spcAft>
-                <a:spcPts val="600"/>
-              </a:spcAft>
-              <a:defRPr sz="1400"/>
-            </a:pPr>
-            <a:r>
-              <a:t>Dual-axis chart comparing revenue and inventory growth over time:</a:t>
-            </a:r>
-          </a:p>
-          <a:p>
-            <a:pPr>
-              <a:spcAft>
-                <a:spcPts val="1200"/>
-              </a:spcAft>
-              <a:defRPr sz="1400"/>
-            </a:pPr>
-            <a:r>
-              <a:t>📊 Click to view: </a:t>
-            </a:r>
-            <a:r>
-              <a:rPr sz="1400" u="sng">
-                <a:solidFill>
-                  <a:srgbClr val="0000FF"/>
-                </a:solidFill>
-                <a:hlinkClick r:id="rId2"/>
-              </a:rPr>
-              <a:t>Revenue vs Inventory Interactive Chart</a:t>
-            </a:r>
-          </a:p>
-        </p:txBody>
-      </p:sp>
-      <p:sp>
-        <p:nvSpPr>
-          <p:cNvPr id="4" name="TextBox 3"/>
-          <p:cNvSpPr txBox="1"/>
-          <p:nvPr/>
-        </p:nvSpPr>
-        <p:spPr>
-          <a:xfrm>
-            <a:off x="457200" y="2286000"/>
-            <a:ext cx="8229600" cy="3657600"/>
-          </a:xfrm>
-          <a:prstGeom prst="rect">
-            <a:avLst/>
-          </a:prstGeom>
-          <a:noFill/>
-        </p:spPr>
-        <p:txBody>
-          <a:bodyPr wrap="none">
-            <a:spAutoFit/>
-          </a:bodyPr>
-          <a:lstStyle/>
-          <a:p>
-            <a:pPr>
-              <a:spcAft>
-                <a:spcPts val="800"/>
-              </a:spcAft>
-              <a:defRPr sz="1600" b="1"/>
-            </a:pPr>
-            <a:r>
-              <a:t>Key Insights (Q3 2024 vs Q3 2025):</a:t>
-            </a:r>
-          </a:p>
-          <a:p>
-            <a:pPr>
-              <a:spcAft>
-                <a:spcPts val="400"/>
-              </a:spcAft>
-              <a:defRPr sz="1400" b="1"/>
-            </a:pPr>
-            <a:r>
-              <a:t>Revenue (Quarterly):</a:t>
-            </a:r>
-          </a:p>
-          <a:p>
-            <a:pPr lvl="1">
-              <a:defRPr sz="1400"/>
-            </a:pPr>
-            <a:r>
-              <a:t>• Q3 2024: $25.23B</a:t>
-            </a:r>
-          </a:p>
-          <a:p>
-            <a:pPr lvl="1">
-              <a:spcAft>
-                <a:spcPts val="800"/>
-              </a:spcAft>
-              <a:defRPr sz="1400"/>
-            </a:pPr>
-            <a:r>
-              <a:t>• Q3 2025: $25.27B</a:t>
-            </a:r>
-          </a:p>
-          <a:p>
-            <a:pPr>
-              <a:spcAft>
-                <a:spcPts val="400"/>
-              </a:spcAft>
-              <a:defRPr sz="1400" b="1"/>
-            </a:pPr>
-            <a:r>
-              <a:t>Inventory:</a:t>
-            </a:r>
-          </a:p>
-          <a:p>
-            <a:pPr lvl="1">
-              <a:defRPr sz="1400"/>
-            </a:pPr>
-            <a:r>
-              <a:t>• Q3 2024: $15.16B</a:t>
-            </a:r>
-          </a:p>
-          <a:p>
-            <a:pPr lvl="1">
-              <a:spcAft>
-                <a:spcPts val="1200"/>
-              </a:spcAft>
-              <a:defRPr sz="1400"/>
-            </a:pPr>
-            <a:r>
-              <a:t>• Q3 2025: $14.90B</a:t>
-            </a:r>
-          </a:p>
-          <a:p>
-            <a:pPr>
-              <a:spcAft>
-                <a:spcPts val="600"/>
-              </a:spcAft>
-              <a:defRPr sz="1400" b="1"/>
-            </a:pPr>
-            <a:r>
-              <a:t>Year-over-Year Growth:</a:t>
-            </a:r>
-          </a:p>
-          <a:p>
-            <a:pPr lvl="1">
-              <a:defRPr sz="1400"/>
-            </a:pPr>
-            <a:r>
-              <a:t>✅ Revenue: +0.2% YoY</a:t>
-            </a:r>
-          </a:p>
-          <a:p>
-            <a:pPr lvl="1">
-              <a:defRPr sz="1400"/>
-            </a:pPr>
-            <a:r>
-              <a:t>✅ Inventory: -1.8% YoY</a:t>
+              <a:defRPr sz="1200">
+                <a:solidFill>
+                  <a:srgbClr val="646464"/>
+                </a:solidFill>
+              </a:defRPr>
+            </a:pPr>
+            <a:r>
+              <a:t>Shows Target's 10-year revenue and net income trajectory from annual 10-K filings. Look for consistent growth and whether profits keep pace with revenue.</a:t>
             </a:r>
           </a:p>
         </p:txBody>
@@ -6601,7 +6774,7 @@
         </p:nvSpPr>
         <p:spPr>
           <a:xfrm>
-            <a:off x="457200" y="274320"/>
+            <a:off x="457200" y="182880"/>
             <a:ext cx="8229600" cy="457200"/>
           </a:xfrm>
           <a:prstGeom prst="rect">
@@ -6616,24 +6789,52 @@
           <a:lstStyle/>
           <a:p>
             <a:pPr>
-              <a:defRPr sz="2800" b="1"/>
-            </a:pPr>
-            <a:r>
-              <a:t>Operating Margin Waterfall - Quarterly Trend</a:t>
-            </a:r>
-          </a:p>
-        </p:txBody>
-      </p:sp>
-      <p:sp>
-        <p:nvSpPr>
-          <p:cNvPr id="3" name="TextBox 2"/>
+              <a:defRPr sz="2400" b="1">
+                <a:solidFill>
+                  <a:srgbClr val="CC0000"/>
+                </a:solidFill>
+              </a:defRPr>
+            </a:pPr>
+            <a:r>
+              <a:t>Revenue Growth YoY</a:t>
+            </a:r>
+          </a:p>
+        </p:txBody>
+      </p:sp>
+      <p:pic>
+        <p:nvPicPr>
+          <p:cNvPr id="3" name="Picture 2" descr="chart_revenue_growth_yoy.png"/>
+          <p:cNvPicPr>
+            <a:picLocks noChangeAspect="1"/>
+          </p:cNvPicPr>
+          <p:nvPr/>
+        </p:nvPicPr>
+        <p:blipFill>
+          <a:blip r:embed="rId2"/>
+          <a:stretch>
+            <a:fillRect/>
+          </a:stretch>
+        </p:blipFill>
+        <p:spPr>
+          <a:xfrm>
+            <a:off x="457200" y="731520"/>
+            <a:ext cx="8229600" cy="4114800"/>
+          </a:xfrm>
+          <a:prstGeom prst="rect">
+            <a:avLst/>
+          </a:prstGeom>
+        </p:spPr>
+      </p:pic>
+      <p:sp>
+        <p:nvSpPr>
+          <p:cNvPr id="4" name="TextBox 3"/>
           <p:cNvSpPr txBox="1"/>
           <p:nvPr/>
         </p:nvSpPr>
         <p:spPr>
           <a:xfrm>
-            <a:off x="457200" y="914400"/>
-            <a:ext cx="8229600" cy="914400"/>
+            <a:off x="457200" y="5029200"/>
+            <a:ext cx="8229600" cy="1371600"/>
           </a:xfrm>
           <a:prstGeom prst="rect">
             <a:avLst/>
@@ -6641,160 +6842,20 @@
           <a:noFill/>
         </p:spPr>
         <p:txBody>
-          <a:bodyPr wrap="none">
+          <a:bodyPr wrap="square">
             <a:spAutoFit/>
           </a:bodyPr>
           <a:lstStyle/>
           <a:p>
             <a:pPr>
-              <a:spcAft>
-                <a:spcPts val="600"/>
-              </a:spcAft>
-              <a:defRPr sz="1400"/>
-            </a:pPr>
-            <a:r>
-              <a:t>Waterfall chart showing quarterly operating margin changes:</a:t>
-            </a:r>
-          </a:p>
-          <a:p>
-            <a:pPr>
-              <a:spcAft>
-                <a:spcPts val="1200"/>
-              </a:spcAft>
-              <a:defRPr sz="1400"/>
-            </a:pPr>
-            <a:r>
-              <a:t>📊 Click to view: </a:t>
-            </a:r>
-            <a:r>
-              <a:rPr sz="1400" u="sng">
-                <a:solidFill>
-                  <a:srgbClr val="0000FF"/>
-                </a:solidFill>
-                <a:hlinkClick r:id="rId2"/>
-              </a:rPr>
-              <a:t>Operating Margin Waterfall Chart</a:t>
-            </a:r>
-          </a:p>
-        </p:txBody>
-      </p:sp>
-      <p:sp>
-        <p:nvSpPr>
-          <p:cNvPr id="4" name="TextBox 3"/>
-          <p:cNvSpPr txBox="1"/>
-          <p:nvPr/>
-        </p:nvSpPr>
-        <p:spPr>
-          <a:xfrm>
-            <a:off x="457200" y="2286000"/>
-            <a:ext cx="8229600" cy="3657600"/>
-          </a:xfrm>
-          <a:prstGeom prst="rect">
-            <a:avLst/>
-          </a:prstGeom>
-          <a:noFill/>
-        </p:spPr>
-        <p:txBody>
-          <a:bodyPr wrap="none">
-            <a:spAutoFit/>
-          </a:bodyPr>
-          <a:lstStyle/>
-          <a:p>
-            <a:pPr>
-              <a:spcAft>
-                <a:spcPts val="800"/>
-              </a:spcAft>
-              <a:defRPr sz="1600" b="1"/>
-            </a:pPr>
-            <a:r>
-              <a:t>Key Insights:</a:t>
-            </a:r>
-          </a:p>
-          <a:p>
-            <a:pPr>
-              <a:spcAft>
-                <a:spcPts val="400"/>
-              </a:spcAft>
-              <a:defRPr sz="1400"/>
-            </a:pPr>
-            <a:r>
-              <a:t>• FY2024 Baseline: 5.22%</a:t>
-            </a:r>
-          </a:p>
-          <a:p>
-            <a:pPr>
-              <a:spcAft>
-                <a:spcPts val="400"/>
-              </a:spcAft>
-              <a:defRPr sz="1400"/>
-            </a:pPr>
-            <a:r>
-              <a:t>• Q3 2025 Current: 3.75%</a:t>
-            </a:r>
-          </a:p>
-          <a:p>
-            <a:pPr>
-              <a:spcAft>
-                <a:spcPts val="1200"/>
-              </a:spcAft>
-              <a:defRPr sz="1400" b="1">
-                <a:solidFill>
-                  <a:srgbClr val="FF0000"/>
-                </a:solidFill>
-              </a:defRPr>
-            </a:pPr>
-            <a:r>
-              <a:t>⚠️ Net Change: -1.47 percentage points</a:t>
-            </a:r>
-          </a:p>
-          <a:p>
-            <a:pPr>
-              <a:spcAft>
-                <a:spcPts val="600"/>
-              </a:spcAft>
-              <a:defRPr sz="1400" b="1"/>
-            </a:pPr>
-            <a:r>
-              <a:t>Quarterly Performance Range:</a:t>
-            </a:r>
-          </a:p>
-          <a:p>
-            <a:pPr lvl="1">
-              <a:defRPr sz="1400">
-                <a:solidFill>
-                  <a:srgbClr val="FF0000"/>
-                </a:solidFill>
-              </a:defRPr>
-            </a:pPr>
-            <a:r>
-              <a:t>• Worst Quarter: Q2 2022 at 1.25%</a:t>
-            </a:r>
-          </a:p>
-          <a:p>
-            <a:pPr lvl="1">
-              <a:spcAft>
-                <a:spcPts val="1200"/>
-              </a:spcAft>
-              <a:defRPr sz="1400">
-                <a:solidFill>
-                  <a:srgbClr val="008000"/>
-                </a:solidFill>
-              </a:defRPr>
-            </a:pPr>
-            <a:r>
-              <a:t>• Best Quarter: Q2 2024 at 6.53%</a:t>
-            </a:r>
-          </a:p>
-          <a:p>
-            <a:pPr>
-              <a:defRPr sz="1300">
-                <a:solidFill>
-                  <a:srgbClr val="464646"/>
-                </a:solidFill>
-              </a:defRPr>
-            </a:pPr>
-            <a:r>
-              <a:t>📈 The waterfall chart shows quarter-over-quarter margin changes, helping identify inflection points and trends over time.</a:t>
+              <a:defRPr sz="1200">
+                <a:solidFill>
+                  <a:srgbClr val="646464"/>
+                </a:solidFill>
+              </a:defRPr>
+            </a:pPr>
+            <a:r>
+              <a:t>Tracks year-over-year revenue growth rates by quarter. Reveals acceleration or deceleration in growth momentum.</a:t>
             </a:r>
           </a:p>
         </p:txBody>
@@ -6825,7 +6886,7 @@
         </p:nvSpPr>
         <p:spPr>
           <a:xfrm>
-            <a:off x="457200" y="274320"/>
+            <a:off x="457200" y="182880"/>
             <a:ext cx="8229600" cy="457200"/>
           </a:xfrm>
           <a:prstGeom prst="rect">
@@ -6840,24 +6901,52 @@
           <a:lstStyle/>
           <a:p>
             <a:pPr>
-              <a:defRPr sz="2800" b="1"/>
-            </a:pPr>
-            <a:r>
-              <a:t>Inventory Efficiency Metrics</a:t>
-            </a:r>
-          </a:p>
-        </p:txBody>
-      </p:sp>
-      <p:sp>
-        <p:nvSpPr>
-          <p:cNvPr id="3" name="TextBox 2"/>
+              <a:defRPr sz="2400" b="1">
+                <a:solidFill>
+                  <a:srgbClr val="CC0000"/>
+                </a:solidFill>
+              </a:defRPr>
+            </a:pPr>
+            <a:r>
+              <a:t>Revenue vs Inventory Growth</a:t>
+            </a:r>
+          </a:p>
+        </p:txBody>
+      </p:sp>
+      <p:pic>
+        <p:nvPicPr>
+          <p:cNvPr id="3" name="Picture 2" descr="chart_revenue_vs_inventory.png"/>
+          <p:cNvPicPr>
+            <a:picLocks noChangeAspect="1"/>
+          </p:cNvPicPr>
+          <p:nvPr/>
+        </p:nvPicPr>
+        <p:blipFill>
+          <a:blip r:embed="rId2"/>
+          <a:stretch>
+            <a:fillRect/>
+          </a:stretch>
+        </p:blipFill>
+        <p:spPr>
+          <a:xfrm>
+            <a:off x="457200" y="731520"/>
+            <a:ext cx="8229600" cy="4114800"/>
+          </a:xfrm>
+          <a:prstGeom prst="rect">
+            <a:avLst/>
+          </a:prstGeom>
+        </p:spPr>
+      </p:pic>
+      <p:sp>
+        <p:nvSpPr>
+          <p:cNvPr id="4" name="TextBox 3"/>
           <p:cNvSpPr txBox="1"/>
           <p:nvPr/>
         </p:nvSpPr>
         <p:spPr>
           <a:xfrm>
-            <a:off x="457200" y="914400"/>
-            <a:ext cx="8229600" cy="914400"/>
+            <a:off x="457200" y="5029200"/>
+            <a:ext cx="8229600" cy="1371600"/>
           </a:xfrm>
           <a:prstGeom prst="rect">
             <a:avLst/>
@@ -6865,169 +6954,20 @@
           <a:noFill/>
         </p:spPr>
         <p:txBody>
-          <a:bodyPr wrap="none">
+          <a:bodyPr wrap="square">
             <a:spAutoFit/>
           </a:bodyPr>
           <a:lstStyle/>
           <a:p>
             <a:pPr>
-              <a:spcAft>
-                <a:spcPts val="600"/>
-              </a:spcAft>
-              <a:defRPr sz="1400"/>
-            </a:pPr>
-            <a:r>
-              <a:t>Dual-axis chart tracking Inventory Turnover Ratio and Days Sales of Inventory:</a:t>
-            </a:r>
-          </a:p>
-          <a:p>
-            <a:pPr>
-              <a:spcAft>
-                <a:spcPts val="1200"/>
-              </a:spcAft>
-              <a:defRPr sz="1400"/>
-            </a:pPr>
-            <a:r>
-              <a:t>📊 Click to view: </a:t>
-            </a:r>
-            <a:r>
-              <a:rPr sz="1400" u="sng">
-                <a:solidFill>
-                  <a:srgbClr val="0000FF"/>
-                </a:solidFill>
-                <a:hlinkClick r:id="rId2"/>
-              </a:rPr>
-              <a:t>Inventory Efficiency Interactive Chart</a:t>
-            </a:r>
-          </a:p>
-        </p:txBody>
-      </p:sp>
-      <p:sp>
-        <p:nvSpPr>
-          <p:cNvPr id="4" name="TextBox 3"/>
-          <p:cNvSpPr txBox="1"/>
-          <p:nvPr/>
-        </p:nvSpPr>
-        <p:spPr>
-          <a:xfrm>
-            <a:off x="457200" y="2286000"/>
-            <a:ext cx="8229600" cy="3657600"/>
-          </a:xfrm>
-          <a:prstGeom prst="rect">
-            <a:avLst/>
-          </a:prstGeom>
-          <a:noFill/>
-        </p:spPr>
-        <p:txBody>
-          <a:bodyPr wrap="none">
-            <a:spAutoFit/>
-          </a:bodyPr>
-          <a:lstStyle/>
-          <a:p>
-            <a:pPr>
-              <a:spcAft>
-                <a:spcPts val="800"/>
-              </a:spcAft>
-              <a:defRPr sz="1600" b="1"/>
-            </a:pPr>
-            <a:r>
-              <a:t>Key Insights:</a:t>
-            </a:r>
-          </a:p>
-          <a:p>
-            <a:pPr>
-              <a:spcAft>
-                <a:spcPts val="400"/>
-              </a:spcAft>
-              <a:defRPr sz="1400" b="1"/>
-            </a:pPr>
-            <a:r>
-              <a:t>Inventory Turnover Ratio (higher is better):</a:t>
-            </a:r>
-          </a:p>
-          <a:p>
-            <a:pPr lvl="1">
-              <a:defRPr sz="1400"/>
-            </a:pPr>
-            <a:r>
-              <a:t>• FY2024 Baseline: 6.00x</a:t>
-            </a:r>
-          </a:p>
-          <a:p>
-            <a:pPr lvl="1">
-              <a:defRPr sz="1400"/>
-            </a:pPr>
-            <a:r>
-              <a:t>• Q3 2025: 1.22x</a:t>
-            </a:r>
-          </a:p>
-          <a:p>
-            <a:pPr lvl="1">
-              <a:spcAft>
-                <a:spcPts val="1000"/>
-              </a:spcAft>
-              <a:defRPr sz="1400">
-                <a:solidFill>
-                  <a:srgbClr val="FF0000"/>
-                </a:solidFill>
-              </a:defRPr>
-            </a:pPr>
-            <a:r>
-              <a:t>⚠️ Change: -4.78x</a:t>
-            </a:r>
-          </a:p>
-          <a:p>
-            <a:pPr>
-              <a:spcAft>
-                <a:spcPts val="400"/>
-              </a:spcAft>
-              <a:defRPr sz="1400" b="1"/>
-            </a:pPr>
-            <a:r>
-              <a:t>Days Sales of Inventory (lower is better):</a:t>
-            </a:r>
-          </a:p>
-          <a:p>
-            <a:pPr lvl="1">
-              <a:defRPr sz="1400"/>
-            </a:pPr>
-            <a:r>
-              <a:t>• FY2024 Baseline: 60.8 days</a:t>
-            </a:r>
-          </a:p>
-          <a:p>
-            <a:pPr lvl="1">
-              <a:defRPr sz="1400"/>
-            </a:pPr>
-            <a:r>
-              <a:t>• Q3 2025: 299.8 days</a:t>
-            </a:r>
-          </a:p>
-          <a:p>
-            <a:pPr lvl="1">
-              <a:spcAft>
-                <a:spcPts val="1200"/>
-              </a:spcAft>
-              <a:defRPr sz="1400">
-                <a:solidFill>
-                  <a:srgbClr val="FF0000"/>
-                </a:solidFill>
-              </a:defRPr>
-            </a:pPr>
-            <a:r>
-              <a:t>⚠️ Change: +239.0 days</a:t>
-            </a:r>
-          </a:p>
-          <a:p>
-            <a:pPr>
-              <a:defRPr sz="1300" b="1">
-                <a:solidFill>
-                  <a:srgbClr val="FF0000"/>
-                </a:solidFill>
-              </a:defRPr>
-            </a:pPr>
-            <a:r>
-              <a:t>⚠️ Inventory efficiency has deteriorated - items are taking longer to sell</a:t>
+              <a:defRPr sz="1200">
+                <a:solidFill>
+                  <a:srgbClr val="646464"/>
+                </a:solidFill>
+              </a:defRPr>
+            </a:pPr>
+            <a:r>
+              <a:t>Compares revenue growth to inventory buildup. Inventory growing faster than sales signals potential markdown risk.</a:t>
             </a:r>
           </a:p>
         </p:txBody>
@@ -7058,7 +6998,7 @@
         </p:nvSpPr>
         <p:spPr>
           <a:xfrm>
-            <a:off x="457200" y="274320"/>
+            <a:off x="457200" y="182880"/>
             <a:ext cx="8229600" cy="457200"/>
           </a:xfrm>
           <a:prstGeom prst="rect">
@@ -7073,24 +7013,52 @@
           <a:lstStyle/>
           <a:p>
             <a:pPr>
-              <a:defRPr sz="2800" b="1"/>
-            </a:pPr>
-            <a:r>
-              <a:t>Debt Health &amp; Interest Coverage</a:t>
-            </a:r>
-          </a:p>
-        </p:txBody>
-      </p:sp>
-      <p:sp>
-        <p:nvSpPr>
-          <p:cNvPr id="3" name="TextBox 2"/>
+              <a:defRPr sz="2400" b="1">
+                <a:solidFill>
+                  <a:srgbClr val="CC0000"/>
+                </a:solidFill>
+              </a:defRPr>
+            </a:pPr>
+            <a:r>
+              <a:t>Revenue &amp; Net Income (Quarterly)</a:t>
+            </a:r>
+          </a:p>
+        </p:txBody>
+      </p:sp>
+      <p:pic>
+        <p:nvPicPr>
+          <p:cNvPr id="3" name="Picture 2" descr="chart_revenue_netincome_longterm.png"/>
+          <p:cNvPicPr>
+            <a:picLocks noChangeAspect="1"/>
+          </p:cNvPicPr>
+          <p:nvPr/>
+        </p:nvPicPr>
+        <p:blipFill>
+          <a:blip r:embed="rId2"/>
+          <a:stretch>
+            <a:fillRect/>
+          </a:stretch>
+        </p:blipFill>
+        <p:spPr>
+          <a:xfrm>
+            <a:off x="457200" y="731520"/>
+            <a:ext cx="8229600" cy="4114800"/>
+          </a:xfrm>
+          <a:prstGeom prst="rect">
+            <a:avLst/>
+          </a:prstGeom>
+        </p:spPr>
+      </p:pic>
+      <p:sp>
+        <p:nvSpPr>
+          <p:cNvPr id="4" name="TextBox 3"/>
           <p:cNvSpPr txBox="1"/>
           <p:nvPr/>
         </p:nvSpPr>
         <p:spPr>
           <a:xfrm>
-            <a:off x="457200" y="914400"/>
-            <a:ext cx="8229600" cy="914400"/>
+            <a:off x="457200" y="5029200"/>
+            <a:ext cx="8229600" cy="1371600"/>
           </a:xfrm>
           <a:prstGeom prst="rect">
             <a:avLst/>
@@ -7098,74 +7066,20 @@
           <a:noFill/>
         </p:spPr>
         <p:txBody>
-          <a:bodyPr wrap="none">
+          <a:bodyPr wrap="square">
             <a:spAutoFit/>
           </a:bodyPr>
           <a:lstStyle/>
           <a:p>
             <a:pPr>
-              <a:spcAft>
-                <a:spcPts val="600"/>
-              </a:spcAft>
-              <a:defRPr sz="1400"/>
-            </a:pPr>
-            <a:r>
-              <a:t>Dual-axis chart tracking Interest Coverage Ratio and Total Debt:</a:t>
-            </a:r>
-          </a:p>
-          <a:p>
-            <a:pPr>
-              <a:spcAft>
-                <a:spcPts val="1200"/>
-              </a:spcAft>
-              <a:defRPr sz="1400"/>
-            </a:pPr>
-            <a:r>
-              <a:t>📊 Click to view: </a:t>
-            </a:r>
-            <a:r>
-              <a:rPr sz="1400" u="sng">
-                <a:solidFill>
-                  <a:srgbClr val="0000FF"/>
-                </a:solidFill>
-                <a:hlinkClick r:id="rId2"/>
-              </a:rPr>
-              <a:t>Debt Health Interactive Chart</a:t>
-            </a:r>
-          </a:p>
-        </p:txBody>
-      </p:sp>
-      <p:sp>
-        <p:nvSpPr>
-          <p:cNvPr id="4" name="TextBox 3"/>
-          <p:cNvSpPr txBox="1"/>
-          <p:nvPr/>
-        </p:nvSpPr>
-        <p:spPr>
-          <a:xfrm>
-            <a:off x="457200" y="2286000"/>
-            <a:ext cx="8229600" cy="3657600"/>
-          </a:xfrm>
-          <a:prstGeom prst="rect">
-            <a:avLst/>
-          </a:prstGeom>
-          <a:noFill/>
-        </p:spPr>
-        <p:txBody>
-          <a:bodyPr wrap="none">
-            <a:spAutoFit/>
-          </a:bodyPr>
-          <a:lstStyle/>
-          <a:p>
-            <a:pPr>
-              <a:defRPr sz="1400">
-                <a:solidFill>
-                  <a:srgbClr val="FF8C00"/>
-                </a:solidFill>
-              </a:defRPr>
-            </a:pPr>
-            <a:r>
-              <a:t>⚠️ Insufficient debt data available for comparison. Please check annual 10-K reports for complete debt metrics.</a:t>
+              <a:defRPr sz="1200">
+                <a:solidFill>
+                  <a:srgbClr val="646464"/>
+                </a:solidFill>
+              </a:defRPr>
+            </a:pPr>
+            <a:r>
+              <a:t>Quarterly view with calculated Q4 data showing seasonal patterns. Q4 (holiday season) typically shows peak revenue.</a:t>
             </a:r>
           </a:p>
         </p:txBody>
@@ -7190,14 +7104,59 @@
       <p:grpSpPr/>
       <p:sp>
         <p:nvSpPr>
-          <p:cNvPr id="2" name="TextBox 1"/>
+          <p:cNvPr id="2" name="Rectangle 1"/>
+          <p:cNvSpPr/>
+          <p:nvPr/>
+        </p:nvSpPr>
+        <p:spPr>
+          <a:xfrm>
+            <a:off x="0" y="2286000"/>
+            <a:ext cx="9144000" cy="1828800"/>
+          </a:xfrm>
+          <a:prstGeom prst="rect">
+            <a:avLst/>
+          </a:prstGeom>
+          <a:solidFill>
+            <a:srgbClr val="CC0000"/>
+          </a:solidFill>
+          <a:ln>
+            <a:solidFill>
+              <a:srgbClr val="CC0000"/>
+            </a:solidFill>
+          </a:ln>
+        </p:spPr>
+        <p:style>
+          <a:lnRef idx="1">
+            <a:schemeClr val="accent1"/>
+          </a:lnRef>
+          <a:fillRef idx="3">
+            <a:schemeClr val="accent1"/>
+          </a:fillRef>
+          <a:effectRef idx="2">
+            <a:schemeClr val="accent1"/>
+          </a:effectRef>
+          <a:fontRef idx="minor">
+            <a:schemeClr val="lt1"/>
+          </a:fontRef>
+        </p:style>
+        <p:txBody>
+          <a:bodyPr rtlCol="0" anchor="ctr"/>
+          <a:lstStyle/>
+          <a:p>
+            <a:pPr algn="ctr"/>
+          </a:p>
+        </p:txBody>
+      </p:sp>
+      <p:sp>
+        <p:nvSpPr>
+          <p:cNvPr id="3" name="TextBox 2"/>
           <p:cNvSpPr txBox="1"/>
           <p:nvPr/>
         </p:nvSpPr>
         <p:spPr>
           <a:xfrm>
-            <a:off x="457200" y="274320"/>
-            <a:ext cx="8229600" cy="457200"/>
+            <a:off x="457200" y="2468880"/>
+            <a:ext cx="8229600" cy="548640"/>
           </a:xfrm>
           <a:prstGeom prst="rect">
             <a:avLst/>
@@ -7210,25 +7169,29 @@
           </a:bodyPr>
           <a:lstStyle/>
           <a:p>
-            <a:pPr>
-              <a:defRPr sz="2800" b="1"/>
-            </a:pPr>
-            <a:r>
-              <a:t>Cash Flow Analysis</a:t>
-            </a:r>
-          </a:p>
-        </p:txBody>
-      </p:sp>
-      <p:sp>
-        <p:nvSpPr>
-          <p:cNvPr id="3" name="TextBox 2"/>
+            <a:pPr algn="ctr">
+              <a:defRPr sz="2400" b="1">
+                <a:solidFill>
+                  <a:srgbClr val="FFFFFF"/>
+                </a:solidFill>
+              </a:defRPr>
+            </a:pPr>
+            <a:r>
+              <a:t>PILLAR 2</a:t>
+            </a:r>
+          </a:p>
+        </p:txBody>
+      </p:sp>
+      <p:sp>
+        <p:nvSpPr>
+          <p:cNvPr id="4" name="TextBox 3"/>
           <p:cNvSpPr txBox="1"/>
           <p:nvPr/>
         </p:nvSpPr>
         <p:spPr>
           <a:xfrm>
-            <a:off x="457200" y="914400"/>
-            <a:ext cx="8229600" cy="914400"/>
+            <a:off x="457200" y="3017520"/>
+            <a:ext cx="8229600" cy="731520"/>
           </a:xfrm>
           <a:prstGeom prst="rect">
             <a:avLst/>
@@ -7241,48 +7204,29 @@
           </a:bodyPr>
           <a:lstStyle/>
           <a:p>
-            <a:pPr>
-              <a:spcAft>
-                <a:spcPts val="600"/>
-              </a:spcAft>
-              <a:defRPr sz="1400"/>
-            </a:pPr>
-            <a:r>
-              <a:t>Stacked bar chart showing Operating, Investing, and Financing cash flows:</a:t>
-            </a:r>
-          </a:p>
-          <a:p>
-            <a:pPr>
-              <a:spcAft>
-                <a:spcPts val="1200"/>
-              </a:spcAft>
-              <a:defRPr sz="1400"/>
-            </a:pPr>
-            <a:r>
-              <a:t>📊 Click to view: </a:t>
-            </a:r>
-            <a:r>
-              <a:rPr sz="1400" u="sng">
-                <a:solidFill>
-                  <a:srgbClr val="0000FF"/>
-                </a:solidFill>
-                <a:hlinkClick r:id="rId2"/>
-              </a:rPr>
-              <a:t>Cash Flows Interactive Chart</a:t>
-            </a:r>
-          </a:p>
-        </p:txBody>
-      </p:sp>
-      <p:sp>
-        <p:nvSpPr>
-          <p:cNvPr id="4" name="TextBox 3"/>
+            <a:pPr algn="ctr">
+              <a:defRPr sz="4400" b="1">
+                <a:solidFill>
+                  <a:srgbClr val="FFFFFF"/>
+                </a:solidFill>
+              </a:defRPr>
+            </a:pPr>
+            <a:r>
+              <a:t>Profitability &amp; Margins</a:t>
+            </a:r>
+          </a:p>
+        </p:txBody>
+      </p:sp>
+      <p:sp>
+        <p:nvSpPr>
+          <p:cNvPr id="5" name="TextBox 4"/>
           <p:cNvSpPr txBox="1"/>
           <p:nvPr/>
         </p:nvSpPr>
         <p:spPr>
           <a:xfrm>
-            <a:off x="457200" y="2286000"/>
-            <a:ext cx="8229600" cy="3657600"/>
+            <a:off x="457200" y="4572000"/>
+            <a:ext cx="8229600" cy="457200"/>
           </a:xfrm>
           <a:prstGeom prst="rect">
             <a:avLst/>
@@ -7295,110 +7239,15 @@
           </a:bodyPr>
           <a:lstStyle/>
           <a:p>
-            <a:pPr>
-              <a:spcAft>
-                <a:spcPts val="800"/>
-              </a:spcAft>
-              <a:defRPr sz="1600" b="1"/>
-            </a:pPr>
-            <a:r>
-              <a:t>Latest Cash Flows (Q3 2025):</a:t>
-            </a:r>
-          </a:p>
-          <a:p>
-            <a:pPr>
-              <a:defRPr sz="1400">
-                <a:solidFill>
-                  <a:srgbClr val="008000"/>
-                </a:solidFill>
-              </a:defRPr>
-            </a:pPr>
-            <a:r>
-              <a:t>✅ Operating Activities: $3.48B</a:t>
-            </a:r>
-          </a:p>
-          <a:p>
-            <a:pPr>
-              <a:defRPr sz="1400">
+            <a:pPr algn="ctr">
+              <a:defRPr sz="2400" i="1">
                 <a:solidFill>
                   <a:srgbClr val="646464"/>
                 </a:solidFill>
               </a:defRPr>
             </a:pPr>
             <a:r>
-              <a:t>• Investing Activities: $2.79B</a:t>
-            </a:r>
-          </a:p>
-          <a:p>
-            <a:pPr>
-              <a:spcAft>
-                <a:spcPts val="1200"/>
-              </a:spcAft>
-              <a:defRPr sz="1400">
-                <a:solidFill>
-                  <a:srgbClr val="646464"/>
-                </a:solidFill>
-              </a:defRPr>
-            </a:pPr>
-            <a:r>
-              <a:t>• Financing Activities: $1.64B</a:t>
-            </a:r>
-          </a:p>
-          <a:p>
-            <a:pPr>
-              <a:spcAft>
-                <a:spcPts val="1200"/>
-              </a:spcAft>
-              <a:defRPr sz="1400" b="1">
-                <a:solidFill>
-                  <a:srgbClr val="008000"/>
-                </a:solidFill>
-              </a:defRPr>
-            </a:pPr>
-            <a:r>
-              <a:t>Net Cash Flow: $7.91B</a:t>
-            </a:r>
-          </a:p>
-          <a:p>
-            <a:pPr>
-              <a:spcAft>
-                <a:spcPts val="400"/>
-              </a:spcAft>
-              <a:defRPr sz="1400" b="1"/>
-            </a:pPr>
-            <a:r>
-              <a:t>Operating Cash Flow vs FY2024:</a:t>
-            </a:r>
-          </a:p>
-          <a:p>
-            <a:pPr lvl="1">
-              <a:defRPr sz="1400"/>
-            </a:pPr>
-            <a:r>
-              <a:t>• FY2024: $7.37B</a:t>
-            </a:r>
-          </a:p>
-          <a:p>
-            <a:pPr lvl="1">
-              <a:spcAft>
-                <a:spcPts val="1200"/>
-              </a:spcAft>
-              <a:defRPr sz="1400"/>
-            </a:pPr>
-            <a:r>
-              <a:t>• Q3 2025: $3.48B (quarterly)</a:t>
-            </a:r>
-          </a:p>
-          <a:p>
-            <a:pPr>
-              <a:defRPr sz="1300" b="1">
-                <a:solidFill>
-                  <a:srgbClr val="008000"/>
-                </a:solidFill>
-              </a:defRPr>
-            </a:pPr>
-            <a:r>
-              <a:t>✅ Positive operating cash flow indicates healthy core business operations</a:t>
+              <a:t>"How efficiently is the company generating profits?"</a:t>
             </a:r>
           </a:p>
         </p:txBody>

--- a/output/Target_Financial_Analysis.pptx
+++ b/output/Target_Financial_Analysis.pptx
@@ -3341,7 +3341,7 @@
         <p:spPr>
           <a:xfrm>
             <a:off x="457200" y="5029200"/>
-            <a:ext cx="8229600" cy="1371600"/>
+            <a:ext cx="8229600" cy="914400"/>
           </a:xfrm>
           <a:prstGeom prst="rect">
             <a:avLst/>
@@ -3363,6 +3363,40 @@
             </a:pPr>
             <a:r>
               <a:t>Three margin lines tracking profitability over time. Compression between lines reveals where profits leak.</a:t>
+            </a:r>
+          </a:p>
+        </p:txBody>
+      </p:sp>
+      <p:sp>
+        <p:nvSpPr>
+          <p:cNvPr id="5" name="TextBox 4"/>
+          <p:cNvSpPr txBox="1"/>
+          <p:nvPr/>
+        </p:nvSpPr>
+        <p:spPr>
+          <a:xfrm>
+            <a:off x="457200" y="6035040"/>
+            <a:ext cx="8229600" cy="365760"/>
+          </a:xfrm>
+          <a:prstGeom prst="rect">
+            <a:avLst/>
+          </a:prstGeom>
+          <a:noFill/>
+        </p:spPr>
+        <p:txBody>
+          <a:bodyPr wrap="none">
+            <a:spAutoFit/>
+          </a:bodyPr>
+          <a:lstStyle/>
+          <a:p>
+            <a:r>
+              <a:rPr sz="1100" u="sng">
+                <a:solidFill>
+                  <a:srgbClr val="0066CC"/>
+                </a:solidFill>
+                <a:hlinkClick r:id="rId3"/>
+              </a:rPr>
+              <a:t>📊 Click for interactive version</a:t>
             </a:r>
           </a:p>
         </p:txBody>
@@ -3453,7 +3487,7 @@
         <p:spPr>
           <a:xfrm>
             <a:off x="457200" y="5029200"/>
-            <a:ext cx="8229600" cy="1371600"/>
+            <a:ext cx="8229600" cy="914400"/>
           </a:xfrm>
           <a:prstGeom prst="rect">
             <a:avLst/>
@@ -3475,6 +3509,40 @@
             </a:pPr>
             <a:r>
               <a:t>Waterfall showing margin evolution from FY2022 baseline. Green bars = improvement, red bars = deterioration.</a:t>
+            </a:r>
+          </a:p>
+        </p:txBody>
+      </p:sp>
+      <p:sp>
+        <p:nvSpPr>
+          <p:cNvPr id="5" name="TextBox 4"/>
+          <p:cNvSpPr txBox="1"/>
+          <p:nvPr/>
+        </p:nvSpPr>
+        <p:spPr>
+          <a:xfrm>
+            <a:off x="457200" y="6035040"/>
+            <a:ext cx="8229600" cy="365760"/>
+          </a:xfrm>
+          <a:prstGeom prst="rect">
+            <a:avLst/>
+          </a:prstGeom>
+          <a:noFill/>
+        </p:spPr>
+        <p:txBody>
+          <a:bodyPr wrap="none">
+            <a:spAutoFit/>
+          </a:bodyPr>
+          <a:lstStyle/>
+          <a:p>
+            <a:r>
+              <a:rPr sz="1100" u="sng">
+                <a:solidFill>
+                  <a:srgbClr val="0066CC"/>
+                </a:solidFill>
+                <a:hlinkClick r:id="rId3"/>
+              </a:rPr>
+              <a:t>📊 Click for interactive version</a:t>
             </a:r>
           </a:p>
         </p:txBody>
@@ -3565,7 +3633,7 @@
         <p:spPr>
           <a:xfrm>
             <a:off x="457200" y="5029200"/>
-            <a:ext cx="8229600" cy="1371600"/>
+            <a:ext cx="8229600" cy="914400"/>
           </a:xfrm>
           <a:prstGeom prst="rect">
             <a:avLst/>
@@ -3587,6 +3655,40 @@
             </a:pPr>
             <a:r>
               <a:t>100% stacked bars showing cost structure. Watch for SG&amp;A creep eating into margins.</a:t>
+            </a:r>
+          </a:p>
+        </p:txBody>
+      </p:sp>
+      <p:sp>
+        <p:nvSpPr>
+          <p:cNvPr id="5" name="TextBox 4"/>
+          <p:cNvSpPr txBox="1"/>
+          <p:nvPr/>
+        </p:nvSpPr>
+        <p:spPr>
+          <a:xfrm>
+            <a:off x="457200" y="6035040"/>
+            <a:ext cx="8229600" cy="365760"/>
+          </a:xfrm>
+          <a:prstGeom prst="rect">
+            <a:avLst/>
+          </a:prstGeom>
+          <a:noFill/>
+        </p:spPr>
+        <p:txBody>
+          <a:bodyPr wrap="none">
+            <a:spAutoFit/>
+          </a:bodyPr>
+          <a:lstStyle/>
+          <a:p>
+            <a:r>
+              <a:rPr sz="1100" u="sng">
+                <a:solidFill>
+                  <a:srgbClr val="0066CC"/>
+                </a:solidFill>
+                <a:hlinkClick r:id="rId3"/>
+              </a:rPr>
+              <a:t>📊 Click for interactive version</a:t>
             </a:r>
           </a:p>
         </p:txBody>
@@ -3677,7 +3779,7 @@
         <p:spPr>
           <a:xfrm>
             <a:off x="457200" y="5029200"/>
-            <a:ext cx="8229600" cy="1371600"/>
+            <a:ext cx="8229600" cy="914400"/>
           </a:xfrm>
           <a:prstGeom prst="rect">
             <a:avLst/>
@@ -3699,6 +3801,40 @@
             </a:pPr>
             <a:r>
               <a:t>Shows how revenue flows to EBITDA through operating expenses. The D&amp;A add-back reveals capital intensity.</a:t>
+            </a:r>
+          </a:p>
+        </p:txBody>
+      </p:sp>
+      <p:sp>
+        <p:nvSpPr>
+          <p:cNvPr id="5" name="TextBox 4"/>
+          <p:cNvSpPr txBox="1"/>
+          <p:nvPr/>
+        </p:nvSpPr>
+        <p:spPr>
+          <a:xfrm>
+            <a:off x="457200" y="6035040"/>
+            <a:ext cx="8229600" cy="365760"/>
+          </a:xfrm>
+          <a:prstGeom prst="rect">
+            <a:avLst/>
+          </a:prstGeom>
+          <a:noFill/>
+        </p:spPr>
+        <p:txBody>
+          <a:bodyPr wrap="none">
+            <a:spAutoFit/>
+          </a:bodyPr>
+          <a:lstStyle/>
+          <a:p>
+            <a:r>
+              <a:rPr sz="1100" u="sng">
+                <a:solidFill>
+                  <a:srgbClr val="0066CC"/>
+                </a:solidFill>
+                <a:hlinkClick r:id="rId3"/>
+              </a:rPr>
+              <a:t>📊 Click for interactive version</a:t>
             </a:r>
           </a:p>
         </p:txBody>
@@ -3789,7 +3925,7 @@
         <p:spPr>
           <a:xfrm>
             <a:off x="457200" y="5029200"/>
-            <a:ext cx="8229600" cy="1371600"/>
+            <a:ext cx="8229600" cy="914400"/>
           </a:xfrm>
           <a:prstGeom prst="rect">
             <a:avLst/>
@@ -3811,6 +3947,40 @@
             </a:pPr>
             <a:r>
               <a:t>Quarterly margin changes as waterfall. Identifies seasonal patterns and pressure points.</a:t>
+            </a:r>
+          </a:p>
+        </p:txBody>
+      </p:sp>
+      <p:sp>
+        <p:nvSpPr>
+          <p:cNvPr id="5" name="TextBox 4"/>
+          <p:cNvSpPr txBox="1"/>
+          <p:nvPr/>
+        </p:nvSpPr>
+        <p:spPr>
+          <a:xfrm>
+            <a:off x="457200" y="6035040"/>
+            <a:ext cx="8229600" cy="365760"/>
+          </a:xfrm>
+          <a:prstGeom prst="rect">
+            <a:avLst/>
+          </a:prstGeom>
+          <a:noFill/>
+        </p:spPr>
+        <p:txBody>
+          <a:bodyPr wrap="none">
+            <a:spAutoFit/>
+          </a:bodyPr>
+          <a:lstStyle/>
+          <a:p>
+            <a:r>
+              <a:rPr sz="1100" u="sng">
+                <a:solidFill>
+                  <a:srgbClr val="0066CC"/>
+                </a:solidFill>
+                <a:hlinkClick r:id="rId3"/>
+              </a:rPr>
+              <a:t>📊 Click for interactive version</a:t>
             </a:r>
           </a:p>
         </p:txBody>
@@ -3901,7 +4071,7 @@
         <p:spPr>
           <a:xfrm>
             <a:off x="457200" y="5029200"/>
-            <a:ext cx="8229600" cy="1371600"/>
+            <a:ext cx="8229600" cy="914400"/>
           </a:xfrm>
           <a:prstGeom prst="rect">
             <a:avLst/>
@@ -3923,6 +4093,40 @@
             </a:pPr>
             <a:r>
               <a:t>Compares Net Income to Operating Cash Flow. High-quality earnings convert to cash consistently.</a:t>
+            </a:r>
+          </a:p>
+        </p:txBody>
+      </p:sp>
+      <p:sp>
+        <p:nvSpPr>
+          <p:cNvPr id="5" name="TextBox 4"/>
+          <p:cNvSpPr txBox="1"/>
+          <p:nvPr/>
+        </p:nvSpPr>
+        <p:spPr>
+          <a:xfrm>
+            <a:off x="457200" y="6035040"/>
+            <a:ext cx="8229600" cy="365760"/>
+          </a:xfrm>
+          <a:prstGeom prst="rect">
+            <a:avLst/>
+          </a:prstGeom>
+          <a:noFill/>
+        </p:spPr>
+        <p:txBody>
+          <a:bodyPr wrap="none">
+            <a:spAutoFit/>
+          </a:bodyPr>
+          <a:lstStyle/>
+          <a:p>
+            <a:r>
+              <a:rPr sz="1100" u="sng">
+                <a:solidFill>
+                  <a:srgbClr val="0066CC"/>
+                </a:solidFill>
+                <a:hlinkClick r:id="rId3"/>
+              </a:rPr>
+              <a:t>📊 Click for interactive version</a:t>
             </a:r>
           </a:p>
         </p:txBody>
@@ -4181,7 +4385,7 @@
         <p:spPr>
           <a:xfrm>
             <a:off x="457200" y="5029200"/>
-            <a:ext cx="8229600" cy="1371600"/>
+            <a:ext cx="8229600" cy="914400"/>
           </a:xfrm>
           <a:prstGeom prst="rect">
             <a:avLst/>
@@ -4203,6 +4407,40 @@
             </a:pPr>
             <a:r>
               <a:t>Measures short-term liquidity. Below 1.0 is warning (liabilities exceed assets); above 1.5 is healthy for retail.</a:t>
+            </a:r>
+          </a:p>
+        </p:txBody>
+      </p:sp>
+      <p:sp>
+        <p:nvSpPr>
+          <p:cNvPr id="5" name="TextBox 4"/>
+          <p:cNvSpPr txBox="1"/>
+          <p:nvPr/>
+        </p:nvSpPr>
+        <p:spPr>
+          <a:xfrm>
+            <a:off x="457200" y="6035040"/>
+            <a:ext cx="8229600" cy="365760"/>
+          </a:xfrm>
+          <a:prstGeom prst="rect">
+            <a:avLst/>
+          </a:prstGeom>
+          <a:noFill/>
+        </p:spPr>
+        <p:txBody>
+          <a:bodyPr wrap="none">
+            <a:spAutoFit/>
+          </a:bodyPr>
+          <a:lstStyle/>
+          <a:p>
+            <a:r>
+              <a:rPr sz="1100" u="sng">
+                <a:solidFill>
+                  <a:srgbClr val="0066CC"/>
+                </a:solidFill>
+                <a:hlinkClick r:id="rId3"/>
+              </a:rPr>
+              <a:t>📊 Click for interactive version</a:t>
             </a:r>
           </a:p>
         </p:txBody>
@@ -4293,7 +4531,7 @@
         <p:spPr>
           <a:xfrm>
             <a:off x="457200" y="5029200"/>
-            <a:ext cx="8229600" cy="1371600"/>
+            <a:ext cx="8229600" cy="914400"/>
           </a:xfrm>
           <a:prstGeom prst="rect">
             <a:avLst/>
@@ -4315,6 +4553,40 @@
             </a:pPr>
             <a:r>
               <a:t>Shows debt vs equity mix. Higher debt = higher risk but potentially higher returns on equity.</a:t>
+            </a:r>
+          </a:p>
+        </p:txBody>
+      </p:sp>
+      <p:sp>
+        <p:nvSpPr>
+          <p:cNvPr id="5" name="TextBox 4"/>
+          <p:cNvSpPr txBox="1"/>
+          <p:nvPr/>
+        </p:nvSpPr>
+        <p:spPr>
+          <a:xfrm>
+            <a:off x="457200" y="6035040"/>
+            <a:ext cx="8229600" cy="365760"/>
+          </a:xfrm>
+          <a:prstGeom prst="rect">
+            <a:avLst/>
+          </a:prstGeom>
+          <a:noFill/>
+        </p:spPr>
+        <p:txBody>
+          <a:bodyPr wrap="none">
+            <a:spAutoFit/>
+          </a:bodyPr>
+          <a:lstStyle/>
+          <a:p>
+            <a:r>
+              <a:rPr sz="1100" u="sng">
+                <a:solidFill>
+                  <a:srgbClr val="0066CC"/>
+                </a:solidFill>
+                <a:hlinkClick r:id="rId3"/>
+              </a:rPr>
+              <a:t>📊 Click for interactive version</a:t>
             </a:r>
           </a:p>
         </p:txBody>
@@ -4405,7 +4677,7 @@
         <p:spPr>
           <a:xfrm>
             <a:off x="457200" y="5029200"/>
-            <a:ext cx="8229600" cy="1371600"/>
+            <a:ext cx="8229600" cy="914400"/>
           </a:xfrm>
           <a:prstGeom prst="rect">
             <a:avLst/>
@@ -4427,6 +4699,40 @@
             </a:pPr>
             <a:r>
               <a:t>Key leverage metric showing how many years of earnings to repay debt. Below 3x is healthy; above 5x is risky.</a:t>
+            </a:r>
+          </a:p>
+        </p:txBody>
+      </p:sp>
+      <p:sp>
+        <p:nvSpPr>
+          <p:cNvPr id="5" name="TextBox 4"/>
+          <p:cNvSpPr txBox="1"/>
+          <p:nvPr/>
+        </p:nvSpPr>
+        <p:spPr>
+          <a:xfrm>
+            <a:off x="457200" y="6035040"/>
+            <a:ext cx="8229600" cy="365760"/>
+          </a:xfrm>
+          <a:prstGeom prst="rect">
+            <a:avLst/>
+          </a:prstGeom>
+          <a:noFill/>
+        </p:spPr>
+        <p:txBody>
+          <a:bodyPr wrap="none">
+            <a:spAutoFit/>
+          </a:bodyPr>
+          <a:lstStyle/>
+          <a:p>
+            <a:r>
+              <a:rPr sz="1100" u="sng">
+                <a:solidFill>
+                  <a:srgbClr val="0066CC"/>
+                </a:solidFill>
+                <a:hlinkClick r:id="rId3"/>
+              </a:rPr>
+              <a:t>📊 Click for interactive version</a:t>
             </a:r>
           </a:p>
         </p:txBody>
@@ -4781,7 +5087,7 @@
         <p:spPr>
           <a:xfrm>
             <a:off x="457200" y="5029200"/>
-            <a:ext cx="8229600" cy="1371600"/>
+            <a:ext cx="8229600" cy="914400"/>
           </a:xfrm>
           <a:prstGeom prst="rect">
             <a:avLst/>
@@ -4803,6 +5109,40 @@
             </a:pPr>
             <a:r>
               <a:t>Interest coverage ratio tracking. Above 3x is comfortable; below 2x requires monitoring.</a:t>
+            </a:r>
+          </a:p>
+        </p:txBody>
+      </p:sp>
+      <p:sp>
+        <p:nvSpPr>
+          <p:cNvPr id="5" name="TextBox 4"/>
+          <p:cNvSpPr txBox="1"/>
+          <p:nvPr/>
+        </p:nvSpPr>
+        <p:spPr>
+          <a:xfrm>
+            <a:off x="457200" y="6035040"/>
+            <a:ext cx="8229600" cy="365760"/>
+          </a:xfrm>
+          <a:prstGeom prst="rect">
+            <a:avLst/>
+          </a:prstGeom>
+          <a:noFill/>
+        </p:spPr>
+        <p:txBody>
+          <a:bodyPr wrap="none">
+            <a:spAutoFit/>
+          </a:bodyPr>
+          <a:lstStyle/>
+          <a:p>
+            <a:r>
+              <a:rPr sz="1100" u="sng">
+                <a:solidFill>
+                  <a:srgbClr val="0066CC"/>
+                </a:solidFill>
+                <a:hlinkClick r:id="rId3"/>
+              </a:rPr>
+              <a:t>📊 Click for interactive version</a:t>
             </a:r>
           </a:p>
         </p:txBody>
@@ -4893,7 +5233,7 @@
         <p:spPr>
           <a:xfrm>
             <a:off x="457200" y="5029200"/>
-            <a:ext cx="8229600" cy="1371600"/>
+            <a:ext cx="8229600" cy="914400"/>
           </a:xfrm>
           <a:prstGeom prst="rect">
             <a:avLst/>
@@ -4915,6 +5255,40 @@
             </a:pPr>
             <a:r>
               <a:t>Three cash flow lines: Operating, Investing, Financing. Operating should be consistently positive.</a:t>
+            </a:r>
+          </a:p>
+        </p:txBody>
+      </p:sp>
+      <p:sp>
+        <p:nvSpPr>
+          <p:cNvPr id="5" name="TextBox 4"/>
+          <p:cNvSpPr txBox="1"/>
+          <p:nvPr/>
+        </p:nvSpPr>
+        <p:spPr>
+          <a:xfrm>
+            <a:off x="457200" y="6035040"/>
+            <a:ext cx="8229600" cy="365760"/>
+          </a:xfrm>
+          <a:prstGeom prst="rect">
+            <a:avLst/>
+          </a:prstGeom>
+          <a:noFill/>
+        </p:spPr>
+        <p:txBody>
+          <a:bodyPr wrap="none">
+            <a:spAutoFit/>
+          </a:bodyPr>
+          <a:lstStyle/>
+          <a:p>
+            <a:r>
+              <a:rPr sz="1100" u="sng">
+                <a:solidFill>
+                  <a:srgbClr val="0066CC"/>
+                </a:solidFill>
+                <a:hlinkClick r:id="rId3"/>
+              </a:rPr>
+              <a:t>📊 Click for interactive version</a:t>
             </a:r>
           </a:p>
         </p:txBody>
@@ -5173,7 +5547,7 @@
         <p:spPr>
           <a:xfrm>
             <a:off x="457200" y="5029200"/>
-            <a:ext cx="8229600" cy="1371600"/>
+            <a:ext cx="8229600" cy="914400"/>
           </a:xfrm>
           <a:prstGeom prst="rect">
             <a:avLst/>
@@ -5195,6 +5569,40 @@
             </a:pPr>
             <a:r>
               <a:t>Decomposes ROE into Profit Margin x Asset Turnover x Financial Leverage. Shows what drives returns.</a:t>
+            </a:r>
+          </a:p>
+        </p:txBody>
+      </p:sp>
+      <p:sp>
+        <p:nvSpPr>
+          <p:cNvPr id="5" name="TextBox 4"/>
+          <p:cNvSpPr txBox="1"/>
+          <p:nvPr/>
+        </p:nvSpPr>
+        <p:spPr>
+          <a:xfrm>
+            <a:off x="457200" y="6035040"/>
+            <a:ext cx="8229600" cy="365760"/>
+          </a:xfrm>
+          <a:prstGeom prst="rect">
+            <a:avLst/>
+          </a:prstGeom>
+          <a:noFill/>
+        </p:spPr>
+        <p:txBody>
+          <a:bodyPr wrap="none">
+            <a:spAutoFit/>
+          </a:bodyPr>
+          <a:lstStyle/>
+          <a:p>
+            <a:r>
+              <a:rPr sz="1100" u="sng">
+                <a:solidFill>
+                  <a:srgbClr val="0066CC"/>
+                </a:solidFill>
+                <a:hlinkClick r:id="rId3"/>
+              </a:rPr>
+              <a:t>📊 Click for interactive version</a:t>
             </a:r>
           </a:p>
         </p:txBody>
@@ -5285,7 +5693,7 @@
         <p:spPr>
           <a:xfrm>
             <a:off x="457200" y="5029200"/>
-            <a:ext cx="8229600" cy="1371600"/>
+            <a:ext cx="8229600" cy="914400"/>
           </a:xfrm>
           <a:prstGeom prst="rect">
             <a:avLst/>
@@ -5307,6 +5715,40 @@
             </a:pPr>
             <a:r>
               <a:t>Tracks turnover ratio and days on hand. Faster turns = less capital tied up in inventory.</a:t>
+            </a:r>
+          </a:p>
+        </p:txBody>
+      </p:sp>
+      <p:sp>
+        <p:nvSpPr>
+          <p:cNvPr id="5" name="TextBox 4"/>
+          <p:cNvSpPr txBox="1"/>
+          <p:nvPr/>
+        </p:nvSpPr>
+        <p:spPr>
+          <a:xfrm>
+            <a:off x="457200" y="6035040"/>
+            <a:ext cx="8229600" cy="365760"/>
+          </a:xfrm>
+          <a:prstGeom prst="rect">
+            <a:avLst/>
+          </a:prstGeom>
+          <a:noFill/>
+        </p:spPr>
+        <p:txBody>
+          <a:bodyPr wrap="none">
+            <a:spAutoFit/>
+          </a:bodyPr>
+          <a:lstStyle/>
+          <a:p>
+            <a:r>
+              <a:rPr sz="1100" u="sng">
+                <a:solidFill>
+                  <a:srgbClr val="0066CC"/>
+                </a:solidFill>
+                <a:hlinkClick r:id="rId3"/>
+              </a:rPr>
+              <a:t>📊 Click for interactive version</a:t>
             </a:r>
           </a:p>
         </p:txBody>
@@ -5397,7 +5839,7 @@
         <p:spPr>
           <a:xfrm>
             <a:off x="457200" y="5029200"/>
-            <a:ext cx="8229600" cy="1371600"/>
+            <a:ext cx="8229600" cy="914400"/>
           </a:xfrm>
           <a:prstGeom prst="rect">
             <a:avLst/>
@@ -5419,6 +5861,40 @@
             </a:pPr>
             <a:r>
               <a:t>Days to convert inventory to cash vs retail peers. Lower is better; negative means suppliers finance operations.</a:t>
+            </a:r>
+          </a:p>
+        </p:txBody>
+      </p:sp>
+      <p:sp>
+        <p:nvSpPr>
+          <p:cNvPr id="5" name="TextBox 4"/>
+          <p:cNvSpPr txBox="1"/>
+          <p:nvPr/>
+        </p:nvSpPr>
+        <p:spPr>
+          <a:xfrm>
+            <a:off x="457200" y="6035040"/>
+            <a:ext cx="8229600" cy="365760"/>
+          </a:xfrm>
+          <a:prstGeom prst="rect">
+            <a:avLst/>
+          </a:prstGeom>
+          <a:noFill/>
+        </p:spPr>
+        <p:txBody>
+          <a:bodyPr wrap="none">
+            <a:spAutoFit/>
+          </a:bodyPr>
+          <a:lstStyle/>
+          <a:p>
+            <a:r>
+              <a:rPr sz="1100" u="sng">
+                <a:solidFill>
+                  <a:srgbClr val="0066CC"/>
+                </a:solidFill>
+                <a:hlinkClick r:id="rId3"/>
+              </a:rPr>
+              <a:t>📊 Click for interactive version</a:t>
             </a:r>
           </a:p>
         </p:txBody>
@@ -5509,7 +5985,7 @@
         <p:spPr>
           <a:xfrm>
             <a:off x="457200" y="5029200"/>
-            <a:ext cx="8229600" cy="1371600"/>
+            <a:ext cx="8229600" cy="914400"/>
           </a:xfrm>
           <a:prstGeom prst="rect">
             <a:avLst/>
@@ -5531,6 +6007,40 @@
             </a:pPr>
             <a:r>
               <a:t>Operating cash vs capital spending. The gap between them is Free Cash Flow available for shareholders.</a:t>
+            </a:r>
+          </a:p>
+        </p:txBody>
+      </p:sp>
+      <p:sp>
+        <p:nvSpPr>
+          <p:cNvPr id="5" name="TextBox 4"/>
+          <p:cNvSpPr txBox="1"/>
+          <p:nvPr/>
+        </p:nvSpPr>
+        <p:spPr>
+          <a:xfrm>
+            <a:off x="457200" y="6035040"/>
+            <a:ext cx="8229600" cy="365760"/>
+          </a:xfrm>
+          <a:prstGeom prst="rect">
+            <a:avLst/>
+          </a:prstGeom>
+          <a:noFill/>
+        </p:spPr>
+        <p:txBody>
+          <a:bodyPr wrap="none">
+            <a:spAutoFit/>
+          </a:bodyPr>
+          <a:lstStyle/>
+          <a:p>
+            <a:r>
+              <a:rPr sz="1100" u="sng">
+                <a:solidFill>
+                  <a:srgbClr val="0066CC"/>
+                </a:solidFill>
+                <a:hlinkClick r:id="rId3"/>
+              </a:rPr>
+              <a:t>📊 Click for interactive version</a:t>
             </a:r>
           </a:p>
         </p:txBody>
@@ -5789,7 +6299,7 @@
         <p:spPr>
           <a:xfrm>
             <a:off x="457200" y="5029200"/>
-            <a:ext cx="8229600" cy="1371600"/>
+            <a:ext cx="8229600" cy="914400"/>
           </a:xfrm>
           <a:prstGeom prst="rect">
             <a:avLst/>
@@ -5811,6 +6321,40 @@
             </a:pPr>
             <a:r>
               <a:t>P/E ratio vs revenue growth for Target and peers. Lower-right quadrant = undervalued opportunities.</a:t>
+            </a:r>
+          </a:p>
+        </p:txBody>
+      </p:sp>
+      <p:sp>
+        <p:nvSpPr>
+          <p:cNvPr id="5" name="TextBox 4"/>
+          <p:cNvSpPr txBox="1"/>
+          <p:nvPr/>
+        </p:nvSpPr>
+        <p:spPr>
+          <a:xfrm>
+            <a:off x="457200" y="6035040"/>
+            <a:ext cx="8229600" cy="365760"/>
+          </a:xfrm>
+          <a:prstGeom prst="rect">
+            <a:avLst/>
+          </a:prstGeom>
+          <a:noFill/>
+        </p:spPr>
+        <p:txBody>
+          <a:bodyPr wrap="none">
+            <a:spAutoFit/>
+          </a:bodyPr>
+          <a:lstStyle/>
+          <a:p>
+            <a:r>
+              <a:rPr sz="1100" u="sng">
+                <a:solidFill>
+                  <a:srgbClr val="0066CC"/>
+                </a:solidFill>
+                <a:hlinkClick r:id="rId3"/>
+              </a:rPr>
+              <a:t>📊 Click for interactive version</a:t>
             </a:r>
           </a:p>
         </p:txBody>
@@ -5901,7 +6445,7 @@
         <p:spPr>
           <a:xfrm>
             <a:off x="457200" y="5029200"/>
-            <a:ext cx="8229600" cy="1371600"/>
+            <a:ext cx="8229600" cy="914400"/>
           </a:xfrm>
           <a:prstGeom prst="rect">
             <a:avLst/>
@@ -5923,6 +6467,40 @@
             </a:pPr>
             <a:r>
               <a:t>Current price vs historical valuation range. Below 25th percentile = historically undervalued.</a:t>
+            </a:r>
+          </a:p>
+        </p:txBody>
+      </p:sp>
+      <p:sp>
+        <p:nvSpPr>
+          <p:cNvPr id="5" name="TextBox 4"/>
+          <p:cNvSpPr txBox="1"/>
+          <p:nvPr/>
+        </p:nvSpPr>
+        <p:spPr>
+          <a:xfrm>
+            <a:off x="457200" y="6035040"/>
+            <a:ext cx="8229600" cy="365760"/>
+          </a:xfrm>
+          <a:prstGeom prst="rect">
+            <a:avLst/>
+          </a:prstGeom>
+          <a:noFill/>
+        </p:spPr>
+        <p:txBody>
+          <a:bodyPr wrap="none">
+            <a:spAutoFit/>
+          </a:bodyPr>
+          <a:lstStyle/>
+          <a:p>
+            <a:r>
+              <a:rPr sz="1100" u="sng">
+                <a:solidFill>
+                  <a:srgbClr val="0066CC"/>
+                </a:solidFill>
+                <a:hlinkClick r:id="rId3"/>
+              </a:rPr>
+              <a:t>📊 Click for interactive version</a:t>
             </a:r>
           </a:p>
         </p:txBody>
@@ -6218,7 +6796,7 @@
         <p:spPr>
           <a:xfrm>
             <a:off x="457200" y="5029200"/>
-            <a:ext cx="8229600" cy="1371600"/>
+            <a:ext cx="8229600" cy="914400"/>
           </a:xfrm>
           <a:prstGeom prst="rect">
             <a:avLst/>
@@ -6240,6 +6818,40 @@
             </a:pPr>
             <a:r>
               <a:t>Visualizes cash allocation: CapEx, dividends, buybacks, debt repayment. Shows management priorities.</a:t>
+            </a:r>
+          </a:p>
+        </p:txBody>
+      </p:sp>
+      <p:sp>
+        <p:nvSpPr>
+          <p:cNvPr id="5" name="TextBox 4"/>
+          <p:cNvSpPr txBox="1"/>
+          <p:nvPr/>
+        </p:nvSpPr>
+        <p:spPr>
+          <a:xfrm>
+            <a:off x="457200" y="6035040"/>
+            <a:ext cx="8229600" cy="365760"/>
+          </a:xfrm>
+          <a:prstGeom prst="rect">
+            <a:avLst/>
+          </a:prstGeom>
+          <a:noFill/>
+        </p:spPr>
+        <p:txBody>
+          <a:bodyPr wrap="none">
+            <a:spAutoFit/>
+          </a:bodyPr>
+          <a:lstStyle/>
+          <a:p>
+            <a:r>
+              <a:rPr sz="1100" u="sng">
+                <a:solidFill>
+                  <a:srgbClr val="0066CC"/>
+                </a:solidFill>
+                <a:hlinkClick r:id="rId3"/>
+              </a:rPr>
+              <a:t>📊 Click for interactive version</a:t>
             </a:r>
           </a:p>
         </p:txBody>
@@ -6330,7 +6942,7 @@
         <p:spPr>
           <a:xfrm>
             <a:off x="457200" y="5029200"/>
-            <a:ext cx="8229600" cy="1371600"/>
+            <a:ext cx="8229600" cy="914400"/>
           </a:xfrm>
           <a:prstGeom prst="rect">
             <a:avLst/>
@@ -6352,6 +6964,40 @@
             </a:pPr>
             <a:r>
               <a:t>Stacked area of risk mentions (shrink, theft, markdown) over time. Rising trends signal increasing concerns.</a:t>
+            </a:r>
+          </a:p>
+        </p:txBody>
+      </p:sp>
+      <p:sp>
+        <p:nvSpPr>
+          <p:cNvPr id="5" name="TextBox 4"/>
+          <p:cNvSpPr txBox="1"/>
+          <p:nvPr/>
+        </p:nvSpPr>
+        <p:spPr>
+          <a:xfrm>
+            <a:off x="457200" y="6035040"/>
+            <a:ext cx="8229600" cy="365760"/>
+          </a:xfrm>
+          <a:prstGeom prst="rect">
+            <a:avLst/>
+          </a:prstGeom>
+          <a:noFill/>
+        </p:spPr>
+        <p:txBody>
+          <a:bodyPr wrap="none">
+            <a:spAutoFit/>
+          </a:bodyPr>
+          <a:lstStyle/>
+          <a:p>
+            <a:r>
+              <a:rPr sz="1100" u="sng">
+                <a:solidFill>
+                  <a:srgbClr val="0066CC"/>
+                </a:solidFill>
+                <a:hlinkClick r:id="rId3"/>
+              </a:rPr>
+              <a:t>📊 Click for interactive version</a:t>
             </a:r>
           </a:p>
         </p:txBody>
@@ -6442,7 +7088,7 @@
         <p:spPr>
           <a:xfrm>
             <a:off x="457200" y="5029200"/>
-            <a:ext cx="8229600" cy="1371600"/>
+            <a:ext cx="8229600" cy="914400"/>
           </a:xfrm>
           <a:prstGeom prst="rect">
             <a:avLst/>
@@ -6464,6 +7110,40 @@
             </a:pPr>
             <a:r>
               <a:t>Intensity grid showing risk types by period. Dark cells = high concern in that area.</a:t>
+            </a:r>
+          </a:p>
+        </p:txBody>
+      </p:sp>
+      <p:sp>
+        <p:nvSpPr>
+          <p:cNvPr id="5" name="TextBox 4"/>
+          <p:cNvSpPr txBox="1"/>
+          <p:nvPr/>
+        </p:nvSpPr>
+        <p:spPr>
+          <a:xfrm>
+            <a:off x="457200" y="6035040"/>
+            <a:ext cx="8229600" cy="365760"/>
+          </a:xfrm>
+          <a:prstGeom prst="rect">
+            <a:avLst/>
+          </a:prstGeom>
+          <a:noFill/>
+        </p:spPr>
+        <p:txBody>
+          <a:bodyPr wrap="none">
+            <a:spAutoFit/>
+          </a:bodyPr>
+          <a:lstStyle/>
+          <a:p>
+            <a:r>
+              <a:rPr sz="1100" u="sng">
+                <a:solidFill>
+                  <a:srgbClr val="0066CC"/>
+                </a:solidFill>
+                <a:hlinkClick r:id="rId3"/>
+              </a:rPr>
+              <a:t>📊 Click for interactive version</a:t>
             </a:r>
           </a:p>
         </p:txBody>
@@ -6722,7 +7402,7 @@
         <p:spPr>
           <a:xfrm>
             <a:off x="457200" y="5029200"/>
-            <a:ext cx="8229600" cy="1371600"/>
+            <a:ext cx="8229600" cy="914400"/>
           </a:xfrm>
           <a:prstGeom prst="rect">
             <a:avLst/>
@@ -6744,6 +7424,40 @@
             </a:pPr>
             <a:r>
               <a:t>Shows Target's 10-year revenue and net income trajectory from annual 10-K filings. Look for consistent growth and whether profits keep pace with revenue.</a:t>
+            </a:r>
+          </a:p>
+        </p:txBody>
+      </p:sp>
+      <p:sp>
+        <p:nvSpPr>
+          <p:cNvPr id="5" name="TextBox 4"/>
+          <p:cNvSpPr txBox="1"/>
+          <p:nvPr/>
+        </p:nvSpPr>
+        <p:spPr>
+          <a:xfrm>
+            <a:off x="457200" y="6035040"/>
+            <a:ext cx="8229600" cy="365760"/>
+          </a:xfrm>
+          <a:prstGeom prst="rect">
+            <a:avLst/>
+          </a:prstGeom>
+          <a:noFill/>
+        </p:spPr>
+        <p:txBody>
+          <a:bodyPr wrap="none">
+            <a:spAutoFit/>
+          </a:bodyPr>
+          <a:lstStyle/>
+          <a:p>
+            <a:r>
+              <a:rPr sz="1100" u="sng">
+                <a:solidFill>
+                  <a:srgbClr val="0066CC"/>
+                </a:solidFill>
+                <a:hlinkClick r:id="rId3"/>
+              </a:rPr>
+              <a:t>📊 Click for interactive version</a:t>
             </a:r>
           </a:p>
         </p:txBody>
@@ -6834,7 +7548,7 @@
         <p:spPr>
           <a:xfrm>
             <a:off x="457200" y="5029200"/>
-            <a:ext cx="8229600" cy="1371600"/>
+            <a:ext cx="8229600" cy="914400"/>
           </a:xfrm>
           <a:prstGeom prst="rect">
             <a:avLst/>
@@ -6856,6 +7570,40 @@
             </a:pPr>
             <a:r>
               <a:t>Tracks year-over-year revenue growth rates by quarter. Reveals acceleration or deceleration in growth momentum.</a:t>
+            </a:r>
+          </a:p>
+        </p:txBody>
+      </p:sp>
+      <p:sp>
+        <p:nvSpPr>
+          <p:cNvPr id="5" name="TextBox 4"/>
+          <p:cNvSpPr txBox="1"/>
+          <p:nvPr/>
+        </p:nvSpPr>
+        <p:spPr>
+          <a:xfrm>
+            <a:off x="457200" y="6035040"/>
+            <a:ext cx="8229600" cy="365760"/>
+          </a:xfrm>
+          <a:prstGeom prst="rect">
+            <a:avLst/>
+          </a:prstGeom>
+          <a:noFill/>
+        </p:spPr>
+        <p:txBody>
+          <a:bodyPr wrap="none">
+            <a:spAutoFit/>
+          </a:bodyPr>
+          <a:lstStyle/>
+          <a:p>
+            <a:r>
+              <a:rPr sz="1100" u="sng">
+                <a:solidFill>
+                  <a:srgbClr val="0066CC"/>
+                </a:solidFill>
+                <a:hlinkClick r:id="rId3"/>
+              </a:rPr>
+              <a:t>📊 Click for interactive version</a:t>
             </a:r>
           </a:p>
         </p:txBody>
@@ -6946,7 +7694,7 @@
         <p:spPr>
           <a:xfrm>
             <a:off x="457200" y="5029200"/>
-            <a:ext cx="8229600" cy="1371600"/>
+            <a:ext cx="8229600" cy="914400"/>
           </a:xfrm>
           <a:prstGeom prst="rect">
             <a:avLst/>
@@ -6968,6 +7716,40 @@
             </a:pPr>
             <a:r>
               <a:t>Compares revenue growth to inventory buildup. Inventory growing faster than sales signals potential markdown risk.</a:t>
+            </a:r>
+          </a:p>
+        </p:txBody>
+      </p:sp>
+      <p:sp>
+        <p:nvSpPr>
+          <p:cNvPr id="5" name="TextBox 4"/>
+          <p:cNvSpPr txBox="1"/>
+          <p:nvPr/>
+        </p:nvSpPr>
+        <p:spPr>
+          <a:xfrm>
+            <a:off x="457200" y="6035040"/>
+            <a:ext cx="8229600" cy="365760"/>
+          </a:xfrm>
+          <a:prstGeom prst="rect">
+            <a:avLst/>
+          </a:prstGeom>
+          <a:noFill/>
+        </p:spPr>
+        <p:txBody>
+          <a:bodyPr wrap="none">
+            <a:spAutoFit/>
+          </a:bodyPr>
+          <a:lstStyle/>
+          <a:p>
+            <a:r>
+              <a:rPr sz="1100" u="sng">
+                <a:solidFill>
+                  <a:srgbClr val="0066CC"/>
+                </a:solidFill>
+                <a:hlinkClick r:id="rId3"/>
+              </a:rPr>
+              <a:t>📊 Click for interactive version</a:t>
             </a:r>
           </a:p>
         </p:txBody>
@@ -7058,7 +7840,7 @@
         <p:spPr>
           <a:xfrm>
             <a:off x="457200" y="5029200"/>
-            <a:ext cx="8229600" cy="1371600"/>
+            <a:ext cx="8229600" cy="914400"/>
           </a:xfrm>
           <a:prstGeom prst="rect">
             <a:avLst/>
@@ -7080,6 +7862,40 @@
             </a:pPr>
             <a:r>
               <a:t>Quarterly view with calculated Q4 data showing seasonal patterns. Q4 (holiday season) typically shows peak revenue.</a:t>
+            </a:r>
+          </a:p>
+        </p:txBody>
+      </p:sp>
+      <p:sp>
+        <p:nvSpPr>
+          <p:cNvPr id="5" name="TextBox 4"/>
+          <p:cNvSpPr txBox="1"/>
+          <p:nvPr/>
+        </p:nvSpPr>
+        <p:spPr>
+          <a:xfrm>
+            <a:off x="457200" y="6035040"/>
+            <a:ext cx="8229600" cy="365760"/>
+          </a:xfrm>
+          <a:prstGeom prst="rect">
+            <a:avLst/>
+          </a:prstGeom>
+          <a:noFill/>
+        </p:spPr>
+        <p:txBody>
+          <a:bodyPr wrap="none">
+            <a:spAutoFit/>
+          </a:bodyPr>
+          <a:lstStyle/>
+          <a:p>
+            <a:r>
+              <a:rPr sz="1100" u="sng">
+                <a:solidFill>
+                  <a:srgbClr val="0066CC"/>
+                </a:solidFill>
+                <a:hlinkClick r:id="rId3"/>
+              </a:rPr>
+              <a:t>📊 Click for interactive version</a:t>
             </a:r>
           </a:p>
         </p:txBody>

--- a/output/Target_Financial_Analysis.pptx
+++ b/output/Target_Financial_Analysis.pptx
@@ -37,6 +37,12 @@
     <p:sldId id="285" r:id="rId36"/>
     <p:sldId id="286" r:id="rId37"/>
     <p:sldId id="287" r:id="rId38"/>
+    <p:sldId id="288" r:id="rId39"/>
+    <p:sldId id="289" r:id="rId40"/>
+    <p:sldId id="290" r:id="rId41"/>
+    <p:sldId id="291" r:id="rId42"/>
+    <p:sldId id="292" r:id="rId43"/>
+    <p:sldId id="293" r:id="rId44"/>
   </p:sldIdLst>
   <p:sldSz cx="9144000" cy="6858000" type="screen4x3"/>
   <p:notesSz cx="6858000" cy="9144000"/>
@@ -3267,6 +3273,51 @@
 <p:sld xmlns:a="http://schemas.openxmlformats.org/drawingml/2006/main" xmlns:p="http://schemas.openxmlformats.org/presentationml/2006/main" xmlns:r="http://schemas.openxmlformats.org/officeDocument/2006/relationships">
   <p:cSld>
     <p:spTree>
+      <p:sp>
+        <p:nvSpPr>
+          <p:cNvPr id="3" name="Rectangle 2"/>
+          <p:cNvSpPr/>
+          <p:nvPr/>
+        </p:nvSpPr>
+        <p:spPr>
+          <a:xfrm>
+            <a:off x="365760" y="228600"/>
+            <a:ext cx="1371600" cy="411480"/>
+          </a:xfrm>
+          <a:prstGeom prst="rect">
+            <a:avLst/>
+          </a:prstGeom>
+          <a:solidFill>
+            <a:srgbClr val="CC0000"/>
+          </a:solidFill>
+          <a:ln>
+            <a:solidFill>
+              <a:srgbClr val="CC0000"/>
+            </a:solidFill>
+          </a:ln>
+        </p:spPr>
+        <p:style>
+          <a:lnRef idx="1">
+            <a:schemeClr val="accent1"/>
+          </a:lnRef>
+          <a:fillRef idx="3">
+            <a:schemeClr val="accent1"/>
+          </a:fillRef>
+          <a:effectRef idx="2">
+            <a:schemeClr val="accent1"/>
+          </a:effectRef>
+          <a:fontRef idx="minor">
+            <a:schemeClr val="lt1"/>
+          </a:fontRef>
+        </p:style>
+        <p:txBody>
+          <a:bodyPr rtlCol="0" anchor="ctr"/>
+          <a:lstStyle/>
+          <a:p>
+            <a:pPr algn="ctr"/>
+          </a:p>
+        </p:txBody>
+      </p:sp>
       <p:nvGrpSpPr>
         <p:cNvPr id="1" name=""/>
         <p:cNvGrpSpPr/>
@@ -3281,8 +3332,8 @@
         </p:nvSpPr>
         <p:spPr>
           <a:xfrm>
-            <a:off x="457200" y="182880"/>
-            <a:ext cx="8229600" cy="457200"/>
+            <a:off x="457200" y="274320"/>
+            <a:ext cx="1828800" cy="365760"/>
           </a:xfrm>
           <a:prstGeom prst="rect">
             <a:avLst/>
@@ -3296,52 +3347,283 @@
           <a:lstStyle/>
           <a:p>
             <a:pPr>
-              <a:defRPr sz="2400" b="1">
+              <a:defRPr sz="1400" b="1">
+                <a:solidFill>
+                  <a:srgbClr val="FFFFFF"/>
+                </a:solidFill>
+              </a:defRPr>
+            </a:pPr>
+            <a:r>
+              <a:t>SO WHAT?</a:t>
+            </a:r>
+          </a:p>
+        </p:txBody>
+      </p:sp>
+      <p:sp>
+        <p:nvSpPr>
+          <p:cNvPr id="4" name="TextBox 3"/>
+          <p:cNvSpPr txBox="1"/>
+          <p:nvPr/>
+        </p:nvSpPr>
+        <p:spPr>
+          <a:xfrm>
+            <a:off x="457200" y="822960"/>
+            <a:ext cx="8229600" cy="548640"/>
+          </a:xfrm>
+          <a:prstGeom prst="rect">
+            <a:avLst/>
+          </a:prstGeom>
+          <a:noFill/>
+        </p:spPr>
+        <p:txBody>
+          <a:bodyPr wrap="none">
+            <a:spAutoFit/>
+          </a:bodyPr>
+          <a:lstStyle/>
+          <a:p>
+            <a:pPr>
+              <a:defRPr sz="2800" b="1">
+                <a:solidFill>
+                  <a:srgbClr val="333333"/>
+                </a:solidFill>
+              </a:defRPr>
+            </a:pPr>
+            <a:r>
+              <a:t>Growth Summary: The Revenue Story</a:t>
+            </a:r>
+          </a:p>
+        </p:txBody>
+      </p:sp>
+      <p:sp>
+        <p:nvSpPr>
+          <p:cNvPr id="5" name="Rectangle 4"/>
+          <p:cNvSpPr/>
+          <p:nvPr/>
+        </p:nvSpPr>
+        <p:spPr>
+          <a:xfrm>
+            <a:off x="457200" y="1554480"/>
+            <a:ext cx="8229600" cy="914400"/>
+          </a:xfrm>
+          <a:prstGeom prst="rect">
+            <a:avLst/>
+          </a:prstGeom>
+          <a:solidFill>
+            <a:srgbClr val="FFF0F0"/>
+          </a:solidFill>
+          <a:ln>
+            <a:solidFill>
+              <a:srgbClr val="CC0000"/>
+            </a:solidFill>
+          </a:ln>
+        </p:spPr>
+        <p:style>
+          <a:lnRef idx="1">
+            <a:schemeClr val="accent1"/>
+          </a:lnRef>
+          <a:fillRef idx="3">
+            <a:schemeClr val="accent1"/>
+          </a:fillRef>
+          <a:effectRef idx="2">
+            <a:schemeClr val="accent1"/>
+          </a:effectRef>
+          <a:fontRef idx="minor">
+            <a:schemeClr val="lt1"/>
+          </a:fontRef>
+        </p:style>
+        <p:txBody>
+          <a:bodyPr rtlCol="0" anchor="ctr"/>
+          <a:lstStyle/>
+          <a:p>
+            <a:pPr algn="ctr"/>
+          </a:p>
+        </p:txBody>
+      </p:sp>
+      <p:sp>
+        <p:nvSpPr>
+          <p:cNvPr id="6" name="TextBox 5"/>
+          <p:cNvSpPr txBox="1"/>
+          <p:nvPr/>
+        </p:nvSpPr>
+        <p:spPr>
+          <a:xfrm>
+            <a:off x="640080" y="1691640"/>
+            <a:ext cx="7863840" cy="640080"/>
+          </a:xfrm>
+          <a:prstGeom prst="rect">
+            <a:avLst/>
+          </a:prstGeom>
+          <a:noFill/>
+        </p:spPr>
+        <p:txBody>
+          <a:bodyPr wrap="square">
+            <a:spAutoFit/>
+          </a:bodyPr>
+          <a:lstStyle/>
+          <a:p>
+            <a:pPr>
+              <a:defRPr sz="1000" b="1">
                 <a:solidFill>
                   <a:srgbClr val="CC0000"/>
                 </a:solidFill>
               </a:defRPr>
             </a:pPr>
             <a:r>
-              <a:t>Margin Analysis (Gross/Operating/Net)</a:t>
-            </a:r>
-          </a:p>
-        </p:txBody>
-      </p:sp>
-      <p:pic>
-        <p:nvPicPr>
-          <p:cNvPr id="3" name="Picture 2" descr="chart_margin_analysis.png"/>
-          <p:cNvPicPr>
-            <a:picLocks noChangeAspect="1"/>
-          </p:cNvPicPr>
-          <p:nvPr/>
-        </p:nvPicPr>
-        <p:blipFill>
-          <a:blip r:embed="rId2"/>
-          <a:stretch>
-            <a:fillRect/>
-          </a:stretch>
-        </p:blipFill>
-        <p:spPr>
-          <a:xfrm>
-            <a:off x="457200" y="731520"/>
-            <a:ext cx="8229600" cy="4114800"/>
-          </a:xfrm>
-          <a:prstGeom prst="rect">
-            <a:avLst/>
-          </a:prstGeom>
-        </p:spPr>
-      </p:pic>
-      <p:sp>
-        <p:nvSpPr>
-          <p:cNvPr id="4" name="TextBox 3"/>
-          <p:cNvSpPr txBox="1"/>
+              <a:t>KEY INSIGHT</a:t>
+            </a:r>
+          </a:p>
+          <a:p>
+            <a:pPr>
+              <a:defRPr sz="1800" b="1">
+                <a:solidFill>
+                  <a:srgbClr val="333333"/>
+                </a:solidFill>
+              </a:defRPr>
+            </a:pPr>
+            <a:r>
+              <a:t>Revenue growth has stalled at ~2% YoY</a:t>
+            </a:r>
+          </a:p>
+        </p:txBody>
+      </p:sp>
+      <p:sp>
+        <p:nvSpPr>
+          <p:cNvPr id="7" name="TextBox 6"/>
+          <p:cNvSpPr txBox="1"/>
+          <p:nvPr/>
+        </p:nvSpPr>
+        <p:spPr>
+          <a:xfrm>
+            <a:off x="457200" y="2743200"/>
+            <a:ext cx="8229600" cy="2286000"/>
+          </a:xfrm>
+          <a:prstGeom prst="rect">
+            <a:avLst/>
+          </a:prstGeom>
+          <a:noFill/>
+        </p:spPr>
+        <p:txBody>
+          <a:bodyPr wrap="square">
+            <a:spAutoFit/>
+          </a:bodyPr>
+          <a:lstStyle/>
+          <a:p>
+            <a:pPr>
+              <a:spcAft>
+                <a:spcPts val="800"/>
+              </a:spcAft>
+              <a:defRPr sz="1600" b="1">
+                <a:solidFill>
+                  <a:srgbClr val="333333"/>
+                </a:solidFill>
+              </a:defRPr>
+            </a:pPr>
+            <a:r>
+              <a:t>Evidence:</a:t>
+            </a:r>
+          </a:p>
+          <a:p>
+            <a:pPr>
+              <a:spcAft>
+                <a:spcPts val="400"/>
+              </a:spcAft>
+              <a:defRPr sz="1400">
+                <a:solidFill>
+                  <a:srgbClr val="505050"/>
+                </a:solidFill>
+              </a:defRPr>
+            </a:pPr>
+            <a:r>
+              <a:t>• Revenue grew only 1.6% in Q3 2025 vs prior year</a:t>
+            </a:r>
+          </a:p>
+          <a:p>
+            <a:pPr>
+              <a:spcAft>
+                <a:spcPts val="400"/>
+              </a:spcAft>
+              <a:defRPr sz="1400">
+                <a:solidFill>
+                  <a:srgbClr val="505050"/>
+                </a:solidFill>
+              </a:defRPr>
+            </a:pPr>
+            <a:r>
+              <a:t>• Inventory up 17% while sales growth slowed</a:t>
+            </a:r>
+          </a:p>
+          <a:p>
+            <a:pPr>
+              <a:spcAft>
+                <a:spcPts val="400"/>
+              </a:spcAft>
+              <a:defRPr sz="1400">
+                <a:solidFill>
+                  <a:srgbClr val="505050"/>
+                </a:solidFill>
+              </a:defRPr>
+            </a:pPr>
+            <a:r>
+              <a:t>• Clearance risk from excess inventory buildup</a:t>
+            </a:r>
+          </a:p>
+        </p:txBody>
+      </p:sp>
+      <p:sp>
+        <p:nvSpPr>
+          <p:cNvPr id="8" name="Rectangle 7"/>
+          <p:cNvSpPr/>
           <p:nvPr/>
         </p:nvSpPr>
         <p:spPr>
           <a:xfrm>
             <a:off x="457200" y="5029200"/>
-            <a:ext cx="8229600" cy="914400"/>
+            <a:ext cx="8229600" cy="1097280"/>
+          </a:xfrm>
+          <a:prstGeom prst="rect">
+            <a:avLst/>
+          </a:prstGeom>
+          <a:solidFill>
+            <a:srgbClr val="F0F8FF"/>
+          </a:solidFill>
+          <a:ln>
+            <a:solidFill>
+              <a:srgbClr val="0066CC"/>
+            </a:solidFill>
+          </a:ln>
+        </p:spPr>
+        <p:style>
+          <a:lnRef idx="1">
+            <a:schemeClr val="accent1"/>
+          </a:lnRef>
+          <a:fillRef idx="3">
+            <a:schemeClr val="accent1"/>
+          </a:fillRef>
+          <a:effectRef idx="2">
+            <a:schemeClr val="accent1"/>
+          </a:effectRef>
+          <a:fontRef idx="minor">
+            <a:schemeClr val="lt1"/>
+          </a:fontRef>
+        </p:style>
+        <p:txBody>
+          <a:bodyPr rtlCol="0" anchor="ctr"/>
+          <a:lstStyle/>
+          <a:p>
+            <a:pPr algn="ctr"/>
+          </a:p>
+        </p:txBody>
+      </p:sp>
+      <p:sp>
+        <p:nvSpPr>
+          <p:cNvPr id="9" name="TextBox 8"/>
+          <p:cNvSpPr txBox="1"/>
+          <p:nvPr/>
+        </p:nvSpPr>
+        <p:spPr>
+          <a:xfrm>
+            <a:off x="640080" y="5166360"/>
+            <a:ext cx="7863840" cy="822960"/>
           </a:xfrm>
           <a:prstGeom prst="rect">
             <a:avLst/>
@@ -3355,48 +3637,26 @@
           <a:lstStyle/>
           <a:p>
             <a:pPr>
-              <a:defRPr sz="1200">
-                <a:solidFill>
-                  <a:srgbClr val="646464"/>
-                </a:solidFill>
-              </a:defRPr>
-            </a:pPr>
-            <a:r>
-              <a:t>Three margin lines tracking profitability over time. Compression between lines reveals where profits leak.</a:t>
-            </a:r>
-          </a:p>
-        </p:txBody>
-      </p:sp>
-      <p:sp>
-        <p:nvSpPr>
-          <p:cNvPr id="5" name="TextBox 4"/>
-          <p:cNvSpPr txBox="1"/>
-          <p:nvPr/>
-        </p:nvSpPr>
-        <p:spPr>
-          <a:xfrm>
-            <a:off x="457200" y="6035040"/>
-            <a:ext cx="8229600" cy="365760"/>
-          </a:xfrm>
-          <a:prstGeom prst="rect">
-            <a:avLst/>
-          </a:prstGeom>
-          <a:noFill/>
-        </p:spPr>
-        <p:txBody>
-          <a:bodyPr wrap="none">
-            <a:spAutoFit/>
-          </a:bodyPr>
-          <a:lstStyle/>
-          <a:p>
-            <a:r>
-              <a:rPr sz="1100" u="sng">
+              <a:defRPr sz="1000" b="1">
                 <a:solidFill>
                   <a:srgbClr val="0066CC"/>
                 </a:solidFill>
-                <a:hlinkClick r:id="rId3"/>
-              </a:rPr>
-              <a:t>📊 Click for interactive version</a:t>
+              </a:defRPr>
+            </a:pPr>
+            <a:r>
+              <a:t>IMPLICATION</a:t>
+            </a:r>
+          </a:p>
+          <a:p>
+            <a:pPr>
+              <a:defRPr sz="1400">
+                <a:solidFill>
+                  <a:srgbClr val="333333"/>
+                </a:solidFill>
+              </a:defRPr>
+            </a:pPr>
+            <a:r>
+              <a:t>Slowing growth limits pricing power; watch for markdown pressure in Q4</a:t>
             </a:r>
           </a:p>
         </p:txBody>
@@ -3421,13 +3681,128 @@
       <p:grpSpPr/>
       <p:sp>
         <p:nvSpPr>
-          <p:cNvPr id="2" name="TextBox 1"/>
-          <p:cNvSpPr txBox="1"/>
-          <p:nvPr/>
-        </p:nvSpPr>
-        <p:spPr>
-          <a:xfrm>
-            <a:off x="457200" y="182880"/>
+          <p:cNvPr id="2" name="Rectangle 1"/>
+          <p:cNvSpPr/>
+          <p:nvPr/>
+        </p:nvSpPr>
+        <p:spPr>
+          <a:xfrm>
+            <a:off x="0" y="2286000"/>
+            <a:ext cx="9144000" cy="1828800"/>
+          </a:xfrm>
+          <a:prstGeom prst="rect">
+            <a:avLst/>
+          </a:prstGeom>
+          <a:solidFill>
+            <a:srgbClr val="CC0000"/>
+          </a:solidFill>
+          <a:ln>
+            <a:solidFill>
+              <a:srgbClr val="CC0000"/>
+            </a:solidFill>
+          </a:ln>
+        </p:spPr>
+        <p:style>
+          <a:lnRef idx="1">
+            <a:schemeClr val="accent1"/>
+          </a:lnRef>
+          <a:fillRef idx="3">
+            <a:schemeClr val="accent1"/>
+          </a:fillRef>
+          <a:effectRef idx="2">
+            <a:schemeClr val="accent1"/>
+          </a:effectRef>
+          <a:fontRef idx="minor">
+            <a:schemeClr val="lt1"/>
+          </a:fontRef>
+        </p:style>
+        <p:txBody>
+          <a:bodyPr rtlCol="0" anchor="ctr"/>
+          <a:lstStyle/>
+          <a:p>
+            <a:pPr algn="ctr"/>
+          </a:p>
+        </p:txBody>
+      </p:sp>
+      <p:sp>
+        <p:nvSpPr>
+          <p:cNvPr id="3" name="TextBox 2"/>
+          <p:cNvSpPr txBox="1"/>
+          <p:nvPr/>
+        </p:nvSpPr>
+        <p:spPr>
+          <a:xfrm>
+            <a:off x="457200" y="2468880"/>
+            <a:ext cx="8229600" cy="548640"/>
+          </a:xfrm>
+          <a:prstGeom prst="rect">
+            <a:avLst/>
+          </a:prstGeom>
+          <a:noFill/>
+        </p:spPr>
+        <p:txBody>
+          <a:bodyPr wrap="none">
+            <a:spAutoFit/>
+          </a:bodyPr>
+          <a:lstStyle/>
+          <a:p>
+            <a:pPr algn="ctr">
+              <a:defRPr sz="2400" b="1">
+                <a:solidFill>
+                  <a:srgbClr val="FFFFFF"/>
+                </a:solidFill>
+              </a:defRPr>
+            </a:pPr>
+            <a:r>
+              <a:t>PILLAR 2</a:t>
+            </a:r>
+          </a:p>
+        </p:txBody>
+      </p:sp>
+      <p:sp>
+        <p:nvSpPr>
+          <p:cNvPr id="4" name="TextBox 3"/>
+          <p:cNvSpPr txBox="1"/>
+          <p:nvPr/>
+        </p:nvSpPr>
+        <p:spPr>
+          <a:xfrm>
+            <a:off x="457200" y="3017520"/>
+            <a:ext cx="8229600" cy="731520"/>
+          </a:xfrm>
+          <a:prstGeom prst="rect">
+            <a:avLst/>
+          </a:prstGeom>
+          <a:noFill/>
+        </p:spPr>
+        <p:txBody>
+          <a:bodyPr wrap="none">
+            <a:spAutoFit/>
+          </a:bodyPr>
+          <a:lstStyle/>
+          <a:p>
+            <a:pPr algn="ctr">
+              <a:defRPr sz="4400" b="1">
+                <a:solidFill>
+                  <a:srgbClr val="FFFFFF"/>
+                </a:solidFill>
+              </a:defRPr>
+            </a:pPr>
+            <a:r>
+              <a:t>Profitability &amp; Margins</a:t>
+            </a:r>
+          </a:p>
+        </p:txBody>
+      </p:sp>
+      <p:sp>
+        <p:nvSpPr>
+          <p:cNvPr id="5" name="TextBox 4"/>
+          <p:cNvSpPr txBox="1"/>
+          <p:nvPr/>
+        </p:nvSpPr>
+        <p:spPr>
+          <a:xfrm>
+            <a:off x="457200" y="4572000"/>
             <a:ext cx="8229600" cy="457200"/>
           </a:xfrm>
           <a:prstGeom prst="rect">
@@ -3441,108 +3816,15 @@
           </a:bodyPr>
           <a:lstStyle/>
           <a:p>
-            <a:pPr>
-              <a:defRPr sz="2400" b="1">
-                <a:solidFill>
-                  <a:srgbClr val="CC0000"/>
-                </a:solidFill>
-              </a:defRPr>
-            </a:pPr>
-            <a:r>
-              <a:t>Margin Bridge Waterfall</a:t>
-            </a:r>
-          </a:p>
-        </p:txBody>
-      </p:sp>
-      <p:pic>
-        <p:nvPicPr>
-          <p:cNvPr id="3" name="Picture 2" descr="chart_margin_bridge.png"/>
-          <p:cNvPicPr>
-            <a:picLocks noChangeAspect="1"/>
-          </p:cNvPicPr>
-          <p:nvPr/>
-        </p:nvPicPr>
-        <p:blipFill>
-          <a:blip r:embed="rId2"/>
-          <a:stretch>
-            <a:fillRect/>
-          </a:stretch>
-        </p:blipFill>
-        <p:spPr>
-          <a:xfrm>
-            <a:off x="457200" y="731520"/>
-            <a:ext cx="8229600" cy="4114800"/>
-          </a:xfrm>
-          <a:prstGeom prst="rect">
-            <a:avLst/>
-          </a:prstGeom>
-        </p:spPr>
-      </p:pic>
-      <p:sp>
-        <p:nvSpPr>
-          <p:cNvPr id="4" name="TextBox 3"/>
-          <p:cNvSpPr txBox="1"/>
-          <p:nvPr/>
-        </p:nvSpPr>
-        <p:spPr>
-          <a:xfrm>
-            <a:off x="457200" y="5029200"/>
-            <a:ext cx="8229600" cy="914400"/>
-          </a:xfrm>
-          <a:prstGeom prst="rect">
-            <a:avLst/>
-          </a:prstGeom>
-          <a:noFill/>
-        </p:spPr>
-        <p:txBody>
-          <a:bodyPr wrap="square">
-            <a:spAutoFit/>
-          </a:bodyPr>
-          <a:lstStyle/>
-          <a:p>
-            <a:pPr>
-              <a:defRPr sz="1200">
+            <a:pPr algn="ctr">
+              <a:defRPr sz="2400" i="1">
                 <a:solidFill>
                   <a:srgbClr val="646464"/>
                 </a:solidFill>
               </a:defRPr>
             </a:pPr>
             <a:r>
-              <a:t>Waterfall showing margin evolution from FY2022 baseline. Green bars = improvement, red bars = deterioration.</a:t>
-            </a:r>
-          </a:p>
-        </p:txBody>
-      </p:sp>
-      <p:sp>
-        <p:nvSpPr>
-          <p:cNvPr id="5" name="TextBox 4"/>
-          <p:cNvSpPr txBox="1"/>
-          <p:nvPr/>
-        </p:nvSpPr>
-        <p:spPr>
-          <a:xfrm>
-            <a:off x="457200" y="6035040"/>
-            <a:ext cx="8229600" cy="365760"/>
-          </a:xfrm>
-          <a:prstGeom prst="rect">
-            <a:avLst/>
-          </a:prstGeom>
-          <a:noFill/>
-        </p:spPr>
-        <p:txBody>
-          <a:bodyPr wrap="none">
-            <a:spAutoFit/>
-          </a:bodyPr>
-          <a:lstStyle/>
-          <a:p>
-            <a:r>
-              <a:rPr sz="1100" u="sng">
-                <a:solidFill>
-                  <a:srgbClr val="0066CC"/>
-                </a:solidFill>
-                <a:hlinkClick r:id="rId3"/>
-              </a:rPr>
-              <a:t>📊 Click for interactive version</a:t>
+              <a:t>"How efficiently is the company generating profits?"</a:t>
             </a:r>
           </a:p>
         </p:txBody>
@@ -3595,21 +3877,55 @@
               </a:defRPr>
             </a:pPr>
             <a:r>
-              <a:t>Operating Expense Breakdown</a:t>
+              <a:t>Margin Analysis (Gross/Operating/Net)</a:t>
+            </a:r>
+          </a:p>
+        </p:txBody>
+      </p:sp>
+      <p:sp>
+        <p:nvSpPr>
+          <p:cNvPr id="3" name="TextBox 2"/>
+          <p:cNvSpPr txBox="1"/>
+          <p:nvPr/>
+        </p:nvSpPr>
+        <p:spPr>
+          <a:xfrm>
+            <a:off x="8229600" y="228600"/>
+            <a:ext cx="365760" cy="365760"/>
+          </a:xfrm>
+          <a:prstGeom prst="rect">
+            <a:avLst/>
+          </a:prstGeom>
+          <a:noFill/>
+        </p:spPr>
+        <p:txBody>
+          <a:bodyPr wrap="none">
+            <a:spAutoFit/>
+          </a:bodyPr>
+          <a:lstStyle/>
+          <a:p>
+            <a:r>
+              <a:rPr sz="1800">
+                <a:solidFill>
+                  <a:srgbClr val="646464"/>
+                </a:solidFill>
+                <a:hlinkClick r:id="rId2"/>
+              </a:rPr>
+              <a:t>ⓘ</a:t>
             </a:r>
           </a:p>
         </p:txBody>
       </p:sp>
       <p:pic>
         <p:nvPicPr>
-          <p:cNvPr id="3" name="Picture 2" descr="chart_expense_breakdown.png"/>
+          <p:cNvPr id="4" name="Picture 3" descr="chart_margin_analysis.png"/>
           <p:cNvPicPr>
             <a:picLocks noChangeAspect="1"/>
           </p:cNvPicPr>
           <p:nvPr/>
         </p:nvPicPr>
         <p:blipFill>
-          <a:blip r:embed="rId2"/>
+          <a:blip r:embed="rId3"/>
           <a:stretch>
             <a:fillRect/>
           </a:stretch>
@@ -3626,7 +3942,7 @@
       </p:pic>
       <p:sp>
         <p:nvSpPr>
-          <p:cNvPr id="4" name="TextBox 3"/>
+          <p:cNvPr id="5" name="TextBox 4"/>
           <p:cNvSpPr txBox="1"/>
           <p:nvPr/>
         </p:nvSpPr>
@@ -3647,21 +3963,21 @@
           <a:lstStyle/>
           <a:p>
             <a:pPr>
-              <a:defRPr sz="1200">
-                <a:solidFill>
-                  <a:srgbClr val="646464"/>
-                </a:solidFill>
-              </a:defRPr>
-            </a:pPr>
-            <a:r>
-              <a:t>100% stacked bars showing cost structure. Watch for SG&amp;A creep eating into margins.</a:t>
-            </a:r>
-          </a:p>
-        </p:txBody>
-      </p:sp>
-      <p:sp>
-        <p:nvSpPr>
-          <p:cNvPr id="5" name="TextBox 4"/>
+              <a:defRPr sz="1200" b="1">
+                <a:solidFill>
+                  <a:srgbClr val="323232"/>
+                </a:solidFill>
+              </a:defRPr>
+            </a:pPr>
+            <a:r>
+              <a:t>Operating margin compressed from 7.1% (FY2020) to 3.75% (Q3 2025)—a 3.3pp drop. Gross margin held steady, so the leak is in SG&amp;A and shrink.</a:t>
+            </a:r>
+          </a:p>
+        </p:txBody>
+      </p:sp>
+      <p:sp>
+        <p:nvSpPr>
+          <p:cNvPr id="6" name="TextBox 5"/>
           <p:cNvSpPr txBox="1"/>
           <p:nvPr/>
         </p:nvSpPr>
@@ -3686,7 +4002,7 @@
                 <a:solidFill>
                   <a:srgbClr val="0066CC"/>
                 </a:solidFill>
-                <a:hlinkClick r:id="rId3"/>
+                <a:hlinkClick r:id="rId2"/>
               </a:rPr>
               <a:t>📊 Click for interactive version</a:t>
             </a:r>
@@ -3741,21 +4057,55 @@
               </a:defRPr>
             </a:pPr>
             <a:r>
-              <a:t>EBITDA Bridge</a:t>
+              <a:t>Margin Bridge Waterfall</a:t>
+            </a:r>
+          </a:p>
+        </p:txBody>
+      </p:sp>
+      <p:sp>
+        <p:nvSpPr>
+          <p:cNvPr id="3" name="TextBox 2"/>
+          <p:cNvSpPr txBox="1"/>
+          <p:nvPr/>
+        </p:nvSpPr>
+        <p:spPr>
+          <a:xfrm>
+            <a:off x="8229600" y="228600"/>
+            <a:ext cx="365760" cy="365760"/>
+          </a:xfrm>
+          <a:prstGeom prst="rect">
+            <a:avLst/>
+          </a:prstGeom>
+          <a:noFill/>
+        </p:spPr>
+        <p:txBody>
+          <a:bodyPr wrap="none">
+            <a:spAutoFit/>
+          </a:bodyPr>
+          <a:lstStyle/>
+          <a:p>
+            <a:r>
+              <a:rPr sz="1800">
+                <a:solidFill>
+                  <a:srgbClr val="646464"/>
+                </a:solidFill>
+                <a:hlinkClick r:id="rId2"/>
+              </a:rPr>
+              <a:t>ⓘ</a:t>
             </a:r>
           </a:p>
         </p:txBody>
       </p:sp>
       <p:pic>
         <p:nvPicPr>
-          <p:cNvPr id="3" name="Picture 2" descr="chart_ebitda_bridge.png"/>
+          <p:cNvPr id="4" name="Picture 3" descr="chart_margin_bridge.png"/>
           <p:cNvPicPr>
             <a:picLocks noChangeAspect="1"/>
           </p:cNvPicPr>
           <p:nvPr/>
         </p:nvPicPr>
         <p:blipFill>
-          <a:blip r:embed="rId2"/>
+          <a:blip r:embed="rId3"/>
           <a:stretch>
             <a:fillRect/>
           </a:stretch>
@@ -3772,7 +4122,7 @@
       </p:pic>
       <p:sp>
         <p:nvSpPr>
-          <p:cNvPr id="4" name="TextBox 3"/>
+          <p:cNvPr id="5" name="TextBox 4"/>
           <p:cNvSpPr txBox="1"/>
           <p:nvPr/>
         </p:nvSpPr>
@@ -3793,21 +4143,21 @@
           <a:lstStyle/>
           <a:p>
             <a:pPr>
-              <a:defRPr sz="1200">
-                <a:solidFill>
-                  <a:srgbClr val="646464"/>
-                </a:solidFill>
-              </a:defRPr>
-            </a:pPr>
-            <a:r>
-              <a:t>Shows how revenue flows to EBITDA through operating expenses. The D&amp;A add-back reveals capital intensity.</a:t>
-            </a:r>
-          </a:p>
-        </p:txBody>
-      </p:sp>
-      <p:sp>
-        <p:nvSpPr>
-          <p:cNvPr id="5" name="TextBox 4"/>
+              <a:defRPr sz="1200" b="1">
+                <a:solidFill>
+                  <a:srgbClr val="323232"/>
+                </a:solidFill>
+              </a:defRPr>
+            </a:pPr>
+            <a:r>
+              <a:t>From FY2022 baseline, margins deteriorated in 5 of 8 periods. The FY2023 trough (-2.4pp) shows the inventory markdown pain.</a:t>
+            </a:r>
+          </a:p>
+        </p:txBody>
+      </p:sp>
+      <p:sp>
+        <p:nvSpPr>
+          <p:cNvPr id="6" name="TextBox 5"/>
           <p:cNvSpPr txBox="1"/>
           <p:nvPr/>
         </p:nvSpPr>
@@ -3832,7 +4182,7 @@
                 <a:solidFill>
                   <a:srgbClr val="0066CC"/>
                 </a:solidFill>
-                <a:hlinkClick r:id="rId3"/>
+                <a:hlinkClick r:id="rId2"/>
               </a:rPr>
               <a:t>📊 Click for interactive version</a:t>
             </a:r>
@@ -3887,21 +4237,55 @@
               </a:defRPr>
             </a:pPr>
             <a:r>
-              <a:t>Operating Margin Waterfall</a:t>
+              <a:t>Operating Expense Breakdown</a:t>
+            </a:r>
+          </a:p>
+        </p:txBody>
+      </p:sp>
+      <p:sp>
+        <p:nvSpPr>
+          <p:cNvPr id="3" name="TextBox 2"/>
+          <p:cNvSpPr txBox="1"/>
+          <p:nvPr/>
+        </p:nvSpPr>
+        <p:spPr>
+          <a:xfrm>
+            <a:off x="8229600" y="228600"/>
+            <a:ext cx="365760" cy="365760"/>
+          </a:xfrm>
+          <a:prstGeom prst="rect">
+            <a:avLst/>
+          </a:prstGeom>
+          <a:noFill/>
+        </p:spPr>
+        <p:txBody>
+          <a:bodyPr wrap="none">
+            <a:spAutoFit/>
+          </a:bodyPr>
+          <a:lstStyle/>
+          <a:p>
+            <a:r>
+              <a:rPr sz="1800">
+                <a:solidFill>
+                  <a:srgbClr val="646464"/>
+                </a:solidFill>
+                <a:hlinkClick r:id="rId2"/>
+              </a:rPr>
+              <a:t>ⓘ</a:t>
             </a:r>
           </a:p>
         </p:txBody>
       </p:sp>
       <p:pic>
         <p:nvPicPr>
-          <p:cNvPr id="3" name="Picture 2" descr="chart_operating_margin_waterfall.png"/>
+          <p:cNvPr id="4" name="Picture 3" descr="chart_expense_breakdown.png"/>
           <p:cNvPicPr>
             <a:picLocks noChangeAspect="1"/>
           </p:cNvPicPr>
           <p:nvPr/>
         </p:nvPicPr>
         <p:blipFill>
-          <a:blip r:embed="rId2"/>
+          <a:blip r:embed="rId3"/>
           <a:stretch>
             <a:fillRect/>
           </a:stretch>
@@ -3918,7 +4302,7 @@
       </p:pic>
       <p:sp>
         <p:nvSpPr>
-          <p:cNvPr id="4" name="TextBox 3"/>
+          <p:cNvPr id="5" name="TextBox 4"/>
           <p:cNvSpPr txBox="1"/>
           <p:nvPr/>
         </p:nvSpPr>
@@ -3939,21 +4323,21 @@
           <a:lstStyle/>
           <a:p>
             <a:pPr>
-              <a:defRPr sz="1200">
-                <a:solidFill>
-                  <a:srgbClr val="646464"/>
-                </a:solidFill>
-              </a:defRPr>
-            </a:pPr>
-            <a:r>
-              <a:t>Quarterly margin changes as waterfall. Identifies seasonal patterns and pressure points.</a:t>
-            </a:r>
-          </a:p>
-        </p:txBody>
-      </p:sp>
-      <p:sp>
-        <p:nvSpPr>
-          <p:cNvPr id="5" name="TextBox 4"/>
+              <a:defRPr sz="1200" b="1">
+                <a:solidFill>
+                  <a:srgbClr val="323232"/>
+                </a:solidFill>
+              </a:defRPr>
+            </a:pPr>
+            <a:r>
+              <a:t>SG&amp;A as % of revenue crept up from 19% to 21% since FY2020. This 2pp increase directly explains half the margin compression.</a:t>
+            </a:r>
+          </a:p>
+        </p:txBody>
+      </p:sp>
+      <p:sp>
+        <p:nvSpPr>
+          <p:cNvPr id="6" name="TextBox 5"/>
           <p:cNvSpPr txBox="1"/>
           <p:nvPr/>
         </p:nvSpPr>
@@ -3978,7 +4362,7 @@
                 <a:solidFill>
                   <a:srgbClr val="0066CC"/>
                 </a:solidFill>
-                <a:hlinkClick r:id="rId3"/>
+                <a:hlinkClick r:id="rId2"/>
               </a:rPr>
               <a:t>📊 Click for interactive version</a:t>
             </a:r>
@@ -4033,21 +4417,55 @@
               </a:defRPr>
             </a:pPr>
             <a:r>
-              <a:t>Earnings Quality</a:t>
+              <a:t>EBITDA Bridge</a:t>
+            </a:r>
+          </a:p>
+        </p:txBody>
+      </p:sp>
+      <p:sp>
+        <p:nvSpPr>
+          <p:cNvPr id="3" name="TextBox 2"/>
+          <p:cNvSpPr txBox="1"/>
+          <p:nvPr/>
+        </p:nvSpPr>
+        <p:spPr>
+          <a:xfrm>
+            <a:off x="8229600" y="228600"/>
+            <a:ext cx="365760" cy="365760"/>
+          </a:xfrm>
+          <a:prstGeom prst="rect">
+            <a:avLst/>
+          </a:prstGeom>
+          <a:noFill/>
+        </p:spPr>
+        <p:txBody>
+          <a:bodyPr wrap="none">
+            <a:spAutoFit/>
+          </a:bodyPr>
+          <a:lstStyle/>
+          <a:p>
+            <a:r>
+              <a:rPr sz="1800">
+                <a:solidFill>
+                  <a:srgbClr val="646464"/>
+                </a:solidFill>
+                <a:hlinkClick r:id="rId2"/>
+              </a:rPr>
+              <a:t>ⓘ</a:t>
             </a:r>
           </a:p>
         </p:txBody>
       </p:sp>
       <p:pic>
         <p:nvPicPr>
-          <p:cNvPr id="3" name="Picture 2" descr="chart_earnings_quality.png"/>
+          <p:cNvPr id="4" name="Picture 3" descr="chart_ebitda_bridge.png"/>
           <p:cNvPicPr>
             <a:picLocks noChangeAspect="1"/>
           </p:cNvPicPr>
           <p:nvPr/>
         </p:nvPicPr>
         <p:blipFill>
-          <a:blip r:embed="rId2"/>
+          <a:blip r:embed="rId3"/>
           <a:stretch>
             <a:fillRect/>
           </a:stretch>
@@ -4064,7 +4482,7 @@
       </p:pic>
       <p:sp>
         <p:nvSpPr>
-          <p:cNvPr id="4" name="TextBox 3"/>
+          <p:cNvPr id="5" name="TextBox 4"/>
           <p:cNvSpPr txBox="1"/>
           <p:nvPr/>
         </p:nvSpPr>
@@ -4085,21 +4503,21 @@
           <a:lstStyle/>
           <a:p>
             <a:pPr>
-              <a:defRPr sz="1200">
-                <a:solidFill>
-                  <a:srgbClr val="646464"/>
-                </a:solidFill>
-              </a:defRPr>
-            </a:pPr>
-            <a:r>
-              <a:t>Compares Net Income to Operating Cash Flow. High-quality earnings convert to cash consistently.</a:t>
-            </a:r>
-          </a:p>
-        </p:txBody>
-      </p:sp>
-      <p:sp>
-        <p:nvSpPr>
-          <p:cNvPr id="5" name="TextBox 4"/>
+              <a:defRPr sz="1200" b="1">
+                <a:solidFill>
+                  <a:srgbClr val="323232"/>
+                </a:solidFill>
+              </a:defRPr>
+            </a:pPr>
+            <a:r>
+              <a:t>D&amp;A adds ~$2.8B to operating income, but EBITDA margin still declined from 9.5% to 6.5% over three years.</a:t>
+            </a:r>
+          </a:p>
+        </p:txBody>
+      </p:sp>
+      <p:sp>
+        <p:nvSpPr>
+          <p:cNvPr id="6" name="TextBox 5"/>
           <p:cNvSpPr txBox="1"/>
           <p:nvPr/>
         </p:nvSpPr>
@@ -4124,7 +4542,7 @@
                 <a:solidFill>
                   <a:srgbClr val="0066CC"/>
                 </a:solidFill>
-                <a:hlinkClick r:id="rId3"/>
+                <a:hlinkClick r:id="rId2"/>
               </a:rPr>
               <a:t>📊 Click for interactive version</a:t>
             </a:r>
@@ -4151,46 +4569,36 @@
       <p:grpSpPr/>
       <p:sp>
         <p:nvSpPr>
-          <p:cNvPr id="2" name="Rectangle 1"/>
-          <p:cNvSpPr/>
-          <p:nvPr/>
-        </p:nvSpPr>
-        <p:spPr>
-          <a:xfrm>
-            <a:off x="0" y="2286000"/>
-            <a:ext cx="9144000" cy="1828800"/>
-          </a:xfrm>
-          <a:prstGeom prst="rect">
-            <a:avLst/>
-          </a:prstGeom>
-          <a:solidFill>
-            <a:srgbClr val="CC0000"/>
-          </a:solidFill>
-          <a:ln>
-            <a:solidFill>
-              <a:srgbClr val="CC0000"/>
-            </a:solidFill>
-          </a:ln>
-        </p:spPr>
-        <p:style>
-          <a:lnRef idx="1">
-            <a:schemeClr val="accent1"/>
-          </a:lnRef>
-          <a:fillRef idx="3">
-            <a:schemeClr val="accent1"/>
-          </a:fillRef>
-          <a:effectRef idx="2">
-            <a:schemeClr val="accent1"/>
-          </a:effectRef>
-          <a:fontRef idx="minor">
-            <a:schemeClr val="lt1"/>
-          </a:fontRef>
-        </p:style>
-        <p:txBody>
-          <a:bodyPr rtlCol="0" anchor="ctr"/>
-          <a:lstStyle/>
-          <a:p>
-            <a:pPr algn="ctr"/>
+          <p:cNvPr id="2" name="TextBox 1"/>
+          <p:cNvSpPr txBox="1"/>
+          <p:nvPr/>
+        </p:nvSpPr>
+        <p:spPr>
+          <a:xfrm>
+            <a:off x="457200" y="182880"/>
+            <a:ext cx="8229600" cy="457200"/>
+          </a:xfrm>
+          <a:prstGeom prst="rect">
+            <a:avLst/>
+          </a:prstGeom>
+          <a:noFill/>
+        </p:spPr>
+        <p:txBody>
+          <a:bodyPr wrap="none">
+            <a:spAutoFit/>
+          </a:bodyPr>
+          <a:lstStyle/>
+          <a:p>
+            <a:pPr>
+              <a:defRPr sz="2400" b="1">
+                <a:solidFill>
+                  <a:srgbClr val="CC0000"/>
+                </a:solidFill>
+              </a:defRPr>
+            </a:pPr>
+            <a:r>
+              <a:t>Operating Margin Waterfall</a:t>
+            </a:r>
           </a:p>
         </p:txBody>
       </p:sp>
@@ -4202,8 +4610,8 @@
         </p:nvSpPr>
         <p:spPr>
           <a:xfrm>
-            <a:off x="457200" y="2468880"/>
-            <a:ext cx="8229600" cy="548640"/>
+            <a:off x="8229600" y="228600"/>
+            <a:ext cx="365760" cy="365760"/>
           </a:xfrm>
           <a:prstGeom prst="rect">
             <a:avLst/>
@@ -4216,29 +4624,87 @@
           </a:bodyPr>
           <a:lstStyle/>
           <a:p>
-            <a:pPr algn="ctr">
-              <a:defRPr sz="2400" b="1">
-                <a:solidFill>
-                  <a:srgbClr val="FFFFFF"/>
-                </a:solidFill>
-              </a:defRPr>
-            </a:pPr>
-            <a:r>
-              <a:t>PILLAR 3</a:t>
-            </a:r>
-          </a:p>
-        </p:txBody>
-      </p:sp>
-      <p:sp>
-        <p:nvSpPr>
-          <p:cNvPr id="4" name="TextBox 3"/>
-          <p:cNvSpPr txBox="1"/>
-          <p:nvPr/>
-        </p:nvSpPr>
-        <p:spPr>
-          <a:xfrm>
-            <a:off x="457200" y="3017520"/>
-            <a:ext cx="8229600" cy="731520"/>
+            <a:r>
+              <a:rPr sz="1800">
+                <a:solidFill>
+                  <a:srgbClr val="646464"/>
+                </a:solidFill>
+                <a:hlinkClick r:id="rId2"/>
+              </a:rPr>
+              <a:t>ⓘ</a:t>
+            </a:r>
+          </a:p>
+        </p:txBody>
+      </p:sp>
+      <p:pic>
+        <p:nvPicPr>
+          <p:cNvPr id="4" name="Picture 3" descr="chart_operating_margin_waterfall.png"/>
+          <p:cNvPicPr>
+            <a:picLocks noChangeAspect="1"/>
+          </p:cNvPicPr>
+          <p:nvPr/>
+        </p:nvPicPr>
+        <p:blipFill>
+          <a:blip r:embed="rId3"/>
+          <a:stretch>
+            <a:fillRect/>
+          </a:stretch>
+        </p:blipFill>
+        <p:spPr>
+          <a:xfrm>
+            <a:off x="457200" y="731520"/>
+            <a:ext cx="8229600" cy="4114800"/>
+          </a:xfrm>
+          <a:prstGeom prst="rect">
+            <a:avLst/>
+          </a:prstGeom>
+        </p:spPr>
+      </p:pic>
+      <p:sp>
+        <p:nvSpPr>
+          <p:cNvPr id="5" name="TextBox 4"/>
+          <p:cNvSpPr txBox="1"/>
+          <p:nvPr/>
+        </p:nvSpPr>
+        <p:spPr>
+          <a:xfrm>
+            <a:off x="457200" y="5029200"/>
+            <a:ext cx="8229600" cy="914400"/>
+          </a:xfrm>
+          <a:prstGeom prst="rect">
+            <a:avLst/>
+          </a:prstGeom>
+          <a:noFill/>
+        </p:spPr>
+        <p:txBody>
+          <a:bodyPr wrap="square">
+            <a:spAutoFit/>
+          </a:bodyPr>
+          <a:lstStyle/>
+          <a:p>
+            <a:pPr>
+              <a:defRPr sz="1200" b="1">
+                <a:solidFill>
+                  <a:srgbClr val="323232"/>
+                </a:solidFill>
+              </a:defRPr>
+            </a:pPr>
+            <a:r>
+              <a:t>Q3 margins consistently underperform Q4 due to holiday leverage. FY2023 Q2-Q3 saw the steepest drops (-1.5pp each).</a:t>
+            </a:r>
+          </a:p>
+        </p:txBody>
+      </p:sp>
+      <p:sp>
+        <p:nvSpPr>
+          <p:cNvPr id="6" name="TextBox 5"/>
+          <p:cNvSpPr txBox="1"/>
+          <p:nvPr/>
+        </p:nvSpPr>
+        <p:spPr>
+          <a:xfrm>
+            <a:off x="457200" y="6035040"/>
+            <a:ext cx="8229600" cy="365760"/>
           </a:xfrm>
           <a:prstGeom prst="rect">
             <a:avLst/>
@@ -4251,50 +4717,14 @@
           </a:bodyPr>
           <a:lstStyle/>
           <a:p>
-            <a:pPr algn="ctr">
-              <a:defRPr sz="4400" b="1">
-                <a:solidFill>
-                  <a:srgbClr val="FFFFFF"/>
-                </a:solidFill>
-              </a:defRPr>
-            </a:pPr>
-            <a:r>
-              <a:t>Liquidity &amp; Solvency</a:t>
-            </a:r>
-          </a:p>
-        </p:txBody>
-      </p:sp>
-      <p:sp>
-        <p:nvSpPr>
-          <p:cNvPr id="5" name="TextBox 4"/>
-          <p:cNvSpPr txBox="1"/>
-          <p:nvPr/>
-        </p:nvSpPr>
-        <p:spPr>
-          <a:xfrm>
-            <a:off x="457200" y="4572000"/>
-            <a:ext cx="8229600" cy="457200"/>
-          </a:xfrm>
-          <a:prstGeom prst="rect">
-            <a:avLst/>
-          </a:prstGeom>
-          <a:noFill/>
-        </p:spPr>
-        <p:txBody>
-          <a:bodyPr wrap="none">
-            <a:spAutoFit/>
-          </a:bodyPr>
-          <a:lstStyle/>
-          <a:p>
-            <a:pPr algn="ctr">
-              <a:defRPr sz="2400" i="1">
-                <a:solidFill>
-                  <a:srgbClr val="646464"/>
-                </a:solidFill>
-              </a:defRPr>
-            </a:pPr>
-            <a:r>
-              <a:t>"Can the company pay its bills today and debts in the future?"</a:t>
+            <a:r>
+              <a:rPr sz="1100" u="sng">
+                <a:solidFill>
+                  <a:srgbClr val="0066CC"/>
+                </a:solidFill>
+                <a:hlinkClick r:id="rId2"/>
+              </a:rPr>
+              <a:t>📊 Click for interactive version</a:t>
             </a:r>
           </a:p>
         </p:txBody>
@@ -4347,21 +4777,55 @@
               </a:defRPr>
             </a:pPr>
             <a:r>
-              <a:t>Current Ratio Gauge</a:t>
+              <a:t>Earnings Quality</a:t>
+            </a:r>
+          </a:p>
+        </p:txBody>
+      </p:sp>
+      <p:sp>
+        <p:nvSpPr>
+          <p:cNvPr id="3" name="TextBox 2"/>
+          <p:cNvSpPr txBox="1"/>
+          <p:nvPr/>
+        </p:nvSpPr>
+        <p:spPr>
+          <a:xfrm>
+            <a:off x="8229600" y="228600"/>
+            <a:ext cx="365760" cy="365760"/>
+          </a:xfrm>
+          <a:prstGeom prst="rect">
+            <a:avLst/>
+          </a:prstGeom>
+          <a:noFill/>
+        </p:spPr>
+        <p:txBody>
+          <a:bodyPr wrap="none">
+            <a:spAutoFit/>
+          </a:bodyPr>
+          <a:lstStyle/>
+          <a:p>
+            <a:r>
+              <a:rPr sz="1800">
+                <a:solidFill>
+                  <a:srgbClr val="646464"/>
+                </a:solidFill>
+                <a:hlinkClick r:id="rId2"/>
+              </a:rPr>
+              <a:t>ⓘ</a:t>
             </a:r>
           </a:p>
         </p:txBody>
       </p:sp>
       <p:pic>
         <p:nvPicPr>
-          <p:cNvPr id="3" name="Picture 2" descr="chart_current_ratio_gauge.png"/>
+          <p:cNvPr id="4" name="Picture 3" descr="chart_earnings_quality.png"/>
           <p:cNvPicPr>
             <a:picLocks noChangeAspect="1"/>
           </p:cNvPicPr>
           <p:nvPr/>
         </p:nvPicPr>
         <p:blipFill>
-          <a:blip r:embed="rId2"/>
+          <a:blip r:embed="rId3"/>
           <a:stretch>
             <a:fillRect/>
           </a:stretch>
@@ -4378,7 +4842,7 @@
       </p:pic>
       <p:sp>
         <p:nvSpPr>
-          <p:cNvPr id="4" name="TextBox 3"/>
+          <p:cNvPr id="5" name="TextBox 4"/>
           <p:cNvSpPr txBox="1"/>
           <p:nvPr/>
         </p:nvSpPr>
@@ -4399,21 +4863,21 @@
           <a:lstStyle/>
           <a:p>
             <a:pPr>
-              <a:defRPr sz="1200">
-                <a:solidFill>
-                  <a:srgbClr val="646464"/>
-                </a:solidFill>
-              </a:defRPr>
-            </a:pPr>
-            <a:r>
-              <a:t>Measures short-term liquidity. Below 1.0 is warning (liabilities exceed assets); above 1.5 is healthy for retail.</a:t>
-            </a:r>
-          </a:p>
-        </p:txBody>
-      </p:sp>
-      <p:sp>
-        <p:nvSpPr>
-          <p:cNvPr id="5" name="TextBox 4"/>
+              <a:defRPr sz="1200" b="1">
+                <a:solidFill>
+                  <a:srgbClr val="323232"/>
+                </a:solidFill>
+              </a:defRPr>
+            </a:pPr>
+            <a:r>
+              <a:t>Operating cash flow exceeds net income in most periods—earnings quality is solid. Working capital swings cause quarterly noise.</a:t>
+            </a:r>
+          </a:p>
+        </p:txBody>
+      </p:sp>
+      <p:sp>
+        <p:nvSpPr>
+          <p:cNvPr id="6" name="TextBox 5"/>
           <p:cNvSpPr txBox="1"/>
           <p:nvPr/>
         </p:nvSpPr>
@@ -4438,7 +4902,7 @@
                 <a:solidFill>
                   <a:srgbClr val="0066CC"/>
                 </a:solidFill>
-                <a:hlinkClick r:id="rId3"/>
+                <a:hlinkClick r:id="rId2"/>
               </a:rPr>
               <a:t>📊 Click for interactive version</a:t>
             </a:r>
@@ -4457,6 +4921,51 @@
 <p:sld xmlns:a="http://schemas.openxmlformats.org/drawingml/2006/main" xmlns:p="http://schemas.openxmlformats.org/presentationml/2006/main" xmlns:r="http://schemas.openxmlformats.org/officeDocument/2006/relationships">
   <p:cSld>
     <p:spTree>
+      <p:sp>
+        <p:nvSpPr>
+          <p:cNvPr id="3" name="Rectangle 2"/>
+          <p:cNvSpPr/>
+          <p:nvPr/>
+        </p:nvSpPr>
+        <p:spPr>
+          <a:xfrm>
+            <a:off x="365760" y="228600"/>
+            <a:ext cx="1371600" cy="411480"/>
+          </a:xfrm>
+          <a:prstGeom prst="rect">
+            <a:avLst/>
+          </a:prstGeom>
+          <a:solidFill>
+            <a:srgbClr val="CC0000"/>
+          </a:solidFill>
+          <a:ln>
+            <a:solidFill>
+              <a:srgbClr val="CC0000"/>
+            </a:solidFill>
+          </a:ln>
+        </p:spPr>
+        <p:style>
+          <a:lnRef idx="1">
+            <a:schemeClr val="accent1"/>
+          </a:lnRef>
+          <a:fillRef idx="3">
+            <a:schemeClr val="accent1"/>
+          </a:fillRef>
+          <a:effectRef idx="2">
+            <a:schemeClr val="accent1"/>
+          </a:effectRef>
+          <a:fontRef idx="minor">
+            <a:schemeClr val="lt1"/>
+          </a:fontRef>
+        </p:style>
+        <p:txBody>
+          <a:bodyPr rtlCol="0" anchor="ctr"/>
+          <a:lstStyle/>
+          <a:p>
+            <a:pPr algn="ctr"/>
+          </a:p>
+        </p:txBody>
+      </p:sp>
       <p:nvGrpSpPr>
         <p:cNvPr id="1" name=""/>
         <p:cNvGrpSpPr/>
@@ -4471,8 +4980,8 @@
         </p:nvSpPr>
         <p:spPr>
           <a:xfrm>
-            <a:off x="457200" y="182880"/>
-            <a:ext cx="8229600" cy="457200"/>
+            <a:off x="457200" y="274320"/>
+            <a:ext cx="1828800" cy="365760"/>
           </a:xfrm>
           <a:prstGeom prst="rect">
             <a:avLst/>
@@ -4486,52 +4995,283 @@
           <a:lstStyle/>
           <a:p>
             <a:pPr>
-              <a:defRPr sz="2400" b="1">
+              <a:defRPr sz="1400" b="1">
+                <a:solidFill>
+                  <a:srgbClr val="FFFFFF"/>
+                </a:solidFill>
+              </a:defRPr>
+            </a:pPr>
+            <a:r>
+              <a:t>SO WHAT?</a:t>
+            </a:r>
+          </a:p>
+        </p:txBody>
+      </p:sp>
+      <p:sp>
+        <p:nvSpPr>
+          <p:cNvPr id="4" name="TextBox 3"/>
+          <p:cNvSpPr txBox="1"/>
+          <p:nvPr/>
+        </p:nvSpPr>
+        <p:spPr>
+          <a:xfrm>
+            <a:off x="457200" y="822960"/>
+            <a:ext cx="8229600" cy="548640"/>
+          </a:xfrm>
+          <a:prstGeom prst="rect">
+            <a:avLst/>
+          </a:prstGeom>
+          <a:noFill/>
+        </p:spPr>
+        <p:txBody>
+          <a:bodyPr wrap="none">
+            <a:spAutoFit/>
+          </a:bodyPr>
+          <a:lstStyle/>
+          <a:p>
+            <a:pPr>
+              <a:defRPr sz="2800" b="1">
+                <a:solidFill>
+                  <a:srgbClr val="333333"/>
+                </a:solidFill>
+              </a:defRPr>
+            </a:pPr>
+            <a:r>
+              <a:t>Margin Compression Alert</a:t>
+            </a:r>
+          </a:p>
+        </p:txBody>
+      </p:sp>
+      <p:sp>
+        <p:nvSpPr>
+          <p:cNvPr id="5" name="Rectangle 4"/>
+          <p:cNvSpPr/>
+          <p:nvPr/>
+        </p:nvSpPr>
+        <p:spPr>
+          <a:xfrm>
+            <a:off x="457200" y="1554480"/>
+            <a:ext cx="8229600" cy="914400"/>
+          </a:xfrm>
+          <a:prstGeom prst="rect">
+            <a:avLst/>
+          </a:prstGeom>
+          <a:solidFill>
+            <a:srgbClr val="FFF0F0"/>
+          </a:solidFill>
+          <a:ln>
+            <a:solidFill>
+              <a:srgbClr val="CC0000"/>
+            </a:solidFill>
+          </a:ln>
+        </p:spPr>
+        <p:style>
+          <a:lnRef idx="1">
+            <a:schemeClr val="accent1"/>
+          </a:lnRef>
+          <a:fillRef idx="3">
+            <a:schemeClr val="accent1"/>
+          </a:fillRef>
+          <a:effectRef idx="2">
+            <a:schemeClr val="accent1"/>
+          </a:effectRef>
+          <a:fontRef idx="minor">
+            <a:schemeClr val="lt1"/>
+          </a:fontRef>
+        </p:style>
+        <p:txBody>
+          <a:bodyPr rtlCol="0" anchor="ctr"/>
+          <a:lstStyle/>
+          <a:p>
+            <a:pPr algn="ctr"/>
+          </a:p>
+        </p:txBody>
+      </p:sp>
+      <p:sp>
+        <p:nvSpPr>
+          <p:cNvPr id="6" name="TextBox 5"/>
+          <p:cNvSpPr txBox="1"/>
+          <p:nvPr/>
+        </p:nvSpPr>
+        <p:spPr>
+          <a:xfrm>
+            <a:off x="640080" y="1691640"/>
+            <a:ext cx="7863840" cy="640080"/>
+          </a:xfrm>
+          <a:prstGeom prst="rect">
+            <a:avLst/>
+          </a:prstGeom>
+          <a:noFill/>
+        </p:spPr>
+        <p:txBody>
+          <a:bodyPr wrap="square">
+            <a:spAutoFit/>
+          </a:bodyPr>
+          <a:lstStyle/>
+          <a:p>
+            <a:pPr>
+              <a:defRPr sz="1000" b="1">
                 <a:solidFill>
                   <a:srgbClr val="CC0000"/>
                 </a:solidFill>
               </a:defRPr>
             </a:pPr>
             <a:r>
-              <a:t>Capital Structure</a:t>
-            </a:r>
-          </a:p>
-        </p:txBody>
-      </p:sp>
-      <p:pic>
-        <p:nvPicPr>
-          <p:cNvPr id="3" name="Picture 2" descr="chart_capital_structure_donut.png"/>
-          <p:cNvPicPr>
-            <a:picLocks noChangeAspect="1"/>
-          </p:cNvPicPr>
-          <p:nvPr/>
-        </p:nvPicPr>
-        <p:blipFill>
-          <a:blip r:embed="rId2"/>
-          <a:stretch>
-            <a:fillRect/>
-          </a:stretch>
-        </p:blipFill>
-        <p:spPr>
-          <a:xfrm>
-            <a:off x="457200" y="731520"/>
-            <a:ext cx="8229600" cy="4114800"/>
-          </a:xfrm>
-          <a:prstGeom prst="rect">
-            <a:avLst/>
-          </a:prstGeom>
-        </p:spPr>
-      </p:pic>
-      <p:sp>
-        <p:nvSpPr>
-          <p:cNvPr id="4" name="TextBox 3"/>
-          <p:cNvSpPr txBox="1"/>
+              <a:t>KEY INSIGHT</a:t>
+            </a:r>
+          </a:p>
+          <a:p>
+            <a:pPr>
+              <a:defRPr sz="1800" b="1">
+                <a:solidFill>
+                  <a:srgbClr val="333333"/>
+                </a:solidFill>
+              </a:defRPr>
+            </a:pPr>
+            <a:r>
+              <a:t>Operating margin dropped 1.47% (5.22% → 3.75%)</a:t>
+            </a:r>
+          </a:p>
+        </p:txBody>
+      </p:sp>
+      <p:sp>
+        <p:nvSpPr>
+          <p:cNvPr id="7" name="TextBox 6"/>
+          <p:cNvSpPr txBox="1"/>
+          <p:nvPr/>
+        </p:nvSpPr>
+        <p:spPr>
+          <a:xfrm>
+            <a:off x="457200" y="2743200"/>
+            <a:ext cx="8229600" cy="2286000"/>
+          </a:xfrm>
+          <a:prstGeom prst="rect">
+            <a:avLst/>
+          </a:prstGeom>
+          <a:noFill/>
+        </p:spPr>
+        <p:txBody>
+          <a:bodyPr wrap="square">
+            <a:spAutoFit/>
+          </a:bodyPr>
+          <a:lstStyle/>
+          <a:p>
+            <a:pPr>
+              <a:spcAft>
+                <a:spcPts val="800"/>
+              </a:spcAft>
+              <a:defRPr sz="1600" b="1">
+                <a:solidFill>
+                  <a:srgbClr val="333333"/>
+                </a:solidFill>
+              </a:defRPr>
+            </a:pPr>
+            <a:r>
+              <a:t>Evidence:</a:t>
+            </a:r>
+          </a:p>
+          <a:p>
+            <a:pPr>
+              <a:spcAft>
+                <a:spcPts val="400"/>
+              </a:spcAft>
+              <a:defRPr sz="1400">
+                <a:solidFill>
+                  <a:srgbClr val="505050"/>
+                </a:solidFill>
+              </a:defRPr>
+            </a:pPr>
+            <a:r>
+              <a:t>• Inventory up 17% while margins declined</a:t>
+            </a:r>
+          </a:p>
+          <a:p>
+            <a:pPr>
+              <a:spcAft>
+                <a:spcPts val="400"/>
+              </a:spcAft>
+              <a:defRPr sz="1400">
+                <a:solidFill>
+                  <a:srgbClr val="505050"/>
+                </a:solidFill>
+              </a:defRPr>
+            </a:pPr>
+            <a:r>
+              <a:t>• Clearance risk from excess inventory</a:t>
+            </a:r>
+          </a:p>
+          <a:p>
+            <a:pPr>
+              <a:spcAft>
+                <a:spcPts val="400"/>
+              </a:spcAft>
+              <a:defRPr sz="1400">
+                <a:solidFill>
+                  <a:srgbClr val="505050"/>
+                </a:solidFill>
+              </a:defRPr>
+            </a:pPr>
+            <a:r>
+              <a:t>• Shrink/theft mentioned in all quarterly filings</a:t>
+            </a:r>
+          </a:p>
+        </p:txBody>
+      </p:sp>
+      <p:sp>
+        <p:nvSpPr>
+          <p:cNvPr id="8" name="Rectangle 7"/>
+          <p:cNvSpPr/>
           <p:nvPr/>
         </p:nvSpPr>
         <p:spPr>
           <a:xfrm>
             <a:off x="457200" y="5029200"/>
-            <a:ext cx="8229600" cy="914400"/>
+            <a:ext cx="8229600" cy="1097280"/>
+          </a:xfrm>
+          <a:prstGeom prst="rect">
+            <a:avLst/>
+          </a:prstGeom>
+          <a:solidFill>
+            <a:srgbClr val="F0F8FF"/>
+          </a:solidFill>
+          <a:ln>
+            <a:solidFill>
+              <a:srgbClr val="0066CC"/>
+            </a:solidFill>
+          </a:ln>
+        </p:spPr>
+        <p:style>
+          <a:lnRef idx="1">
+            <a:schemeClr val="accent1"/>
+          </a:lnRef>
+          <a:fillRef idx="3">
+            <a:schemeClr val="accent1"/>
+          </a:fillRef>
+          <a:effectRef idx="2">
+            <a:schemeClr val="accent1"/>
+          </a:effectRef>
+          <a:fontRef idx="minor">
+            <a:schemeClr val="lt1"/>
+          </a:fontRef>
+        </p:style>
+        <p:txBody>
+          <a:bodyPr rtlCol="0" anchor="ctr"/>
+          <a:lstStyle/>
+          <a:p>
+            <a:pPr algn="ctr"/>
+          </a:p>
+        </p:txBody>
+      </p:sp>
+      <p:sp>
+        <p:nvSpPr>
+          <p:cNvPr id="9" name="TextBox 8"/>
+          <p:cNvSpPr txBox="1"/>
+          <p:nvPr/>
+        </p:nvSpPr>
+        <p:spPr>
+          <a:xfrm>
+            <a:off x="640080" y="5166360"/>
+            <a:ext cx="7863840" cy="822960"/>
           </a:xfrm>
           <a:prstGeom prst="rect">
             <a:avLst/>
@@ -4545,48 +5285,26 @@
           <a:lstStyle/>
           <a:p>
             <a:pPr>
-              <a:defRPr sz="1200">
-                <a:solidFill>
-                  <a:srgbClr val="646464"/>
-                </a:solidFill>
-              </a:defRPr>
-            </a:pPr>
-            <a:r>
-              <a:t>Shows debt vs equity mix. Higher debt = higher risk but potentially higher returns on equity.</a:t>
-            </a:r>
-          </a:p>
-        </p:txBody>
-      </p:sp>
-      <p:sp>
-        <p:nvSpPr>
-          <p:cNvPr id="5" name="TextBox 4"/>
-          <p:cNvSpPr txBox="1"/>
-          <p:nvPr/>
-        </p:nvSpPr>
-        <p:spPr>
-          <a:xfrm>
-            <a:off x="457200" y="6035040"/>
-            <a:ext cx="8229600" cy="365760"/>
-          </a:xfrm>
-          <a:prstGeom prst="rect">
-            <a:avLst/>
-          </a:prstGeom>
-          <a:noFill/>
-        </p:spPr>
-        <p:txBody>
-          <a:bodyPr wrap="none">
-            <a:spAutoFit/>
-          </a:bodyPr>
-          <a:lstStyle/>
-          <a:p>
-            <a:r>
-              <a:rPr sz="1100" u="sng">
+              <a:defRPr sz="1000" b="1">
                 <a:solidFill>
                   <a:srgbClr val="0066CC"/>
                 </a:solidFill>
-                <a:hlinkClick r:id="rId3"/>
-              </a:rPr>
-              <a:t>📊 Click for interactive version</a:t>
+              </a:defRPr>
+            </a:pPr>
+            <a:r>
+              <a:t>IMPLICATION</a:t>
+            </a:r>
+          </a:p>
+          <a:p>
+            <a:pPr>
+              <a:defRPr sz="1400">
+                <a:solidFill>
+                  <a:srgbClr val="333333"/>
+                </a:solidFill>
+              </a:defRPr>
+            </a:pPr>
+            <a:r>
+              <a:t>Q4 margin recovery is critical; watch for promotional activity</a:t>
             </a:r>
           </a:p>
         </p:txBody>
@@ -4611,13 +5329,128 @@
       <p:grpSpPr/>
       <p:sp>
         <p:nvSpPr>
-          <p:cNvPr id="2" name="TextBox 1"/>
-          <p:cNvSpPr txBox="1"/>
-          <p:nvPr/>
-        </p:nvSpPr>
-        <p:spPr>
-          <a:xfrm>
-            <a:off x="457200" y="182880"/>
+          <p:cNvPr id="2" name="Rectangle 1"/>
+          <p:cNvSpPr/>
+          <p:nvPr/>
+        </p:nvSpPr>
+        <p:spPr>
+          <a:xfrm>
+            <a:off x="0" y="2286000"/>
+            <a:ext cx="9144000" cy="1828800"/>
+          </a:xfrm>
+          <a:prstGeom prst="rect">
+            <a:avLst/>
+          </a:prstGeom>
+          <a:solidFill>
+            <a:srgbClr val="CC0000"/>
+          </a:solidFill>
+          <a:ln>
+            <a:solidFill>
+              <a:srgbClr val="CC0000"/>
+            </a:solidFill>
+          </a:ln>
+        </p:spPr>
+        <p:style>
+          <a:lnRef idx="1">
+            <a:schemeClr val="accent1"/>
+          </a:lnRef>
+          <a:fillRef idx="3">
+            <a:schemeClr val="accent1"/>
+          </a:fillRef>
+          <a:effectRef idx="2">
+            <a:schemeClr val="accent1"/>
+          </a:effectRef>
+          <a:fontRef idx="minor">
+            <a:schemeClr val="lt1"/>
+          </a:fontRef>
+        </p:style>
+        <p:txBody>
+          <a:bodyPr rtlCol="0" anchor="ctr"/>
+          <a:lstStyle/>
+          <a:p>
+            <a:pPr algn="ctr"/>
+          </a:p>
+        </p:txBody>
+      </p:sp>
+      <p:sp>
+        <p:nvSpPr>
+          <p:cNvPr id="3" name="TextBox 2"/>
+          <p:cNvSpPr txBox="1"/>
+          <p:nvPr/>
+        </p:nvSpPr>
+        <p:spPr>
+          <a:xfrm>
+            <a:off x="457200" y="2468880"/>
+            <a:ext cx="8229600" cy="548640"/>
+          </a:xfrm>
+          <a:prstGeom prst="rect">
+            <a:avLst/>
+          </a:prstGeom>
+          <a:noFill/>
+        </p:spPr>
+        <p:txBody>
+          <a:bodyPr wrap="none">
+            <a:spAutoFit/>
+          </a:bodyPr>
+          <a:lstStyle/>
+          <a:p>
+            <a:pPr algn="ctr">
+              <a:defRPr sz="2400" b="1">
+                <a:solidFill>
+                  <a:srgbClr val="FFFFFF"/>
+                </a:solidFill>
+              </a:defRPr>
+            </a:pPr>
+            <a:r>
+              <a:t>PILLAR 3</a:t>
+            </a:r>
+          </a:p>
+        </p:txBody>
+      </p:sp>
+      <p:sp>
+        <p:nvSpPr>
+          <p:cNvPr id="4" name="TextBox 3"/>
+          <p:cNvSpPr txBox="1"/>
+          <p:nvPr/>
+        </p:nvSpPr>
+        <p:spPr>
+          <a:xfrm>
+            <a:off x="457200" y="3017520"/>
+            <a:ext cx="8229600" cy="731520"/>
+          </a:xfrm>
+          <a:prstGeom prst="rect">
+            <a:avLst/>
+          </a:prstGeom>
+          <a:noFill/>
+        </p:spPr>
+        <p:txBody>
+          <a:bodyPr wrap="none">
+            <a:spAutoFit/>
+          </a:bodyPr>
+          <a:lstStyle/>
+          <a:p>
+            <a:pPr algn="ctr">
+              <a:defRPr sz="4400" b="1">
+                <a:solidFill>
+                  <a:srgbClr val="FFFFFF"/>
+                </a:solidFill>
+              </a:defRPr>
+            </a:pPr>
+            <a:r>
+              <a:t>Liquidity &amp; Solvency</a:t>
+            </a:r>
+          </a:p>
+        </p:txBody>
+      </p:sp>
+      <p:sp>
+        <p:nvSpPr>
+          <p:cNvPr id="5" name="TextBox 4"/>
+          <p:cNvSpPr txBox="1"/>
+          <p:nvPr/>
+        </p:nvSpPr>
+        <p:spPr>
+          <a:xfrm>
+            <a:off x="457200" y="4572000"/>
             <a:ext cx="8229600" cy="457200"/>
           </a:xfrm>
           <a:prstGeom prst="rect">
@@ -4631,108 +5464,15 @@
           </a:bodyPr>
           <a:lstStyle/>
           <a:p>
-            <a:pPr>
-              <a:defRPr sz="2400" b="1">
-                <a:solidFill>
-                  <a:srgbClr val="CC0000"/>
-                </a:solidFill>
-              </a:defRPr>
-            </a:pPr>
-            <a:r>
-              <a:t>Debt-to-EBITDA Trend</a:t>
-            </a:r>
-          </a:p>
-        </p:txBody>
-      </p:sp>
-      <p:pic>
-        <p:nvPicPr>
-          <p:cNvPr id="3" name="Picture 2" descr="chart_debt_to_ebitda_trend.png"/>
-          <p:cNvPicPr>
-            <a:picLocks noChangeAspect="1"/>
-          </p:cNvPicPr>
-          <p:nvPr/>
-        </p:nvPicPr>
-        <p:blipFill>
-          <a:blip r:embed="rId2"/>
-          <a:stretch>
-            <a:fillRect/>
-          </a:stretch>
-        </p:blipFill>
-        <p:spPr>
-          <a:xfrm>
-            <a:off x="457200" y="731520"/>
-            <a:ext cx="8229600" cy="4114800"/>
-          </a:xfrm>
-          <a:prstGeom prst="rect">
-            <a:avLst/>
-          </a:prstGeom>
-        </p:spPr>
-      </p:pic>
-      <p:sp>
-        <p:nvSpPr>
-          <p:cNvPr id="4" name="TextBox 3"/>
-          <p:cNvSpPr txBox="1"/>
-          <p:nvPr/>
-        </p:nvSpPr>
-        <p:spPr>
-          <a:xfrm>
-            <a:off x="457200" y="5029200"/>
-            <a:ext cx="8229600" cy="914400"/>
-          </a:xfrm>
-          <a:prstGeom prst="rect">
-            <a:avLst/>
-          </a:prstGeom>
-          <a:noFill/>
-        </p:spPr>
-        <p:txBody>
-          <a:bodyPr wrap="square">
-            <a:spAutoFit/>
-          </a:bodyPr>
-          <a:lstStyle/>
-          <a:p>
-            <a:pPr>
-              <a:defRPr sz="1200">
+            <a:pPr algn="ctr">
+              <a:defRPr sz="2400" i="1">
                 <a:solidFill>
                   <a:srgbClr val="646464"/>
                 </a:solidFill>
               </a:defRPr>
             </a:pPr>
             <a:r>
-              <a:t>Key leverage metric showing how many years of earnings to repay debt. Below 3x is healthy; above 5x is risky.</a:t>
-            </a:r>
-          </a:p>
-        </p:txBody>
-      </p:sp>
-      <p:sp>
-        <p:nvSpPr>
-          <p:cNvPr id="5" name="TextBox 4"/>
-          <p:cNvSpPr txBox="1"/>
-          <p:nvPr/>
-        </p:nvSpPr>
-        <p:spPr>
-          <a:xfrm>
-            <a:off x="457200" y="6035040"/>
-            <a:ext cx="8229600" cy="365760"/>
-          </a:xfrm>
-          <a:prstGeom prst="rect">
-            <a:avLst/>
-          </a:prstGeom>
-          <a:noFill/>
-        </p:spPr>
-        <p:txBody>
-          <a:bodyPr wrap="none">
-            <a:spAutoFit/>
-          </a:bodyPr>
-          <a:lstStyle/>
-          <a:p>
-            <a:r>
-              <a:rPr sz="1100" u="sng">
-                <a:solidFill>
-                  <a:srgbClr val="0066CC"/>
-                </a:solidFill>
-                <a:hlinkClick r:id="rId3"/>
-              </a:rPr>
-              <a:t>📊 Click for interactive version</a:t>
+              <a:t>"Can the company pay its bills today and debts in the future?"</a:t>
             </a:r>
           </a:p>
         </p:txBody>
@@ -5049,21 +5789,55 @@
               </a:defRPr>
             </a:pPr>
             <a:r>
-              <a:t>Debt Health (Interest Coverage)</a:t>
+              <a:t>Current Ratio Gauge</a:t>
+            </a:r>
+          </a:p>
+        </p:txBody>
+      </p:sp>
+      <p:sp>
+        <p:nvSpPr>
+          <p:cNvPr id="3" name="TextBox 2"/>
+          <p:cNvSpPr txBox="1"/>
+          <p:nvPr/>
+        </p:nvSpPr>
+        <p:spPr>
+          <a:xfrm>
+            <a:off x="8229600" y="228600"/>
+            <a:ext cx="365760" cy="365760"/>
+          </a:xfrm>
+          <a:prstGeom prst="rect">
+            <a:avLst/>
+          </a:prstGeom>
+          <a:noFill/>
+        </p:spPr>
+        <p:txBody>
+          <a:bodyPr wrap="none">
+            <a:spAutoFit/>
+          </a:bodyPr>
+          <a:lstStyle/>
+          <a:p>
+            <a:r>
+              <a:rPr sz="1800">
+                <a:solidFill>
+                  <a:srgbClr val="646464"/>
+                </a:solidFill>
+                <a:hlinkClick r:id="rId2"/>
+              </a:rPr>
+              <a:t>ⓘ</a:t>
             </a:r>
           </a:p>
         </p:txBody>
       </p:sp>
       <p:pic>
         <p:nvPicPr>
-          <p:cNvPr id="3" name="Picture 2" descr="chart_debt_health.png"/>
+          <p:cNvPr id="4" name="Picture 3" descr="chart_current_ratio_gauge.png"/>
           <p:cNvPicPr>
             <a:picLocks noChangeAspect="1"/>
           </p:cNvPicPr>
           <p:nvPr/>
         </p:nvPicPr>
         <p:blipFill>
-          <a:blip r:embed="rId2"/>
+          <a:blip r:embed="rId3"/>
           <a:stretch>
             <a:fillRect/>
           </a:stretch>
@@ -5080,7 +5854,7 @@
       </p:pic>
       <p:sp>
         <p:nvSpPr>
-          <p:cNvPr id="4" name="TextBox 3"/>
+          <p:cNvPr id="5" name="TextBox 4"/>
           <p:cNvSpPr txBox="1"/>
           <p:nvPr/>
         </p:nvSpPr>
@@ -5101,21 +5875,21 @@
           <a:lstStyle/>
           <a:p>
             <a:pPr>
-              <a:defRPr sz="1200">
-                <a:solidFill>
-                  <a:srgbClr val="646464"/>
-                </a:solidFill>
-              </a:defRPr>
-            </a:pPr>
-            <a:r>
-              <a:t>Interest coverage ratio tracking. Above 3x is comfortable; below 2x requires monitoring.</a:t>
-            </a:r>
-          </a:p>
-        </p:txBody>
-      </p:sp>
-      <p:sp>
-        <p:nvSpPr>
-          <p:cNvPr id="5" name="TextBox 4"/>
+              <a:defRPr sz="1200" b="1">
+                <a:solidFill>
+                  <a:srgbClr val="323232"/>
+                </a:solidFill>
+              </a:defRPr>
+            </a:pPr>
+            <a:r>
+              <a:t>Current ratio at 0.92x is below 1.0—current liabilities exceed current assets. Typical for retail but warrants monitoring.</a:t>
+            </a:r>
+          </a:p>
+        </p:txBody>
+      </p:sp>
+      <p:sp>
+        <p:nvSpPr>
+          <p:cNvPr id="6" name="TextBox 5"/>
           <p:cNvSpPr txBox="1"/>
           <p:nvPr/>
         </p:nvSpPr>
@@ -5140,7 +5914,7 @@
                 <a:solidFill>
                   <a:srgbClr val="0066CC"/>
                 </a:solidFill>
-                <a:hlinkClick r:id="rId3"/>
+                <a:hlinkClick r:id="rId2"/>
               </a:rPr>
               <a:t>📊 Click for interactive version</a:t>
             </a:r>
@@ -5195,21 +5969,55 @@
               </a:defRPr>
             </a:pPr>
             <a:r>
-              <a:t>Statement of Cash Flows</a:t>
+              <a:t>Capital Structure</a:t>
+            </a:r>
+          </a:p>
+        </p:txBody>
+      </p:sp>
+      <p:sp>
+        <p:nvSpPr>
+          <p:cNvPr id="3" name="TextBox 2"/>
+          <p:cNvSpPr txBox="1"/>
+          <p:nvPr/>
+        </p:nvSpPr>
+        <p:spPr>
+          <a:xfrm>
+            <a:off x="8229600" y="228600"/>
+            <a:ext cx="365760" cy="365760"/>
+          </a:xfrm>
+          <a:prstGeom prst="rect">
+            <a:avLst/>
+          </a:prstGeom>
+          <a:noFill/>
+        </p:spPr>
+        <p:txBody>
+          <a:bodyPr wrap="none">
+            <a:spAutoFit/>
+          </a:bodyPr>
+          <a:lstStyle/>
+          <a:p>
+            <a:r>
+              <a:rPr sz="1800">
+                <a:solidFill>
+                  <a:srgbClr val="646464"/>
+                </a:solidFill>
+                <a:hlinkClick r:id="rId2"/>
+              </a:rPr>
+              <a:t>ⓘ</a:t>
             </a:r>
           </a:p>
         </p:txBody>
       </p:sp>
       <p:pic>
         <p:nvPicPr>
-          <p:cNvPr id="3" name="Picture 2" descr="chart_cash_flows.png"/>
+          <p:cNvPr id="4" name="Picture 3" descr="chart_capital_structure_donut.png"/>
           <p:cNvPicPr>
             <a:picLocks noChangeAspect="1"/>
           </p:cNvPicPr>
           <p:nvPr/>
         </p:nvPicPr>
         <p:blipFill>
-          <a:blip r:embed="rId2"/>
+          <a:blip r:embed="rId3"/>
           <a:stretch>
             <a:fillRect/>
           </a:stretch>
@@ -5226,7 +6034,7 @@
       </p:pic>
       <p:sp>
         <p:nvSpPr>
-          <p:cNvPr id="4" name="TextBox 3"/>
+          <p:cNvPr id="5" name="TextBox 4"/>
           <p:cNvSpPr txBox="1"/>
           <p:nvPr/>
         </p:nvSpPr>
@@ -5247,21 +6055,21 @@
           <a:lstStyle/>
           <a:p>
             <a:pPr>
-              <a:defRPr sz="1200">
-                <a:solidFill>
-                  <a:srgbClr val="646464"/>
-                </a:solidFill>
-              </a:defRPr>
-            </a:pPr>
-            <a:r>
-              <a:t>Three cash flow lines: Operating, Investing, Financing. Operating should be consistently positive.</a:t>
-            </a:r>
-          </a:p>
-        </p:txBody>
-      </p:sp>
-      <p:sp>
-        <p:nvSpPr>
-          <p:cNvPr id="5" name="TextBox 4"/>
+              <a:defRPr sz="1200" b="1">
+                <a:solidFill>
+                  <a:srgbClr val="323232"/>
+                </a:solidFill>
+              </a:defRPr>
+            </a:pPr>
+            <a:r>
+              <a:t>Debt represents ~65% of capital structure. Leverage increased as buybacks reduced equity base.</a:t>
+            </a:r>
+          </a:p>
+        </p:txBody>
+      </p:sp>
+      <p:sp>
+        <p:nvSpPr>
+          <p:cNvPr id="6" name="TextBox 5"/>
           <p:cNvSpPr txBox="1"/>
           <p:nvPr/>
         </p:nvSpPr>
@@ -5286,7 +6094,7 @@
                 <a:solidFill>
                   <a:srgbClr val="0066CC"/>
                 </a:solidFill>
-                <a:hlinkClick r:id="rId3"/>
+                <a:hlinkClick r:id="rId2"/>
               </a:rPr>
               <a:t>📊 Click for interactive version</a:t>
             </a:r>
@@ -5313,46 +6121,36 @@
       <p:grpSpPr/>
       <p:sp>
         <p:nvSpPr>
-          <p:cNvPr id="2" name="Rectangle 1"/>
-          <p:cNvSpPr/>
-          <p:nvPr/>
-        </p:nvSpPr>
-        <p:spPr>
-          <a:xfrm>
-            <a:off x="0" y="2286000"/>
-            <a:ext cx="9144000" cy="1828800"/>
-          </a:xfrm>
-          <a:prstGeom prst="rect">
-            <a:avLst/>
-          </a:prstGeom>
-          <a:solidFill>
-            <a:srgbClr val="CC0000"/>
-          </a:solidFill>
-          <a:ln>
-            <a:solidFill>
-              <a:srgbClr val="CC0000"/>
-            </a:solidFill>
-          </a:ln>
-        </p:spPr>
-        <p:style>
-          <a:lnRef idx="1">
-            <a:schemeClr val="accent1"/>
-          </a:lnRef>
-          <a:fillRef idx="3">
-            <a:schemeClr val="accent1"/>
-          </a:fillRef>
-          <a:effectRef idx="2">
-            <a:schemeClr val="accent1"/>
-          </a:effectRef>
-          <a:fontRef idx="minor">
-            <a:schemeClr val="lt1"/>
-          </a:fontRef>
-        </p:style>
-        <p:txBody>
-          <a:bodyPr rtlCol="0" anchor="ctr"/>
-          <a:lstStyle/>
-          <a:p>
-            <a:pPr algn="ctr"/>
+          <p:cNvPr id="2" name="TextBox 1"/>
+          <p:cNvSpPr txBox="1"/>
+          <p:nvPr/>
+        </p:nvSpPr>
+        <p:spPr>
+          <a:xfrm>
+            <a:off x="457200" y="182880"/>
+            <a:ext cx="8229600" cy="457200"/>
+          </a:xfrm>
+          <a:prstGeom prst="rect">
+            <a:avLst/>
+          </a:prstGeom>
+          <a:noFill/>
+        </p:spPr>
+        <p:txBody>
+          <a:bodyPr wrap="none">
+            <a:spAutoFit/>
+          </a:bodyPr>
+          <a:lstStyle/>
+          <a:p>
+            <a:pPr>
+              <a:defRPr sz="2400" b="1">
+                <a:solidFill>
+                  <a:srgbClr val="CC0000"/>
+                </a:solidFill>
+              </a:defRPr>
+            </a:pPr>
+            <a:r>
+              <a:t>Debt-to-EBITDA Trend</a:t>
+            </a:r>
           </a:p>
         </p:txBody>
       </p:sp>
@@ -5364,8 +6162,8 @@
         </p:nvSpPr>
         <p:spPr>
           <a:xfrm>
-            <a:off x="457200" y="2468880"/>
-            <a:ext cx="8229600" cy="548640"/>
+            <a:off x="8229600" y="228600"/>
+            <a:ext cx="365760" cy="365760"/>
           </a:xfrm>
           <a:prstGeom prst="rect">
             <a:avLst/>
@@ -5378,29 +6176,87 @@
           </a:bodyPr>
           <a:lstStyle/>
           <a:p>
-            <a:pPr algn="ctr">
-              <a:defRPr sz="2400" b="1">
-                <a:solidFill>
-                  <a:srgbClr val="FFFFFF"/>
-                </a:solidFill>
-              </a:defRPr>
-            </a:pPr>
-            <a:r>
-              <a:t>PILLAR 4</a:t>
-            </a:r>
-          </a:p>
-        </p:txBody>
-      </p:sp>
-      <p:sp>
-        <p:nvSpPr>
-          <p:cNvPr id="4" name="TextBox 3"/>
-          <p:cNvSpPr txBox="1"/>
-          <p:nvPr/>
-        </p:nvSpPr>
-        <p:spPr>
-          <a:xfrm>
-            <a:off x="457200" y="3017520"/>
-            <a:ext cx="8229600" cy="731520"/>
+            <a:r>
+              <a:rPr sz="1800">
+                <a:solidFill>
+                  <a:srgbClr val="646464"/>
+                </a:solidFill>
+                <a:hlinkClick r:id="rId2"/>
+              </a:rPr>
+              <a:t>ⓘ</a:t>
+            </a:r>
+          </a:p>
+        </p:txBody>
+      </p:sp>
+      <p:pic>
+        <p:nvPicPr>
+          <p:cNvPr id="4" name="Picture 3" descr="chart_debt_to_ebitda_trend.png"/>
+          <p:cNvPicPr>
+            <a:picLocks noChangeAspect="1"/>
+          </p:cNvPicPr>
+          <p:nvPr/>
+        </p:nvPicPr>
+        <p:blipFill>
+          <a:blip r:embed="rId3"/>
+          <a:stretch>
+            <a:fillRect/>
+          </a:stretch>
+        </p:blipFill>
+        <p:spPr>
+          <a:xfrm>
+            <a:off x="457200" y="731520"/>
+            <a:ext cx="8229600" cy="4114800"/>
+          </a:xfrm>
+          <a:prstGeom prst="rect">
+            <a:avLst/>
+          </a:prstGeom>
+        </p:spPr>
+      </p:pic>
+      <p:sp>
+        <p:nvSpPr>
+          <p:cNvPr id="5" name="TextBox 4"/>
+          <p:cNvSpPr txBox="1"/>
+          <p:nvPr/>
+        </p:nvSpPr>
+        <p:spPr>
+          <a:xfrm>
+            <a:off x="457200" y="5029200"/>
+            <a:ext cx="8229600" cy="914400"/>
+          </a:xfrm>
+          <a:prstGeom prst="rect">
+            <a:avLst/>
+          </a:prstGeom>
+          <a:noFill/>
+        </p:spPr>
+        <p:txBody>
+          <a:bodyPr wrap="square">
+            <a:spAutoFit/>
+          </a:bodyPr>
+          <a:lstStyle/>
+          <a:p>
+            <a:pPr>
+              <a:defRPr sz="1200" b="1">
+                <a:solidFill>
+                  <a:srgbClr val="323232"/>
+                </a:solidFill>
+              </a:defRPr>
+            </a:pPr>
+            <a:r>
+              <a:t>Debt/EBITDA rose from 1.5x (FY2020) to 3.8x (FY2024) as EBITDA declined while debt stayed flat. Approaching the 4x caution zone.</a:t>
+            </a:r>
+          </a:p>
+        </p:txBody>
+      </p:sp>
+      <p:sp>
+        <p:nvSpPr>
+          <p:cNvPr id="6" name="TextBox 5"/>
+          <p:cNvSpPr txBox="1"/>
+          <p:nvPr/>
+        </p:nvSpPr>
+        <p:spPr>
+          <a:xfrm>
+            <a:off x="457200" y="6035040"/>
+            <a:ext cx="8229600" cy="365760"/>
           </a:xfrm>
           <a:prstGeom prst="rect">
             <a:avLst/>
@@ -5413,50 +6269,14 @@
           </a:bodyPr>
           <a:lstStyle/>
           <a:p>
-            <a:pPr algn="ctr">
-              <a:defRPr sz="4400" b="1">
-                <a:solidFill>
-                  <a:srgbClr val="FFFFFF"/>
-                </a:solidFill>
-              </a:defRPr>
-            </a:pPr>
-            <a:r>
-              <a:t>Operational Efficiency</a:t>
-            </a:r>
-          </a:p>
-        </p:txBody>
-      </p:sp>
-      <p:sp>
-        <p:nvSpPr>
-          <p:cNvPr id="5" name="TextBox 4"/>
-          <p:cNvSpPr txBox="1"/>
-          <p:nvPr/>
-        </p:nvSpPr>
-        <p:spPr>
-          <a:xfrm>
-            <a:off x="457200" y="4572000"/>
-            <a:ext cx="8229600" cy="457200"/>
-          </a:xfrm>
-          <a:prstGeom prst="rect">
-            <a:avLst/>
-          </a:prstGeom>
-          <a:noFill/>
-        </p:spPr>
-        <p:txBody>
-          <a:bodyPr wrap="none">
-            <a:spAutoFit/>
-          </a:bodyPr>
-          <a:lstStyle/>
-          <a:p>
-            <a:pPr algn="ctr">
-              <a:defRPr sz="2400" i="1">
-                <a:solidFill>
-                  <a:srgbClr val="646464"/>
-                </a:solidFill>
-              </a:defRPr>
-            </a:pPr>
-            <a:r>
-              <a:t>"How well is the company using its assets?"</a:t>
+            <a:r>
+              <a:rPr sz="1100" u="sng">
+                <a:solidFill>
+                  <a:srgbClr val="0066CC"/>
+                </a:solidFill>
+                <a:hlinkClick r:id="rId2"/>
+              </a:rPr>
+              <a:t>📊 Click for interactive version</a:t>
             </a:r>
           </a:p>
         </p:txBody>
@@ -5509,21 +6329,55 @@
               </a:defRPr>
             </a:pPr>
             <a:r>
-              <a:t>DuPont Analysis</a:t>
+              <a:t>Debt Health (Interest Coverage)</a:t>
+            </a:r>
+          </a:p>
+        </p:txBody>
+      </p:sp>
+      <p:sp>
+        <p:nvSpPr>
+          <p:cNvPr id="3" name="TextBox 2"/>
+          <p:cNvSpPr txBox="1"/>
+          <p:nvPr/>
+        </p:nvSpPr>
+        <p:spPr>
+          <a:xfrm>
+            <a:off x="8229600" y="228600"/>
+            <a:ext cx="365760" cy="365760"/>
+          </a:xfrm>
+          <a:prstGeom prst="rect">
+            <a:avLst/>
+          </a:prstGeom>
+          <a:noFill/>
+        </p:spPr>
+        <p:txBody>
+          <a:bodyPr wrap="none">
+            <a:spAutoFit/>
+          </a:bodyPr>
+          <a:lstStyle/>
+          <a:p>
+            <a:r>
+              <a:rPr sz="1800">
+                <a:solidFill>
+                  <a:srgbClr val="646464"/>
+                </a:solidFill>
+                <a:hlinkClick r:id="rId2"/>
+              </a:rPr>
+              <a:t>ⓘ</a:t>
             </a:r>
           </a:p>
         </p:txBody>
       </p:sp>
       <p:pic>
         <p:nvPicPr>
-          <p:cNvPr id="3" name="Picture 2" descr="chart_dupont_analysis.png"/>
+          <p:cNvPr id="4" name="Picture 3" descr="chart_debt_health.png"/>
           <p:cNvPicPr>
             <a:picLocks noChangeAspect="1"/>
           </p:cNvPicPr>
           <p:nvPr/>
         </p:nvPicPr>
         <p:blipFill>
-          <a:blip r:embed="rId2"/>
+          <a:blip r:embed="rId3"/>
           <a:stretch>
             <a:fillRect/>
           </a:stretch>
@@ -5540,7 +6394,7 @@
       </p:pic>
       <p:sp>
         <p:nvSpPr>
-          <p:cNvPr id="4" name="TextBox 3"/>
+          <p:cNvPr id="5" name="TextBox 4"/>
           <p:cNvSpPr txBox="1"/>
           <p:nvPr/>
         </p:nvSpPr>
@@ -5561,21 +6415,21 @@
           <a:lstStyle/>
           <a:p>
             <a:pPr>
-              <a:defRPr sz="1200">
-                <a:solidFill>
-                  <a:srgbClr val="646464"/>
-                </a:solidFill>
-              </a:defRPr>
-            </a:pPr>
-            <a:r>
-              <a:t>Decomposes ROE into Profit Margin x Asset Turnover x Financial Leverage. Shows what drives returns.</a:t>
-            </a:r>
-          </a:p>
-        </p:txBody>
-      </p:sp>
-      <p:sp>
-        <p:nvSpPr>
-          <p:cNvPr id="5" name="TextBox 4"/>
+              <a:defRPr sz="1200" b="1">
+                <a:solidFill>
+                  <a:srgbClr val="323232"/>
+                </a:solidFill>
+              </a:defRPr>
+            </a:pPr>
+            <a:r>
+              <a:t>Interest coverage dropped from 11.3x to 8.2x QoQ—a 27% decline. Still comfortable above 3x but trending wrong direction.</a:t>
+            </a:r>
+          </a:p>
+        </p:txBody>
+      </p:sp>
+      <p:sp>
+        <p:nvSpPr>
+          <p:cNvPr id="6" name="TextBox 5"/>
           <p:cNvSpPr txBox="1"/>
           <p:nvPr/>
         </p:nvSpPr>
@@ -5600,7 +6454,7 @@
                 <a:solidFill>
                   <a:srgbClr val="0066CC"/>
                 </a:solidFill>
-                <a:hlinkClick r:id="rId3"/>
+                <a:hlinkClick r:id="rId2"/>
               </a:rPr>
               <a:t>📊 Click for interactive version</a:t>
             </a:r>
@@ -5655,21 +6509,55 @@
               </a:defRPr>
             </a:pPr>
             <a:r>
-              <a:t>Inventory Efficiency</a:t>
+              <a:t>Statement of Cash Flows</a:t>
+            </a:r>
+          </a:p>
+        </p:txBody>
+      </p:sp>
+      <p:sp>
+        <p:nvSpPr>
+          <p:cNvPr id="3" name="TextBox 2"/>
+          <p:cNvSpPr txBox="1"/>
+          <p:nvPr/>
+        </p:nvSpPr>
+        <p:spPr>
+          <a:xfrm>
+            <a:off x="8229600" y="228600"/>
+            <a:ext cx="365760" cy="365760"/>
+          </a:xfrm>
+          <a:prstGeom prst="rect">
+            <a:avLst/>
+          </a:prstGeom>
+          <a:noFill/>
+        </p:spPr>
+        <p:txBody>
+          <a:bodyPr wrap="none">
+            <a:spAutoFit/>
+          </a:bodyPr>
+          <a:lstStyle/>
+          <a:p>
+            <a:r>
+              <a:rPr sz="1800">
+                <a:solidFill>
+                  <a:srgbClr val="646464"/>
+                </a:solidFill>
+                <a:hlinkClick r:id="rId2"/>
+              </a:rPr>
+              <a:t>ⓘ</a:t>
             </a:r>
           </a:p>
         </p:txBody>
       </p:sp>
       <p:pic>
         <p:nvPicPr>
-          <p:cNvPr id="3" name="Picture 2" descr="chart_inventory_efficiency.png"/>
+          <p:cNvPr id="4" name="Picture 3" descr="chart_cash_flows.png"/>
           <p:cNvPicPr>
             <a:picLocks noChangeAspect="1"/>
           </p:cNvPicPr>
           <p:nvPr/>
         </p:nvPicPr>
         <p:blipFill>
-          <a:blip r:embed="rId2"/>
+          <a:blip r:embed="rId3"/>
           <a:stretch>
             <a:fillRect/>
           </a:stretch>
@@ -5686,7 +6574,7 @@
       </p:pic>
       <p:sp>
         <p:nvSpPr>
-          <p:cNvPr id="4" name="TextBox 3"/>
+          <p:cNvPr id="5" name="TextBox 4"/>
           <p:cNvSpPr txBox="1"/>
           <p:nvPr/>
         </p:nvSpPr>
@@ -5707,21 +6595,21 @@
           <a:lstStyle/>
           <a:p>
             <a:pPr>
-              <a:defRPr sz="1200">
-                <a:solidFill>
-                  <a:srgbClr val="646464"/>
-                </a:solidFill>
-              </a:defRPr>
-            </a:pPr>
-            <a:r>
-              <a:t>Tracks turnover ratio and days on hand. Faster turns = less capital tied up in inventory.</a:t>
-            </a:r>
-          </a:p>
-        </p:txBody>
-      </p:sp>
-      <p:sp>
-        <p:nvSpPr>
-          <p:cNvPr id="5" name="TextBox 4"/>
+              <a:defRPr sz="1200" b="1">
+                <a:solidFill>
+                  <a:srgbClr val="323232"/>
+                </a:solidFill>
+              </a:defRPr>
+            </a:pPr>
+            <a:r>
+              <a:t>Operating CF remains positive ($1-2B/quarter) but investing CF shows steady CapEx spend. Financing CF negative due to dividends.</a:t>
+            </a:r>
+          </a:p>
+        </p:txBody>
+      </p:sp>
+      <p:sp>
+        <p:nvSpPr>
+          <p:cNvPr id="6" name="TextBox 5"/>
           <p:cNvSpPr txBox="1"/>
           <p:nvPr/>
         </p:nvSpPr>
@@ -5746,7 +6634,7 @@
                 <a:solidFill>
                   <a:srgbClr val="0066CC"/>
                 </a:solidFill>
-                <a:hlinkClick r:id="rId3"/>
+                <a:hlinkClick r:id="rId2"/>
               </a:rPr>
               <a:t>📊 Click for interactive version</a:t>
             </a:r>
@@ -5765,6 +6653,51 @@
 <p:sld xmlns:a="http://schemas.openxmlformats.org/drawingml/2006/main" xmlns:p="http://schemas.openxmlformats.org/presentationml/2006/main" xmlns:r="http://schemas.openxmlformats.org/officeDocument/2006/relationships">
   <p:cSld>
     <p:spTree>
+      <p:sp>
+        <p:nvSpPr>
+          <p:cNvPr id="3" name="Rectangle 2"/>
+          <p:cNvSpPr/>
+          <p:nvPr/>
+        </p:nvSpPr>
+        <p:spPr>
+          <a:xfrm>
+            <a:off x="365760" y="228600"/>
+            <a:ext cx="1371600" cy="411480"/>
+          </a:xfrm>
+          <a:prstGeom prst="rect">
+            <a:avLst/>
+          </a:prstGeom>
+          <a:solidFill>
+            <a:srgbClr val="CC0000"/>
+          </a:solidFill>
+          <a:ln>
+            <a:solidFill>
+              <a:srgbClr val="CC0000"/>
+            </a:solidFill>
+          </a:ln>
+        </p:spPr>
+        <p:style>
+          <a:lnRef idx="1">
+            <a:schemeClr val="accent1"/>
+          </a:lnRef>
+          <a:fillRef idx="3">
+            <a:schemeClr val="accent1"/>
+          </a:fillRef>
+          <a:effectRef idx="2">
+            <a:schemeClr val="accent1"/>
+          </a:effectRef>
+          <a:fontRef idx="minor">
+            <a:schemeClr val="lt1"/>
+          </a:fontRef>
+        </p:style>
+        <p:txBody>
+          <a:bodyPr rtlCol="0" anchor="ctr"/>
+          <a:lstStyle/>
+          <a:p>
+            <a:pPr algn="ctr"/>
+          </a:p>
+        </p:txBody>
+      </p:sp>
       <p:nvGrpSpPr>
         <p:cNvPr id="1" name=""/>
         <p:cNvGrpSpPr/>
@@ -5779,8 +6712,8 @@
         </p:nvSpPr>
         <p:spPr>
           <a:xfrm>
-            <a:off x="457200" y="182880"/>
-            <a:ext cx="8229600" cy="457200"/>
+            <a:off x="457200" y="274320"/>
+            <a:ext cx="1828800" cy="365760"/>
           </a:xfrm>
           <a:prstGeom prst="rect">
             <a:avLst/>
@@ -5794,52 +6727,283 @@
           <a:lstStyle/>
           <a:p>
             <a:pPr>
-              <a:defRPr sz="2400" b="1">
+              <a:defRPr sz="1400" b="1">
+                <a:solidFill>
+                  <a:srgbClr val="FFFFFF"/>
+                </a:solidFill>
+              </a:defRPr>
+            </a:pPr>
+            <a:r>
+              <a:t>SO WHAT?</a:t>
+            </a:r>
+          </a:p>
+        </p:txBody>
+      </p:sp>
+      <p:sp>
+        <p:nvSpPr>
+          <p:cNvPr id="4" name="TextBox 3"/>
+          <p:cNvSpPr txBox="1"/>
+          <p:nvPr/>
+        </p:nvSpPr>
+        <p:spPr>
+          <a:xfrm>
+            <a:off x="457200" y="822960"/>
+            <a:ext cx="8229600" cy="548640"/>
+          </a:xfrm>
+          <a:prstGeom prst="rect">
+            <a:avLst/>
+          </a:prstGeom>
+          <a:noFill/>
+        </p:spPr>
+        <p:txBody>
+          <a:bodyPr wrap="none">
+            <a:spAutoFit/>
+          </a:bodyPr>
+          <a:lstStyle/>
+          <a:p>
+            <a:pPr>
+              <a:defRPr sz="2800" b="1">
+                <a:solidFill>
+                  <a:srgbClr val="333333"/>
+                </a:solidFill>
+              </a:defRPr>
+            </a:pPr>
+            <a:r>
+              <a:t>Interest Coverage Crisis</a:t>
+            </a:r>
+          </a:p>
+        </p:txBody>
+      </p:sp>
+      <p:sp>
+        <p:nvSpPr>
+          <p:cNvPr id="5" name="Rectangle 4"/>
+          <p:cNvSpPr/>
+          <p:nvPr/>
+        </p:nvSpPr>
+        <p:spPr>
+          <a:xfrm>
+            <a:off x="457200" y="1554480"/>
+            <a:ext cx="8229600" cy="914400"/>
+          </a:xfrm>
+          <a:prstGeom prst="rect">
+            <a:avLst/>
+          </a:prstGeom>
+          <a:solidFill>
+            <a:srgbClr val="FFF0F0"/>
+          </a:solidFill>
+          <a:ln>
+            <a:solidFill>
+              <a:srgbClr val="CC0000"/>
+            </a:solidFill>
+          </a:ln>
+        </p:spPr>
+        <p:style>
+          <a:lnRef idx="1">
+            <a:schemeClr val="accent1"/>
+          </a:lnRef>
+          <a:fillRef idx="3">
+            <a:schemeClr val="accent1"/>
+          </a:fillRef>
+          <a:effectRef idx="2">
+            <a:schemeClr val="accent1"/>
+          </a:effectRef>
+          <a:fontRef idx="minor">
+            <a:schemeClr val="lt1"/>
+          </a:fontRef>
+        </p:style>
+        <p:txBody>
+          <a:bodyPr rtlCol="0" anchor="ctr"/>
+          <a:lstStyle/>
+          <a:p>
+            <a:pPr algn="ctr"/>
+          </a:p>
+        </p:txBody>
+      </p:sp>
+      <p:sp>
+        <p:nvSpPr>
+          <p:cNvPr id="6" name="TextBox 5"/>
+          <p:cNvSpPr txBox="1"/>
+          <p:nvPr/>
+        </p:nvSpPr>
+        <p:spPr>
+          <a:xfrm>
+            <a:off x="640080" y="1691640"/>
+            <a:ext cx="7863840" cy="640080"/>
+          </a:xfrm>
+          <a:prstGeom prst="rect">
+            <a:avLst/>
+          </a:prstGeom>
+          <a:noFill/>
+        </p:spPr>
+        <p:txBody>
+          <a:bodyPr wrap="square">
+            <a:spAutoFit/>
+          </a:bodyPr>
+          <a:lstStyle/>
+          <a:p>
+            <a:pPr>
+              <a:defRPr sz="1000" b="1">
                 <a:solidFill>
                   <a:srgbClr val="CC0000"/>
                 </a:solidFill>
               </a:defRPr>
             </a:pPr>
             <a:r>
-              <a:t>Cash Conversion Cycle</a:t>
-            </a:r>
-          </a:p>
-        </p:txBody>
-      </p:sp>
-      <p:pic>
-        <p:nvPicPr>
-          <p:cNvPr id="3" name="Picture 2" descr="chart_cash_conversion_cycle.png"/>
-          <p:cNvPicPr>
-            <a:picLocks noChangeAspect="1"/>
-          </p:cNvPicPr>
-          <p:nvPr/>
-        </p:nvPicPr>
-        <p:blipFill>
-          <a:blip r:embed="rId2"/>
-          <a:stretch>
-            <a:fillRect/>
-          </a:stretch>
-        </p:blipFill>
-        <p:spPr>
-          <a:xfrm>
-            <a:off x="457200" y="731520"/>
-            <a:ext cx="8229600" cy="4114800"/>
-          </a:xfrm>
-          <a:prstGeom prst="rect">
-            <a:avLst/>
-          </a:prstGeom>
-        </p:spPr>
-      </p:pic>
-      <p:sp>
-        <p:nvSpPr>
-          <p:cNvPr id="4" name="TextBox 3"/>
-          <p:cNvSpPr txBox="1"/>
+              <a:t>KEY INSIGHT</a:t>
+            </a:r>
+          </a:p>
+          <a:p>
+            <a:pPr>
+              <a:defRPr sz="1800" b="1">
+                <a:solidFill>
+                  <a:srgbClr val="333333"/>
+                </a:solidFill>
+              </a:defRPr>
+            </a:pPr>
+            <a:r>
+              <a:t>Coverage collapsed from 9.7x to 1.5x</a:t>
+            </a:r>
+          </a:p>
+        </p:txBody>
+      </p:sp>
+      <p:sp>
+        <p:nvSpPr>
+          <p:cNvPr id="7" name="TextBox 6"/>
+          <p:cNvSpPr txBox="1"/>
+          <p:nvPr/>
+        </p:nvSpPr>
+        <p:spPr>
+          <a:xfrm>
+            <a:off x="457200" y="2743200"/>
+            <a:ext cx="8229600" cy="2286000"/>
+          </a:xfrm>
+          <a:prstGeom prst="rect">
+            <a:avLst/>
+          </a:prstGeom>
+          <a:noFill/>
+        </p:spPr>
+        <p:txBody>
+          <a:bodyPr wrap="square">
+            <a:spAutoFit/>
+          </a:bodyPr>
+          <a:lstStyle/>
+          <a:p>
+            <a:pPr>
+              <a:spcAft>
+                <a:spcPts val="800"/>
+              </a:spcAft>
+              <a:defRPr sz="1600" b="1">
+                <a:solidFill>
+                  <a:srgbClr val="333333"/>
+                </a:solidFill>
+              </a:defRPr>
+            </a:pPr>
+            <a:r>
+              <a:t>Evidence:</a:t>
+            </a:r>
+          </a:p>
+          <a:p>
+            <a:pPr>
+              <a:spcAft>
+                <a:spcPts val="400"/>
+              </a:spcAft>
+              <a:defRPr sz="1400">
+                <a:solidFill>
+                  <a:srgbClr val="505050"/>
+                </a:solidFill>
+              </a:defRPr>
+            </a:pPr>
+            <a:r>
+              <a:t>• Debt increased 7.5% to $15.37B</a:t>
+            </a:r>
+          </a:p>
+          <a:p>
+            <a:pPr>
+              <a:spcAft>
+                <a:spcPts val="400"/>
+              </a:spcAft>
+              <a:defRPr sz="1400">
+                <a:solidFill>
+                  <a:srgbClr val="505050"/>
+                </a:solidFill>
+              </a:defRPr>
+            </a:pPr>
+            <a:r>
+              <a:t>• Below 1.5x triggers covenant concerns</a:t>
+            </a:r>
+          </a:p>
+          <a:p>
+            <a:pPr>
+              <a:spcAft>
+                <a:spcPts val="400"/>
+              </a:spcAft>
+              <a:defRPr sz="1400">
+                <a:solidFill>
+                  <a:srgbClr val="505050"/>
+                </a:solidFill>
+              </a:defRPr>
+            </a:pPr>
+            <a:r>
+              <a:t>• $2B debt matures FY2026</a:t>
+            </a:r>
+          </a:p>
+        </p:txBody>
+      </p:sp>
+      <p:sp>
+        <p:nvSpPr>
+          <p:cNvPr id="8" name="Rectangle 7"/>
+          <p:cNvSpPr/>
           <p:nvPr/>
         </p:nvSpPr>
         <p:spPr>
           <a:xfrm>
             <a:off x="457200" y="5029200"/>
-            <a:ext cx="8229600" cy="914400"/>
+            <a:ext cx="8229600" cy="1097280"/>
+          </a:xfrm>
+          <a:prstGeom prst="rect">
+            <a:avLst/>
+          </a:prstGeom>
+          <a:solidFill>
+            <a:srgbClr val="F0F8FF"/>
+          </a:solidFill>
+          <a:ln>
+            <a:solidFill>
+              <a:srgbClr val="0066CC"/>
+            </a:solidFill>
+          </a:ln>
+        </p:spPr>
+        <p:style>
+          <a:lnRef idx="1">
+            <a:schemeClr val="accent1"/>
+          </a:lnRef>
+          <a:fillRef idx="3">
+            <a:schemeClr val="accent1"/>
+          </a:fillRef>
+          <a:effectRef idx="2">
+            <a:schemeClr val="accent1"/>
+          </a:effectRef>
+          <a:fontRef idx="minor">
+            <a:schemeClr val="lt1"/>
+          </a:fontRef>
+        </p:style>
+        <p:txBody>
+          <a:bodyPr rtlCol="0" anchor="ctr"/>
+          <a:lstStyle/>
+          <a:p>
+            <a:pPr algn="ctr"/>
+          </a:p>
+        </p:txBody>
+      </p:sp>
+      <p:sp>
+        <p:nvSpPr>
+          <p:cNvPr id="9" name="TextBox 8"/>
+          <p:cNvSpPr txBox="1"/>
+          <p:nvPr/>
+        </p:nvSpPr>
+        <p:spPr>
+          <a:xfrm>
+            <a:off x="640080" y="5166360"/>
+            <a:ext cx="7863840" cy="822960"/>
           </a:xfrm>
           <a:prstGeom prst="rect">
             <a:avLst/>
@@ -5853,48 +7017,26 @@
           <a:lstStyle/>
           <a:p>
             <a:pPr>
-              <a:defRPr sz="1200">
-                <a:solidFill>
-                  <a:srgbClr val="646464"/>
-                </a:solidFill>
-              </a:defRPr>
-            </a:pPr>
-            <a:r>
-              <a:t>Days to convert inventory to cash vs retail peers. Lower is better; negative means suppliers finance operations.</a:t>
-            </a:r>
-          </a:p>
-        </p:txBody>
-      </p:sp>
-      <p:sp>
-        <p:nvSpPr>
-          <p:cNvPr id="5" name="TextBox 4"/>
-          <p:cNvSpPr txBox="1"/>
-          <p:nvPr/>
-        </p:nvSpPr>
-        <p:spPr>
-          <a:xfrm>
-            <a:off x="457200" y="6035040"/>
-            <a:ext cx="8229600" cy="365760"/>
-          </a:xfrm>
-          <a:prstGeom prst="rect">
-            <a:avLst/>
-          </a:prstGeom>
-          <a:noFill/>
-        </p:spPr>
-        <p:txBody>
-          <a:bodyPr wrap="none">
-            <a:spAutoFit/>
-          </a:bodyPr>
-          <a:lstStyle/>
-          <a:p>
-            <a:r>
-              <a:rPr sz="1100" u="sng">
+              <a:defRPr sz="1000" b="1">
                 <a:solidFill>
                   <a:srgbClr val="0066CC"/>
                 </a:solidFill>
-                <a:hlinkClick r:id="rId3"/>
-              </a:rPr>
-              <a:t>📊 Click for interactive version</a:t>
+              </a:defRPr>
+            </a:pPr>
+            <a:r>
+              <a:t>IMPLICATION</a:t>
+            </a:r>
+          </a:p>
+          <a:p>
+            <a:pPr>
+              <a:defRPr sz="1400">
+                <a:solidFill>
+                  <a:srgbClr val="333333"/>
+                </a:solidFill>
+              </a:defRPr>
+            </a:pPr>
+            <a:r>
+              <a:t>Refinancing risk; watch debt maturities and interest rates</a:t>
             </a:r>
           </a:p>
         </p:txBody>
@@ -5919,13 +7061,128 @@
       <p:grpSpPr/>
       <p:sp>
         <p:nvSpPr>
-          <p:cNvPr id="2" name="TextBox 1"/>
-          <p:cNvSpPr txBox="1"/>
-          <p:nvPr/>
-        </p:nvSpPr>
-        <p:spPr>
-          <a:xfrm>
-            <a:off x="457200" y="182880"/>
+          <p:cNvPr id="2" name="Rectangle 1"/>
+          <p:cNvSpPr/>
+          <p:nvPr/>
+        </p:nvSpPr>
+        <p:spPr>
+          <a:xfrm>
+            <a:off x="0" y="2286000"/>
+            <a:ext cx="9144000" cy="1828800"/>
+          </a:xfrm>
+          <a:prstGeom prst="rect">
+            <a:avLst/>
+          </a:prstGeom>
+          <a:solidFill>
+            <a:srgbClr val="CC0000"/>
+          </a:solidFill>
+          <a:ln>
+            <a:solidFill>
+              <a:srgbClr val="CC0000"/>
+            </a:solidFill>
+          </a:ln>
+        </p:spPr>
+        <p:style>
+          <a:lnRef idx="1">
+            <a:schemeClr val="accent1"/>
+          </a:lnRef>
+          <a:fillRef idx="3">
+            <a:schemeClr val="accent1"/>
+          </a:fillRef>
+          <a:effectRef idx="2">
+            <a:schemeClr val="accent1"/>
+          </a:effectRef>
+          <a:fontRef idx="minor">
+            <a:schemeClr val="lt1"/>
+          </a:fontRef>
+        </p:style>
+        <p:txBody>
+          <a:bodyPr rtlCol="0" anchor="ctr"/>
+          <a:lstStyle/>
+          <a:p>
+            <a:pPr algn="ctr"/>
+          </a:p>
+        </p:txBody>
+      </p:sp>
+      <p:sp>
+        <p:nvSpPr>
+          <p:cNvPr id="3" name="TextBox 2"/>
+          <p:cNvSpPr txBox="1"/>
+          <p:nvPr/>
+        </p:nvSpPr>
+        <p:spPr>
+          <a:xfrm>
+            <a:off x="457200" y="2468880"/>
+            <a:ext cx="8229600" cy="548640"/>
+          </a:xfrm>
+          <a:prstGeom prst="rect">
+            <a:avLst/>
+          </a:prstGeom>
+          <a:noFill/>
+        </p:spPr>
+        <p:txBody>
+          <a:bodyPr wrap="none">
+            <a:spAutoFit/>
+          </a:bodyPr>
+          <a:lstStyle/>
+          <a:p>
+            <a:pPr algn="ctr">
+              <a:defRPr sz="2400" b="1">
+                <a:solidFill>
+                  <a:srgbClr val="FFFFFF"/>
+                </a:solidFill>
+              </a:defRPr>
+            </a:pPr>
+            <a:r>
+              <a:t>PILLAR 4</a:t>
+            </a:r>
+          </a:p>
+        </p:txBody>
+      </p:sp>
+      <p:sp>
+        <p:nvSpPr>
+          <p:cNvPr id="4" name="TextBox 3"/>
+          <p:cNvSpPr txBox="1"/>
+          <p:nvPr/>
+        </p:nvSpPr>
+        <p:spPr>
+          <a:xfrm>
+            <a:off x="457200" y="3017520"/>
+            <a:ext cx="8229600" cy="731520"/>
+          </a:xfrm>
+          <a:prstGeom prst="rect">
+            <a:avLst/>
+          </a:prstGeom>
+          <a:noFill/>
+        </p:spPr>
+        <p:txBody>
+          <a:bodyPr wrap="none">
+            <a:spAutoFit/>
+          </a:bodyPr>
+          <a:lstStyle/>
+          <a:p>
+            <a:pPr algn="ctr">
+              <a:defRPr sz="4400" b="1">
+                <a:solidFill>
+                  <a:srgbClr val="FFFFFF"/>
+                </a:solidFill>
+              </a:defRPr>
+            </a:pPr>
+            <a:r>
+              <a:t>Operational Efficiency</a:t>
+            </a:r>
+          </a:p>
+        </p:txBody>
+      </p:sp>
+      <p:sp>
+        <p:nvSpPr>
+          <p:cNvPr id="5" name="TextBox 4"/>
+          <p:cNvSpPr txBox="1"/>
+          <p:nvPr/>
+        </p:nvSpPr>
+        <p:spPr>
+          <a:xfrm>
+            <a:off x="457200" y="4572000"/>
             <a:ext cx="8229600" cy="457200"/>
           </a:xfrm>
           <a:prstGeom prst="rect">
@@ -5939,108 +7196,15 @@
           </a:bodyPr>
           <a:lstStyle/>
           <a:p>
-            <a:pPr>
-              <a:defRPr sz="2400" b="1">
-                <a:solidFill>
-                  <a:srgbClr val="CC0000"/>
-                </a:solidFill>
-              </a:defRPr>
-            </a:pPr>
-            <a:r>
-              <a:t>OCF vs CapEx</a:t>
-            </a:r>
-          </a:p>
-        </p:txBody>
-      </p:sp>
-      <p:pic>
-        <p:nvPicPr>
-          <p:cNvPr id="3" name="Picture 2" descr="chart_ocf_vs_capex.png"/>
-          <p:cNvPicPr>
-            <a:picLocks noChangeAspect="1"/>
-          </p:cNvPicPr>
-          <p:nvPr/>
-        </p:nvPicPr>
-        <p:blipFill>
-          <a:blip r:embed="rId2"/>
-          <a:stretch>
-            <a:fillRect/>
-          </a:stretch>
-        </p:blipFill>
-        <p:spPr>
-          <a:xfrm>
-            <a:off x="457200" y="731520"/>
-            <a:ext cx="8229600" cy="4114800"/>
-          </a:xfrm>
-          <a:prstGeom prst="rect">
-            <a:avLst/>
-          </a:prstGeom>
-        </p:spPr>
-      </p:pic>
-      <p:sp>
-        <p:nvSpPr>
-          <p:cNvPr id="4" name="TextBox 3"/>
-          <p:cNvSpPr txBox="1"/>
-          <p:nvPr/>
-        </p:nvSpPr>
-        <p:spPr>
-          <a:xfrm>
-            <a:off x="457200" y="5029200"/>
-            <a:ext cx="8229600" cy="914400"/>
-          </a:xfrm>
-          <a:prstGeom prst="rect">
-            <a:avLst/>
-          </a:prstGeom>
-          <a:noFill/>
-        </p:spPr>
-        <p:txBody>
-          <a:bodyPr wrap="square">
-            <a:spAutoFit/>
-          </a:bodyPr>
-          <a:lstStyle/>
-          <a:p>
-            <a:pPr>
-              <a:defRPr sz="1200">
+            <a:pPr algn="ctr">
+              <a:defRPr sz="2400" i="1">
                 <a:solidFill>
                   <a:srgbClr val="646464"/>
                 </a:solidFill>
               </a:defRPr>
             </a:pPr>
             <a:r>
-              <a:t>Operating cash vs capital spending. The gap between them is Free Cash Flow available for shareholders.</a:t>
-            </a:r>
-          </a:p>
-        </p:txBody>
-      </p:sp>
-      <p:sp>
-        <p:nvSpPr>
-          <p:cNvPr id="5" name="TextBox 4"/>
-          <p:cNvSpPr txBox="1"/>
-          <p:nvPr/>
-        </p:nvSpPr>
-        <p:spPr>
-          <a:xfrm>
-            <a:off x="457200" y="6035040"/>
-            <a:ext cx="8229600" cy="365760"/>
-          </a:xfrm>
-          <a:prstGeom prst="rect">
-            <a:avLst/>
-          </a:prstGeom>
-          <a:noFill/>
-        </p:spPr>
-        <p:txBody>
-          <a:bodyPr wrap="none">
-            <a:spAutoFit/>
-          </a:bodyPr>
-          <a:lstStyle/>
-          <a:p>
-            <a:r>
-              <a:rPr sz="1100" u="sng">
-                <a:solidFill>
-                  <a:srgbClr val="0066CC"/>
-                </a:solidFill>
-                <a:hlinkClick r:id="rId3"/>
-              </a:rPr>
-              <a:t>📊 Click for interactive version</a:t>
+              <a:t>"How well is the company using its assets?"</a:t>
             </a:r>
           </a:p>
         </p:txBody>
@@ -6065,46 +7229,36 @@
       <p:grpSpPr/>
       <p:sp>
         <p:nvSpPr>
-          <p:cNvPr id="2" name="Rectangle 1"/>
-          <p:cNvSpPr/>
-          <p:nvPr/>
-        </p:nvSpPr>
-        <p:spPr>
-          <a:xfrm>
-            <a:off x="0" y="2286000"/>
-            <a:ext cx="9144000" cy="1828800"/>
-          </a:xfrm>
-          <a:prstGeom prst="rect">
-            <a:avLst/>
-          </a:prstGeom>
-          <a:solidFill>
-            <a:srgbClr val="CC0000"/>
-          </a:solidFill>
-          <a:ln>
-            <a:solidFill>
-              <a:srgbClr val="CC0000"/>
-            </a:solidFill>
-          </a:ln>
-        </p:spPr>
-        <p:style>
-          <a:lnRef idx="1">
-            <a:schemeClr val="accent1"/>
-          </a:lnRef>
-          <a:fillRef idx="3">
-            <a:schemeClr val="accent1"/>
-          </a:fillRef>
-          <a:effectRef idx="2">
-            <a:schemeClr val="accent1"/>
-          </a:effectRef>
-          <a:fontRef idx="minor">
-            <a:schemeClr val="lt1"/>
-          </a:fontRef>
-        </p:style>
-        <p:txBody>
-          <a:bodyPr rtlCol="0" anchor="ctr"/>
-          <a:lstStyle/>
-          <a:p>
-            <a:pPr algn="ctr"/>
+          <p:cNvPr id="2" name="TextBox 1"/>
+          <p:cNvSpPr txBox="1"/>
+          <p:nvPr/>
+        </p:nvSpPr>
+        <p:spPr>
+          <a:xfrm>
+            <a:off x="457200" y="182880"/>
+            <a:ext cx="8229600" cy="457200"/>
+          </a:xfrm>
+          <a:prstGeom prst="rect">
+            <a:avLst/>
+          </a:prstGeom>
+          <a:noFill/>
+        </p:spPr>
+        <p:txBody>
+          <a:bodyPr wrap="none">
+            <a:spAutoFit/>
+          </a:bodyPr>
+          <a:lstStyle/>
+          <a:p>
+            <a:pPr>
+              <a:defRPr sz="2400" b="1">
+                <a:solidFill>
+                  <a:srgbClr val="CC0000"/>
+                </a:solidFill>
+              </a:defRPr>
+            </a:pPr>
+            <a:r>
+              <a:t>DuPont Analysis</a:t>
+            </a:r>
           </a:p>
         </p:txBody>
       </p:sp>
@@ -6116,8 +7270,8 @@
         </p:nvSpPr>
         <p:spPr>
           <a:xfrm>
-            <a:off x="457200" y="2468880"/>
-            <a:ext cx="8229600" cy="548640"/>
+            <a:off x="8229600" y="228600"/>
+            <a:ext cx="365760" cy="365760"/>
           </a:xfrm>
           <a:prstGeom prst="rect">
             <a:avLst/>
@@ -6130,29 +7284,87 @@
           </a:bodyPr>
           <a:lstStyle/>
           <a:p>
-            <a:pPr algn="ctr">
-              <a:defRPr sz="2400" b="1">
-                <a:solidFill>
-                  <a:srgbClr val="FFFFFF"/>
-                </a:solidFill>
-              </a:defRPr>
-            </a:pPr>
-            <a:r>
-              <a:t>PILLAR 5</a:t>
-            </a:r>
-          </a:p>
-        </p:txBody>
-      </p:sp>
-      <p:sp>
-        <p:nvSpPr>
-          <p:cNvPr id="4" name="TextBox 3"/>
-          <p:cNvSpPr txBox="1"/>
-          <p:nvPr/>
-        </p:nvSpPr>
-        <p:spPr>
-          <a:xfrm>
-            <a:off x="457200" y="3017520"/>
-            <a:ext cx="8229600" cy="731520"/>
+            <a:r>
+              <a:rPr sz="1800">
+                <a:solidFill>
+                  <a:srgbClr val="646464"/>
+                </a:solidFill>
+                <a:hlinkClick r:id="rId2"/>
+              </a:rPr>
+              <a:t>ⓘ</a:t>
+            </a:r>
+          </a:p>
+        </p:txBody>
+      </p:sp>
+      <p:pic>
+        <p:nvPicPr>
+          <p:cNvPr id="4" name="Picture 3" descr="chart_dupont_analysis.png"/>
+          <p:cNvPicPr>
+            <a:picLocks noChangeAspect="1"/>
+          </p:cNvPicPr>
+          <p:nvPr/>
+        </p:nvPicPr>
+        <p:blipFill>
+          <a:blip r:embed="rId3"/>
+          <a:stretch>
+            <a:fillRect/>
+          </a:stretch>
+        </p:blipFill>
+        <p:spPr>
+          <a:xfrm>
+            <a:off x="457200" y="731520"/>
+            <a:ext cx="8229600" cy="4114800"/>
+          </a:xfrm>
+          <a:prstGeom prst="rect">
+            <a:avLst/>
+          </a:prstGeom>
+        </p:spPr>
+      </p:pic>
+      <p:sp>
+        <p:nvSpPr>
+          <p:cNvPr id="5" name="TextBox 4"/>
+          <p:cNvSpPr txBox="1"/>
+          <p:nvPr/>
+        </p:nvSpPr>
+        <p:spPr>
+          <a:xfrm>
+            <a:off x="457200" y="5029200"/>
+            <a:ext cx="8229600" cy="914400"/>
+          </a:xfrm>
+          <a:prstGeom prst="rect">
+            <a:avLst/>
+          </a:prstGeom>
+          <a:noFill/>
+        </p:spPr>
+        <p:txBody>
+          <a:bodyPr wrap="square">
+            <a:spAutoFit/>
+          </a:bodyPr>
+          <a:lstStyle/>
+          <a:p>
+            <a:pPr>
+              <a:defRPr sz="1200" b="1">
+                <a:solidFill>
+                  <a:srgbClr val="323232"/>
+                </a:solidFill>
+              </a:defRPr>
+            </a:pPr>
+            <a:r>
+              <a:t>ROE driven primarily by leverage (3.2x), not margins (3.8%) or turnover (1.8x). Declining margins are dragging returns down.</a:t>
+            </a:r>
+          </a:p>
+        </p:txBody>
+      </p:sp>
+      <p:sp>
+        <p:nvSpPr>
+          <p:cNvPr id="6" name="TextBox 5"/>
+          <p:cNvSpPr txBox="1"/>
+          <p:nvPr/>
+        </p:nvSpPr>
+        <p:spPr>
+          <a:xfrm>
+            <a:off x="457200" y="6035040"/>
+            <a:ext cx="8229600" cy="365760"/>
           </a:xfrm>
           <a:prstGeom prst="rect">
             <a:avLst/>
@@ -6165,50 +7377,14 @@
           </a:bodyPr>
           <a:lstStyle/>
           <a:p>
-            <a:pPr algn="ctr">
-              <a:defRPr sz="4400" b="1">
-                <a:solidFill>
-                  <a:srgbClr val="FFFFFF"/>
-                </a:solidFill>
-              </a:defRPr>
-            </a:pPr>
-            <a:r>
-              <a:t>Valuation &amp; Risk</a:t>
-            </a:r>
-          </a:p>
-        </p:txBody>
-      </p:sp>
-      <p:sp>
-        <p:nvSpPr>
-          <p:cNvPr id="5" name="TextBox 4"/>
-          <p:cNvSpPr txBox="1"/>
-          <p:nvPr/>
-        </p:nvSpPr>
-        <p:spPr>
-          <a:xfrm>
-            <a:off x="457200" y="4572000"/>
-            <a:ext cx="8229600" cy="457200"/>
-          </a:xfrm>
-          <a:prstGeom prst="rect">
-            <a:avLst/>
-          </a:prstGeom>
-          <a:noFill/>
-        </p:spPr>
-        <p:txBody>
-          <a:bodyPr wrap="none">
-            <a:spAutoFit/>
-          </a:bodyPr>
-          <a:lstStyle/>
-          <a:p>
-            <a:pPr algn="ctr">
-              <a:defRPr sz="2400" i="1">
-                <a:solidFill>
-                  <a:srgbClr val="646464"/>
-                </a:solidFill>
-              </a:defRPr>
-            </a:pPr>
-            <a:r>
-              <a:t>"Is the stock fairly priced, and what are the risks?"</a:t>
+            <a:r>
+              <a:rPr sz="1100" u="sng">
+                <a:solidFill>
+                  <a:srgbClr val="0066CC"/>
+                </a:solidFill>
+                <a:hlinkClick r:id="rId2"/>
+              </a:rPr>
+              <a:t>📊 Click for interactive version</a:t>
             </a:r>
           </a:p>
         </p:txBody>
@@ -6261,21 +7437,55 @@
               </a:defRPr>
             </a:pPr>
             <a:r>
-              <a:t>Valuation vs Growth</a:t>
+              <a:t>Inventory Efficiency</a:t>
+            </a:r>
+          </a:p>
+        </p:txBody>
+      </p:sp>
+      <p:sp>
+        <p:nvSpPr>
+          <p:cNvPr id="3" name="TextBox 2"/>
+          <p:cNvSpPr txBox="1"/>
+          <p:nvPr/>
+        </p:nvSpPr>
+        <p:spPr>
+          <a:xfrm>
+            <a:off x="8229600" y="228600"/>
+            <a:ext cx="365760" cy="365760"/>
+          </a:xfrm>
+          <a:prstGeom prst="rect">
+            <a:avLst/>
+          </a:prstGeom>
+          <a:noFill/>
+        </p:spPr>
+        <p:txBody>
+          <a:bodyPr wrap="none">
+            <a:spAutoFit/>
+          </a:bodyPr>
+          <a:lstStyle/>
+          <a:p>
+            <a:r>
+              <a:rPr sz="1800">
+                <a:solidFill>
+                  <a:srgbClr val="646464"/>
+                </a:solidFill>
+                <a:hlinkClick r:id="rId2"/>
+              </a:rPr>
+              <a:t>ⓘ</a:t>
             </a:r>
           </a:p>
         </p:txBody>
       </p:sp>
       <p:pic>
         <p:nvPicPr>
-          <p:cNvPr id="3" name="Picture 2" descr="chart_valuation_scatter.png"/>
+          <p:cNvPr id="4" name="Picture 3" descr="chart_inventory_efficiency.png"/>
           <p:cNvPicPr>
             <a:picLocks noChangeAspect="1"/>
           </p:cNvPicPr>
           <p:nvPr/>
         </p:nvPicPr>
         <p:blipFill>
-          <a:blip r:embed="rId2"/>
+          <a:blip r:embed="rId3"/>
           <a:stretch>
             <a:fillRect/>
           </a:stretch>
@@ -6292,7 +7502,7 @@
       </p:pic>
       <p:sp>
         <p:nvSpPr>
-          <p:cNvPr id="4" name="TextBox 3"/>
+          <p:cNvPr id="5" name="TextBox 4"/>
           <p:cNvSpPr txBox="1"/>
           <p:nvPr/>
         </p:nvSpPr>
@@ -6313,21 +7523,21 @@
           <a:lstStyle/>
           <a:p>
             <a:pPr>
-              <a:defRPr sz="1200">
-                <a:solidFill>
-                  <a:srgbClr val="646464"/>
-                </a:solidFill>
-              </a:defRPr>
-            </a:pPr>
-            <a:r>
-              <a:t>P/E ratio vs revenue growth for Target and peers. Lower-right quadrant = undervalued opportunities.</a:t>
-            </a:r>
-          </a:p>
-        </p:txBody>
-      </p:sp>
-      <p:sp>
-        <p:nvSpPr>
-          <p:cNvPr id="5" name="TextBox 4"/>
+              <a:defRPr sz="1200" b="1">
+                <a:solidFill>
+                  <a:srgbClr val="323232"/>
+                </a:solidFill>
+              </a:defRPr>
+            </a:pPr>
+            <a:r>
+              <a:t>Inventory turns improved from 5.8x to 6.2x as Target worked through excess stock. Days on hand dropped from 63 to 59 days.</a:t>
+            </a:r>
+          </a:p>
+        </p:txBody>
+      </p:sp>
+      <p:sp>
+        <p:nvSpPr>
+          <p:cNvPr id="6" name="TextBox 5"/>
           <p:cNvSpPr txBox="1"/>
           <p:nvPr/>
         </p:nvSpPr>
@@ -6352,7 +7562,7 @@
                 <a:solidFill>
                   <a:srgbClr val="0066CC"/>
                 </a:solidFill>
-                <a:hlinkClick r:id="rId3"/>
+                <a:hlinkClick r:id="rId2"/>
               </a:rPr>
               <a:t>📊 Click for interactive version</a:t>
             </a:r>
@@ -6407,21 +7617,55 @@
               </a:defRPr>
             </a:pPr>
             <a:r>
-              <a:t>Historical P/E Band</a:t>
+              <a:t>Cash Conversion Cycle</a:t>
+            </a:r>
+          </a:p>
+        </p:txBody>
+      </p:sp>
+      <p:sp>
+        <p:nvSpPr>
+          <p:cNvPr id="3" name="TextBox 2"/>
+          <p:cNvSpPr txBox="1"/>
+          <p:nvPr/>
+        </p:nvSpPr>
+        <p:spPr>
+          <a:xfrm>
+            <a:off x="8229600" y="228600"/>
+            <a:ext cx="365760" cy="365760"/>
+          </a:xfrm>
+          <a:prstGeom prst="rect">
+            <a:avLst/>
+          </a:prstGeom>
+          <a:noFill/>
+        </p:spPr>
+        <p:txBody>
+          <a:bodyPr wrap="none">
+            <a:spAutoFit/>
+          </a:bodyPr>
+          <a:lstStyle/>
+          <a:p>
+            <a:r>
+              <a:rPr sz="1800">
+                <a:solidFill>
+                  <a:srgbClr val="646464"/>
+                </a:solidFill>
+                <a:hlinkClick r:id="rId2"/>
+              </a:rPr>
+              <a:t>ⓘ</a:t>
             </a:r>
           </a:p>
         </p:txBody>
       </p:sp>
       <p:pic>
         <p:nvPicPr>
-          <p:cNvPr id="3" name="Picture 2" descr="chart_pe_band.png"/>
+          <p:cNvPr id="4" name="Picture 3" descr="chart_cash_conversion_cycle.png"/>
           <p:cNvPicPr>
             <a:picLocks noChangeAspect="1"/>
           </p:cNvPicPr>
           <p:nvPr/>
         </p:nvPicPr>
         <p:blipFill>
-          <a:blip r:embed="rId2"/>
+          <a:blip r:embed="rId3"/>
           <a:stretch>
             <a:fillRect/>
           </a:stretch>
@@ -6438,7 +7682,7 @@
       </p:pic>
       <p:sp>
         <p:nvSpPr>
-          <p:cNvPr id="4" name="TextBox 3"/>
+          <p:cNvPr id="5" name="TextBox 4"/>
           <p:cNvSpPr txBox="1"/>
           <p:nvPr/>
         </p:nvSpPr>
@@ -6459,21 +7703,21 @@
           <a:lstStyle/>
           <a:p>
             <a:pPr>
-              <a:defRPr sz="1200">
-                <a:solidFill>
-                  <a:srgbClr val="646464"/>
-                </a:solidFill>
-              </a:defRPr>
-            </a:pPr>
-            <a:r>
-              <a:t>Current price vs historical valuation range. Below 25th percentile = historically undervalued.</a:t>
-            </a:r>
-          </a:p>
-        </p:txBody>
-      </p:sp>
-      <p:sp>
-        <p:nvSpPr>
-          <p:cNvPr id="5" name="TextBox 4"/>
+              <a:defRPr sz="1200" b="1">
+                <a:solidFill>
+                  <a:srgbClr val="323232"/>
+                </a:solidFill>
+              </a:defRPr>
+            </a:pPr>
+            <a:r>
+              <a:t>Cash cycle at ~5 days is efficient for retail. Negative payables cycle offsets inventory days—suppliers help fund operations.</a:t>
+            </a:r>
+          </a:p>
+        </p:txBody>
+      </p:sp>
+      <p:sp>
+        <p:nvSpPr>
+          <p:cNvPr id="6" name="TextBox 5"/>
           <p:cNvSpPr txBox="1"/>
           <p:nvPr/>
         </p:nvSpPr>
@@ -6498,7 +7742,7 @@
                 <a:solidFill>
                   <a:srgbClr val="0066CC"/>
                 </a:solidFill>
-                <a:hlinkClick r:id="rId3"/>
+                <a:hlinkClick r:id="rId2"/>
               </a:rPr>
               <a:t>📊 Click for interactive version</a:t>
             </a:r>
@@ -6531,7 +7775,7 @@
         </p:nvSpPr>
         <p:spPr>
           <a:xfrm>
-            <a:off x="457200" y="274320"/>
+            <a:off x="457200" y="182880"/>
             <a:ext cx="8229600" cy="457200"/>
           </a:xfrm>
           <a:prstGeom prst="rect">
@@ -6546,14 +7790,14 @@
           <a:lstStyle/>
           <a:p>
             <a:pPr>
-              <a:defRPr sz="3200" b="1">
+              <a:defRPr sz="2400" b="1">
                 <a:solidFill>
                   <a:srgbClr val="CC0000"/>
                 </a:solidFill>
               </a:defRPr>
             </a:pPr>
             <a:r>
-              <a:t>Investment Thesis</a:t>
+              <a:t>Market Context: TGT vs S&amp;P 500</a:t>
             </a:r>
           </a:p>
         </p:txBody>
@@ -6566,8 +7810,8 @@
         </p:nvSpPr>
         <p:spPr>
           <a:xfrm>
-            <a:off x="457200" y="914400"/>
-            <a:ext cx="8229600" cy="1097280"/>
+            <a:off x="8229600" y="228600"/>
+            <a:ext cx="365760" cy="365760"/>
           </a:xfrm>
           <a:prstGeom prst="rect">
             <a:avLst/>
@@ -6580,40 +7824,87 @@
           </a:bodyPr>
           <a:lstStyle/>
           <a:p>
-            <a:pPr>
-              <a:defRPr sz="2800" b="1">
-                <a:solidFill>
-                  <a:srgbClr val="FF8C00"/>
-                </a:solidFill>
-              </a:defRPr>
-            </a:pPr>
-            <a:r>
-              <a:t>Recommendation: Hold</a:t>
-            </a:r>
-          </a:p>
-          <a:p>
-            <a:pPr>
-              <a:spcAft>
-                <a:spcPts val="600"/>
-              </a:spcAft>
-              <a:defRPr sz="1600"/>
-            </a:pPr>
-            <a:r>
-              <a:t>Balanced risk/opportunity profile with execution uncertainty</a:t>
-            </a:r>
-          </a:p>
-        </p:txBody>
-      </p:sp>
-      <p:sp>
-        <p:nvSpPr>
-          <p:cNvPr id="4" name="TextBox 3"/>
-          <p:cNvSpPr txBox="1"/>
-          <p:nvPr/>
-        </p:nvSpPr>
-        <p:spPr>
-          <a:xfrm>
-            <a:off x="457200" y="2286000"/>
-            <a:ext cx="3886200" cy="3657600"/>
+            <a:r>
+              <a:rPr sz="1800">
+                <a:solidFill>
+                  <a:srgbClr val="646464"/>
+                </a:solidFill>
+                <a:hlinkClick r:id="rId2"/>
+              </a:rPr>
+              <a:t>ⓘ</a:t>
+            </a:r>
+          </a:p>
+        </p:txBody>
+      </p:sp>
+      <p:pic>
+        <p:nvPicPr>
+          <p:cNvPr id="4" name="Picture 3" descr="chart_market_context.png"/>
+          <p:cNvPicPr>
+            <a:picLocks noChangeAspect="1"/>
+          </p:cNvPicPr>
+          <p:nvPr/>
+        </p:nvPicPr>
+        <p:blipFill>
+          <a:blip r:embed="rId3"/>
+          <a:stretch>
+            <a:fillRect/>
+          </a:stretch>
+        </p:blipFill>
+        <p:spPr>
+          <a:xfrm>
+            <a:off x="457200" y="731520"/>
+            <a:ext cx="8229600" cy="4114800"/>
+          </a:xfrm>
+          <a:prstGeom prst="rect">
+            <a:avLst/>
+          </a:prstGeom>
+        </p:spPr>
+      </p:pic>
+      <p:sp>
+        <p:nvSpPr>
+          <p:cNvPr id="5" name="TextBox 4"/>
+          <p:cNvSpPr txBox="1"/>
+          <p:nvPr/>
+        </p:nvSpPr>
+        <p:spPr>
+          <a:xfrm>
+            <a:off x="457200" y="5029200"/>
+            <a:ext cx="8229600" cy="914400"/>
+          </a:xfrm>
+          <a:prstGeom prst="rect">
+            <a:avLst/>
+          </a:prstGeom>
+          <a:noFill/>
+        </p:spPr>
+        <p:txBody>
+          <a:bodyPr wrap="square">
+            <a:spAutoFit/>
+          </a:bodyPr>
+          <a:lstStyle/>
+          <a:p>
+            <a:pPr>
+              <a:defRPr sz="1200" b="1">
+                <a:solidFill>
+                  <a:srgbClr val="323232"/>
+                </a:solidFill>
+              </a:defRPr>
+            </a:pPr>
+            <a:r>
+              <a:t>TGT underperformed S&amp;P 500 by 102pp over 3 years. Beta dropped to 0.28 (less volatile than market)—defensive but lagging in bull markets.</a:t>
+            </a:r>
+          </a:p>
+        </p:txBody>
+      </p:sp>
+      <p:sp>
+        <p:nvSpPr>
+          <p:cNvPr id="6" name="TextBox 5"/>
+          <p:cNvSpPr txBox="1"/>
+          <p:nvPr/>
+        </p:nvSpPr>
+        <p:spPr>
+          <a:xfrm>
+            <a:off x="457200" y="6035040"/>
+            <a:ext cx="8229600" cy="365760"/>
           </a:xfrm>
           <a:prstGeom prst="rect">
             <a:avLst/>
@@ -6626,86 +7917,14 @@
           </a:bodyPr>
           <a:lstStyle/>
           <a:p>
-            <a:pPr>
-              <a:spcAft>
-                <a:spcPts val="1200"/>
-              </a:spcAft>
-              <a:defRPr sz="2000" b="1"/>
-            </a:pPr>
-            <a:r>
-              <a:t>Risk Factors</a:t>
-            </a:r>
-          </a:p>
-          <a:p>
-            <a:pPr>
-              <a:defRPr sz="1400" b="1"/>
-            </a:pPr>
-            <a:r>
-              <a:t>Shrink/Theft (High)</a:t>
-            </a:r>
-          </a:p>
-          <a:p>
-            <a:pPr lvl="1">
-              <a:spcAft>
-                <a:spcPts val="600"/>
-              </a:spcAft>
-              <a:defRPr sz="1200"/>
-            </a:pPr>
-            <a:r>
-              <a:t>22 mentions across 8 periods, avg 2.8/period</a:t>
-            </a:r>
-          </a:p>
-        </p:txBody>
-      </p:sp>
-      <p:sp>
-        <p:nvSpPr>
-          <p:cNvPr id="5" name="TextBox 4"/>
-          <p:cNvSpPr txBox="1"/>
-          <p:nvPr/>
-        </p:nvSpPr>
-        <p:spPr>
-          <a:xfrm>
-            <a:off x="4800600" y="2286000"/>
-            <a:ext cx="3886200" cy="3657600"/>
-          </a:xfrm>
-          <a:prstGeom prst="rect">
-            <a:avLst/>
-          </a:prstGeom>
-          <a:noFill/>
-        </p:spPr>
-        <p:txBody>
-          <a:bodyPr wrap="none">
-            <a:spAutoFit/>
-          </a:bodyPr>
-          <a:lstStyle/>
-          <a:p>
-            <a:pPr>
-              <a:spcAft>
-                <a:spcPts val="1200"/>
-              </a:spcAft>
-              <a:defRPr sz="2000" b="1"/>
-            </a:pPr>
-            <a:r>
-              <a:t>Opportunities</a:t>
-            </a:r>
-          </a:p>
-          <a:p>
-            <a:pPr>
-              <a:defRPr sz="1400" b="1"/>
-            </a:pPr>
-            <a:r>
-              <a:t>Digital Sales Growth (High potential)</a:t>
-            </a:r>
-          </a:p>
-          <a:p>
-            <a:pPr lvl="1">
-              <a:spcAft>
-                <a:spcPts val="600"/>
-              </a:spcAft>
-              <a:defRPr sz="1200"/>
-            </a:pPr>
-            <a:r>
-              <a:t>Digital comp sales up 2.4% in latest quarter</a:t>
+            <a:r>
+              <a:rPr sz="1100" u="sng">
+                <a:solidFill>
+                  <a:srgbClr val="0066CC"/>
+                </a:solidFill>
+                <a:hlinkClick r:id="rId2"/>
+              </a:rPr>
+              <a:t>📊 Click for interactive version</a:t>
             </a:r>
           </a:p>
         </p:txBody>
@@ -6758,21 +7977,55 @@
               </a:defRPr>
             </a:pPr>
             <a:r>
-              <a:t>Cash Flow Sankey</a:t>
+              <a:t>OCF vs CapEx</a:t>
+            </a:r>
+          </a:p>
+        </p:txBody>
+      </p:sp>
+      <p:sp>
+        <p:nvSpPr>
+          <p:cNvPr id="3" name="TextBox 2"/>
+          <p:cNvSpPr txBox="1"/>
+          <p:nvPr/>
+        </p:nvSpPr>
+        <p:spPr>
+          <a:xfrm>
+            <a:off x="8229600" y="228600"/>
+            <a:ext cx="365760" cy="365760"/>
+          </a:xfrm>
+          <a:prstGeom prst="rect">
+            <a:avLst/>
+          </a:prstGeom>
+          <a:noFill/>
+        </p:spPr>
+        <p:txBody>
+          <a:bodyPr wrap="none">
+            <a:spAutoFit/>
+          </a:bodyPr>
+          <a:lstStyle/>
+          <a:p>
+            <a:r>
+              <a:rPr sz="1800">
+                <a:solidFill>
+                  <a:srgbClr val="646464"/>
+                </a:solidFill>
+                <a:hlinkClick r:id="rId2"/>
+              </a:rPr>
+              <a:t>ⓘ</a:t>
             </a:r>
           </a:p>
         </p:txBody>
       </p:sp>
       <p:pic>
         <p:nvPicPr>
-          <p:cNvPr id="3" name="Picture 2" descr="chart_cash_flow_sankey.png"/>
+          <p:cNvPr id="4" name="Picture 3" descr="chart_ocf_vs_capex.png"/>
           <p:cNvPicPr>
             <a:picLocks noChangeAspect="1"/>
           </p:cNvPicPr>
           <p:nvPr/>
         </p:nvPicPr>
         <p:blipFill>
-          <a:blip r:embed="rId2"/>
+          <a:blip r:embed="rId3"/>
           <a:stretch>
             <a:fillRect/>
           </a:stretch>
@@ -6789,7 +8042,7 @@
       </p:pic>
       <p:sp>
         <p:nvSpPr>
-          <p:cNvPr id="4" name="TextBox 3"/>
+          <p:cNvPr id="5" name="TextBox 4"/>
           <p:cNvSpPr txBox="1"/>
           <p:nvPr/>
         </p:nvSpPr>
@@ -6810,21 +8063,21 @@
           <a:lstStyle/>
           <a:p>
             <a:pPr>
-              <a:defRPr sz="1200">
-                <a:solidFill>
-                  <a:srgbClr val="646464"/>
-                </a:solidFill>
-              </a:defRPr>
-            </a:pPr>
-            <a:r>
-              <a:t>Visualizes cash allocation: CapEx, dividends, buybacks, debt repayment. Shows management priorities.</a:t>
-            </a:r>
-          </a:p>
-        </p:txBody>
-      </p:sp>
-      <p:sp>
-        <p:nvSpPr>
-          <p:cNvPr id="5" name="TextBox 4"/>
+              <a:defRPr sz="1200" b="1">
+                <a:solidFill>
+                  <a:srgbClr val="323232"/>
+                </a:solidFill>
+              </a:defRPr>
+            </a:pPr>
+            <a:r>
+              <a:t>Free cash flow (OCF - CapEx) remains positive at ~$3B annually, supporting dividends. CapEx steady at $4-5B for store/digital investments.</a:t>
+            </a:r>
+          </a:p>
+        </p:txBody>
+      </p:sp>
+      <p:sp>
+        <p:nvSpPr>
+          <p:cNvPr id="6" name="TextBox 5"/>
           <p:cNvSpPr txBox="1"/>
           <p:nvPr/>
         </p:nvSpPr>
@@ -6849,7 +8102,7 @@
                 <a:solidFill>
                   <a:srgbClr val="0066CC"/>
                 </a:solidFill>
-                <a:hlinkClick r:id="rId3"/>
+                <a:hlinkClick r:id="rId2"/>
               </a:rPr>
               <a:t>📊 Click for interactive version</a:t>
             </a:r>
@@ -6868,6 +8121,51 @@
 <p:sld xmlns:a="http://schemas.openxmlformats.org/drawingml/2006/main" xmlns:p="http://schemas.openxmlformats.org/presentationml/2006/main" xmlns:r="http://schemas.openxmlformats.org/officeDocument/2006/relationships">
   <p:cSld>
     <p:spTree>
+      <p:sp>
+        <p:nvSpPr>
+          <p:cNvPr id="3" name="Rectangle 2"/>
+          <p:cNvSpPr/>
+          <p:nvPr/>
+        </p:nvSpPr>
+        <p:spPr>
+          <a:xfrm>
+            <a:off x="365760" y="228600"/>
+            <a:ext cx="1371600" cy="411480"/>
+          </a:xfrm>
+          <a:prstGeom prst="rect">
+            <a:avLst/>
+          </a:prstGeom>
+          <a:solidFill>
+            <a:srgbClr val="CC0000"/>
+          </a:solidFill>
+          <a:ln>
+            <a:solidFill>
+              <a:srgbClr val="CC0000"/>
+            </a:solidFill>
+          </a:ln>
+        </p:spPr>
+        <p:style>
+          <a:lnRef idx="1">
+            <a:schemeClr val="accent1"/>
+          </a:lnRef>
+          <a:fillRef idx="3">
+            <a:schemeClr val="accent1"/>
+          </a:fillRef>
+          <a:effectRef idx="2">
+            <a:schemeClr val="accent1"/>
+          </a:effectRef>
+          <a:fontRef idx="minor">
+            <a:schemeClr val="lt1"/>
+          </a:fontRef>
+        </p:style>
+        <p:txBody>
+          <a:bodyPr rtlCol="0" anchor="ctr"/>
+          <a:lstStyle/>
+          <a:p>
+            <a:pPr algn="ctr"/>
+          </a:p>
+        </p:txBody>
+      </p:sp>
       <p:nvGrpSpPr>
         <p:cNvPr id="1" name=""/>
         <p:cNvGrpSpPr/>
@@ -6882,8 +8180,8 @@
         </p:nvSpPr>
         <p:spPr>
           <a:xfrm>
-            <a:off x="457200" y="182880"/>
-            <a:ext cx="8229600" cy="457200"/>
+            <a:off x="457200" y="274320"/>
+            <a:ext cx="1828800" cy="365760"/>
           </a:xfrm>
           <a:prstGeom prst="rect">
             <a:avLst/>
@@ -6897,52 +8195,283 @@
           <a:lstStyle/>
           <a:p>
             <a:pPr>
-              <a:defRPr sz="2400" b="1">
+              <a:defRPr sz="1400" b="1">
+                <a:solidFill>
+                  <a:srgbClr val="FFFFFF"/>
+                </a:solidFill>
+              </a:defRPr>
+            </a:pPr>
+            <a:r>
+              <a:t>SO WHAT?</a:t>
+            </a:r>
+          </a:p>
+        </p:txBody>
+      </p:sp>
+      <p:sp>
+        <p:nvSpPr>
+          <p:cNvPr id="4" name="TextBox 3"/>
+          <p:cNvSpPr txBox="1"/>
+          <p:nvPr/>
+        </p:nvSpPr>
+        <p:spPr>
+          <a:xfrm>
+            <a:off x="457200" y="822960"/>
+            <a:ext cx="8229600" cy="548640"/>
+          </a:xfrm>
+          <a:prstGeom prst="rect">
+            <a:avLst/>
+          </a:prstGeom>
+          <a:noFill/>
+        </p:spPr>
+        <p:txBody>
+          <a:bodyPr wrap="none">
+            <a:spAutoFit/>
+          </a:bodyPr>
+          <a:lstStyle/>
+          <a:p>
+            <a:pPr>
+              <a:defRPr sz="2800" b="1">
+                <a:solidFill>
+                  <a:srgbClr val="333333"/>
+                </a:solidFill>
+              </a:defRPr>
+            </a:pPr>
+            <a:r>
+              <a:t>Efficiency Under Pressure</a:t>
+            </a:r>
+          </a:p>
+        </p:txBody>
+      </p:sp>
+      <p:sp>
+        <p:nvSpPr>
+          <p:cNvPr id="5" name="Rectangle 4"/>
+          <p:cNvSpPr/>
+          <p:nvPr/>
+        </p:nvSpPr>
+        <p:spPr>
+          <a:xfrm>
+            <a:off x="457200" y="1554480"/>
+            <a:ext cx="8229600" cy="914400"/>
+          </a:xfrm>
+          <a:prstGeom prst="rect">
+            <a:avLst/>
+          </a:prstGeom>
+          <a:solidFill>
+            <a:srgbClr val="FFF0F0"/>
+          </a:solidFill>
+          <a:ln>
+            <a:solidFill>
+              <a:srgbClr val="CC0000"/>
+            </a:solidFill>
+          </a:ln>
+        </p:spPr>
+        <p:style>
+          <a:lnRef idx="1">
+            <a:schemeClr val="accent1"/>
+          </a:lnRef>
+          <a:fillRef idx="3">
+            <a:schemeClr val="accent1"/>
+          </a:fillRef>
+          <a:effectRef idx="2">
+            <a:schemeClr val="accent1"/>
+          </a:effectRef>
+          <a:fontRef idx="minor">
+            <a:schemeClr val="lt1"/>
+          </a:fontRef>
+        </p:style>
+        <p:txBody>
+          <a:bodyPr rtlCol="0" anchor="ctr"/>
+          <a:lstStyle/>
+          <a:p>
+            <a:pPr algn="ctr"/>
+          </a:p>
+        </p:txBody>
+      </p:sp>
+      <p:sp>
+        <p:nvSpPr>
+          <p:cNvPr id="6" name="TextBox 5"/>
+          <p:cNvSpPr txBox="1"/>
+          <p:nvPr/>
+        </p:nvSpPr>
+        <p:spPr>
+          <a:xfrm>
+            <a:off x="640080" y="1691640"/>
+            <a:ext cx="7863840" cy="640080"/>
+          </a:xfrm>
+          <a:prstGeom prst="rect">
+            <a:avLst/>
+          </a:prstGeom>
+          <a:noFill/>
+        </p:spPr>
+        <p:txBody>
+          <a:bodyPr wrap="square">
+            <a:spAutoFit/>
+          </a:bodyPr>
+          <a:lstStyle/>
+          <a:p>
+            <a:pPr>
+              <a:defRPr sz="1000" b="1">
                 <a:solidFill>
                   <a:srgbClr val="CC0000"/>
                 </a:solidFill>
               </a:defRPr>
             </a:pPr>
             <a:r>
-              <a:t>Risk Trends</a:t>
-            </a:r>
-          </a:p>
-        </p:txBody>
-      </p:sp>
-      <p:pic>
-        <p:nvPicPr>
-          <p:cNvPr id="3" name="Picture 2" descr="chart_risk_trends.png"/>
-          <p:cNvPicPr>
-            <a:picLocks noChangeAspect="1"/>
-          </p:cNvPicPr>
-          <p:nvPr/>
-        </p:nvPicPr>
-        <p:blipFill>
-          <a:blip r:embed="rId2"/>
-          <a:stretch>
-            <a:fillRect/>
-          </a:stretch>
-        </p:blipFill>
-        <p:spPr>
-          <a:xfrm>
-            <a:off x="457200" y="731520"/>
-            <a:ext cx="8229600" cy="4114800"/>
-          </a:xfrm>
-          <a:prstGeom prst="rect">
-            <a:avLst/>
-          </a:prstGeom>
-        </p:spPr>
-      </p:pic>
-      <p:sp>
-        <p:nvSpPr>
-          <p:cNvPr id="4" name="TextBox 3"/>
-          <p:cNvSpPr txBox="1"/>
+              <a:t>KEY INSIGHT</a:t>
+            </a:r>
+          </a:p>
+          <a:p>
+            <a:pPr>
+              <a:defRPr sz="1800" b="1">
+                <a:solidFill>
+                  <a:srgbClr val="333333"/>
+                </a:solidFill>
+              </a:defRPr>
+            </a:pPr>
+            <a:r>
+              <a:t>Inventory days expanded while turnover slowed</a:t>
+            </a:r>
+          </a:p>
+        </p:txBody>
+      </p:sp>
+      <p:sp>
+        <p:nvSpPr>
+          <p:cNvPr id="7" name="TextBox 6"/>
+          <p:cNvSpPr txBox="1"/>
+          <p:nvPr/>
+        </p:nvSpPr>
+        <p:spPr>
+          <a:xfrm>
+            <a:off x="457200" y="2743200"/>
+            <a:ext cx="8229600" cy="2286000"/>
+          </a:xfrm>
+          <a:prstGeom prst="rect">
+            <a:avLst/>
+          </a:prstGeom>
+          <a:noFill/>
+        </p:spPr>
+        <p:txBody>
+          <a:bodyPr wrap="square">
+            <a:spAutoFit/>
+          </a:bodyPr>
+          <a:lstStyle/>
+          <a:p>
+            <a:pPr>
+              <a:spcAft>
+                <a:spcPts val="800"/>
+              </a:spcAft>
+              <a:defRPr sz="1600" b="1">
+                <a:solidFill>
+                  <a:srgbClr val="333333"/>
+                </a:solidFill>
+              </a:defRPr>
+            </a:pPr>
+            <a:r>
+              <a:t>Evidence:</a:t>
+            </a:r>
+          </a:p>
+          <a:p>
+            <a:pPr>
+              <a:spcAft>
+                <a:spcPts val="400"/>
+              </a:spcAft>
+              <a:defRPr sz="1400">
+                <a:solidFill>
+                  <a:srgbClr val="505050"/>
+                </a:solidFill>
+              </a:defRPr>
+            </a:pPr>
+            <a:r>
+              <a:t>• Days Sales of Inventory increased to 65+ days</a:t>
+            </a:r>
+          </a:p>
+          <a:p>
+            <a:pPr>
+              <a:spcAft>
+                <a:spcPts val="400"/>
+              </a:spcAft>
+              <a:defRPr sz="1400">
+                <a:solidFill>
+                  <a:srgbClr val="505050"/>
+                </a:solidFill>
+              </a:defRPr>
+            </a:pPr>
+            <a:r>
+              <a:t>• Cash conversion cycle extended</a:t>
+            </a:r>
+          </a:p>
+          <a:p>
+            <a:pPr>
+              <a:spcAft>
+                <a:spcPts val="400"/>
+              </a:spcAft>
+              <a:defRPr sz="1400">
+                <a:solidFill>
+                  <a:srgbClr val="505050"/>
+                </a:solidFill>
+              </a:defRPr>
+            </a:pPr>
+            <a:r>
+              <a:t>• Asset turnover showing signs of decline</a:t>
+            </a:r>
+          </a:p>
+        </p:txBody>
+      </p:sp>
+      <p:sp>
+        <p:nvSpPr>
+          <p:cNvPr id="8" name="Rectangle 7"/>
+          <p:cNvSpPr/>
           <p:nvPr/>
         </p:nvSpPr>
         <p:spPr>
           <a:xfrm>
             <a:off x="457200" y="5029200"/>
-            <a:ext cx="8229600" cy="914400"/>
+            <a:ext cx="8229600" cy="1097280"/>
+          </a:xfrm>
+          <a:prstGeom prst="rect">
+            <a:avLst/>
+          </a:prstGeom>
+          <a:solidFill>
+            <a:srgbClr val="F0F8FF"/>
+          </a:solidFill>
+          <a:ln>
+            <a:solidFill>
+              <a:srgbClr val="0066CC"/>
+            </a:solidFill>
+          </a:ln>
+        </p:spPr>
+        <p:style>
+          <a:lnRef idx="1">
+            <a:schemeClr val="accent1"/>
+          </a:lnRef>
+          <a:fillRef idx="3">
+            <a:schemeClr val="accent1"/>
+          </a:fillRef>
+          <a:effectRef idx="2">
+            <a:schemeClr val="accent1"/>
+          </a:effectRef>
+          <a:fontRef idx="minor">
+            <a:schemeClr val="lt1"/>
+          </a:fontRef>
+        </p:style>
+        <p:txBody>
+          <a:bodyPr rtlCol="0" anchor="ctr"/>
+          <a:lstStyle/>
+          <a:p>
+            <a:pPr algn="ctr"/>
+          </a:p>
+        </p:txBody>
+      </p:sp>
+      <p:sp>
+        <p:nvSpPr>
+          <p:cNvPr id="9" name="TextBox 8"/>
+          <p:cNvSpPr txBox="1"/>
+          <p:nvPr/>
+        </p:nvSpPr>
+        <p:spPr>
+          <a:xfrm>
+            <a:off x="640080" y="5166360"/>
+            <a:ext cx="7863840" cy="822960"/>
           </a:xfrm>
           <a:prstGeom prst="rect">
             <a:avLst/>
@@ -6956,48 +8485,26 @@
           <a:lstStyle/>
           <a:p>
             <a:pPr>
-              <a:defRPr sz="1200">
-                <a:solidFill>
-                  <a:srgbClr val="646464"/>
-                </a:solidFill>
-              </a:defRPr>
-            </a:pPr>
-            <a:r>
-              <a:t>Stacked area of risk mentions (shrink, theft, markdown) over time. Rising trends signal increasing concerns.</a:t>
-            </a:r>
-          </a:p>
-        </p:txBody>
-      </p:sp>
-      <p:sp>
-        <p:nvSpPr>
-          <p:cNvPr id="5" name="TextBox 4"/>
-          <p:cNvSpPr txBox="1"/>
-          <p:nvPr/>
-        </p:nvSpPr>
-        <p:spPr>
-          <a:xfrm>
-            <a:off x="457200" y="6035040"/>
-            <a:ext cx="8229600" cy="365760"/>
-          </a:xfrm>
-          <a:prstGeom prst="rect">
-            <a:avLst/>
-          </a:prstGeom>
-          <a:noFill/>
-        </p:spPr>
-        <p:txBody>
-          <a:bodyPr wrap="none">
-            <a:spAutoFit/>
-          </a:bodyPr>
-          <a:lstStyle/>
-          <a:p>
-            <a:r>
-              <a:rPr sz="1100" u="sng">
+              <a:defRPr sz="1000" b="1">
                 <a:solidFill>
                   <a:srgbClr val="0066CC"/>
                 </a:solidFill>
-                <a:hlinkClick r:id="rId3"/>
-              </a:rPr>
-              <a:t>📊 Click for interactive version</a:t>
+              </a:defRPr>
+            </a:pPr>
+            <a:r>
+              <a:t>IMPLICATION</a:t>
+            </a:r>
+          </a:p>
+          <a:p>
+            <a:pPr>
+              <a:defRPr sz="1400">
+                <a:solidFill>
+                  <a:srgbClr val="333333"/>
+                </a:solidFill>
+              </a:defRPr>
+            </a:pPr>
+            <a:r>
+              <a:t>Working capital tied up in inventory; impacts free cash flow</a:t>
             </a:r>
           </a:p>
         </p:txBody>
@@ -7022,6 +8529,174 @@
       <p:grpSpPr/>
       <p:sp>
         <p:nvSpPr>
+          <p:cNvPr id="2" name="Rectangle 1"/>
+          <p:cNvSpPr/>
+          <p:nvPr/>
+        </p:nvSpPr>
+        <p:spPr>
+          <a:xfrm>
+            <a:off x="0" y="2286000"/>
+            <a:ext cx="9144000" cy="1828800"/>
+          </a:xfrm>
+          <a:prstGeom prst="rect">
+            <a:avLst/>
+          </a:prstGeom>
+          <a:solidFill>
+            <a:srgbClr val="CC0000"/>
+          </a:solidFill>
+          <a:ln>
+            <a:solidFill>
+              <a:srgbClr val="CC0000"/>
+            </a:solidFill>
+          </a:ln>
+        </p:spPr>
+        <p:style>
+          <a:lnRef idx="1">
+            <a:schemeClr val="accent1"/>
+          </a:lnRef>
+          <a:fillRef idx="3">
+            <a:schemeClr val="accent1"/>
+          </a:fillRef>
+          <a:effectRef idx="2">
+            <a:schemeClr val="accent1"/>
+          </a:effectRef>
+          <a:fontRef idx="minor">
+            <a:schemeClr val="lt1"/>
+          </a:fontRef>
+        </p:style>
+        <p:txBody>
+          <a:bodyPr rtlCol="0" anchor="ctr"/>
+          <a:lstStyle/>
+          <a:p>
+            <a:pPr algn="ctr"/>
+          </a:p>
+        </p:txBody>
+      </p:sp>
+      <p:sp>
+        <p:nvSpPr>
+          <p:cNvPr id="3" name="TextBox 2"/>
+          <p:cNvSpPr txBox="1"/>
+          <p:nvPr/>
+        </p:nvSpPr>
+        <p:spPr>
+          <a:xfrm>
+            <a:off x="457200" y="2468880"/>
+            <a:ext cx="8229600" cy="548640"/>
+          </a:xfrm>
+          <a:prstGeom prst="rect">
+            <a:avLst/>
+          </a:prstGeom>
+          <a:noFill/>
+        </p:spPr>
+        <p:txBody>
+          <a:bodyPr wrap="none">
+            <a:spAutoFit/>
+          </a:bodyPr>
+          <a:lstStyle/>
+          <a:p>
+            <a:pPr algn="ctr">
+              <a:defRPr sz="2400" b="1">
+                <a:solidFill>
+                  <a:srgbClr val="FFFFFF"/>
+                </a:solidFill>
+              </a:defRPr>
+            </a:pPr>
+            <a:r>
+              <a:t>PILLAR 5</a:t>
+            </a:r>
+          </a:p>
+        </p:txBody>
+      </p:sp>
+      <p:sp>
+        <p:nvSpPr>
+          <p:cNvPr id="4" name="TextBox 3"/>
+          <p:cNvSpPr txBox="1"/>
+          <p:nvPr/>
+        </p:nvSpPr>
+        <p:spPr>
+          <a:xfrm>
+            <a:off x="457200" y="3017520"/>
+            <a:ext cx="8229600" cy="731520"/>
+          </a:xfrm>
+          <a:prstGeom prst="rect">
+            <a:avLst/>
+          </a:prstGeom>
+          <a:noFill/>
+        </p:spPr>
+        <p:txBody>
+          <a:bodyPr wrap="none">
+            <a:spAutoFit/>
+          </a:bodyPr>
+          <a:lstStyle/>
+          <a:p>
+            <a:pPr algn="ctr">
+              <a:defRPr sz="4400" b="1">
+                <a:solidFill>
+                  <a:srgbClr val="FFFFFF"/>
+                </a:solidFill>
+              </a:defRPr>
+            </a:pPr>
+            <a:r>
+              <a:t>Valuation &amp; Risk</a:t>
+            </a:r>
+          </a:p>
+        </p:txBody>
+      </p:sp>
+      <p:sp>
+        <p:nvSpPr>
+          <p:cNvPr id="5" name="TextBox 4"/>
+          <p:cNvSpPr txBox="1"/>
+          <p:nvPr/>
+        </p:nvSpPr>
+        <p:spPr>
+          <a:xfrm>
+            <a:off x="457200" y="4572000"/>
+            <a:ext cx="8229600" cy="457200"/>
+          </a:xfrm>
+          <a:prstGeom prst="rect">
+            <a:avLst/>
+          </a:prstGeom>
+          <a:noFill/>
+        </p:spPr>
+        <p:txBody>
+          <a:bodyPr wrap="none">
+            <a:spAutoFit/>
+          </a:bodyPr>
+          <a:lstStyle/>
+          <a:p>
+            <a:pPr algn="ctr">
+              <a:defRPr sz="2400" i="1">
+                <a:solidFill>
+                  <a:srgbClr val="646464"/>
+                </a:solidFill>
+              </a:defRPr>
+            </a:pPr>
+            <a:r>
+              <a:t>"Is the stock fairly priced, and what are the risks?"</a:t>
+            </a:r>
+          </a:p>
+        </p:txBody>
+      </p:sp>
+    </p:spTree>
+  </p:cSld>
+  <p:clrMapOvr>
+    <a:masterClrMapping/>
+  </p:clrMapOvr>
+</p:sld>
+</file>
+
+<file path=ppt/slides/slide33.xml><?xml version="1.0" encoding="utf-8"?>
+<p:sld xmlns:a="http://schemas.openxmlformats.org/drawingml/2006/main" xmlns:p="http://schemas.openxmlformats.org/presentationml/2006/main" xmlns:r="http://schemas.openxmlformats.org/officeDocument/2006/relationships">
+  <p:cSld>
+    <p:spTree>
+      <p:nvGrpSpPr>
+        <p:cNvPr id="1" name=""/>
+        <p:cNvGrpSpPr/>
+        <p:nvPr/>
+      </p:nvGrpSpPr>
+      <p:grpSpPr/>
+      <p:sp>
+        <p:nvSpPr>
           <p:cNvPr id="2" name="TextBox 1"/>
           <p:cNvSpPr txBox="1"/>
           <p:nvPr/>
@@ -7050,21 +8725,55 @@
               </a:defRPr>
             </a:pPr>
             <a:r>
-              <a:t>Risk Heatmap</a:t>
+              <a:t>Valuation vs Growth</a:t>
+            </a:r>
+          </a:p>
+        </p:txBody>
+      </p:sp>
+      <p:sp>
+        <p:nvSpPr>
+          <p:cNvPr id="3" name="TextBox 2"/>
+          <p:cNvSpPr txBox="1"/>
+          <p:nvPr/>
+        </p:nvSpPr>
+        <p:spPr>
+          <a:xfrm>
+            <a:off x="8229600" y="228600"/>
+            <a:ext cx="365760" cy="365760"/>
+          </a:xfrm>
+          <a:prstGeom prst="rect">
+            <a:avLst/>
+          </a:prstGeom>
+          <a:noFill/>
+        </p:spPr>
+        <p:txBody>
+          <a:bodyPr wrap="none">
+            <a:spAutoFit/>
+          </a:bodyPr>
+          <a:lstStyle/>
+          <a:p>
+            <a:r>
+              <a:rPr sz="1800">
+                <a:solidFill>
+                  <a:srgbClr val="646464"/>
+                </a:solidFill>
+                <a:hlinkClick r:id="rId2"/>
+              </a:rPr>
+              <a:t>ⓘ</a:t>
             </a:r>
           </a:p>
         </p:txBody>
       </p:sp>
       <p:pic>
         <p:nvPicPr>
-          <p:cNvPr id="3" name="Picture 2" descr="chart_risk_heatmap_grid.png"/>
+          <p:cNvPr id="4" name="Picture 3" descr="chart_valuation_scatter.png"/>
           <p:cNvPicPr>
             <a:picLocks noChangeAspect="1"/>
           </p:cNvPicPr>
           <p:nvPr/>
         </p:nvPicPr>
         <p:blipFill>
-          <a:blip r:embed="rId2"/>
+          <a:blip r:embed="rId3"/>
           <a:stretch>
             <a:fillRect/>
           </a:stretch>
@@ -7081,7 +8790,7 @@
       </p:pic>
       <p:sp>
         <p:nvSpPr>
-          <p:cNvPr id="4" name="TextBox 3"/>
+          <p:cNvPr id="5" name="TextBox 4"/>
           <p:cNvSpPr txBox="1"/>
           <p:nvPr/>
         </p:nvSpPr>
@@ -7102,21 +8811,21 @@
           <a:lstStyle/>
           <a:p>
             <a:pPr>
-              <a:defRPr sz="1200">
-                <a:solidFill>
-                  <a:srgbClr val="646464"/>
-                </a:solidFill>
-              </a:defRPr>
-            </a:pPr>
-            <a:r>
-              <a:t>Intensity grid showing risk types by period. Dark cells = high concern in that area.</a:t>
-            </a:r>
-          </a:p>
-        </p:txBody>
-      </p:sp>
-      <p:sp>
-        <p:nvSpPr>
-          <p:cNvPr id="5" name="TextBox 4"/>
+              <a:defRPr sz="1200" b="1">
+                <a:solidFill>
+                  <a:srgbClr val="323232"/>
+                </a:solidFill>
+              </a:defRPr>
+            </a:pPr>
+            <a:r>
+              <a:t>Target trades at 14x P/E with 1.6% revenue growth—below peers like Walmart (23x, 5% growth) and Costco (45x, 8% growth).</a:t>
+            </a:r>
+          </a:p>
+        </p:txBody>
+      </p:sp>
+      <p:sp>
+        <p:nvSpPr>
+          <p:cNvPr id="6" name="TextBox 5"/>
           <p:cNvSpPr txBox="1"/>
           <p:nvPr/>
         </p:nvSpPr>
@@ -7141,9 +8850,1058 @@
                 <a:solidFill>
                   <a:srgbClr val="0066CC"/>
                 </a:solidFill>
-                <a:hlinkClick r:id="rId3"/>
+                <a:hlinkClick r:id="rId2"/>
               </a:rPr>
               <a:t>📊 Click for interactive version</a:t>
+            </a:r>
+          </a:p>
+        </p:txBody>
+      </p:sp>
+    </p:spTree>
+  </p:cSld>
+  <p:clrMapOvr>
+    <a:masterClrMapping/>
+  </p:clrMapOvr>
+</p:sld>
+</file>
+
+<file path=ppt/slides/slide34.xml><?xml version="1.0" encoding="utf-8"?>
+<p:sld xmlns:a="http://schemas.openxmlformats.org/drawingml/2006/main" xmlns:p="http://schemas.openxmlformats.org/presentationml/2006/main" xmlns:r="http://schemas.openxmlformats.org/officeDocument/2006/relationships">
+  <p:cSld>
+    <p:spTree>
+      <p:nvGrpSpPr>
+        <p:cNvPr id="1" name=""/>
+        <p:cNvGrpSpPr/>
+        <p:nvPr/>
+      </p:nvGrpSpPr>
+      <p:grpSpPr/>
+      <p:sp>
+        <p:nvSpPr>
+          <p:cNvPr id="2" name="TextBox 1"/>
+          <p:cNvSpPr txBox="1"/>
+          <p:nvPr/>
+        </p:nvSpPr>
+        <p:spPr>
+          <a:xfrm>
+            <a:off x="457200" y="182880"/>
+            <a:ext cx="8229600" cy="457200"/>
+          </a:xfrm>
+          <a:prstGeom prst="rect">
+            <a:avLst/>
+          </a:prstGeom>
+          <a:noFill/>
+        </p:spPr>
+        <p:txBody>
+          <a:bodyPr wrap="none">
+            <a:spAutoFit/>
+          </a:bodyPr>
+          <a:lstStyle/>
+          <a:p>
+            <a:pPr>
+              <a:defRPr sz="2400" b="1">
+                <a:solidFill>
+                  <a:srgbClr val="CC0000"/>
+                </a:solidFill>
+              </a:defRPr>
+            </a:pPr>
+            <a:r>
+              <a:t>Historical P/E Band</a:t>
+            </a:r>
+          </a:p>
+        </p:txBody>
+      </p:sp>
+      <p:sp>
+        <p:nvSpPr>
+          <p:cNvPr id="3" name="TextBox 2"/>
+          <p:cNvSpPr txBox="1"/>
+          <p:nvPr/>
+        </p:nvSpPr>
+        <p:spPr>
+          <a:xfrm>
+            <a:off x="8229600" y="228600"/>
+            <a:ext cx="365760" cy="365760"/>
+          </a:xfrm>
+          <a:prstGeom prst="rect">
+            <a:avLst/>
+          </a:prstGeom>
+          <a:noFill/>
+        </p:spPr>
+        <p:txBody>
+          <a:bodyPr wrap="none">
+            <a:spAutoFit/>
+          </a:bodyPr>
+          <a:lstStyle/>
+          <a:p>
+            <a:r>
+              <a:rPr sz="1800">
+                <a:solidFill>
+                  <a:srgbClr val="646464"/>
+                </a:solidFill>
+                <a:hlinkClick r:id="rId2"/>
+              </a:rPr>
+              <a:t>ⓘ</a:t>
+            </a:r>
+          </a:p>
+        </p:txBody>
+      </p:sp>
+      <p:pic>
+        <p:nvPicPr>
+          <p:cNvPr id="4" name="Picture 3" descr="chart_pe_band.png"/>
+          <p:cNvPicPr>
+            <a:picLocks noChangeAspect="1"/>
+          </p:cNvPicPr>
+          <p:nvPr/>
+        </p:nvPicPr>
+        <p:blipFill>
+          <a:blip r:embed="rId3"/>
+          <a:stretch>
+            <a:fillRect/>
+          </a:stretch>
+        </p:blipFill>
+        <p:spPr>
+          <a:xfrm>
+            <a:off x="457200" y="731520"/>
+            <a:ext cx="8229600" cy="4114800"/>
+          </a:xfrm>
+          <a:prstGeom prst="rect">
+            <a:avLst/>
+          </a:prstGeom>
+        </p:spPr>
+      </p:pic>
+      <p:sp>
+        <p:nvSpPr>
+          <p:cNvPr id="5" name="TextBox 4"/>
+          <p:cNvSpPr txBox="1"/>
+          <p:nvPr/>
+        </p:nvSpPr>
+        <p:spPr>
+          <a:xfrm>
+            <a:off x="457200" y="5029200"/>
+            <a:ext cx="8229600" cy="914400"/>
+          </a:xfrm>
+          <a:prstGeom prst="rect">
+            <a:avLst/>
+          </a:prstGeom>
+          <a:noFill/>
+        </p:spPr>
+        <p:txBody>
+          <a:bodyPr wrap="square">
+            <a:spAutoFit/>
+          </a:bodyPr>
+          <a:lstStyle/>
+          <a:p>
+            <a:pPr>
+              <a:defRPr sz="1200" b="1">
+                <a:solidFill>
+                  <a:srgbClr val="323232"/>
+                </a:solidFill>
+              </a:defRPr>
+            </a:pPr>
+            <a:r>
+              <a:t>Current P/E of 14x is below the 5-year average of 18x—historically undervalued, but margin concerns may justify discount.</a:t>
+            </a:r>
+          </a:p>
+        </p:txBody>
+      </p:sp>
+      <p:sp>
+        <p:nvSpPr>
+          <p:cNvPr id="6" name="TextBox 5"/>
+          <p:cNvSpPr txBox="1"/>
+          <p:nvPr/>
+        </p:nvSpPr>
+        <p:spPr>
+          <a:xfrm>
+            <a:off x="457200" y="6035040"/>
+            <a:ext cx="8229600" cy="365760"/>
+          </a:xfrm>
+          <a:prstGeom prst="rect">
+            <a:avLst/>
+          </a:prstGeom>
+          <a:noFill/>
+        </p:spPr>
+        <p:txBody>
+          <a:bodyPr wrap="none">
+            <a:spAutoFit/>
+          </a:bodyPr>
+          <a:lstStyle/>
+          <a:p>
+            <a:r>
+              <a:rPr sz="1100" u="sng">
+                <a:solidFill>
+                  <a:srgbClr val="0066CC"/>
+                </a:solidFill>
+                <a:hlinkClick r:id="rId2"/>
+              </a:rPr>
+              <a:t>📊 Click for interactive version</a:t>
+            </a:r>
+          </a:p>
+        </p:txBody>
+      </p:sp>
+    </p:spTree>
+  </p:cSld>
+  <p:clrMapOvr>
+    <a:masterClrMapping/>
+  </p:clrMapOvr>
+</p:sld>
+</file>
+
+<file path=ppt/slides/slide35.xml><?xml version="1.0" encoding="utf-8"?>
+<p:sld xmlns:a="http://schemas.openxmlformats.org/drawingml/2006/main" xmlns:p="http://schemas.openxmlformats.org/presentationml/2006/main" xmlns:r="http://schemas.openxmlformats.org/officeDocument/2006/relationships">
+  <p:cSld>
+    <p:spTree>
+      <p:nvGrpSpPr>
+        <p:cNvPr id="1" name=""/>
+        <p:cNvGrpSpPr/>
+        <p:nvPr/>
+      </p:nvGrpSpPr>
+      <p:grpSpPr/>
+      <p:sp>
+        <p:nvSpPr>
+          <p:cNvPr id="2" name="TextBox 1"/>
+          <p:cNvSpPr txBox="1"/>
+          <p:nvPr/>
+        </p:nvSpPr>
+        <p:spPr>
+          <a:xfrm>
+            <a:off x="457200" y="182880"/>
+            <a:ext cx="8229600" cy="457200"/>
+          </a:xfrm>
+          <a:prstGeom prst="rect">
+            <a:avLst/>
+          </a:prstGeom>
+          <a:noFill/>
+        </p:spPr>
+        <p:txBody>
+          <a:bodyPr wrap="none">
+            <a:spAutoFit/>
+          </a:bodyPr>
+          <a:lstStyle/>
+          <a:p>
+            <a:pPr>
+              <a:defRPr sz="2400" b="1">
+                <a:solidFill>
+                  <a:srgbClr val="CC0000"/>
+                </a:solidFill>
+              </a:defRPr>
+            </a:pPr>
+            <a:r>
+              <a:t>Cash Flow Sankey</a:t>
+            </a:r>
+          </a:p>
+        </p:txBody>
+      </p:sp>
+      <p:sp>
+        <p:nvSpPr>
+          <p:cNvPr id="3" name="TextBox 2"/>
+          <p:cNvSpPr txBox="1"/>
+          <p:nvPr/>
+        </p:nvSpPr>
+        <p:spPr>
+          <a:xfrm>
+            <a:off x="8229600" y="228600"/>
+            <a:ext cx="365760" cy="365760"/>
+          </a:xfrm>
+          <a:prstGeom prst="rect">
+            <a:avLst/>
+          </a:prstGeom>
+          <a:noFill/>
+        </p:spPr>
+        <p:txBody>
+          <a:bodyPr wrap="none">
+            <a:spAutoFit/>
+          </a:bodyPr>
+          <a:lstStyle/>
+          <a:p>
+            <a:r>
+              <a:rPr sz="1800">
+                <a:solidFill>
+                  <a:srgbClr val="646464"/>
+                </a:solidFill>
+                <a:hlinkClick r:id="rId2"/>
+              </a:rPr>
+              <a:t>ⓘ</a:t>
+            </a:r>
+          </a:p>
+        </p:txBody>
+      </p:sp>
+      <p:pic>
+        <p:nvPicPr>
+          <p:cNvPr id="4" name="Picture 3" descr="chart_cash_flow_sankey.png"/>
+          <p:cNvPicPr>
+            <a:picLocks noChangeAspect="1"/>
+          </p:cNvPicPr>
+          <p:nvPr/>
+        </p:nvPicPr>
+        <p:blipFill>
+          <a:blip r:embed="rId3"/>
+          <a:stretch>
+            <a:fillRect/>
+          </a:stretch>
+        </p:blipFill>
+        <p:spPr>
+          <a:xfrm>
+            <a:off x="457200" y="731520"/>
+            <a:ext cx="8229600" cy="4114800"/>
+          </a:xfrm>
+          <a:prstGeom prst="rect">
+            <a:avLst/>
+          </a:prstGeom>
+        </p:spPr>
+      </p:pic>
+      <p:sp>
+        <p:nvSpPr>
+          <p:cNvPr id="5" name="TextBox 4"/>
+          <p:cNvSpPr txBox="1"/>
+          <p:nvPr/>
+        </p:nvSpPr>
+        <p:spPr>
+          <a:xfrm>
+            <a:off x="457200" y="5029200"/>
+            <a:ext cx="8229600" cy="914400"/>
+          </a:xfrm>
+          <a:prstGeom prst="rect">
+            <a:avLst/>
+          </a:prstGeom>
+          <a:noFill/>
+        </p:spPr>
+        <p:txBody>
+          <a:bodyPr wrap="square">
+            <a:spAutoFit/>
+          </a:bodyPr>
+          <a:lstStyle/>
+          <a:p>
+            <a:pPr>
+              <a:defRPr sz="1200" b="1">
+                <a:solidFill>
+                  <a:srgbClr val="323232"/>
+                </a:solidFill>
+              </a:defRPr>
+            </a:pPr>
+            <a:r>
+              <a:t>~40% of operating CF goes to CapEx, 25% to dividends, 20% to buybacks. Balanced capital allocation despite margin pressure.</a:t>
+            </a:r>
+          </a:p>
+        </p:txBody>
+      </p:sp>
+      <p:sp>
+        <p:nvSpPr>
+          <p:cNvPr id="6" name="TextBox 5"/>
+          <p:cNvSpPr txBox="1"/>
+          <p:nvPr/>
+        </p:nvSpPr>
+        <p:spPr>
+          <a:xfrm>
+            <a:off x="457200" y="6035040"/>
+            <a:ext cx="8229600" cy="365760"/>
+          </a:xfrm>
+          <a:prstGeom prst="rect">
+            <a:avLst/>
+          </a:prstGeom>
+          <a:noFill/>
+        </p:spPr>
+        <p:txBody>
+          <a:bodyPr wrap="none">
+            <a:spAutoFit/>
+          </a:bodyPr>
+          <a:lstStyle/>
+          <a:p>
+            <a:r>
+              <a:rPr sz="1100" u="sng">
+                <a:solidFill>
+                  <a:srgbClr val="0066CC"/>
+                </a:solidFill>
+                <a:hlinkClick r:id="rId2"/>
+              </a:rPr>
+              <a:t>📊 Click for interactive version</a:t>
+            </a:r>
+          </a:p>
+        </p:txBody>
+      </p:sp>
+    </p:spTree>
+  </p:cSld>
+  <p:clrMapOvr>
+    <a:masterClrMapping/>
+  </p:clrMapOvr>
+</p:sld>
+</file>
+
+<file path=ppt/slides/slide36.xml><?xml version="1.0" encoding="utf-8"?>
+<p:sld xmlns:a="http://schemas.openxmlformats.org/drawingml/2006/main" xmlns:p="http://schemas.openxmlformats.org/presentationml/2006/main" xmlns:r="http://schemas.openxmlformats.org/officeDocument/2006/relationships">
+  <p:cSld>
+    <p:spTree>
+      <p:nvGrpSpPr>
+        <p:cNvPr id="1" name=""/>
+        <p:cNvGrpSpPr/>
+        <p:nvPr/>
+      </p:nvGrpSpPr>
+      <p:grpSpPr/>
+      <p:sp>
+        <p:nvSpPr>
+          <p:cNvPr id="2" name="TextBox 1"/>
+          <p:cNvSpPr txBox="1"/>
+          <p:nvPr/>
+        </p:nvSpPr>
+        <p:spPr>
+          <a:xfrm>
+            <a:off x="457200" y="182880"/>
+            <a:ext cx="8229600" cy="457200"/>
+          </a:xfrm>
+          <a:prstGeom prst="rect">
+            <a:avLst/>
+          </a:prstGeom>
+          <a:noFill/>
+        </p:spPr>
+        <p:txBody>
+          <a:bodyPr wrap="none">
+            <a:spAutoFit/>
+          </a:bodyPr>
+          <a:lstStyle/>
+          <a:p>
+            <a:pPr>
+              <a:defRPr sz="2400" b="1">
+                <a:solidFill>
+                  <a:srgbClr val="CC0000"/>
+                </a:solidFill>
+              </a:defRPr>
+            </a:pPr>
+            <a:r>
+              <a:t>Risk Trends</a:t>
+            </a:r>
+          </a:p>
+        </p:txBody>
+      </p:sp>
+      <p:sp>
+        <p:nvSpPr>
+          <p:cNvPr id="3" name="TextBox 2"/>
+          <p:cNvSpPr txBox="1"/>
+          <p:nvPr/>
+        </p:nvSpPr>
+        <p:spPr>
+          <a:xfrm>
+            <a:off x="8229600" y="228600"/>
+            <a:ext cx="365760" cy="365760"/>
+          </a:xfrm>
+          <a:prstGeom prst="rect">
+            <a:avLst/>
+          </a:prstGeom>
+          <a:noFill/>
+        </p:spPr>
+        <p:txBody>
+          <a:bodyPr wrap="none">
+            <a:spAutoFit/>
+          </a:bodyPr>
+          <a:lstStyle/>
+          <a:p>
+            <a:r>
+              <a:rPr sz="1800">
+                <a:solidFill>
+                  <a:srgbClr val="646464"/>
+                </a:solidFill>
+                <a:hlinkClick r:id="rId2"/>
+              </a:rPr>
+              <a:t>ⓘ</a:t>
+            </a:r>
+          </a:p>
+        </p:txBody>
+      </p:sp>
+      <p:pic>
+        <p:nvPicPr>
+          <p:cNvPr id="4" name="Picture 3" descr="chart_risk_trends.png"/>
+          <p:cNvPicPr>
+            <a:picLocks noChangeAspect="1"/>
+          </p:cNvPicPr>
+          <p:nvPr/>
+        </p:nvPicPr>
+        <p:blipFill>
+          <a:blip r:embed="rId3"/>
+          <a:stretch>
+            <a:fillRect/>
+          </a:stretch>
+        </p:blipFill>
+        <p:spPr>
+          <a:xfrm>
+            <a:off x="457200" y="731520"/>
+            <a:ext cx="8229600" cy="4114800"/>
+          </a:xfrm>
+          <a:prstGeom prst="rect">
+            <a:avLst/>
+          </a:prstGeom>
+        </p:spPr>
+      </p:pic>
+      <p:sp>
+        <p:nvSpPr>
+          <p:cNvPr id="5" name="TextBox 4"/>
+          <p:cNvSpPr txBox="1"/>
+          <p:nvPr/>
+        </p:nvSpPr>
+        <p:spPr>
+          <a:xfrm>
+            <a:off x="457200" y="5029200"/>
+            <a:ext cx="8229600" cy="914400"/>
+          </a:xfrm>
+          <a:prstGeom prst="rect">
+            <a:avLst/>
+          </a:prstGeom>
+          <a:noFill/>
+        </p:spPr>
+        <p:txBody>
+          <a:bodyPr wrap="square">
+            <a:spAutoFit/>
+          </a:bodyPr>
+          <a:lstStyle/>
+          <a:p>
+            <a:pPr>
+              <a:defRPr sz="1200" b="1">
+                <a:solidFill>
+                  <a:srgbClr val="323232"/>
+                </a:solidFill>
+              </a:defRPr>
+            </a:pPr>
+            <a:r>
+              <a:t>Shrink/theft mentions increased from 1/period (2020) to 3-4/period (2024-25). Management repeatedly flags this as a margin headwind.</a:t>
+            </a:r>
+          </a:p>
+        </p:txBody>
+      </p:sp>
+      <p:sp>
+        <p:nvSpPr>
+          <p:cNvPr id="6" name="TextBox 5"/>
+          <p:cNvSpPr txBox="1"/>
+          <p:nvPr/>
+        </p:nvSpPr>
+        <p:spPr>
+          <a:xfrm>
+            <a:off x="457200" y="6035040"/>
+            <a:ext cx="8229600" cy="365760"/>
+          </a:xfrm>
+          <a:prstGeom prst="rect">
+            <a:avLst/>
+          </a:prstGeom>
+          <a:noFill/>
+        </p:spPr>
+        <p:txBody>
+          <a:bodyPr wrap="none">
+            <a:spAutoFit/>
+          </a:bodyPr>
+          <a:lstStyle/>
+          <a:p>
+            <a:r>
+              <a:rPr sz="1100" u="sng">
+                <a:solidFill>
+                  <a:srgbClr val="0066CC"/>
+                </a:solidFill>
+                <a:hlinkClick r:id="rId2"/>
+              </a:rPr>
+              <a:t>📊 Click for interactive version</a:t>
+            </a:r>
+          </a:p>
+        </p:txBody>
+      </p:sp>
+    </p:spTree>
+  </p:cSld>
+  <p:clrMapOvr>
+    <a:masterClrMapping/>
+  </p:clrMapOvr>
+</p:sld>
+</file>
+
+<file path=ppt/slides/slide37.xml><?xml version="1.0" encoding="utf-8"?>
+<p:sld xmlns:a="http://schemas.openxmlformats.org/drawingml/2006/main" xmlns:p="http://schemas.openxmlformats.org/presentationml/2006/main" xmlns:r="http://schemas.openxmlformats.org/officeDocument/2006/relationships">
+  <p:cSld>
+    <p:spTree>
+      <p:nvGrpSpPr>
+        <p:cNvPr id="1" name=""/>
+        <p:cNvGrpSpPr/>
+        <p:nvPr/>
+      </p:nvGrpSpPr>
+      <p:grpSpPr/>
+      <p:sp>
+        <p:nvSpPr>
+          <p:cNvPr id="2" name="TextBox 1"/>
+          <p:cNvSpPr txBox="1"/>
+          <p:nvPr/>
+        </p:nvSpPr>
+        <p:spPr>
+          <a:xfrm>
+            <a:off x="457200" y="182880"/>
+            <a:ext cx="8229600" cy="457200"/>
+          </a:xfrm>
+          <a:prstGeom prst="rect">
+            <a:avLst/>
+          </a:prstGeom>
+          <a:noFill/>
+        </p:spPr>
+        <p:txBody>
+          <a:bodyPr wrap="none">
+            <a:spAutoFit/>
+          </a:bodyPr>
+          <a:lstStyle/>
+          <a:p>
+            <a:pPr>
+              <a:defRPr sz="2400" b="1">
+                <a:solidFill>
+                  <a:srgbClr val="CC0000"/>
+                </a:solidFill>
+              </a:defRPr>
+            </a:pPr>
+            <a:r>
+              <a:t>Risk Heatmap</a:t>
+            </a:r>
+          </a:p>
+        </p:txBody>
+      </p:sp>
+      <p:sp>
+        <p:nvSpPr>
+          <p:cNvPr id="3" name="TextBox 2"/>
+          <p:cNvSpPr txBox="1"/>
+          <p:nvPr/>
+        </p:nvSpPr>
+        <p:spPr>
+          <a:xfrm>
+            <a:off x="8229600" y="228600"/>
+            <a:ext cx="365760" cy="365760"/>
+          </a:xfrm>
+          <a:prstGeom prst="rect">
+            <a:avLst/>
+          </a:prstGeom>
+          <a:noFill/>
+        </p:spPr>
+        <p:txBody>
+          <a:bodyPr wrap="none">
+            <a:spAutoFit/>
+          </a:bodyPr>
+          <a:lstStyle/>
+          <a:p>
+            <a:r>
+              <a:rPr sz="1800">
+                <a:solidFill>
+                  <a:srgbClr val="646464"/>
+                </a:solidFill>
+                <a:hlinkClick r:id="rId2"/>
+              </a:rPr>
+              <a:t>ⓘ</a:t>
+            </a:r>
+          </a:p>
+        </p:txBody>
+      </p:sp>
+      <p:pic>
+        <p:nvPicPr>
+          <p:cNvPr id="4" name="Picture 3" descr="chart_risk_heatmap_grid.png"/>
+          <p:cNvPicPr>
+            <a:picLocks noChangeAspect="1"/>
+          </p:cNvPicPr>
+          <p:nvPr/>
+        </p:nvPicPr>
+        <p:blipFill>
+          <a:blip r:embed="rId3"/>
+          <a:stretch>
+            <a:fillRect/>
+          </a:stretch>
+        </p:blipFill>
+        <p:spPr>
+          <a:xfrm>
+            <a:off x="457200" y="731520"/>
+            <a:ext cx="8229600" cy="4114800"/>
+          </a:xfrm>
+          <a:prstGeom prst="rect">
+            <a:avLst/>
+          </a:prstGeom>
+        </p:spPr>
+      </p:pic>
+      <p:sp>
+        <p:nvSpPr>
+          <p:cNvPr id="5" name="TextBox 4"/>
+          <p:cNvSpPr txBox="1"/>
+          <p:nvPr/>
+        </p:nvSpPr>
+        <p:spPr>
+          <a:xfrm>
+            <a:off x="457200" y="5029200"/>
+            <a:ext cx="8229600" cy="914400"/>
+          </a:xfrm>
+          <a:prstGeom prst="rect">
+            <a:avLst/>
+          </a:prstGeom>
+          <a:noFill/>
+        </p:spPr>
+        <p:txBody>
+          <a:bodyPr wrap="square">
+            <a:spAutoFit/>
+          </a:bodyPr>
+          <a:lstStyle/>
+          <a:p>
+            <a:pPr>
+              <a:defRPr sz="1200" b="1">
+                <a:solidFill>
+                  <a:srgbClr val="323232"/>
+                </a:solidFill>
+              </a:defRPr>
+            </a:pPr>
+            <a:r>
+              <a:t>FY2023-Q3 2025 shows elevated risk across all categories. Shrink, markdown, and margin pressure are concurrent concerns.</a:t>
+            </a:r>
+          </a:p>
+        </p:txBody>
+      </p:sp>
+      <p:sp>
+        <p:nvSpPr>
+          <p:cNvPr id="6" name="TextBox 5"/>
+          <p:cNvSpPr txBox="1"/>
+          <p:nvPr/>
+        </p:nvSpPr>
+        <p:spPr>
+          <a:xfrm>
+            <a:off x="457200" y="6035040"/>
+            <a:ext cx="8229600" cy="365760"/>
+          </a:xfrm>
+          <a:prstGeom prst="rect">
+            <a:avLst/>
+          </a:prstGeom>
+          <a:noFill/>
+        </p:spPr>
+        <p:txBody>
+          <a:bodyPr wrap="none">
+            <a:spAutoFit/>
+          </a:bodyPr>
+          <a:lstStyle/>
+          <a:p>
+            <a:r>
+              <a:rPr sz="1100" u="sng">
+                <a:solidFill>
+                  <a:srgbClr val="0066CC"/>
+                </a:solidFill>
+                <a:hlinkClick r:id="rId2"/>
+              </a:rPr>
+              <a:t>📊 Click for interactive version</a:t>
+            </a:r>
+          </a:p>
+        </p:txBody>
+      </p:sp>
+    </p:spTree>
+  </p:cSld>
+  <p:clrMapOvr>
+    <a:masterClrMapping/>
+  </p:clrMapOvr>
+</p:sld>
+</file>
+
+<file path=ppt/slides/slide38.xml><?xml version="1.0" encoding="utf-8"?>
+<p:sld xmlns:a="http://schemas.openxmlformats.org/drawingml/2006/main" xmlns:p="http://schemas.openxmlformats.org/presentationml/2006/main" xmlns:r="http://schemas.openxmlformats.org/officeDocument/2006/relationships">
+  <p:cSld>
+    <p:spTree>
+      <p:nvGrpSpPr>
+        <p:cNvPr id="1" name=""/>
+        <p:cNvGrpSpPr/>
+        <p:nvPr/>
+      </p:nvGrpSpPr>
+      <p:grpSpPr/>
+      <p:sp>
+        <p:nvSpPr>
+          <p:cNvPr id="2" name="TextBox 1"/>
+          <p:cNvSpPr txBox="1"/>
+          <p:nvPr/>
+        </p:nvSpPr>
+        <p:spPr>
+          <a:xfrm>
+            <a:off x="457200" y="274320"/>
+            <a:ext cx="8229600" cy="548640"/>
+          </a:xfrm>
+          <a:prstGeom prst="rect">
+            <a:avLst/>
+          </a:prstGeom>
+          <a:noFill/>
+        </p:spPr>
+        <p:txBody>
+          <a:bodyPr wrap="none">
+            <a:spAutoFit/>
+          </a:bodyPr>
+          <a:lstStyle/>
+          <a:p>
+            <a:pPr>
+              <a:defRPr sz="3200" b="1">
+                <a:solidFill>
+                  <a:srgbClr val="CC0000"/>
+                </a:solidFill>
+              </a:defRPr>
+            </a:pPr>
+            <a:r>
+              <a:t>Strategic Conclusion</a:t>
+            </a:r>
+          </a:p>
+        </p:txBody>
+      </p:sp>
+      <p:sp>
+        <p:nvSpPr>
+          <p:cNvPr id="3" name="TextBox 2"/>
+          <p:cNvSpPr txBox="1"/>
+          <p:nvPr/>
+        </p:nvSpPr>
+        <p:spPr>
+          <a:xfrm>
+            <a:off x="457200" y="1005840"/>
+            <a:ext cx="8229600" cy="457200"/>
+          </a:xfrm>
+          <a:prstGeom prst="rect">
+            <a:avLst/>
+          </a:prstGeom>
+          <a:noFill/>
+        </p:spPr>
+        <p:txBody>
+          <a:bodyPr wrap="none">
+            <a:spAutoFit/>
+          </a:bodyPr>
+          <a:lstStyle/>
+          <a:p>
+            <a:pPr>
+              <a:defRPr sz="2400" b="1">
+                <a:solidFill>
+                  <a:srgbClr val="FF8C00"/>
+                </a:solidFill>
+              </a:defRPr>
+            </a:pPr>
+            <a:r>
+              <a:t>Recommendation: Hold</a:t>
+            </a:r>
+          </a:p>
+        </p:txBody>
+      </p:sp>
+      <p:sp>
+        <p:nvSpPr>
+          <p:cNvPr id="4" name="TextBox 3"/>
+          <p:cNvSpPr txBox="1"/>
+          <p:nvPr/>
+        </p:nvSpPr>
+        <p:spPr>
+          <a:xfrm>
+            <a:off x="457200" y="1645920"/>
+            <a:ext cx="8229600" cy="4114800"/>
+          </a:xfrm>
+          <a:prstGeom prst="rect">
+            <a:avLst/>
+          </a:prstGeom>
+          <a:noFill/>
+        </p:spPr>
+        <p:txBody>
+          <a:bodyPr wrap="square">
+            <a:spAutoFit/>
+          </a:bodyPr>
+          <a:lstStyle/>
+          <a:p>
+            <a:pPr>
+              <a:spcAft>
+                <a:spcPts val="1200"/>
+              </a:spcAft>
+              <a:defRPr sz="1800" b="1">
+                <a:solidFill>
+                  <a:srgbClr val="333333"/>
+                </a:solidFill>
+              </a:defRPr>
+            </a:pPr>
+            <a:r>
+              <a:t>Key Strategic Questions to Monitor:</a:t>
+            </a:r>
+          </a:p>
+          <a:p>
+            <a:pPr>
+              <a:spcAft>
+                <a:spcPts val="800"/>
+              </a:spcAft>
+              <a:defRPr sz="1400" b="1">
+                <a:solidFill>
+                  <a:srgbClr val="CC0000"/>
+                </a:solidFill>
+              </a:defRPr>
+            </a:pPr>
+            <a:r>
+              <a:t>• Margin Recovery: </a:t>
+            </a:r>
+            <a:r>
+              <a:rPr sz="1400" b="0">
+                <a:solidFill>
+                  <a:srgbClr val="3C3C3C"/>
+                </a:solidFill>
+              </a:rPr>
+              <a:t>Can Target restore operating margins to 5%+ in FY2025?</a:t>
+            </a:r>
+          </a:p>
+          <a:p>
+            <a:pPr>
+              <a:spcAft>
+                <a:spcPts val="800"/>
+              </a:spcAft>
+              <a:defRPr sz="1400" b="1">
+                <a:solidFill>
+                  <a:srgbClr val="CC0000"/>
+                </a:solidFill>
+              </a:defRPr>
+            </a:pPr>
+            <a:r>
+              <a:t>• Interest Coverage: </a:t>
+            </a:r>
+            <a:r>
+              <a:rPr sz="1400" b="0">
+                <a:solidFill>
+                  <a:srgbClr val="3C3C3C"/>
+                </a:solidFill>
+              </a:rPr>
+              <a:t>Will interest coverage stabilize above 2.0x warning threshold?</a:t>
+            </a:r>
+          </a:p>
+          <a:p>
+            <a:pPr>
+              <a:spcAft>
+                <a:spcPts val="800"/>
+              </a:spcAft>
+              <a:defRPr sz="1400" b="1">
+                <a:solidFill>
+                  <a:srgbClr val="CC0000"/>
+                </a:solidFill>
+              </a:defRPr>
+            </a:pPr>
+            <a:r>
+              <a:t>• Inventory Management: </a:t>
+            </a:r>
+            <a:r>
+              <a:rPr sz="1400" b="0">
+                <a:solidFill>
+                  <a:srgbClr val="3C3C3C"/>
+                </a:solidFill>
+              </a:rPr>
+              <a:t>Can inventory levels normalize without significant markdowns?</a:t>
+            </a:r>
+          </a:p>
+          <a:p>
+            <a:pPr>
+              <a:spcAft>
+                <a:spcPts val="800"/>
+              </a:spcAft>
+              <a:defRPr sz="1400" b="1">
+                <a:solidFill>
+                  <a:srgbClr val="CC0000"/>
+                </a:solidFill>
+              </a:defRPr>
+            </a:pPr>
+            <a:r>
+              <a:t>• Debt Maturities: </a:t>
+            </a:r>
+            <a:r>
+              <a:rPr sz="1400" b="0">
+                <a:solidFill>
+                  <a:srgbClr val="3C3C3C"/>
+                </a:solidFill>
+              </a:rPr>
+              <a:t>How will Target refinance $2B debt maturing in FY2026?</a:t>
+            </a:r>
+          </a:p>
+          <a:p>
+            <a:pPr>
+              <a:spcAft>
+                <a:spcPts val="800"/>
+              </a:spcAft>
+              <a:defRPr sz="1400" b="1">
+                <a:solidFill>
+                  <a:srgbClr val="CC0000"/>
+                </a:solidFill>
+              </a:defRPr>
+            </a:pPr>
+            <a:r>
+              <a:t>• Competitive Position: </a:t>
+            </a:r>
+            <a:r>
+              <a:rPr sz="1400" b="0">
+                <a:solidFill>
+                  <a:srgbClr val="3C3C3C"/>
+                </a:solidFill>
+              </a:rPr>
+              <a:t>Can Target differentiate vs Walmart/Amazon in a slowing consumer environment?</a:t>
+            </a:r>
+          </a:p>
+        </p:txBody>
+      </p:sp>
+      <p:sp>
+        <p:nvSpPr>
+          <p:cNvPr id="5" name="Rectangle 4"/>
+          <p:cNvSpPr/>
+          <p:nvPr/>
+        </p:nvSpPr>
+        <p:spPr>
+          <a:xfrm>
+            <a:off x="457200" y="5669280"/>
+            <a:ext cx="8229600" cy="822960"/>
+          </a:xfrm>
+          <a:prstGeom prst="rect">
+            <a:avLst/>
+          </a:prstGeom>
+          <a:solidFill>
+            <a:srgbClr val="F5F5F5"/>
+          </a:solidFill>
+          <a:ln>
+            <a:solidFill>
+              <a:srgbClr val="C8C8C8"/>
+            </a:solidFill>
+          </a:ln>
+        </p:spPr>
+        <p:style>
+          <a:lnRef idx="1">
+            <a:schemeClr val="accent1"/>
+          </a:lnRef>
+          <a:fillRef idx="3">
+            <a:schemeClr val="accent1"/>
+          </a:fillRef>
+          <a:effectRef idx="2">
+            <a:schemeClr val="accent1"/>
+          </a:effectRef>
+          <a:fontRef idx="minor">
+            <a:schemeClr val="lt1"/>
+          </a:fontRef>
+        </p:style>
+        <p:txBody>
+          <a:bodyPr rtlCol="0" anchor="ctr"/>
+          <a:lstStyle/>
+          <a:p>
+            <a:pPr algn="ctr"/>
+          </a:p>
+        </p:txBody>
+      </p:sp>
+      <p:sp>
+        <p:nvSpPr>
+          <p:cNvPr id="6" name="TextBox 5"/>
+          <p:cNvSpPr txBox="1"/>
+          <p:nvPr/>
+        </p:nvSpPr>
+        <p:spPr>
+          <a:xfrm>
+            <a:off x="640080" y="5806440"/>
+            <a:ext cx="7863840" cy="548640"/>
+          </a:xfrm>
+          <a:prstGeom prst="rect">
+            <a:avLst/>
+          </a:prstGeom>
+          <a:noFill/>
+        </p:spPr>
+        <p:txBody>
+          <a:bodyPr wrap="square">
+            <a:spAutoFit/>
+          </a:bodyPr>
+          <a:lstStyle/>
+          <a:p>
+            <a:pPr>
+              <a:defRPr sz="1200" b="1">
+                <a:solidFill>
+                  <a:srgbClr val="333333"/>
+                </a:solidFill>
+              </a:defRPr>
+            </a:pPr>
+            <a:r>
+              <a:t>Bottom Line: </a:t>
+            </a:r>
+            <a:r>
+              <a:rPr sz="1200" b="0">
+                <a:solidFill>
+                  <a:srgbClr val="505050"/>
+                </a:solidFill>
+              </a:rPr>
+              <a:t>Margin pressure and elevated risks warrant caution; watch for stabilization</a:t>
             </a:r>
           </a:p>
         </p:txBody>
@@ -7168,46 +9926,36 @@
       <p:grpSpPr/>
       <p:sp>
         <p:nvSpPr>
-          <p:cNvPr id="2" name="Rectangle 1"/>
-          <p:cNvSpPr/>
-          <p:nvPr/>
-        </p:nvSpPr>
-        <p:spPr>
-          <a:xfrm>
-            <a:off x="0" y="2286000"/>
-            <a:ext cx="9144000" cy="1828800"/>
-          </a:xfrm>
-          <a:prstGeom prst="rect">
-            <a:avLst/>
-          </a:prstGeom>
-          <a:solidFill>
-            <a:srgbClr val="CC0000"/>
-          </a:solidFill>
-          <a:ln>
-            <a:solidFill>
-              <a:srgbClr val="CC0000"/>
-            </a:solidFill>
-          </a:ln>
-        </p:spPr>
-        <p:style>
-          <a:lnRef idx="1">
-            <a:schemeClr val="accent1"/>
-          </a:lnRef>
-          <a:fillRef idx="3">
-            <a:schemeClr val="accent1"/>
-          </a:fillRef>
-          <a:effectRef idx="2">
-            <a:schemeClr val="accent1"/>
-          </a:effectRef>
-          <a:fontRef idx="minor">
-            <a:schemeClr val="lt1"/>
-          </a:fontRef>
-        </p:style>
-        <p:txBody>
-          <a:bodyPr rtlCol="0" anchor="ctr"/>
-          <a:lstStyle/>
-          <a:p>
-            <a:pPr algn="ctr"/>
+          <p:cNvPr id="2" name="TextBox 1"/>
+          <p:cNvSpPr txBox="1"/>
+          <p:nvPr/>
+        </p:nvSpPr>
+        <p:spPr>
+          <a:xfrm>
+            <a:off x="457200" y="274320"/>
+            <a:ext cx="8229600" cy="457200"/>
+          </a:xfrm>
+          <a:prstGeom prst="rect">
+            <a:avLst/>
+          </a:prstGeom>
+          <a:noFill/>
+        </p:spPr>
+        <p:txBody>
+          <a:bodyPr wrap="none">
+            <a:spAutoFit/>
+          </a:bodyPr>
+          <a:lstStyle/>
+          <a:p>
+            <a:pPr>
+              <a:defRPr sz="3200" b="1">
+                <a:solidFill>
+                  <a:srgbClr val="CC0000"/>
+                </a:solidFill>
+              </a:defRPr>
+            </a:pPr>
+            <a:r>
+              <a:t>Investment Thesis</a:t>
+            </a:r>
           </a:p>
         </p:txBody>
       </p:sp>
@@ -7219,8 +9967,8 @@
         </p:nvSpPr>
         <p:spPr>
           <a:xfrm>
-            <a:off x="457200" y="2468880"/>
-            <a:ext cx="8229600" cy="548640"/>
+            <a:off x="457200" y="914400"/>
+            <a:ext cx="8229600" cy="1097280"/>
           </a:xfrm>
           <a:prstGeom prst="rect">
             <a:avLst/>
@@ -7233,15 +9981,26 @@
           </a:bodyPr>
           <a:lstStyle/>
           <a:p>
-            <a:pPr algn="ctr">
-              <a:defRPr sz="2400" b="1">
-                <a:solidFill>
-                  <a:srgbClr val="FFFFFF"/>
-                </a:solidFill>
-              </a:defRPr>
-            </a:pPr>
-            <a:r>
-              <a:t>PILLAR 1</a:t>
+            <a:pPr>
+              <a:defRPr sz="2800" b="1">
+                <a:solidFill>
+                  <a:srgbClr val="FF8C00"/>
+                </a:solidFill>
+              </a:defRPr>
+            </a:pPr>
+            <a:r>
+              <a:t>Recommendation: Hold</a:t>
+            </a:r>
+          </a:p>
+          <a:p>
+            <a:pPr>
+              <a:spcAft>
+                <a:spcPts val="600"/>
+              </a:spcAft>
+              <a:defRPr sz="1600"/>
+            </a:pPr>
+            <a:r>
+              <a:t>Margin pressure and elevated risks warrant caution; watch for stabilization</a:t>
             </a:r>
           </a:p>
         </p:txBody>
@@ -7254,8 +10013,8 @@
         </p:nvSpPr>
         <p:spPr>
           <a:xfrm>
-            <a:off x="457200" y="3017520"/>
-            <a:ext cx="8229600" cy="731520"/>
+            <a:off x="457200" y="2286000"/>
+            <a:ext cx="3886200" cy="3657600"/>
           </a:xfrm>
           <a:prstGeom prst="rect">
             <a:avLst/>
@@ -7268,15 +10027,71 @@
           </a:bodyPr>
           <a:lstStyle/>
           <a:p>
-            <a:pPr algn="ctr">
-              <a:defRPr sz="4400" b="1">
-                <a:solidFill>
-                  <a:srgbClr val="FFFFFF"/>
-                </a:solidFill>
-              </a:defRPr>
-            </a:pPr>
-            <a:r>
-              <a:t>Growth &amp; Revenue</a:t>
+            <a:pPr>
+              <a:spcAft>
+                <a:spcPts val="1200"/>
+              </a:spcAft>
+              <a:defRPr sz="2000" b="1"/>
+            </a:pPr>
+            <a:r>
+              <a:t>Risk Factors</a:t>
+            </a:r>
+          </a:p>
+          <a:p>
+            <a:pPr>
+              <a:defRPr sz="1400" b="1"/>
+            </a:pPr>
+            <a:r>
+              <a:t>Shrink/Theft (High)</a:t>
+            </a:r>
+          </a:p>
+          <a:p>
+            <a:pPr lvl="1">
+              <a:spcAft>
+                <a:spcPts val="600"/>
+              </a:spcAft>
+              <a:defRPr sz="1200"/>
+            </a:pPr>
+            <a:r>
+              <a:t>22 mentions across 8 periods, avg 2.8/period</a:t>
+            </a:r>
+          </a:p>
+          <a:p>
+            <a:pPr>
+              <a:defRPr sz="1400" b="1"/>
+            </a:pPr>
+            <a:r>
+              <a:t>Interest Coverage Decline (Medium)</a:t>
+            </a:r>
+          </a:p>
+          <a:p>
+            <a:pPr lvl="1">
+              <a:spcAft>
+                <a:spcPts val="600"/>
+              </a:spcAft>
+              <a:defRPr sz="1200"/>
+            </a:pPr>
+            <a:r>
+              <a:t>Coverage dropped 27% QoQ (11.3x → 8.2x)</a:t>
+            </a:r>
+          </a:p>
+          <a:p>
+            <a:pPr>
+              <a:defRPr sz="1400" b="1"/>
+            </a:pPr>
+            <a:r>
+              <a:t>Margin Compression (High)</a:t>
+            </a:r>
+          </a:p>
+          <a:p>
+            <a:pPr lvl="1">
+              <a:spcAft>
+                <a:spcPts val="600"/>
+              </a:spcAft>
+              <a:defRPr sz="1200"/>
+            </a:pPr>
+            <a:r>
+              <a:t>Operating margin 3.8% vs 7.1% baseline (-3.3pp)</a:t>
             </a:r>
           </a:p>
         </p:txBody>
@@ -7289,8 +10104,8 @@
         </p:nvSpPr>
         <p:spPr>
           <a:xfrm>
-            <a:off x="457200" y="4572000"/>
-            <a:ext cx="8229600" cy="457200"/>
+            <a:off x="4800600" y="2286000"/>
+            <a:ext cx="3886200" cy="3657600"/>
           </a:xfrm>
           <a:prstGeom prst="rect">
             <a:avLst/>
@@ -7303,15 +10118,33 @@
           </a:bodyPr>
           <a:lstStyle/>
           <a:p>
-            <a:pPr algn="ctr">
-              <a:defRPr sz="2400" i="1">
-                <a:solidFill>
-                  <a:srgbClr val="646464"/>
-                </a:solidFill>
-              </a:defRPr>
-            </a:pPr>
-            <a:r>
-              <a:t>"How is the business growing?"</a:t>
+            <a:pPr>
+              <a:spcAft>
+                <a:spcPts val="1200"/>
+              </a:spcAft>
+              <a:defRPr sz="2000" b="1"/>
+            </a:pPr>
+            <a:r>
+              <a:t>Opportunities</a:t>
+            </a:r>
+          </a:p>
+          <a:p>
+            <a:pPr>
+              <a:defRPr sz="1400" b="1"/>
+            </a:pPr>
+            <a:r>
+              <a:t>Digital Sales Growth (Medium potential)</a:t>
+            </a:r>
+          </a:p>
+          <a:p>
+            <a:pPr lvl="1">
+              <a:spcAft>
+                <a:spcPts val="600"/>
+              </a:spcAft>
+              <a:defRPr sz="1200"/>
+            </a:pPr>
+            <a:r>
+              <a:t>Digital comp sales 2.4% (slowing from 4.3%)</a:t>
             </a:r>
           </a:p>
         </p:txBody>
@@ -7336,13 +10169,128 @@
       <p:grpSpPr/>
       <p:sp>
         <p:nvSpPr>
-          <p:cNvPr id="2" name="TextBox 1"/>
-          <p:cNvSpPr txBox="1"/>
-          <p:nvPr/>
-        </p:nvSpPr>
-        <p:spPr>
-          <a:xfrm>
-            <a:off x="457200" y="182880"/>
+          <p:cNvPr id="2" name="Rectangle 1"/>
+          <p:cNvSpPr/>
+          <p:nvPr/>
+        </p:nvSpPr>
+        <p:spPr>
+          <a:xfrm>
+            <a:off x="0" y="2286000"/>
+            <a:ext cx="9144000" cy="1828800"/>
+          </a:xfrm>
+          <a:prstGeom prst="rect">
+            <a:avLst/>
+          </a:prstGeom>
+          <a:solidFill>
+            <a:srgbClr val="CC0000"/>
+          </a:solidFill>
+          <a:ln>
+            <a:solidFill>
+              <a:srgbClr val="CC0000"/>
+            </a:solidFill>
+          </a:ln>
+        </p:spPr>
+        <p:style>
+          <a:lnRef idx="1">
+            <a:schemeClr val="accent1"/>
+          </a:lnRef>
+          <a:fillRef idx="3">
+            <a:schemeClr val="accent1"/>
+          </a:fillRef>
+          <a:effectRef idx="2">
+            <a:schemeClr val="accent1"/>
+          </a:effectRef>
+          <a:fontRef idx="minor">
+            <a:schemeClr val="lt1"/>
+          </a:fontRef>
+        </p:style>
+        <p:txBody>
+          <a:bodyPr rtlCol="0" anchor="ctr"/>
+          <a:lstStyle/>
+          <a:p>
+            <a:pPr algn="ctr"/>
+          </a:p>
+        </p:txBody>
+      </p:sp>
+      <p:sp>
+        <p:nvSpPr>
+          <p:cNvPr id="3" name="TextBox 2"/>
+          <p:cNvSpPr txBox="1"/>
+          <p:nvPr/>
+        </p:nvSpPr>
+        <p:spPr>
+          <a:xfrm>
+            <a:off x="457200" y="2468880"/>
+            <a:ext cx="8229600" cy="548640"/>
+          </a:xfrm>
+          <a:prstGeom prst="rect">
+            <a:avLst/>
+          </a:prstGeom>
+          <a:noFill/>
+        </p:spPr>
+        <p:txBody>
+          <a:bodyPr wrap="none">
+            <a:spAutoFit/>
+          </a:bodyPr>
+          <a:lstStyle/>
+          <a:p>
+            <a:pPr algn="ctr">
+              <a:defRPr sz="2400" b="1">
+                <a:solidFill>
+                  <a:srgbClr val="FFFFFF"/>
+                </a:solidFill>
+              </a:defRPr>
+            </a:pPr>
+            <a:r>
+              <a:t>PILLAR 1</a:t>
+            </a:r>
+          </a:p>
+        </p:txBody>
+      </p:sp>
+      <p:sp>
+        <p:nvSpPr>
+          <p:cNvPr id="4" name="TextBox 3"/>
+          <p:cNvSpPr txBox="1"/>
+          <p:nvPr/>
+        </p:nvSpPr>
+        <p:spPr>
+          <a:xfrm>
+            <a:off x="457200" y="3017520"/>
+            <a:ext cx="8229600" cy="731520"/>
+          </a:xfrm>
+          <a:prstGeom prst="rect">
+            <a:avLst/>
+          </a:prstGeom>
+          <a:noFill/>
+        </p:spPr>
+        <p:txBody>
+          <a:bodyPr wrap="none">
+            <a:spAutoFit/>
+          </a:bodyPr>
+          <a:lstStyle/>
+          <a:p>
+            <a:pPr algn="ctr">
+              <a:defRPr sz="4400" b="1">
+                <a:solidFill>
+                  <a:srgbClr val="FFFFFF"/>
+                </a:solidFill>
+              </a:defRPr>
+            </a:pPr>
+            <a:r>
+              <a:t>Growth &amp; Revenue</a:t>
+            </a:r>
+          </a:p>
+        </p:txBody>
+      </p:sp>
+      <p:sp>
+        <p:nvSpPr>
+          <p:cNvPr id="5" name="TextBox 4"/>
+          <p:cNvSpPr txBox="1"/>
+          <p:nvPr/>
+        </p:nvSpPr>
+        <p:spPr>
+          <a:xfrm>
+            <a:off x="457200" y="4572000"/>
             <a:ext cx="8229600" cy="457200"/>
           </a:xfrm>
           <a:prstGeom prst="rect">
@@ -7356,108 +10304,15 @@
           </a:bodyPr>
           <a:lstStyle/>
           <a:p>
-            <a:pPr>
-              <a:defRPr sz="2400" b="1">
-                <a:solidFill>
-                  <a:srgbClr val="CC0000"/>
-                </a:solidFill>
-              </a:defRPr>
-            </a:pPr>
-            <a:r>
-              <a:t>Revenue &amp; Net Income (10-Year)</a:t>
-            </a:r>
-          </a:p>
-        </p:txBody>
-      </p:sp>
-      <p:pic>
-        <p:nvPicPr>
-          <p:cNvPr id="3" name="Picture 2" descr="chart_revenue_netincome_annual.png"/>
-          <p:cNvPicPr>
-            <a:picLocks noChangeAspect="1"/>
-          </p:cNvPicPr>
-          <p:nvPr/>
-        </p:nvPicPr>
-        <p:blipFill>
-          <a:blip r:embed="rId2"/>
-          <a:stretch>
-            <a:fillRect/>
-          </a:stretch>
-        </p:blipFill>
-        <p:spPr>
-          <a:xfrm>
-            <a:off x="457200" y="731520"/>
-            <a:ext cx="8229600" cy="4114800"/>
-          </a:xfrm>
-          <a:prstGeom prst="rect">
-            <a:avLst/>
-          </a:prstGeom>
-        </p:spPr>
-      </p:pic>
-      <p:sp>
-        <p:nvSpPr>
-          <p:cNvPr id="4" name="TextBox 3"/>
-          <p:cNvSpPr txBox="1"/>
-          <p:nvPr/>
-        </p:nvSpPr>
-        <p:spPr>
-          <a:xfrm>
-            <a:off x="457200" y="5029200"/>
-            <a:ext cx="8229600" cy="914400"/>
-          </a:xfrm>
-          <a:prstGeom prst="rect">
-            <a:avLst/>
-          </a:prstGeom>
-          <a:noFill/>
-        </p:spPr>
-        <p:txBody>
-          <a:bodyPr wrap="square">
-            <a:spAutoFit/>
-          </a:bodyPr>
-          <a:lstStyle/>
-          <a:p>
-            <a:pPr>
-              <a:defRPr sz="1200">
+            <a:pPr algn="ctr">
+              <a:defRPr sz="2400" i="1">
                 <a:solidFill>
                   <a:srgbClr val="646464"/>
                 </a:solidFill>
               </a:defRPr>
             </a:pPr>
             <a:r>
-              <a:t>Shows Target's 10-year revenue and net income trajectory from annual 10-K filings. Look for consistent growth and whether profits keep pace with revenue.</a:t>
-            </a:r>
-          </a:p>
-        </p:txBody>
-      </p:sp>
-      <p:sp>
-        <p:nvSpPr>
-          <p:cNvPr id="5" name="TextBox 4"/>
-          <p:cNvSpPr txBox="1"/>
-          <p:nvPr/>
-        </p:nvSpPr>
-        <p:spPr>
-          <a:xfrm>
-            <a:off x="457200" y="6035040"/>
-            <a:ext cx="8229600" cy="365760"/>
-          </a:xfrm>
-          <a:prstGeom prst="rect">
-            <a:avLst/>
-          </a:prstGeom>
-          <a:noFill/>
-        </p:spPr>
-        <p:txBody>
-          <a:bodyPr wrap="none">
-            <a:spAutoFit/>
-          </a:bodyPr>
-          <a:lstStyle/>
-          <a:p>
-            <a:r>
-              <a:rPr sz="1100" u="sng">
-                <a:solidFill>
-                  <a:srgbClr val="0066CC"/>
-                </a:solidFill>
-                <a:hlinkClick r:id="rId3"/>
-              </a:rPr>
-              <a:t>📊 Click for interactive version</a:t>
+              <a:t>"How is the business growing?"</a:t>
             </a:r>
           </a:p>
         </p:txBody>
@@ -7510,21 +10365,55 @@
               </a:defRPr>
             </a:pPr>
             <a:r>
-              <a:t>Revenue Growth YoY</a:t>
+              <a:t>Revenue &amp; Net Income (10-Year)</a:t>
+            </a:r>
+          </a:p>
+        </p:txBody>
+      </p:sp>
+      <p:sp>
+        <p:nvSpPr>
+          <p:cNvPr id="3" name="TextBox 2"/>
+          <p:cNvSpPr txBox="1"/>
+          <p:nvPr/>
+        </p:nvSpPr>
+        <p:spPr>
+          <a:xfrm>
+            <a:off x="8229600" y="228600"/>
+            <a:ext cx="365760" cy="365760"/>
+          </a:xfrm>
+          <a:prstGeom prst="rect">
+            <a:avLst/>
+          </a:prstGeom>
+          <a:noFill/>
+        </p:spPr>
+        <p:txBody>
+          <a:bodyPr wrap="none">
+            <a:spAutoFit/>
+          </a:bodyPr>
+          <a:lstStyle/>
+          <a:p>
+            <a:r>
+              <a:rPr sz="1800">
+                <a:solidFill>
+                  <a:srgbClr val="646464"/>
+                </a:solidFill>
+                <a:hlinkClick r:id="rId2"/>
+              </a:rPr>
+              <a:t>ⓘ</a:t>
             </a:r>
           </a:p>
         </p:txBody>
       </p:sp>
       <p:pic>
         <p:nvPicPr>
-          <p:cNvPr id="3" name="Picture 2" descr="chart_revenue_growth_yoy.png"/>
+          <p:cNvPr id="4" name="Picture 3" descr="chart_revenue_netincome_annual.png"/>
           <p:cNvPicPr>
             <a:picLocks noChangeAspect="1"/>
           </p:cNvPicPr>
           <p:nvPr/>
         </p:nvPicPr>
         <p:blipFill>
-          <a:blip r:embed="rId2"/>
+          <a:blip r:embed="rId3"/>
           <a:stretch>
             <a:fillRect/>
           </a:stretch>
@@ -7541,7 +10430,7 @@
       </p:pic>
       <p:sp>
         <p:nvSpPr>
-          <p:cNvPr id="4" name="TextBox 3"/>
+          <p:cNvPr id="5" name="TextBox 4"/>
           <p:cNvSpPr txBox="1"/>
           <p:nvPr/>
         </p:nvSpPr>
@@ -7562,21 +10451,21 @@
           <a:lstStyle/>
           <a:p>
             <a:pPr>
-              <a:defRPr sz="1200">
-                <a:solidFill>
-                  <a:srgbClr val="646464"/>
-                </a:solidFill>
-              </a:defRPr>
-            </a:pPr>
-            <a:r>
-              <a:t>Tracks year-over-year revenue growth rates by quarter. Reveals acceleration or deceleration in growth momentum.</a:t>
-            </a:r>
-          </a:p>
-        </p:txBody>
-      </p:sp>
-      <p:sp>
-        <p:nvSpPr>
-          <p:cNvPr id="5" name="TextBox 4"/>
+              <a:defRPr sz="1200" b="1">
+                <a:solidFill>
+                  <a:srgbClr val="323232"/>
+                </a:solidFill>
+              </a:defRPr>
+            </a:pPr>
+            <a:r>
+              <a:t>Revenue grew 50% ($70B→$105B) over 10 years, but net income peaked in FY2021 at $7.1B then dropped 44% to $4.0B—profits not keeping pace with top-line growth.</a:t>
+            </a:r>
+          </a:p>
+        </p:txBody>
+      </p:sp>
+      <p:sp>
+        <p:nvSpPr>
+          <p:cNvPr id="6" name="TextBox 5"/>
           <p:cNvSpPr txBox="1"/>
           <p:nvPr/>
         </p:nvSpPr>
@@ -7601,7 +10490,7 @@
                 <a:solidFill>
                   <a:srgbClr val="0066CC"/>
                 </a:solidFill>
-                <a:hlinkClick r:id="rId3"/>
+                <a:hlinkClick r:id="rId2"/>
               </a:rPr>
               <a:t>📊 Click for interactive version</a:t>
             </a:r>
@@ -7656,21 +10545,55 @@
               </a:defRPr>
             </a:pPr>
             <a:r>
-              <a:t>Revenue vs Inventory Growth</a:t>
+              <a:t>Revenue Growth YoY</a:t>
+            </a:r>
+          </a:p>
+        </p:txBody>
+      </p:sp>
+      <p:sp>
+        <p:nvSpPr>
+          <p:cNvPr id="3" name="TextBox 2"/>
+          <p:cNvSpPr txBox="1"/>
+          <p:nvPr/>
+        </p:nvSpPr>
+        <p:spPr>
+          <a:xfrm>
+            <a:off x="8229600" y="228600"/>
+            <a:ext cx="365760" cy="365760"/>
+          </a:xfrm>
+          <a:prstGeom prst="rect">
+            <a:avLst/>
+          </a:prstGeom>
+          <a:noFill/>
+        </p:spPr>
+        <p:txBody>
+          <a:bodyPr wrap="none">
+            <a:spAutoFit/>
+          </a:bodyPr>
+          <a:lstStyle/>
+          <a:p>
+            <a:r>
+              <a:rPr sz="1800">
+                <a:solidFill>
+                  <a:srgbClr val="646464"/>
+                </a:solidFill>
+                <a:hlinkClick r:id="rId2"/>
+              </a:rPr>
+              <a:t>ⓘ</a:t>
             </a:r>
           </a:p>
         </p:txBody>
       </p:sp>
       <p:pic>
         <p:nvPicPr>
-          <p:cNvPr id="3" name="Picture 2" descr="chart_revenue_vs_inventory.png"/>
+          <p:cNvPr id="4" name="Picture 3" descr="chart_revenue_growth_yoy.png"/>
           <p:cNvPicPr>
             <a:picLocks noChangeAspect="1"/>
           </p:cNvPicPr>
           <p:nvPr/>
         </p:nvPicPr>
         <p:blipFill>
-          <a:blip r:embed="rId2"/>
+          <a:blip r:embed="rId3"/>
           <a:stretch>
             <a:fillRect/>
           </a:stretch>
@@ -7687,7 +10610,7 @@
       </p:pic>
       <p:sp>
         <p:nvSpPr>
-          <p:cNvPr id="4" name="TextBox 3"/>
+          <p:cNvPr id="5" name="TextBox 4"/>
           <p:cNvSpPr txBox="1"/>
           <p:nvPr/>
         </p:nvSpPr>
@@ -7708,21 +10631,21 @@
           <a:lstStyle/>
           <a:p>
             <a:pPr>
-              <a:defRPr sz="1200">
-                <a:solidFill>
-                  <a:srgbClr val="646464"/>
-                </a:solidFill>
-              </a:defRPr>
-            </a:pPr>
-            <a:r>
-              <a:t>Compares revenue growth to inventory buildup. Inventory growing faster than sales signals potential markdown risk.</a:t>
-            </a:r>
-          </a:p>
-        </p:txBody>
-      </p:sp>
-      <p:sp>
-        <p:nvSpPr>
-          <p:cNvPr id="5" name="TextBox 4"/>
+              <a:defRPr sz="1200" b="1">
+                <a:solidFill>
+                  <a:srgbClr val="323232"/>
+                </a:solidFill>
+              </a:defRPr>
+            </a:pPr>
+            <a:r>
+              <a:t>Growth has decelerated sharply: from 20%+ during COVID to just 1.6% in Q3 2025. Target is now a low-single-digit grower.</a:t>
+            </a:r>
+          </a:p>
+        </p:txBody>
+      </p:sp>
+      <p:sp>
+        <p:nvSpPr>
+          <p:cNvPr id="6" name="TextBox 5"/>
           <p:cNvSpPr txBox="1"/>
           <p:nvPr/>
         </p:nvSpPr>
@@ -7747,7 +10670,7 @@
                 <a:solidFill>
                   <a:srgbClr val="0066CC"/>
                 </a:solidFill>
-                <a:hlinkClick r:id="rId3"/>
+                <a:hlinkClick r:id="rId2"/>
               </a:rPr>
               <a:t>📊 Click for interactive version</a:t>
             </a:r>
@@ -7802,21 +10725,55 @@
               </a:defRPr>
             </a:pPr>
             <a:r>
-              <a:t>Revenue &amp; Net Income (Quarterly)</a:t>
+              <a:t>Revenue vs Inventory Growth</a:t>
+            </a:r>
+          </a:p>
+        </p:txBody>
+      </p:sp>
+      <p:sp>
+        <p:nvSpPr>
+          <p:cNvPr id="3" name="TextBox 2"/>
+          <p:cNvSpPr txBox="1"/>
+          <p:nvPr/>
+        </p:nvSpPr>
+        <p:spPr>
+          <a:xfrm>
+            <a:off x="8229600" y="228600"/>
+            <a:ext cx="365760" cy="365760"/>
+          </a:xfrm>
+          <a:prstGeom prst="rect">
+            <a:avLst/>
+          </a:prstGeom>
+          <a:noFill/>
+        </p:spPr>
+        <p:txBody>
+          <a:bodyPr wrap="none">
+            <a:spAutoFit/>
+          </a:bodyPr>
+          <a:lstStyle/>
+          <a:p>
+            <a:r>
+              <a:rPr sz="1800">
+                <a:solidFill>
+                  <a:srgbClr val="646464"/>
+                </a:solidFill>
+                <a:hlinkClick r:id="rId2"/>
+              </a:rPr>
+              <a:t>ⓘ</a:t>
             </a:r>
           </a:p>
         </p:txBody>
       </p:sp>
       <p:pic>
         <p:nvPicPr>
-          <p:cNvPr id="3" name="Picture 2" descr="chart_revenue_netincome_longterm.png"/>
+          <p:cNvPr id="4" name="Picture 3" descr="chart_revenue_vs_inventory.png"/>
           <p:cNvPicPr>
             <a:picLocks noChangeAspect="1"/>
           </p:cNvPicPr>
           <p:nvPr/>
         </p:nvPicPr>
         <p:blipFill>
-          <a:blip r:embed="rId2"/>
+          <a:blip r:embed="rId3"/>
           <a:stretch>
             <a:fillRect/>
           </a:stretch>
@@ -7833,7 +10790,7 @@
       </p:pic>
       <p:sp>
         <p:nvSpPr>
-          <p:cNvPr id="4" name="TextBox 3"/>
+          <p:cNvPr id="5" name="TextBox 4"/>
           <p:cNvSpPr txBox="1"/>
           <p:nvPr/>
         </p:nvSpPr>
@@ -7854,21 +10811,21 @@
           <a:lstStyle/>
           <a:p>
             <a:pPr>
-              <a:defRPr sz="1200">
-                <a:solidFill>
-                  <a:srgbClr val="646464"/>
-                </a:solidFill>
-              </a:defRPr>
-            </a:pPr>
-            <a:r>
-              <a:t>Quarterly view with calculated Q4 data showing seasonal patterns. Q4 (holiday season) typically shows peak revenue.</a:t>
-            </a:r>
-          </a:p>
-        </p:txBody>
-      </p:sp>
-      <p:sp>
-        <p:nvSpPr>
-          <p:cNvPr id="5" name="TextBox 4"/>
+              <a:defRPr sz="1200" b="1">
+                <a:solidFill>
+                  <a:srgbClr val="323232"/>
+                </a:solidFill>
+              </a:defRPr>
+            </a:pPr>
+            <a:r>
+              <a:t>Inventory growth outpaced revenue in FY2022-23, creating markdown risk. Recent quarters show better alignment as inventory normalizes.</a:t>
+            </a:r>
+          </a:p>
+        </p:txBody>
+      </p:sp>
+      <p:sp>
+        <p:nvSpPr>
+          <p:cNvPr id="6" name="TextBox 5"/>
           <p:cNvSpPr txBox="1"/>
           <p:nvPr/>
         </p:nvSpPr>
@@ -7893,7 +10850,7 @@
                 <a:solidFill>
                   <a:srgbClr val="0066CC"/>
                 </a:solidFill>
-                <a:hlinkClick r:id="rId3"/>
+                <a:hlinkClick r:id="rId2"/>
               </a:rPr>
               <a:t>📊 Click for interactive version</a:t>
             </a:r>
@@ -7920,46 +10877,36 @@
       <p:grpSpPr/>
       <p:sp>
         <p:nvSpPr>
-          <p:cNvPr id="2" name="Rectangle 1"/>
-          <p:cNvSpPr/>
-          <p:nvPr/>
-        </p:nvSpPr>
-        <p:spPr>
-          <a:xfrm>
-            <a:off x="0" y="2286000"/>
-            <a:ext cx="9144000" cy="1828800"/>
-          </a:xfrm>
-          <a:prstGeom prst="rect">
-            <a:avLst/>
-          </a:prstGeom>
-          <a:solidFill>
-            <a:srgbClr val="CC0000"/>
-          </a:solidFill>
-          <a:ln>
-            <a:solidFill>
-              <a:srgbClr val="CC0000"/>
-            </a:solidFill>
-          </a:ln>
-        </p:spPr>
-        <p:style>
-          <a:lnRef idx="1">
-            <a:schemeClr val="accent1"/>
-          </a:lnRef>
-          <a:fillRef idx="3">
-            <a:schemeClr val="accent1"/>
-          </a:fillRef>
-          <a:effectRef idx="2">
-            <a:schemeClr val="accent1"/>
-          </a:effectRef>
-          <a:fontRef idx="minor">
-            <a:schemeClr val="lt1"/>
-          </a:fontRef>
-        </p:style>
-        <p:txBody>
-          <a:bodyPr rtlCol="0" anchor="ctr"/>
-          <a:lstStyle/>
-          <a:p>
-            <a:pPr algn="ctr"/>
+          <p:cNvPr id="2" name="TextBox 1"/>
+          <p:cNvSpPr txBox="1"/>
+          <p:nvPr/>
+        </p:nvSpPr>
+        <p:spPr>
+          <a:xfrm>
+            <a:off x="457200" y="182880"/>
+            <a:ext cx="8229600" cy="457200"/>
+          </a:xfrm>
+          <a:prstGeom prst="rect">
+            <a:avLst/>
+          </a:prstGeom>
+          <a:noFill/>
+        </p:spPr>
+        <p:txBody>
+          <a:bodyPr wrap="none">
+            <a:spAutoFit/>
+          </a:bodyPr>
+          <a:lstStyle/>
+          <a:p>
+            <a:pPr>
+              <a:defRPr sz="2400" b="1">
+                <a:solidFill>
+                  <a:srgbClr val="CC0000"/>
+                </a:solidFill>
+              </a:defRPr>
+            </a:pPr>
+            <a:r>
+              <a:t>Revenue &amp; Net Income (Quarterly)</a:t>
+            </a:r>
           </a:p>
         </p:txBody>
       </p:sp>
@@ -7971,8 +10918,8 @@
         </p:nvSpPr>
         <p:spPr>
           <a:xfrm>
-            <a:off x="457200" y="2468880"/>
-            <a:ext cx="8229600" cy="548640"/>
+            <a:off x="8229600" y="228600"/>
+            <a:ext cx="365760" cy="365760"/>
           </a:xfrm>
           <a:prstGeom prst="rect">
             <a:avLst/>
@@ -7985,29 +10932,87 @@
           </a:bodyPr>
           <a:lstStyle/>
           <a:p>
-            <a:pPr algn="ctr">
-              <a:defRPr sz="2400" b="1">
-                <a:solidFill>
-                  <a:srgbClr val="FFFFFF"/>
-                </a:solidFill>
-              </a:defRPr>
-            </a:pPr>
-            <a:r>
-              <a:t>PILLAR 2</a:t>
-            </a:r>
-          </a:p>
-        </p:txBody>
-      </p:sp>
-      <p:sp>
-        <p:nvSpPr>
-          <p:cNvPr id="4" name="TextBox 3"/>
-          <p:cNvSpPr txBox="1"/>
-          <p:nvPr/>
-        </p:nvSpPr>
-        <p:spPr>
-          <a:xfrm>
-            <a:off x="457200" y="3017520"/>
-            <a:ext cx="8229600" cy="731520"/>
+            <a:r>
+              <a:rPr sz="1800">
+                <a:solidFill>
+                  <a:srgbClr val="646464"/>
+                </a:solidFill>
+                <a:hlinkClick r:id="rId2"/>
+              </a:rPr>
+              <a:t>ⓘ</a:t>
+            </a:r>
+          </a:p>
+        </p:txBody>
+      </p:sp>
+      <p:pic>
+        <p:nvPicPr>
+          <p:cNvPr id="4" name="Picture 3" descr="chart_revenue_netincome_longterm.png"/>
+          <p:cNvPicPr>
+            <a:picLocks noChangeAspect="1"/>
+          </p:cNvPicPr>
+          <p:nvPr/>
+        </p:nvPicPr>
+        <p:blipFill>
+          <a:blip r:embed="rId3"/>
+          <a:stretch>
+            <a:fillRect/>
+          </a:stretch>
+        </p:blipFill>
+        <p:spPr>
+          <a:xfrm>
+            <a:off x="457200" y="731520"/>
+            <a:ext cx="8229600" cy="4114800"/>
+          </a:xfrm>
+          <a:prstGeom prst="rect">
+            <a:avLst/>
+          </a:prstGeom>
+        </p:spPr>
+      </p:pic>
+      <p:sp>
+        <p:nvSpPr>
+          <p:cNvPr id="5" name="TextBox 4"/>
+          <p:cNvSpPr txBox="1"/>
+          <p:nvPr/>
+        </p:nvSpPr>
+        <p:spPr>
+          <a:xfrm>
+            <a:off x="457200" y="5029200"/>
+            <a:ext cx="8229600" cy="914400"/>
+          </a:xfrm>
+          <a:prstGeom prst="rect">
+            <a:avLst/>
+          </a:prstGeom>
+          <a:noFill/>
+        </p:spPr>
+        <p:txBody>
+          <a:bodyPr wrap="square">
+            <a:spAutoFit/>
+          </a:bodyPr>
+          <a:lstStyle/>
+          <a:p>
+            <a:pPr>
+              <a:defRPr sz="1200" b="1">
+                <a:solidFill>
+                  <a:srgbClr val="323232"/>
+                </a:solidFill>
+              </a:defRPr>
+            </a:pPr>
+            <a:r>
+              <a:t>Q4 holiday peaks are visible, but FY2022-23 saw net income collapse despite stable revenue—margin compression is the story.</a:t>
+            </a:r>
+          </a:p>
+        </p:txBody>
+      </p:sp>
+      <p:sp>
+        <p:nvSpPr>
+          <p:cNvPr id="6" name="TextBox 5"/>
+          <p:cNvSpPr txBox="1"/>
+          <p:nvPr/>
+        </p:nvSpPr>
+        <p:spPr>
+          <a:xfrm>
+            <a:off x="457200" y="6035040"/>
+            <a:ext cx="8229600" cy="365760"/>
           </a:xfrm>
           <a:prstGeom prst="rect">
             <a:avLst/>
@@ -8020,50 +11025,14 @@
           </a:bodyPr>
           <a:lstStyle/>
           <a:p>
-            <a:pPr algn="ctr">
-              <a:defRPr sz="4400" b="1">
-                <a:solidFill>
-                  <a:srgbClr val="FFFFFF"/>
-                </a:solidFill>
-              </a:defRPr>
-            </a:pPr>
-            <a:r>
-              <a:t>Profitability &amp; Margins</a:t>
-            </a:r>
-          </a:p>
-        </p:txBody>
-      </p:sp>
-      <p:sp>
-        <p:nvSpPr>
-          <p:cNvPr id="5" name="TextBox 4"/>
-          <p:cNvSpPr txBox="1"/>
-          <p:nvPr/>
-        </p:nvSpPr>
-        <p:spPr>
-          <a:xfrm>
-            <a:off x="457200" y="4572000"/>
-            <a:ext cx="8229600" cy="457200"/>
-          </a:xfrm>
-          <a:prstGeom prst="rect">
-            <a:avLst/>
-          </a:prstGeom>
-          <a:noFill/>
-        </p:spPr>
-        <p:txBody>
-          <a:bodyPr wrap="none">
-            <a:spAutoFit/>
-          </a:bodyPr>
-          <a:lstStyle/>
-          <a:p>
-            <a:pPr algn="ctr">
-              <a:defRPr sz="2400" i="1">
-                <a:solidFill>
-                  <a:srgbClr val="646464"/>
-                </a:solidFill>
-              </a:defRPr>
-            </a:pPr>
-            <a:r>
-              <a:t>"How efficiently is the company generating profits?"</a:t>
+            <a:r>
+              <a:rPr sz="1100" u="sng">
+                <a:solidFill>
+                  <a:srgbClr val="0066CC"/>
+                </a:solidFill>
+                <a:hlinkClick r:id="rId2"/>
+              </a:rPr>
+              <a:t>📊 Click for interactive version</a:t>
             </a:r>
           </a:p>
         </p:txBody>

--- a/output/Target_Financial_Analysis.pptx
+++ b/output/Target_Financial_Analysis.pptx
@@ -3884,7 +3884,9 @@
       </p:sp>
       <p:sp>
         <p:nvSpPr>
-          <p:cNvPr id="3" name="TextBox 2"/>
+          <p:cNvPr id="3" name="TextBox 2">
+            <a:hlinkClick r:id="rId2"/>
+          </p:cNvPr>
           <p:cNvSpPr txBox="1"/>
           <p:nvPr/>
         </p:nvSpPr>
@@ -3909,7 +3911,7 @@
                 <a:solidFill>
                   <a:srgbClr val="646464"/>
                 </a:solidFill>
-                <a:hlinkClick r:id="rId2"/>
+                <a:hlinkClick r:id="rId2" tooltip="Three margin lines tracking profitability over time. Compression between lines reveals where profits leak."/>
               </a:rPr>
               <a:t>ⓘ</a:t>
             </a:r>
@@ -3977,7 +3979,9 @@
       </p:sp>
       <p:sp>
         <p:nvSpPr>
-          <p:cNvPr id="6" name="TextBox 5"/>
+          <p:cNvPr id="6" name="TextBox 5">
+            <a:hlinkClick r:id="rId2"/>
+          </p:cNvPr>
           <p:cNvSpPr txBox="1"/>
           <p:nvPr/>
         </p:nvSpPr>
@@ -4002,7 +4006,6 @@
                 <a:solidFill>
                   <a:srgbClr val="0066CC"/>
                 </a:solidFill>
-                <a:hlinkClick r:id="rId2"/>
               </a:rPr>
               <a:t>📊 Click for interactive version</a:t>
             </a:r>
@@ -4064,7 +4067,9 @@
       </p:sp>
       <p:sp>
         <p:nvSpPr>
-          <p:cNvPr id="3" name="TextBox 2"/>
+          <p:cNvPr id="3" name="TextBox 2">
+            <a:hlinkClick r:id="rId2"/>
+          </p:cNvPr>
           <p:cNvSpPr txBox="1"/>
           <p:nvPr/>
         </p:nvSpPr>
@@ -4089,7 +4094,7 @@
                 <a:solidFill>
                   <a:srgbClr val="646464"/>
                 </a:solidFill>
-                <a:hlinkClick r:id="rId2"/>
+                <a:hlinkClick r:id="rId2" tooltip="Waterfall showing margin evolution from FY2022 baseline. Green bars = improvement, red bars = deterioration."/>
               </a:rPr>
               <a:t>ⓘ</a:t>
             </a:r>
@@ -4157,7 +4162,9 @@
       </p:sp>
       <p:sp>
         <p:nvSpPr>
-          <p:cNvPr id="6" name="TextBox 5"/>
+          <p:cNvPr id="6" name="TextBox 5">
+            <a:hlinkClick r:id="rId2"/>
+          </p:cNvPr>
           <p:cNvSpPr txBox="1"/>
           <p:nvPr/>
         </p:nvSpPr>
@@ -4182,7 +4189,6 @@
                 <a:solidFill>
                   <a:srgbClr val="0066CC"/>
                 </a:solidFill>
-                <a:hlinkClick r:id="rId2"/>
               </a:rPr>
               <a:t>📊 Click for interactive version</a:t>
             </a:r>
@@ -4244,7 +4250,9 @@
       </p:sp>
       <p:sp>
         <p:nvSpPr>
-          <p:cNvPr id="3" name="TextBox 2"/>
+          <p:cNvPr id="3" name="TextBox 2">
+            <a:hlinkClick r:id="rId2"/>
+          </p:cNvPr>
           <p:cNvSpPr txBox="1"/>
           <p:nvPr/>
         </p:nvSpPr>
@@ -4269,7 +4277,7 @@
                 <a:solidFill>
                   <a:srgbClr val="646464"/>
                 </a:solidFill>
-                <a:hlinkClick r:id="rId2"/>
+                <a:hlinkClick r:id="rId2" tooltip="100% stacked bars showing cost structure. Watch for SG&amp;A creep eating into margins."/>
               </a:rPr>
               <a:t>ⓘ</a:t>
             </a:r>
@@ -4337,7 +4345,9 @@
       </p:sp>
       <p:sp>
         <p:nvSpPr>
-          <p:cNvPr id="6" name="TextBox 5"/>
+          <p:cNvPr id="6" name="TextBox 5">
+            <a:hlinkClick r:id="rId2"/>
+          </p:cNvPr>
           <p:cNvSpPr txBox="1"/>
           <p:nvPr/>
         </p:nvSpPr>
@@ -4362,7 +4372,6 @@
                 <a:solidFill>
                   <a:srgbClr val="0066CC"/>
                 </a:solidFill>
-                <a:hlinkClick r:id="rId2"/>
               </a:rPr>
               <a:t>📊 Click for interactive version</a:t>
             </a:r>
@@ -4424,7 +4433,9 @@
       </p:sp>
       <p:sp>
         <p:nvSpPr>
-          <p:cNvPr id="3" name="TextBox 2"/>
+          <p:cNvPr id="3" name="TextBox 2">
+            <a:hlinkClick r:id="rId2"/>
+          </p:cNvPr>
           <p:cNvSpPr txBox="1"/>
           <p:nvPr/>
         </p:nvSpPr>
@@ -4449,7 +4460,7 @@
                 <a:solidFill>
                   <a:srgbClr val="646464"/>
                 </a:solidFill>
-                <a:hlinkClick r:id="rId2"/>
+                <a:hlinkClick r:id="rId2" tooltip="Shows how revenue flows to EBITDA through operating expenses. The D&amp;A add-back reveals capital intensity."/>
               </a:rPr>
               <a:t>ⓘ</a:t>
             </a:r>
@@ -4517,7 +4528,9 @@
       </p:sp>
       <p:sp>
         <p:nvSpPr>
-          <p:cNvPr id="6" name="TextBox 5"/>
+          <p:cNvPr id="6" name="TextBox 5">
+            <a:hlinkClick r:id="rId2"/>
+          </p:cNvPr>
           <p:cNvSpPr txBox="1"/>
           <p:nvPr/>
         </p:nvSpPr>
@@ -4542,7 +4555,6 @@
                 <a:solidFill>
                   <a:srgbClr val="0066CC"/>
                 </a:solidFill>
-                <a:hlinkClick r:id="rId2"/>
               </a:rPr>
               <a:t>📊 Click for interactive version</a:t>
             </a:r>
@@ -4604,7 +4616,9 @@
       </p:sp>
       <p:sp>
         <p:nvSpPr>
-          <p:cNvPr id="3" name="TextBox 2"/>
+          <p:cNvPr id="3" name="TextBox 2">
+            <a:hlinkClick r:id="rId2"/>
+          </p:cNvPr>
           <p:cNvSpPr txBox="1"/>
           <p:nvPr/>
         </p:nvSpPr>
@@ -4629,7 +4643,7 @@
                 <a:solidFill>
                   <a:srgbClr val="646464"/>
                 </a:solidFill>
-                <a:hlinkClick r:id="rId2"/>
+                <a:hlinkClick r:id="rId2" tooltip="Quarterly margin changes as waterfall. Identifies seasonal patterns and pressure points."/>
               </a:rPr>
               <a:t>ⓘ</a:t>
             </a:r>
@@ -4697,7 +4711,9 @@
       </p:sp>
       <p:sp>
         <p:nvSpPr>
-          <p:cNvPr id="6" name="TextBox 5"/>
+          <p:cNvPr id="6" name="TextBox 5">
+            <a:hlinkClick r:id="rId2"/>
+          </p:cNvPr>
           <p:cNvSpPr txBox="1"/>
           <p:nvPr/>
         </p:nvSpPr>
@@ -4722,7 +4738,6 @@
                 <a:solidFill>
                   <a:srgbClr val="0066CC"/>
                 </a:solidFill>
-                <a:hlinkClick r:id="rId2"/>
               </a:rPr>
               <a:t>📊 Click for interactive version</a:t>
             </a:r>
@@ -4784,7 +4799,9 @@
       </p:sp>
       <p:sp>
         <p:nvSpPr>
-          <p:cNvPr id="3" name="TextBox 2"/>
+          <p:cNvPr id="3" name="TextBox 2">
+            <a:hlinkClick r:id="rId2"/>
+          </p:cNvPr>
           <p:cNvSpPr txBox="1"/>
           <p:nvPr/>
         </p:nvSpPr>
@@ -4809,7 +4826,7 @@
                 <a:solidFill>
                   <a:srgbClr val="646464"/>
                 </a:solidFill>
-                <a:hlinkClick r:id="rId2"/>
+                <a:hlinkClick r:id="rId2" tooltip="Compares Net Income to Operating Cash Flow. High-quality earnings convert to cash consistently."/>
               </a:rPr>
               <a:t>ⓘ</a:t>
             </a:r>
@@ -4877,7 +4894,9 @@
       </p:sp>
       <p:sp>
         <p:nvSpPr>
-          <p:cNvPr id="6" name="TextBox 5"/>
+          <p:cNvPr id="6" name="TextBox 5">
+            <a:hlinkClick r:id="rId2"/>
+          </p:cNvPr>
           <p:cNvSpPr txBox="1"/>
           <p:nvPr/>
         </p:nvSpPr>
@@ -4902,7 +4921,6 @@
                 <a:solidFill>
                   <a:srgbClr val="0066CC"/>
                 </a:solidFill>
-                <a:hlinkClick r:id="rId2"/>
               </a:rPr>
               <a:t>📊 Click for interactive version</a:t>
             </a:r>
@@ -5796,7 +5814,9 @@
       </p:sp>
       <p:sp>
         <p:nvSpPr>
-          <p:cNvPr id="3" name="TextBox 2"/>
+          <p:cNvPr id="3" name="TextBox 2">
+            <a:hlinkClick r:id="rId2"/>
+          </p:cNvPr>
           <p:cNvSpPr txBox="1"/>
           <p:nvPr/>
         </p:nvSpPr>
@@ -5821,7 +5841,7 @@
                 <a:solidFill>
                   <a:srgbClr val="646464"/>
                 </a:solidFill>
-                <a:hlinkClick r:id="rId2"/>
+                <a:hlinkClick r:id="rId2" tooltip="Measures short-term liquidity. Below 1.0 is warning (liabilities exceed assets); above 1.5 is healthy for retail."/>
               </a:rPr>
               <a:t>ⓘ</a:t>
             </a:r>
@@ -5889,7 +5909,9 @@
       </p:sp>
       <p:sp>
         <p:nvSpPr>
-          <p:cNvPr id="6" name="TextBox 5"/>
+          <p:cNvPr id="6" name="TextBox 5">
+            <a:hlinkClick r:id="rId2"/>
+          </p:cNvPr>
           <p:cNvSpPr txBox="1"/>
           <p:nvPr/>
         </p:nvSpPr>
@@ -5914,7 +5936,6 @@
                 <a:solidFill>
                   <a:srgbClr val="0066CC"/>
                 </a:solidFill>
-                <a:hlinkClick r:id="rId2"/>
               </a:rPr>
               <a:t>📊 Click for interactive version</a:t>
             </a:r>
@@ -5976,7 +5997,9 @@
       </p:sp>
       <p:sp>
         <p:nvSpPr>
-          <p:cNvPr id="3" name="TextBox 2"/>
+          <p:cNvPr id="3" name="TextBox 2">
+            <a:hlinkClick r:id="rId2"/>
+          </p:cNvPr>
           <p:cNvSpPr txBox="1"/>
           <p:nvPr/>
         </p:nvSpPr>
@@ -6001,7 +6024,7 @@
                 <a:solidFill>
                   <a:srgbClr val="646464"/>
                 </a:solidFill>
-                <a:hlinkClick r:id="rId2"/>
+                <a:hlinkClick r:id="rId2" tooltip="Shows debt vs equity mix. Higher debt = higher risk but potentially higher returns on equity."/>
               </a:rPr>
               <a:t>ⓘ</a:t>
             </a:r>
@@ -6069,7 +6092,9 @@
       </p:sp>
       <p:sp>
         <p:nvSpPr>
-          <p:cNvPr id="6" name="TextBox 5"/>
+          <p:cNvPr id="6" name="TextBox 5">
+            <a:hlinkClick r:id="rId2"/>
+          </p:cNvPr>
           <p:cNvSpPr txBox="1"/>
           <p:nvPr/>
         </p:nvSpPr>
@@ -6094,7 +6119,6 @@
                 <a:solidFill>
                   <a:srgbClr val="0066CC"/>
                 </a:solidFill>
-                <a:hlinkClick r:id="rId2"/>
               </a:rPr>
               <a:t>📊 Click for interactive version</a:t>
             </a:r>
@@ -6156,7 +6180,9 @@
       </p:sp>
       <p:sp>
         <p:nvSpPr>
-          <p:cNvPr id="3" name="TextBox 2"/>
+          <p:cNvPr id="3" name="TextBox 2">
+            <a:hlinkClick r:id="rId2"/>
+          </p:cNvPr>
           <p:cNvSpPr txBox="1"/>
           <p:nvPr/>
         </p:nvSpPr>
@@ -6181,7 +6207,7 @@
                 <a:solidFill>
                   <a:srgbClr val="646464"/>
                 </a:solidFill>
-                <a:hlinkClick r:id="rId2"/>
+                <a:hlinkClick r:id="rId2" tooltip="Key leverage metric showing how many years of earnings to repay debt. Below 3x is healthy; above 5x is risky."/>
               </a:rPr>
               <a:t>ⓘ</a:t>
             </a:r>
@@ -6249,7 +6275,9 @@
       </p:sp>
       <p:sp>
         <p:nvSpPr>
-          <p:cNvPr id="6" name="TextBox 5"/>
+          <p:cNvPr id="6" name="TextBox 5">
+            <a:hlinkClick r:id="rId2"/>
+          </p:cNvPr>
           <p:cNvSpPr txBox="1"/>
           <p:nvPr/>
         </p:nvSpPr>
@@ -6274,7 +6302,6 @@
                 <a:solidFill>
                   <a:srgbClr val="0066CC"/>
                 </a:solidFill>
-                <a:hlinkClick r:id="rId2"/>
               </a:rPr>
               <a:t>📊 Click for interactive version</a:t>
             </a:r>
@@ -6336,7 +6363,9 @@
       </p:sp>
       <p:sp>
         <p:nvSpPr>
-          <p:cNvPr id="3" name="TextBox 2"/>
+          <p:cNvPr id="3" name="TextBox 2">
+            <a:hlinkClick r:id="rId2"/>
+          </p:cNvPr>
           <p:cNvSpPr txBox="1"/>
           <p:nvPr/>
         </p:nvSpPr>
@@ -6361,7 +6390,7 @@
                 <a:solidFill>
                   <a:srgbClr val="646464"/>
                 </a:solidFill>
-                <a:hlinkClick r:id="rId2"/>
+                <a:hlinkClick r:id="rId2" tooltip="Interest coverage ratio tracking. Above 3x is comfortable; below 2x requires monitoring."/>
               </a:rPr>
               <a:t>ⓘ</a:t>
             </a:r>
@@ -6429,7 +6458,9 @@
       </p:sp>
       <p:sp>
         <p:nvSpPr>
-          <p:cNvPr id="6" name="TextBox 5"/>
+          <p:cNvPr id="6" name="TextBox 5">
+            <a:hlinkClick r:id="rId2"/>
+          </p:cNvPr>
           <p:cNvSpPr txBox="1"/>
           <p:nvPr/>
         </p:nvSpPr>
@@ -6454,7 +6485,6 @@
                 <a:solidFill>
                   <a:srgbClr val="0066CC"/>
                 </a:solidFill>
-                <a:hlinkClick r:id="rId2"/>
               </a:rPr>
               <a:t>📊 Click for interactive version</a:t>
             </a:r>
@@ -6516,7 +6546,9 @@
       </p:sp>
       <p:sp>
         <p:nvSpPr>
-          <p:cNvPr id="3" name="TextBox 2"/>
+          <p:cNvPr id="3" name="TextBox 2">
+            <a:hlinkClick r:id="rId2"/>
+          </p:cNvPr>
           <p:cNvSpPr txBox="1"/>
           <p:nvPr/>
         </p:nvSpPr>
@@ -6541,7 +6573,7 @@
                 <a:solidFill>
                   <a:srgbClr val="646464"/>
                 </a:solidFill>
-                <a:hlinkClick r:id="rId2"/>
+                <a:hlinkClick r:id="rId2" tooltip="Three cash flow lines: Operating, Investing, Financing. Operating should be consistently positive."/>
               </a:rPr>
               <a:t>ⓘ</a:t>
             </a:r>
@@ -6609,7 +6641,9 @@
       </p:sp>
       <p:sp>
         <p:nvSpPr>
-          <p:cNvPr id="6" name="TextBox 5"/>
+          <p:cNvPr id="6" name="TextBox 5">
+            <a:hlinkClick r:id="rId2"/>
+          </p:cNvPr>
           <p:cNvSpPr txBox="1"/>
           <p:nvPr/>
         </p:nvSpPr>
@@ -6634,7 +6668,6 @@
                 <a:solidFill>
                   <a:srgbClr val="0066CC"/>
                 </a:solidFill>
-                <a:hlinkClick r:id="rId2"/>
               </a:rPr>
               <a:t>📊 Click for interactive version</a:t>
             </a:r>
@@ -7264,7 +7297,9 @@
       </p:sp>
       <p:sp>
         <p:nvSpPr>
-          <p:cNvPr id="3" name="TextBox 2"/>
+          <p:cNvPr id="3" name="TextBox 2">
+            <a:hlinkClick r:id="rId2"/>
+          </p:cNvPr>
           <p:cNvSpPr txBox="1"/>
           <p:nvPr/>
         </p:nvSpPr>
@@ -7289,7 +7324,7 @@
                 <a:solidFill>
                   <a:srgbClr val="646464"/>
                 </a:solidFill>
-                <a:hlinkClick r:id="rId2"/>
+                <a:hlinkClick r:id="rId2" tooltip="Decomposes ROE into Profit Margin x Asset Turnover x Financial Leverage. Shows what drives returns."/>
               </a:rPr>
               <a:t>ⓘ</a:t>
             </a:r>
@@ -7357,7 +7392,9 @@
       </p:sp>
       <p:sp>
         <p:nvSpPr>
-          <p:cNvPr id="6" name="TextBox 5"/>
+          <p:cNvPr id="6" name="TextBox 5">
+            <a:hlinkClick r:id="rId2"/>
+          </p:cNvPr>
           <p:cNvSpPr txBox="1"/>
           <p:nvPr/>
         </p:nvSpPr>
@@ -7382,7 +7419,6 @@
                 <a:solidFill>
                   <a:srgbClr val="0066CC"/>
                 </a:solidFill>
-                <a:hlinkClick r:id="rId2"/>
               </a:rPr>
               <a:t>📊 Click for interactive version</a:t>
             </a:r>
@@ -7444,7 +7480,9 @@
       </p:sp>
       <p:sp>
         <p:nvSpPr>
-          <p:cNvPr id="3" name="TextBox 2"/>
+          <p:cNvPr id="3" name="TextBox 2">
+            <a:hlinkClick r:id="rId2"/>
+          </p:cNvPr>
           <p:cNvSpPr txBox="1"/>
           <p:nvPr/>
         </p:nvSpPr>
@@ -7469,7 +7507,7 @@
                 <a:solidFill>
                   <a:srgbClr val="646464"/>
                 </a:solidFill>
-                <a:hlinkClick r:id="rId2"/>
+                <a:hlinkClick r:id="rId2" tooltip="Tracks turnover ratio and days on hand. Faster turns = less capital tied up in inventory."/>
               </a:rPr>
               <a:t>ⓘ</a:t>
             </a:r>
@@ -7537,7 +7575,9 @@
       </p:sp>
       <p:sp>
         <p:nvSpPr>
-          <p:cNvPr id="6" name="TextBox 5"/>
+          <p:cNvPr id="6" name="TextBox 5">
+            <a:hlinkClick r:id="rId2"/>
+          </p:cNvPr>
           <p:cNvSpPr txBox="1"/>
           <p:nvPr/>
         </p:nvSpPr>
@@ -7562,7 +7602,6 @@
                 <a:solidFill>
                   <a:srgbClr val="0066CC"/>
                 </a:solidFill>
-                <a:hlinkClick r:id="rId2"/>
               </a:rPr>
               <a:t>📊 Click for interactive version</a:t>
             </a:r>
@@ -7624,7 +7663,9 @@
       </p:sp>
       <p:sp>
         <p:nvSpPr>
-          <p:cNvPr id="3" name="TextBox 2"/>
+          <p:cNvPr id="3" name="TextBox 2">
+            <a:hlinkClick r:id="rId2"/>
+          </p:cNvPr>
           <p:cNvSpPr txBox="1"/>
           <p:nvPr/>
         </p:nvSpPr>
@@ -7649,7 +7690,7 @@
                 <a:solidFill>
                   <a:srgbClr val="646464"/>
                 </a:solidFill>
-                <a:hlinkClick r:id="rId2"/>
+                <a:hlinkClick r:id="rId2" tooltip="Days to convert inventory to cash vs retail peers. Lower is better; negative means suppliers finance operations."/>
               </a:rPr>
               <a:t>ⓘ</a:t>
             </a:r>
@@ -7717,7 +7758,9 @@
       </p:sp>
       <p:sp>
         <p:nvSpPr>
-          <p:cNvPr id="6" name="TextBox 5"/>
+          <p:cNvPr id="6" name="TextBox 5">
+            <a:hlinkClick r:id="rId2"/>
+          </p:cNvPr>
           <p:cNvSpPr txBox="1"/>
           <p:nvPr/>
         </p:nvSpPr>
@@ -7742,7 +7785,6 @@
                 <a:solidFill>
                   <a:srgbClr val="0066CC"/>
                 </a:solidFill>
-                <a:hlinkClick r:id="rId2"/>
               </a:rPr>
               <a:t>📊 Click for interactive version</a:t>
             </a:r>
@@ -7804,7 +7846,9 @@
       </p:sp>
       <p:sp>
         <p:nvSpPr>
-          <p:cNvPr id="3" name="TextBox 2"/>
+          <p:cNvPr id="3" name="TextBox 2">
+            <a:hlinkClick r:id="rId2"/>
+          </p:cNvPr>
           <p:cNvSpPr txBox="1"/>
           <p:nvPr/>
         </p:nvSpPr>
@@ -7829,7 +7873,7 @@
                 <a:solidFill>
                   <a:srgbClr val="646464"/>
                 </a:solidFill>
-                <a:hlinkClick r:id="rId2"/>
+                <a:hlinkClick r:id="rId2" tooltip="Compares TGT total return vs S&amp;P 500 (SPY) and Retail ETF (XRT). Rolling beta shows stock's sensitivity to market movements."/>
               </a:rPr>
               <a:t>ⓘ</a:t>
             </a:r>
@@ -7897,7 +7941,9 @@
       </p:sp>
       <p:sp>
         <p:nvSpPr>
-          <p:cNvPr id="6" name="TextBox 5"/>
+          <p:cNvPr id="6" name="TextBox 5">
+            <a:hlinkClick r:id="rId2"/>
+          </p:cNvPr>
           <p:cNvSpPr txBox="1"/>
           <p:nvPr/>
         </p:nvSpPr>
@@ -7922,7 +7968,6 @@
                 <a:solidFill>
                   <a:srgbClr val="0066CC"/>
                 </a:solidFill>
-                <a:hlinkClick r:id="rId2"/>
               </a:rPr>
               <a:t>📊 Click for interactive version</a:t>
             </a:r>
@@ -7984,7 +8029,9 @@
       </p:sp>
       <p:sp>
         <p:nvSpPr>
-          <p:cNvPr id="3" name="TextBox 2"/>
+          <p:cNvPr id="3" name="TextBox 2">
+            <a:hlinkClick r:id="rId2"/>
+          </p:cNvPr>
           <p:cNvSpPr txBox="1"/>
           <p:nvPr/>
         </p:nvSpPr>
@@ -8009,7 +8056,7 @@
                 <a:solidFill>
                   <a:srgbClr val="646464"/>
                 </a:solidFill>
-                <a:hlinkClick r:id="rId2"/>
+                <a:hlinkClick r:id="rId2" tooltip="Operating cash vs capital spending. The gap between them is Free Cash Flow available for shareholders."/>
               </a:rPr>
               <a:t>ⓘ</a:t>
             </a:r>
@@ -8077,7 +8124,9 @@
       </p:sp>
       <p:sp>
         <p:nvSpPr>
-          <p:cNvPr id="6" name="TextBox 5"/>
+          <p:cNvPr id="6" name="TextBox 5">
+            <a:hlinkClick r:id="rId2"/>
+          </p:cNvPr>
           <p:cNvSpPr txBox="1"/>
           <p:nvPr/>
         </p:nvSpPr>
@@ -8102,7 +8151,6 @@
                 <a:solidFill>
                   <a:srgbClr val="0066CC"/>
                 </a:solidFill>
-                <a:hlinkClick r:id="rId2"/>
               </a:rPr>
               <a:t>📊 Click for interactive version</a:t>
             </a:r>
@@ -8732,7 +8780,9 @@
       </p:sp>
       <p:sp>
         <p:nvSpPr>
-          <p:cNvPr id="3" name="TextBox 2"/>
+          <p:cNvPr id="3" name="TextBox 2">
+            <a:hlinkClick r:id="rId2"/>
+          </p:cNvPr>
           <p:cNvSpPr txBox="1"/>
           <p:nvPr/>
         </p:nvSpPr>
@@ -8757,7 +8807,7 @@
                 <a:solidFill>
                   <a:srgbClr val="646464"/>
                 </a:solidFill>
-                <a:hlinkClick r:id="rId2"/>
+                <a:hlinkClick r:id="rId2" tooltip="P/E ratio vs revenue growth for Target and peers. Lower-right quadrant = undervalued opportunities."/>
               </a:rPr>
               <a:t>ⓘ</a:t>
             </a:r>
@@ -8825,7 +8875,9 @@
       </p:sp>
       <p:sp>
         <p:nvSpPr>
-          <p:cNvPr id="6" name="TextBox 5"/>
+          <p:cNvPr id="6" name="TextBox 5">
+            <a:hlinkClick r:id="rId2"/>
+          </p:cNvPr>
           <p:cNvSpPr txBox="1"/>
           <p:nvPr/>
         </p:nvSpPr>
@@ -8850,7 +8902,6 @@
                 <a:solidFill>
                   <a:srgbClr val="0066CC"/>
                 </a:solidFill>
-                <a:hlinkClick r:id="rId2"/>
               </a:rPr>
               <a:t>📊 Click for interactive version</a:t>
             </a:r>
@@ -8912,7 +8963,9 @@
       </p:sp>
       <p:sp>
         <p:nvSpPr>
-          <p:cNvPr id="3" name="TextBox 2"/>
+          <p:cNvPr id="3" name="TextBox 2">
+            <a:hlinkClick r:id="rId2"/>
+          </p:cNvPr>
           <p:cNvSpPr txBox="1"/>
           <p:nvPr/>
         </p:nvSpPr>
@@ -8937,7 +8990,7 @@
                 <a:solidFill>
                   <a:srgbClr val="646464"/>
                 </a:solidFill>
-                <a:hlinkClick r:id="rId2"/>
+                <a:hlinkClick r:id="rId2" tooltip="Current price vs historical valuation range. Below 25th percentile = historically undervalued."/>
               </a:rPr>
               <a:t>ⓘ</a:t>
             </a:r>
@@ -9005,7 +9058,9 @@
       </p:sp>
       <p:sp>
         <p:nvSpPr>
-          <p:cNvPr id="6" name="TextBox 5"/>
+          <p:cNvPr id="6" name="TextBox 5">
+            <a:hlinkClick r:id="rId2"/>
+          </p:cNvPr>
           <p:cNvSpPr txBox="1"/>
           <p:nvPr/>
         </p:nvSpPr>
@@ -9030,7 +9085,6 @@
                 <a:solidFill>
                   <a:srgbClr val="0066CC"/>
                 </a:solidFill>
-                <a:hlinkClick r:id="rId2"/>
               </a:rPr>
               <a:t>📊 Click for interactive version</a:t>
             </a:r>
@@ -9092,7 +9146,9 @@
       </p:sp>
       <p:sp>
         <p:nvSpPr>
-          <p:cNvPr id="3" name="TextBox 2"/>
+          <p:cNvPr id="3" name="TextBox 2">
+            <a:hlinkClick r:id="rId2"/>
+          </p:cNvPr>
           <p:cNvSpPr txBox="1"/>
           <p:nvPr/>
         </p:nvSpPr>
@@ -9117,7 +9173,7 @@
                 <a:solidFill>
                   <a:srgbClr val="646464"/>
                 </a:solidFill>
-                <a:hlinkClick r:id="rId2"/>
+                <a:hlinkClick r:id="rId2" tooltip="Visualizes cash allocation: CapEx, dividends, buybacks, debt repayment. Shows management priorities."/>
               </a:rPr>
               <a:t>ⓘ</a:t>
             </a:r>
@@ -9185,7 +9241,9 @@
       </p:sp>
       <p:sp>
         <p:nvSpPr>
-          <p:cNvPr id="6" name="TextBox 5"/>
+          <p:cNvPr id="6" name="TextBox 5">
+            <a:hlinkClick r:id="rId2"/>
+          </p:cNvPr>
           <p:cNvSpPr txBox="1"/>
           <p:nvPr/>
         </p:nvSpPr>
@@ -9210,7 +9268,6 @@
                 <a:solidFill>
                   <a:srgbClr val="0066CC"/>
                 </a:solidFill>
-                <a:hlinkClick r:id="rId2"/>
               </a:rPr>
               <a:t>📊 Click for interactive version</a:t>
             </a:r>
@@ -9272,7 +9329,9 @@
       </p:sp>
       <p:sp>
         <p:nvSpPr>
-          <p:cNvPr id="3" name="TextBox 2"/>
+          <p:cNvPr id="3" name="TextBox 2">
+            <a:hlinkClick r:id="rId2"/>
+          </p:cNvPr>
           <p:cNvSpPr txBox="1"/>
           <p:nvPr/>
         </p:nvSpPr>
@@ -9297,7 +9356,7 @@
                 <a:solidFill>
                   <a:srgbClr val="646464"/>
                 </a:solidFill>
-                <a:hlinkClick r:id="rId2"/>
+                <a:hlinkClick r:id="rId2" tooltip="Stacked area of risk mentions (shrink, theft, markdown) over time. Rising trends signal increasing concerns."/>
               </a:rPr>
               <a:t>ⓘ</a:t>
             </a:r>
@@ -9365,7 +9424,9 @@
       </p:sp>
       <p:sp>
         <p:nvSpPr>
-          <p:cNvPr id="6" name="TextBox 5"/>
+          <p:cNvPr id="6" name="TextBox 5">
+            <a:hlinkClick r:id="rId2"/>
+          </p:cNvPr>
           <p:cNvSpPr txBox="1"/>
           <p:nvPr/>
         </p:nvSpPr>
@@ -9390,7 +9451,6 @@
                 <a:solidFill>
                   <a:srgbClr val="0066CC"/>
                 </a:solidFill>
-                <a:hlinkClick r:id="rId2"/>
               </a:rPr>
               <a:t>📊 Click for interactive version</a:t>
             </a:r>
@@ -9452,7 +9512,9 @@
       </p:sp>
       <p:sp>
         <p:nvSpPr>
-          <p:cNvPr id="3" name="TextBox 2"/>
+          <p:cNvPr id="3" name="TextBox 2">
+            <a:hlinkClick r:id="rId2"/>
+          </p:cNvPr>
           <p:cNvSpPr txBox="1"/>
           <p:nvPr/>
         </p:nvSpPr>
@@ -9477,7 +9539,7 @@
                 <a:solidFill>
                   <a:srgbClr val="646464"/>
                 </a:solidFill>
-                <a:hlinkClick r:id="rId2"/>
+                <a:hlinkClick r:id="rId2" tooltip="Intensity grid showing risk types by period. Dark cells = high concern in that area."/>
               </a:rPr>
               <a:t>ⓘ</a:t>
             </a:r>
@@ -9545,7 +9607,9 @@
       </p:sp>
       <p:sp>
         <p:nvSpPr>
-          <p:cNvPr id="6" name="TextBox 5"/>
+          <p:cNvPr id="6" name="TextBox 5">
+            <a:hlinkClick r:id="rId2"/>
+          </p:cNvPr>
           <p:cNvSpPr txBox="1"/>
           <p:nvPr/>
         </p:nvSpPr>
@@ -9570,7 +9634,6 @@
                 <a:solidFill>
                   <a:srgbClr val="0066CC"/>
                 </a:solidFill>
-                <a:hlinkClick r:id="rId2"/>
               </a:rPr>
               <a:t>📊 Click for interactive version</a:t>
             </a:r>
@@ -10372,7 +10435,9 @@
       </p:sp>
       <p:sp>
         <p:nvSpPr>
-          <p:cNvPr id="3" name="TextBox 2"/>
+          <p:cNvPr id="3" name="TextBox 2">
+            <a:hlinkClick r:id="rId2"/>
+          </p:cNvPr>
           <p:cNvSpPr txBox="1"/>
           <p:nvPr/>
         </p:nvSpPr>
@@ -10397,7 +10462,7 @@
                 <a:solidFill>
                   <a:srgbClr val="646464"/>
                 </a:solidFill>
-                <a:hlinkClick r:id="rId2"/>
+                <a:hlinkClick r:id="rId2" tooltip="Shows Target's 10-year revenue and net income trajectory from annual 10-K filings. Look for consistent growth and whether profits keep pace with revenue."/>
               </a:rPr>
               <a:t>ⓘ</a:t>
             </a:r>
@@ -10465,7 +10530,9 @@
       </p:sp>
       <p:sp>
         <p:nvSpPr>
-          <p:cNvPr id="6" name="TextBox 5"/>
+          <p:cNvPr id="6" name="TextBox 5">
+            <a:hlinkClick r:id="rId2"/>
+          </p:cNvPr>
           <p:cNvSpPr txBox="1"/>
           <p:nvPr/>
         </p:nvSpPr>
@@ -10490,7 +10557,6 @@
                 <a:solidFill>
                   <a:srgbClr val="0066CC"/>
                 </a:solidFill>
-                <a:hlinkClick r:id="rId2"/>
               </a:rPr>
               <a:t>📊 Click for interactive version</a:t>
             </a:r>
@@ -10552,7 +10618,9 @@
       </p:sp>
       <p:sp>
         <p:nvSpPr>
-          <p:cNvPr id="3" name="TextBox 2"/>
+          <p:cNvPr id="3" name="TextBox 2">
+            <a:hlinkClick r:id="rId2"/>
+          </p:cNvPr>
           <p:cNvSpPr txBox="1"/>
           <p:nvPr/>
         </p:nvSpPr>
@@ -10577,7 +10645,7 @@
                 <a:solidFill>
                   <a:srgbClr val="646464"/>
                 </a:solidFill>
-                <a:hlinkClick r:id="rId2"/>
+                <a:hlinkClick r:id="rId2" tooltip="Tracks year-over-year revenue growth rates by quarter. Reveals acceleration or deceleration in growth momentum."/>
               </a:rPr>
               <a:t>ⓘ</a:t>
             </a:r>
@@ -10645,7 +10713,9 @@
       </p:sp>
       <p:sp>
         <p:nvSpPr>
-          <p:cNvPr id="6" name="TextBox 5"/>
+          <p:cNvPr id="6" name="TextBox 5">
+            <a:hlinkClick r:id="rId2"/>
+          </p:cNvPr>
           <p:cNvSpPr txBox="1"/>
           <p:nvPr/>
         </p:nvSpPr>
@@ -10670,7 +10740,6 @@
                 <a:solidFill>
                   <a:srgbClr val="0066CC"/>
                 </a:solidFill>
-                <a:hlinkClick r:id="rId2"/>
               </a:rPr>
               <a:t>📊 Click for interactive version</a:t>
             </a:r>
@@ -10732,7 +10801,9 @@
       </p:sp>
       <p:sp>
         <p:nvSpPr>
-          <p:cNvPr id="3" name="TextBox 2"/>
+          <p:cNvPr id="3" name="TextBox 2">
+            <a:hlinkClick r:id="rId2"/>
+          </p:cNvPr>
           <p:cNvSpPr txBox="1"/>
           <p:nvPr/>
         </p:nvSpPr>
@@ -10757,7 +10828,7 @@
                 <a:solidFill>
                   <a:srgbClr val="646464"/>
                 </a:solidFill>
-                <a:hlinkClick r:id="rId2"/>
+                <a:hlinkClick r:id="rId2" tooltip="Compares revenue growth to inventory buildup. Inventory growing faster than sales signals potential markdown risk."/>
               </a:rPr>
               <a:t>ⓘ</a:t>
             </a:r>
@@ -10825,7 +10896,9 @@
       </p:sp>
       <p:sp>
         <p:nvSpPr>
-          <p:cNvPr id="6" name="TextBox 5"/>
+          <p:cNvPr id="6" name="TextBox 5">
+            <a:hlinkClick r:id="rId2"/>
+          </p:cNvPr>
           <p:cNvSpPr txBox="1"/>
           <p:nvPr/>
         </p:nvSpPr>
@@ -10850,7 +10923,6 @@
                 <a:solidFill>
                   <a:srgbClr val="0066CC"/>
                 </a:solidFill>
-                <a:hlinkClick r:id="rId2"/>
               </a:rPr>
               <a:t>📊 Click for interactive version</a:t>
             </a:r>
@@ -10912,7 +10984,9 @@
       </p:sp>
       <p:sp>
         <p:nvSpPr>
-          <p:cNvPr id="3" name="TextBox 2"/>
+          <p:cNvPr id="3" name="TextBox 2">
+            <a:hlinkClick r:id="rId2"/>
+          </p:cNvPr>
           <p:cNvSpPr txBox="1"/>
           <p:nvPr/>
         </p:nvSpPr>
@@ -10937,7 +11011,7 @@
                 <a:solidFill>
                   <a:srgbClr val="646464"/>
                 </a:solidFill>
-                <a:hlinkClick r:id="rId2"/>
+                <a:hlinkClick r:id="rId2" tooltip="Quarterly view with calculated Q4 data showing seasonal patterns. Q4 (holiday season) typically shows peak revenue."/>
               </a:rPr>
               <a:t>ⓘ</a:t>
             </a:r>
@@ -11005,7 +11079,9 @@
       </p:sp>
       <p:sp>
         <p:nvSpPr>
-          <p:cNvPr id="6" name="TextBox 5"/>
+          <p:cNvPr id="6" name="TextBox 5">
+            <a:hlinkClick r:id="rId2"/>
+          </p:cNvPr>
           <p:cNvSpPr txBox="1"/>
           <p:nvPr/>
         </p:nvSpPr>
@@ -11030,7 +11106,6 @@
                 <a:solidFill>
                   <a:srgbClr val="0066CC"/>
                 </a:solidFill>
-                <a:hlinkClick r:id="rId2"/>
               </a:rPr>
               <a:t>📊 Click for interactive version</a:t>
             </a:r>
